--- a/納品レポート/ホテル別レポート/apa_sagamihara_口コミ分析レポート.pptx
+++ b/納品レポート/ホテル別レポート/apa_sagamihara_口コミ分析レポート.pptx
@@ -2784,7 +2784,7 @@
                 <a:ea typeface="Arial" pitchFamily="34" charset="-122"/>
                 <a:cs typeface="Arial" pitchFamily="34" charset="-120"/>
               </a:rPr>
-              <a:t>作成日：2026年3月17日</a:t>
+              <a:t>作成日：2026年3月18日</a:t>
             </a:r>
             <a:endParaRPr lang="en-US" sz="1000" dirty="0"/>
           </a:p>

--- a/納品レポート/ホテル別レポート/apa_sagamihara_口コミ分析レポート.pptx
+++ b/納品レポート/ホテル別レポート/apa_sagamihara_口コミ分析レポート.pptx
@@ -217,13 +217,13 @@
                   <c:v>8.67</c:v>
                 </c:pt>
                 <c:pt idx="3">
-                  <c:v>7.83</c:v>
+                  <c:v>7.89</c:v>
                 </c:pt>
                 <c:pt idx="4">
                   <c:v>7.71</c:v>
                 </c:pt>
                 <c:pt idx="5">
-                  <c:v>7.67</c:v>
+                  <c:v>7.57</c:v>
                 </c:pt>
               </c:numCache>
             </c:numRef>
@@ -566,10 +566,10 @@
               <c:numCache>
                 <c:ptCount val="3"/>
                 <c:pt idx="0">
-                  <c:v>39</c:v>
+                  <c:v>40</c:v>
                 </c:pt>
                 <c:pt idx="1">
-                  <c:v>16</c:v>
+                  <c:v>17</c:v>
                 </c:pt>
                 <c:pt idx="2">
                   <c:v>1</c:v>
@@ -798,13 +798,13 @@
                   <c:v>18</c:v>
                 </c:pt>
                 <c:pt idx="1">
-                  <c:v>3</c:v>
+                  <c:v>4</c:v>
                 </c:pt>
                 <c:pt idx="2">
                   <c:v>18</c:v>
                 </c:pt>
                 <c:pt idx="3">
-                  <c:v>6</c:v>
+                  <c:v>7</c:v>
                 </c:pt>
                 <c:pt idx="4">
                   <c:v>8</c:v>
@@ -2764,7 +2764,7 @@
                 <a:ea typeface="Arial" pitchFamily="34" charset="-122"/>
                 <a:cs typeface="Arial" pitchFamily="34" charset="-120"/>
               </a:rPr>
-              <a:t>レビュー総数：56件（6サイト）</a:t>
+              <a:t>レビュー総数：58件（6サイト）</a:t>
             </a:r>
             <a:endParaRPr lang="en-US" sz="1000" dirty="0"/>
           </a:p>
@@ -2784,7 +2784,7 @@
                 <a:ea typeface="Arial" pitchFamily="34" charset="-122"/>
                 <a:cs typeface="Arial" pitchFamily="34" charset="-120"/>
               </a:rPr>
-              <a:t>作成日：2026年3月18日</a:t>
+              <a:t>作成日：2026年3月19日</a:t>
             </a:r>
             <a:endParaRPr lang="en-US" sz="1000" dirty="0"/>
           </a:p>
@@ -3604,7 +3604,7 @@
                           <a:ea typeface="Arial" pitchFamily="34" charset="-122"/>
                           <a:cs typeface="Arial" pitchFamily="34" charset="-120"/>
                         </a:rPr>
-                        <a:t>69.6%</a:t>
+                        <a:t>69.0%</a:t>
                       </a:r>
                       <a:endParaRPr lang="en-US" sz="1000" dirty="0">
                         <a:latin typeface="Arial" charset="0"/>
@@ -3672,7 +3672,7 @@
                           <a:ea typeface="Arial" pitchFamily="34" charset="-122"/>
                           <a:cs typeface="Arial" pitchFamily="34" charset="-120"/>
                         </a:rPr>
-                        <a:t>80%以上</a:t>
+                        <a:t>79%以上</a:t>
                       </a:r>
                       <a:endParaRPr lang="en-US" sz="1000" dirty="0">
                         <a:latin typeface="Arial" charset="0"/>
@@ -3878,7 +3878,7 @@
                           <a:ea typeface="Arial" pitchFamily="34" charset="-122"/>
                           <a:cs typeface="Arial" pitchFamily="34" charset="-120"/>
                         </a:rPr>
-                        <a:t>1.8%</a:t>
+                        <a:t>1.7%</a:t>
                       </a:r>
                       <a:endParaRPr lang="en-US" sz="1000" dirty="0">
                         <a:latin typeface="Arial" charset="0"/>
@@ -4084,6 +4084,280 @@
                           <a:ea typeface="Arial" pitchFamily="34" charset="-122"/>
                           <a:cs typeface="Arial" pitchFamily="34" charset="-120"/>
                         </a:rPr>
+                        <a:t>Agoda平均評価</a:t>
+                      </a:r>
+                      <a:endParaRPr lang="en-US" sz="1000" dirty="0">
+                        <a:latin typeface="Arial" charset="0"/>
+                        <a:ea typeface="Arial" charset="0"/>
+                        <a:cs typeface="Arial" charset="0"/>
+                      </a:endParaRPr>
+                    </a:p>
+                  </a:txBody>
+                  <a:tcPr marL="91440" marR="91440" marT="45720" marB="45720">
+                    <a:lnL w="6350" cap="flat" cmpd="sng" algn="ctr">
+                      <a:solidFill>
+                        <a:srgbClr val="CBD5E1"/>
+                      </a:solidFill>
+                      <a:prstDash val="solid"/>
+                      <a:round/>
+                      <a:headEnd type="none" w="med" len="med"/>
+                      <a:tailEnd type="none" w="med" len="med"/>
+                    </a:lnL>
+                    <a:lnR w="6350" cap="flat" cmpd="sng" algn="ctr">
+                      <a:solidFill>
+                        <a:srgbClr val="CBD5E1"/>
+                      </a:solidFill>
+                      <a:prstDash val="solid"/>
+                      <a:round/>
+                      <a:headEnd type="none" w="med" len="med"/>
+                      <a:tailEnd type="none" w="med" len="med"/>
+                    </a:lnR>
+                    <a:lnT w="6350" cap="flat" cmpd="sng" algn="ctr">
+                      <a:solidFill>
+                        <a:srgbClr val="CBD5E1"/>
+                      </a:solidFill>
+                      <a:prstDash val="solid"/>
+                      <a:round/>
+                      <a:headEnd type="none" w="med" len="med"/>
+                      <a:tailEnd type="none" w="med" len="med"/>
+                    </a:lnT>
+                    <a:lnB w="6350" cap="flat" cmpd="sng" algn="ctr">
+                      <a:solidFill>
+                        <a:srgbClr val="CBD5E1"/>
+                      </a:solidFill>
+                      <a:prstDash val="solid"/>
+                      <a:round/>
+                      <a:headEnd type="none" w="med" len="med"/>
+                      <a:tailEnd type="none" w="med" len="med"/>
+                    </a:lnB>
+                    <a:solidFill>
+                      <a:srgbClr val="FFFFFF"/>
+                    </a:solidFill>
+                  </a:tcPr>
+                </a:tc>
+                <a:tc>
+                  <a:txBody>
+                    <a:bodyPr/>
+                    <a:lstStyle/>
+                    <a:p>
+                      <a:pPr algn="ctr" indent="0" marL="0">
+                        <a:buNone/>
+                      </a:pPr>
+                      <a:r>
+                        <a:rPr lang="en-US" sz="1000" dirty="0">
+                          <a:solidFill>
+                            <a:srgbClr val="64748B"/>
+                          </a:solidFill>
+                          <a:latin typeface="Arial" pitchFamily="34" charset="0"/>
+                          <a:ea typeface="Arial" pitchFamily="34" charset="-122"/>
+                          <a:cs typeface="Arial" pitchFamily="34" charset="-120"/>
+                        </a:rPr>
+                        <a:t>7.6点</a:t>
+                      </a:r>
+                      <a:endParaRPr lang="en-US" sz="1000" dirty="0">
+                        <a:latin typeface="Arial" charset="0"/>
+                        <a:ea typeface="Arial" charset="0"/>
+                        <a:cs typeface="Arial" charset="0"/>
+                      </a:endParaRPr>
+                    </a:p>
+                  </a:txBody>
+                  <a:tcPr marL="91440" marR="91440" marT="45720" marB="45720">
+                    <a:lnL w="6350" cap="flat" cmpd="sng" algn="ctr">
+                      <a:solidFill>
+                        <a:srgbClr val="CBD5E1"/>
+                      </a:solidFill>
+                      <a:prstDash val="solid"/>
+                      <a:round/>
+                      <a:headEnd type="none" w="med" len="med"/>
+                      <a:tailEnd type="none" w="med" len="med"/>
+                    </a:lnL>
+                    <a:lnR w="6350" cap="flat" cmpd="sng" algn="ctr">
+                      <a:solidFill>
+                        <a:srgbClr val="CBD5E1"/>
+                      </a:solidFill>
+                      <a:prstDash val="solid"/>
+                      <a:round/>
+                      <a:headEnd type="none" w="med" len="med"/>
+                      <a:tailEnd type="none" w="med" len="med"/>
+                    </a:lnR>
+                    <a:lnT w="6350" cap="flat" cmpd="sng" algn="ctr">
+                      <a:solidFill>
+                        <a:srgbClr val="CBD5E1"/>
+                      </a:solidFill>
+                      <a:prstDash val="solid"/>
+                      <a:round/>
+                      <a:headEnd type="none" w="med" len="med"/>
+                      <a:tailEnd type="none" w="med" len="med"/>
+                    </a:lnT>
+                    <a:lnB w="6350" cap="flat" cmpd="sng" algn="ctr">
+                      <a:solidFill>
+                        <a:srgbClr val="CBD5E1"/>
+                      </a:solidFill>
+                      <a:prstDash val="solid"/>
+                      <a:round/>
+                      <a:headEnd type="none" w="med" len="med"/>
+                      <a:tailEnd type="none" w="med" len="med"/>
+                    </a:lnB>
+                    <a:solidFill>
+                      <a:srgbClr val="FFFFFF"/>
+                    </a:solidFill>
+                  </a:tcPr>
+                </a:tc>
+                <a:tc>
+                  <a:txBody>
+                    <a:bodyPr/>
+                    <a:lstStyle/>
+                    <a:p>
+                      <a:pPr algn="ctr" indent="0" marL="0">
+                        <a:buNone/>
+                      </a:pPr>
+                      <a:r>
+                        <a:rPr lang="en-US" sz="1000" b="1" dirty="0">
+                          <a:solidFill>
+                            <a:srgbClr val="16A34A"/>
+                          </a:solidFill>
+                          <a:latin typeface="Arial" pitchFamily="34" charset="0"/>
+                          <a:ea typeface="Arial" pitchFamily="34" charset="-122"/>
+                          <a:cs typeface="Arial" pitchFamily="34" charset="-120"/>
+                        </a:rPr>
+                        <a:t>8.6点以上</a:t>
+                      </a:r>
+                      <a:endParaRPr lang="en-US" sz="1000" dirty="0">
+                        <a:latin typeface="Arial" charset="0"/>
+                        <a:ea typeface="Arial" charset="0"/>
+                        <a:cs typeface="Arial" charset="0"/>
+                      </a:endParaRPr>
+                    </a:p>
+                  </a:txBody>
+                  <a:tcPr marL="91440" marR="91440" marT="45720" marB="45720">
+                    <a:lnL w="6350" cap="flat" cmpd="sng" algn="ctr">
+                      <a:solidFill>
+                        <a:srgbClr val="CBD5E1"/>
+                      </a:solidFill>
+                      <a:prstDash val="solid"/>
+                      <a:round/>
+                      <a:headEnd type="none" w="med" len="med"/>
+                      <a:tailEnd type="none" w="med" len="med"/>
+                    </a:lnL>
+                    <a:lnR w="6350" cap="flat" cmpd="sng" algn="ctr">
+                      <a:solidFill>
+                        <a:srgbClr val="CBD5E1"/>
+                      </a:solidFill>
+                      <a:prstDash val="solid"/>
+                      <a:round/>
+                      <a:headEnd type="none" w="med" len="med"/>
+                      <a:tailEnd type="none" w="med" len="med"/>
+                    </a:lnR>
+                    <a:lnT w="6350" cap="flat" cmpd="sng" algn="ctr">
+                      <a:solidFill>
+                        <a:srgbClr val="CBD5E1"/>
+                      </a:solidFill>
+                      <a:prstDash val="solid"/>
+                      <a:round/>
+                      <a:headEnd type="none" w="med" len="med"/>
+                      <a:tailEnd type="none" w="med" len="med"/>
+                    </a:lnT>
+                    <a:lnB w="6350" cap="flat" cmpd="sng" algn="ctr">
+                      <a:solidFill>
+                        <a:srgbClr val="CBD5E1"/>
+                      </a:solidFill>
+                      <a:prstDash val="solid"/>
+                      <a:round/>
+                      <a:headEnd type="none" w="med" len="med"/>
+                      <a:tailEnd type="none" w="med" len="med"/>
+                    </a:lnB>
+                    <a:solidFill>
+                      <a:srgbClr val="FFFFFF"/>
+                    </a:solidFill>
+                  </a:tcPr>
+                </a:tc>
+                <a:tc>
+                  <a:txBody>
+                    <a:bodyPr/>
+                    <a:lstStyle/>
+                    <a:p>
+                      <a:pPr algn="ctr" indent="0" marL="0">
+                        <a:buNone/>
+                      </a:pPr>
+                      <a:r>
+                        <a:rPr lang="en-US" sz="1000" dirty="0">
+                          <a:solidFill>
+                            <a:srgbClr val="64748B"/>
+                          </a:solidFill>
+                          <a:latin typeface="Arial" pitchFamily="34" charset="0"/>
+                          <a:ea typeface="Arial" pitchFamily="34" charset="-122"/>
+                          <a:cs typeface="Arial" pitchFamily="34" charset="-120"/>
+                        </a:rPr>
+                        <a:t>2026年9月</a:t>
+                      </a:r>
+                      <a:endParaRPr lang="en-US" sz="1000" dirty="0">
+                        <a:latin typeface="Arial" charset="0"/>
+                        <a:ea typeface="Arial" charset="0"/>
+                        <a:cs typeface="Arial" charset="0"/>
+                      </a:endParaRPr>
+                    </a:p>
+                  </a:txBody>
+                  <a:tcPr marL="91440" marR="91440" marT="45720" marB="45720">
+                    <a:lnL w="6350" cap="flat" cmpd="sng" algn="ctr">
+                      <a:solidFill>
+                        <a:srgbClr val="CBD5E1"/>
+                      </a:solidFill>
+                      <a:prstDash val="solid"/>
+                      <a:round/>
+                      <a:headEnd type="none" w="med" len="med"/>
+                      <a:tailEnd type="none" w="med" len="med"/>
+                    </a:lnL>
+                    <a:lnR w="6350" cap="flat" cmpd="sng" algn="ctr">
+                      <a:solidFill>
+                        <a:srgbClr val="CBD5E1"/>
+                      </a:solidFill>
+                      <a:prstDash val="solid"/>
+                      <a:round/>
+                      <a:headEnd type="none" w="med" len="med"/>
+                      <a:tailEnd type="none" w="med" len="med"/>
+                    </a:lnR>
+                    <a:lnT w="6350" cap="flat" cmpd="sng" algn="ctr">
+                      <a:solidFill>
+                        <a:srgbClr val="CBD5E1"/>
+                      </a:solidFill>
+                      <a:prstDash val="solid"/>
+                      <a:round/>
+                      <a:headEnd type="none" w="med" len="med"/>
+                      <a:tailEnd type="none" w="med" len="med"/>
+                    </a:lnT>
+                    <a:lnB w="6350" cap="flat" cmpd="sng" algn="ctr">
+                      <a:solidFill>
+                        <a:srgbClr val="CBD5E1"/>
+                      </a:solidFill>
+                      <a:prstDash val="solid"/>
+                      <a:round/>
+                      <a:headEnd type="none" w="med" len="med"/>
+                      <a:tailEnd type="none" w="med" len="med"/>
+                    </a:lnB>
+                    <a:solidFill>
+                      <a:srgbClr val="FFFFFF"/>
+                    </a:solidFill>
+                  </a:tcPr>
+                </a:tc>
+              </a:tr>
+              <a:tr h="320040">
+                <a:tc>
+                  <a:txBody>
+                    <a:bodyPr/>
+                    <a:lstStyle/>
+                    <a:p>
+                      <a:pPr indent="0" marL="0">
+                        <a:buNone/>
+                      </a:pPr>
+                      <a:r>
+                        <a:rPr lang="en-US" sz="1000" b="1" dirty="0">
+                          <a:solidFill>
+                            <a:srgbClr val="334155"/>
+                          </a:solidFill>
+                          <a:latin typeface="Arial" pitchFamily="34" charset="0"/>
+                          <a:ea typeface="Arial" pitchFamily="34" charset="-122"/>
+                          <a:cs typeface="Arial" pitchFamily="34" charset="-120"/>
+                        </a:rPr>
                         <a:t>口コミ返信率</a:t>
                       </a:r>
                       <a:endParaRPr lang="en-US" sz="1000" dirty="0">
@@ -4131,7 +4405,7 @@
                       <a:tailEnd type="none" w="med" len="med"/>
                     </a:lnB>
                     <a:solidFill>
-                      <a:srgbClr val="FFFFFF"/>
+                      <a:srgbClr val="E8EFF8"/>
                     </a:solidFill>
                   </a:tcPr>
                 </a:tc>
@@ -4199,7 +4473,7 @@
                       <a:tailEnd type="none" w="med" len="med"/>
                     </a:lnB>
                     <a:solidFill>
-                      <a:srgbClr val="FFFFFF"/>
+                      <a:srgbClr val="E8EFF8"/>
                     </a:solidFill>
                   </a:tcPr>
                 </a:tc>
@@ -4267,7 +4541,7 @@
                       <a:tailEnd type="none" w="med" len="med"/>
                     </a:lnB>
                     <a:solidFill>
-                      <a:srgbClr val="FFFFFF"/>
+                      <a:srgbClr val="E8EFF8"/>
                     </a:solidFill>
                   </a:tcPr>
                 </a:tc>
@@ -4335,7 +4609,7 @@
                       <a:tailEnd type="none" w="med" len="med"/>
                     </a:lnB>
                     <a:solidFill>
-                      <a:srgbClr val="FFFFFF"/>
+                      <a:srgbClr val="E8EFF8"/>
                     </a:solidFill>
                   </a:tcPr>
                 </a:tc>
@@ -4405,7 +4679,7 @@
                       <a:tailEnd type="none" w="med" len="med"/>
                     </a:lnB>
                     <a:solidFill>
-                      <a:srgbClr val="E8EFF8"/>
+                      <a:srgbClr val="FFFFFF"/>
                     </a:solidFill>
                   </a:tcPr>
                 </a:tc>
@@ -4473,7 +4747,7 @@
                       <a:tailEnd type="none" w="med" len="med"/>
                     </a:lnB>
                     <a:solidFill>
-                      <a:srgbClr val="E8EFF8"/>
+                      <a:srgbClr val="FFFFFF"/>
                     </a:solidFill>
                   </a:tcPr>
                 </a:tc>
@@ -4541,7 +4815,7 @@
                       <a:tailEnd type="none" w="med" len="med"/>
                     </a:lnB>
                     <a:solidFill>
-                      <a:srgbClr val="E8EFF8"/>
+                      <a:srgbClr val="FFFFFF"/>
                     </a:solidFill>
                   </a:tcPr>
                 </a:tc>
@@ -4609,7 +4883,7 @@
                       <a:tailEnd type="none" w="med" len="med"/>
                     </a:lnB>
                     <a:solidFill>
-                      <a:srgbClr val="E8EFF8"/>
+                      <a:srgbClr val="FFFFFF"/>
                     </a:solidFill>
                   </a:tcPr>
                 </a:tc>
@@ -4626,7 +4900,7 @@
         </p:nvSpPr>
         <p:spPr>
           <a:xfrm>
-            <a:off x="457200" y="3108960"/>
+            <a:off x="457200" y="3429000"/>
             <a:ext cx="8229600" cy="640080"/>
           </a:xfrm>
           <a:prstGeom prst="rect">
@@ -4653,7 +4927,7 @@
         </p:nvSpPr>
         <p:spPr>
           <a:xfrm>
-            <a:off x="457200" y="3108960"/>
+            <a:off x="457200" y="3429000"/>
             <a:ext cx="54864" cy="640080"/>
           </a:xfrm>
           <a:prstGeom prst="rect">
@@ -4673,7 +4947,7 @@
         </p:nvSpPr>
         <p:spPr>
           <a:xfrm>
-            <a:off x="640080" y="3108960"/>
+            <a:off x="640080" y="3429000"/>
             <a:ext cx="7863840" cy="640080"/>
           </a:xfrm>
           <a:prstGeom prst="rect">
@@ -5190,7 +5464,7 @@
                 <a:ea typeface="Arial" pitchFamily="34" charset="-122"/>
                 <a:cs typeface="Arial" pitchFamily="34" charset="-120"/>
               </a:rPr>
-              <a:t>69.6%</a:t>
+              <a:t>69.0%</a:t>
             </a:r>
             <a:endParaRPr lang="en-US" sz="3200" dirty="0"/>
           </a:p>
@@ -5315,7 +5589,7 @@
                 <a:ea typeface="Arial" pitchFamily="34" charset="-122"/>
                 <a:cs typeface="Arial" pitchFamily="34" charset="-120"/>
               </a:rPr>
-              <a:t>1.8%</a:t>
+              <a:t>1.7%</a:t>
             </a:r>
             <a:endParaRPr lang="en-US" sz="3200" dirty="0"/>
           </a:p>
@@ -5440,7 +5714,7 @@
                 <a:ea typeface="Arial" pitchFamily="34" charset="-122"/>
                 <a:cs typeface="Arial" pitchFamily="34" charset="-120"/>
               </a:rPr>
-              <a:t>56件</a:t>
+              <a:t>58件</a:t>
             </a:r>
             <a:endParaRPr lang="en-US" sz="3200" dirty="0"/>
           </a:p>
@@ -5588,7 +5862,7 @@
                 <a:ea typeface="Arial" pitchFamily="34" charset="-122"/>
                 <a:cs typeface="Arial" pitchFamily="34" charset="-120"/>
               </a:rPr>
-              <a:t>  入れ替え制は立地状仕方ない事だと思うので、せめて女湯→男湯→女湯と交互にしてくれれば、夜入れなかったとしても、朝は...</a:t>
+              <a:t>  駅も近いし、部屋もひとりならじゅうぶんな広さです</a:t>
             </a:r>
             <a:endParaRPr lang="en-US" sz="1100" dirty="0"/>
           </a:p>
@@ -5628,7 +5902,7 @@
                 <a:ea typeface="Arial" pitchFamily="34" charset="-122"/>
                 <a:cs typeface="Arial" pitchFamily="34" charset="-120"/>
               </a:rPr>
-              <a:t>  Clean room with ample amenities for a solo traveller, alt...</a:t>
+              <a:t>  快適でした</a:t>
             </a:r>
             <a:endParaRPr lang="en-US" sz="1100" dirty="0"/>
           </a:p>
@@ -6374,7 +6648,7 @@
                 <a:ea typeface="Arial" pitchFamily="34" charset="-122"/>
                 <a:cs typeface="Arial" pitchFamily="34" charset="-120"/>
               </a:rPr>
-              <a:t>69.6%</a:t>
+              <a:t>69.0%</a:t>
             </a:r>
             <a:endParaRPr lang="en-US" sz="3200" dirty="0"/>
           </a:p>
@@ -6499,7 +6773,7 @@
                 <a:ea typeface="Arial" pitchFamily="34" charset="-122"/>
                 <a:cs typeface="Arial" pitchFamily="34" charset="-120"/>
               </a:rPr>
-              <a:t>1.8%</a:t>
+              <a:t>1.7%</a:t>
             </a:r>
             <a:endParaRPr lang="en-US" sz="3200" dirty="0"/>
           </a:p>
@@ -6624,7 +6898,7 @@
                 <a:ea typeface="Arial" pitchFamily="34" charset="-122"/>
                 <a:cs typeface="Arial" pitchFamily="34" charset="-120"/>
               </a:rPr>
-              <a:t>56件</a:t>
+              <a:t>58件</a:t>
             </a:r>
             <a:endParaRPr lang="en-US" sz="3200" dirty="0"/>
           </a:p>
@@ -7046,6 +7320,55 @@
                 <a:cs typeface="Arial" pitchFamily="34" charset="-120"/>
               </a:rPr>
               <a:t>じゃらん(9.00)が最高スコア。</a:t>
+            </a:r>
+            <a:endParaRPr lang="en-US" sz="1100" dirty="0"/>
+          </a:p>
+          <a:p>
+            <a:pPr indent="0" marL="0">
+              <a:spcAft>
+                <a:spcPts val="200"/>
+              </a:spcAft>
+              <a:buNone/>
+            </a:pPr>
+            <a:endParaRPr lang="en-US" sz="1100" dirty="0"/>
+          </a:p>
+          <a:p>
+            <a:pPr indent="0" marL="0">
+              <a:spcAft>
+                <a:spcPts val="200"/>
+              </a:spcAft>
+              <a:buNone/>
+            </a:pPr>
+            <a:r>
+              <a:rPr lang="en-US" sz="1100" b="1" dirty="0">
+                <a:solidFill>
+                  <a:srgbClr val="DC2626"/>
+                </a:solidFill>
+                <a:latin typeface="Arial" pitchFamily="34" charset="0"/>
+                <a:ea typeface="Arial" pitchFamily="34" charset="-122"/>
+                <a:cs typeface="Arial" pitchFamily="34" charset="-120"/>
+              </a:rPr>
+              <a:t>改善対象サイト</a:t>
+            </a:r>
+            <a:endParaRPr lang="en-US" sz="1100" dirty="0"/>
+          </a:p>
+          <a:p>
+            <a:pPr indent="0" marL="0">
+              <a:spcAft>
+                <a:spcPts val="200"/>
+              </a:spcAft>
+              <a:buNone/>
+            </a:pPr>
+            <a:r>
+              <a:rPr lang="en-US" sz="900" dirty="0">
+                <a:solidFill>
+                  <a:srgbClr val="64748B"/>
+                </a:solidFill>
+                <a:latin typeface="Arial" pitchFamily="34" charset="0"/>
+                <a:ea typeface="Arial" pitchFamily="34" charset="-122"/>
+                <a:cs typeface="Arial" pitchFamily="34" charset="-120"/>
+              </a:rPr>
+              <a:t>Agoda(7.6)が相対的に低い。口コミ返信の強化が急務</a:t>
             </a:r>
             <a:endParaRPr lang="en-US" sz="1100" dirty="0"/>
           </a:p>
@@ -8580,7 +8903,7 @@
                           <a:ea typeface="Arial" pitchFamily="34" charset="-122"/>
                           <a:cs typeface="Arial" pitchFamily="34" charset="-120"/>
                         </a:rPr>
-                        <a:t>18</a:t>
+                        <a:t>19</a:t>
                       </a:r>
                       <a:endParaRPr lang="en-US" sz="900" dirty="0">
                         <a:latin typeface="Arial" charset="0"/>
@@ -8648,7 +8971,7 @@
                           <a:ea typeface="Arial" pitchFamily="34" charset="-122"/>
                           <a:cs typeface="Arial" pitchFamily="34" charset="-120"/>
                         </a:rPr>
-                        <a:t>7.83</a:t>
+                        <a:t>7.89</a:t>
                       </a:r>
                       <a:endParaRPr lang="en-US" sz="900" dirty="0">
                         <a:latin typeface="Arial" charset="0"/>
@@ -8784,7 +9107,7 @@
                           <a:ea typeface="Arial" pitchFamily="34" charset="-122"/>
                           <a:cs typeface="Arial" pitchFamily="34" charset="-120"/>
                         </a:rPr>
-                        <a:t>7.83</a:t>
+                        <a:t>7.89</a:t>
                       </a:r>
                       <a:endParaRPr lang="en-US" sz="900" dirty="0">
                         <a:latin typeface="Arial" charset="0"/>
@@ -9264,7 +9587,7 @@
                           <a:ea typeface="Arial" pitchFamily="34" charset="-122"/>
                           <a:cs typeface="Arial" pitchFamily="34" charset="-120"/>
                         </a:rPr>
-                        <a:t>6</a:t>
+                        <a:t>7</a:t>
                       </a:r>
                       <a:endParaRPr lang="en-US" sz="900" dirty="0">
                         <a:latin typeface="Arial" charset="0"/>
@@ -9332,7 +9655,7 @@
                           <a:ea typeface="Arial" pitchFamily="34" charset="-122"/>
                           <a:cs typeface="Arial" pitchFamily="34" charset="-120"/>
                         </a:rPr>
-                        <a:t>7.67</a:t>
+                        <a:t>7.57</a:t>
                       </a:r>
                       <a:endParaRPr lang="en-US" sz="900" dirty="0">
                         <a:latin typeface="Arial" charset="0"/>
@@ -9468,7 +9791,7 @@
                           <a:ea typeface="Arial" pitchFamily="34" charset="-122"/>
                           <a:cs typeface="Arial" pitchFamily="34" charset="-120"/>
                         </a:rPr>
-                        <a:t>7.67</a:t>
+                        <a:t>7.57</a:t>
                       </a:r>
                       <a:endParaRPr lang="en-US" sz="900" dirty="0">
                         <a:latin typeface="Arial" charset="0"/>
@@ -9876,7 +10199,7 @@
                 <a:ea typeface="Arial" pitchFamily="34" charset="-122"/>
                 <a:cs typeface="Arial" pitchFamily="34" charset="-120"/>
               </a:rPr>
-              <a:t>39件（69.6%）</a:t>
+              <a:t>40件（69.0%）</a:t>
             </a:r>
             <a:endParaRPr lang="en-US" sz="1100" dirty="0"/>
           </a:p>
@@ -9974,7 +10297,7 @@
                 <a:ea typeface="Arial" pitchFamily="34" charset="-122"/>
                 <a:cs typeface="Arial" pitchFamily="34" charset="-120"/>
               </a:rPr>
-              <a:t>16件（28.6%）</a:t>
+              <a:t>17件（29.3%）</a:t>
             </a:r>
             <a:endParaRPr lang="en-US" sz="1100" dirty="0"/>
           </a:p>
@@ -10072,7 +10395,7 @@
                 <a:ea typeface="Arial" pitchFamily="34" charset="-122"/>
                 <a:cs typeface="Arial" pitchFamily="34" charset="-120"/>
               </a:rPr>
-              <a:t>1件（1.8%）</a:t>
+              <a:t>1件（1.7%）</a:t>
             </a:r>
             <a:endParaRPr lang="en-US" sz="1100" dirty="0"/>
           </a:p>
@@ -10484,7 +10807,7 @@
                 <a:ea typeface="Arial" pitchFamily="34" charset="-122"/>
                 <a:cs typeface="Arial" pitchFamily="34" charset="-120"/>
               </a:rPr>
-              <a:t>入れ替え制は立地状仕方ない事だと思うので、せめて女湯→男湯→女湯と交互にしてくれれば、夜入れなかったとしても、朝は...</a:t>
+              <a:t>駅も近いし、部屋もひとりならじゅうぶんな広さです</a:t>
             </a:r>
             <a:endParaRPr lang="en-US" sz="900" dirty="0"/>
           </a:p>
@@ -10523,7 +10846,7 @@
                 <a:ea typeface="Arial" pitchFamily="34" charset="-122"/>
                 <a:cs typeface="Arial" pitchFamily="34" charset="-120"/>
               </a:rPr>
-              <a:t>「橋本駅徒歩５分の好立地」</a:t>
+              <a:t>「入れ替え制は立地状仕方ない事だと思うので、せめて女湯→男湯→女湯と交互にしてくれれば、夜入れなかったとしても、朝は...」</a:t>
             </a:r>
             <a:endParaRPr lang="en-US" sz="900" dirty="0"/>
           </a:p>
@@ -10707,7 +11030,7 @@
                 <a:ea typeface="Arial" pitchFamily="34" charset="-122"/>
                 <a:cs typeface="Arial" pitchFamily="34" charset="-120"/>
               </a:rPr>
-              <a:t>Clean room with ample amenities for a solo traveller, alt...</a:t>
+              <a:t>快適でした</a:t>
             </a:r>
             <a:endParaRPr lang="en-US" sz="900" dirty="0"/>
           </a:p>
@@ -10746,7 +11069,7 @@
                 <a:ea typeface="Arial" pitchFamily="34" charset="-122"/>
                 <a:cs typeface="Arial" pitchFamily="34" charset="-120"/>
               </a:rPr>
-              <a:t>「シングルがベッドも広く、綺麗なアパでした」</a:t>
+              <a:t>「Clean room with ample amenities for a solo traveller, alt...」</a:t>
             </a:r>
             <a:endParaRPr lang="en-US" sz="900" dirty="0"/>
           </a:p>

--- a/納品レポート/ホテル別レポート/apa_sagamihara_口コミ分析レポート.pptx
+++ b/納品レポート/ホテル別レポート/apa_sagamihara_口コミ分析レポート.pptx
@@ -208,7 +208,7 @@
                 <c:formatCode>General</c:formatCode>
                 <c:ptCount val="6"/>
                 <c:pt idx="0">
-                  <c:v>9</c:v>
+                  <c:v>8.91</c:v>
                 </c:pt>
                 <c:pt idx="1">
                   <c:v>8.8</c:v>
@@ -566,7 +566,7 @@
               <c:numCache>
                 <c:ptCount val="3"/>
                 <c:pt idx="0">
-                  <c:v>40</c:v>
+                  <c:v>41</c:v>
                 </c:pt>
                 <c:pt idx="1">
                   <c:v>17</c:v>
@@ -801,7 +801,7 @@
                   <c:v>4</c:v>
                 </c:pt>
                 <c:pt idx="2">
-                  <c:v>18</c:v>
+                  <c:v>19</c:v>
                 </c:pt>
                 <c:pt idx="3">
                   <c:v>7</c:v>
@@ -2764,7 +2764,7 @@
                 <a:ea typeface="Arial" pitchFamily="34" charset="-122"/>
                 <a:cs typeface="Arial" pitchFamily="34" charset="-120"/>
               </a:rPr>
-              <a:t>レビュー総数：58件（6サイト）</a:t>
+              <a:t>レビュー総数：59件（6サイト）</a:t>
             </a:r>
             <a:endParaRPr lang="en-US" sz="1000" dirty="0"/>
           </a:p>
@@ -2784,7 +2784,7 @@
                 <a:ea typeface="Arial" pitchFamily="34" charset="-122"/>
                 <a:cs typeface="Arial" pitchFamily="34" charset="-120"/>
               </a:rPr>
-              <a:t>作成日：2026年3月19日</a:t>
+              <a:t>作成日：2026年3月20日</a:t>
             </a:r>
             <a:endParaRPr lang="en-US" sz="1000" dirty="0"/>
           </a:p>
@@ -3604,7 +3604,7 @@
                           <a:ea typeface="Arial" pitchFamily="34" charset="-122"/>
                           <a:cs typeface="Arial" pitchFamily="34" charset="-120"/>
                         </a:rPr>
-                        <a:t>69.0%</a:t>
+                        <a:t>69.5%</a:t>
                       </a:r>
                       <a:endParaRPr lang="en-US" sz="1000" dirty="0">
                         <a:latin typeface="Arial" charset="0"/>
@@ -3672,7 +3672,7 @@
                           <a:ea typeface="Arial" pitchFamily="34" charset="-122"/>
                           <a:cs typeface="Arial" pitchFamily="34" charset="-120"/>
                         </a:rPr>
-                        <a:t>79%以上</a:t>
+                        <a:t>80%以上</a:t>
                       </a:r>
                       <a:endParaRPr lang="en-US" sz="1000" dirty="0">
                         <a:latin typeface="Arial" charset="0"/>
@@ -5464,7 +5464,7 @@
                 <a:ea typeface="Arial" pitchFamily="34" charset="-122"/>
                 <a:cs typeface="Arial" pitchFamily="34" charset="-120"/>
               </a:rPr>
-              <a:t>69.0%</a:t>
+              <a:t>69.5%</a:t>
             </a:r>
             <a:endParaRPr lang="en-US" sz="3200" dirty="0"/>
           </a:p>
@@ -5714,7 +5714,7 @@
                 <a:ea typeface="Arial" pitchFamily="34" charset="-122"/>
                 <a:cs typeface="Arial" pitchFamily="34" charset="-120"/>
               </a:rPr>
-              <a:t>58件</a:t>
+              <a:t>59件</a:t>
             </a:r>
             <a:endParaRPr lang="en-US" sz="3200" dirty="0"/>
           </a:p>
@@ -5942,7 +5942,7 @@
                 <a:ea typeface="Arial" pitchFamily="34" charset="-122"/>
                 <a:cs typeface="Arial" pitchFamily="34" charset="-120"/>
               </a:rPr>
-              <a:t>  フロントにてカードキーと大浴場専用カードキーを交換とのこと</a:t>
+              <a:t>  意外とスタッフはおっちょこちょいな感じがします</a:t>
             </a:r>
             <a:endParaRPr lang="en-US" sz="1100" dirty="0"/>
           </a:p>
@@ -6648,7 +6648,7 @@
                 <a:ea typeface="Arial" pitchFamily="34" charset="-122"/>
                 <a:cs typeface="Arial" pitchFamily="34" charset="-120"/>
               </a:rPr>
-              <a:t>69.0%</a:t>
+              <a:t>69.5%</a:t>
             </a:r>
             <a:endParaRPr lang="en-US" sz="3200" dirty="0"/>
           </a:p>
@@ -6898,7 +6898,7 @@
                 <a:ea typeface="Arial" pitchFamily="34" charset="-122"/>
                 <a:cs typeface="Arial" pitchFamily="34" charset="-120"/>
               </a:rPr>
-              <a:t>58件</a:t>
+              <a:t>59件</a:t>
             </a:r>
             <a:endParaRPr lang="en-US" sz="3200" dirty="0"/>
           </a:p>
@@ -7319,7 +7319,7 @@
                 <a:ea typeface="Arial" pitchFamily="34" charset="-122"/>
                 <a:cs typeface="Arial" pitchFamily="34" charset="-120"/>
               </a:rPr>
-              <a:t>じゃらん(9.00)が最高スコア。</a:t>
+              <a:t>じゃらん(8.91)が最高スコア。</a:t>
             </a:r>
             <a:endParaRPr lang="en-US" sz="1100" dirty="0"/>
           </a:p>
@@ -7877,7 +7877,7 @@
                           <a:ea typeface="Arial" pitchFamily="34" charset="-122"/>
                           <a:cs typeface="Arial" pitchFamily="34" charset="-120"/>
                         </a:rPr>
-                        <a:t>10</a:t>
+                        <a:t>11</a:t>
                       </a:r>
                       <a:endParaRPr lang="en-US" sz="900" dirty="0">
                         <a:latin typeface="Arial" charset="0"/>
@@ -7945,7 +7945,7 @@
                           <a:ea typeface="Arial" pitchFamily="34" charset="-122"/>
                           <a:cs typeface="Arial" pitchFamily="34" charset="-120"/>
                         </a:rPr>
-                        <a:t>4.5</a:t>
+                        <a:t>4.45</a:t>
                       </a:r>
                       <a:endParaRPr lang="en-US" sz="900" dirty="0">
                         <a:latin typeface="Arial" charset="0"/>
@@ -8081,7 +8081,7 @@
                           <a:ea typeface="Arial" pitchFamily="34" charset="-122"/>
                           <a:cs typeface="Arial" pitchFamily="34" charset="-120"/>
                         </a:rPr>
-                        <a:t>9</a:t>
+                        <a:t>8.91</a:t>
                       </a:r>
                       <a:endParaRPr lang="en-US" sz="900" dirty="0">
                         <a:latin typeface="Arial" charset="0"/>
@@ -10199,7 +10199,7 @@
                 <a:ea typeface="Arial" pitchFamily="34" charset="-122"/>
                 <a:cs typeface="Arial" pitchFamily="34" charset="-120"/>
               </a:rPr>
-              <a:t>40件（69.0%）</a:t>
+              <a:t>41件（69.5%）</a:t>
             </a:r>
             <a:endParaRPr lang="en-US" sz="1100" dirty="0"/>
           </a:p>
@@ -10297,7 +10297,7 @@
                 <a:ea typeface="Arial" pitchFamily="34" charset="-122"/>
                 <a:cs typeface="Arial" pitchFamily="34" charset="-120"/>
               </a:rPr>
-              <a:t>17件（29.3%）</a:t>
+              <a:t>17件（28.8%）</a:t>
             </a:r>
             <a:endParaRPr lang="en-US" sz="1100" dirty="0"/>
           </a:p>
@@ -10846,7 +10846,7 @@
                 <a:ea typeface="Arial" pitchFamily="34" charset="-122"/>
                 <a:cs typeface="Arial" pitchFamily="34" charset="-120"/>
               </a:rPr>
-              <a:t>「入れ替え制は立地状仕方ない事だと思うので、せめて女湯→男湯→女湯と交互にしてくれれば、夜入れなかったとしても、朝は...」</a:t>
+              <a:t>「駅近で、近くに飲食店がいろいろあり立地は申し分ないです」</a:t>
             </a:r>
             <a:endParaRPr lang="en-US" sz="900" dirty="0"/>
           </a:p>
@@ -11253,7 +11253,7 @@
                 <a:ea typeface="Arial" pitchFamily="34" charset="-122"/>
                 <a:cs typeface="Arial" pitchFamily="34" charset="-120"/>
               </a:rPr>
-              <a:t>フロントにてカードキーと大浴場専用カードキーを交換とのこと</a:t>
+              <a:t>意外とスタッフはおっちょこちょいな感じがします</a:t>
             </a:r>
             <a:endParaRPr lang="en-US" sz="900" dirty="0"/>
           </a:p>
@@ -11292,7 +11292,7 @@
                 <a:ea typeface="Arial" pitchFamily="34" charset="-122"/>
                 <a:cs typeface="Arial" pitchFamily="34" charset="-120"/>
               </a:rPr>
-              <a:t>「ホテルスタッフの方々の対応も丁寧で、全体的に安心感のある印象です」</a:t>
+              <a:t>「フロントにてカードキーと大浴場専用カードキーを交換とのこと」</a:t>
             </a:r>
             <a:endParaRPr lang="en-US" sz="900" dirty="0"/>
           </a:p>
@@ -11476,7 +11476,7 @@
                 <a:ea typeface="Arial" pitchFamily="34" charset="-122"/>
                 <a:cs typeface="Arial" pitchFamily="34" charset="-120"/>
               </a:rPr>
-              <a:t>Clean room with ample amenities for a solo traveller, alt...</a:t>
+              <a:t>意外と新しいホテルで凄く綺麗で良かったです(*^^*)  大浴場もあり良いのですが…風呂が熱すぎる</a:t>
             </a:r>
             <a:endParaRPr lang="en-US" sz="900" dirty="0"/>
           </a:p>
@@ -11515,7 +11515,7 @@
                 <a:ea typeface="Arial" pitchFamily="34" charset="-122"/>
                 <a:cs typeface="Arial" pitchFamily="34" charset="-120"/>
               </a:rPr>
-              <a:t>「シングルがベッドも広く、綺麗なアパでした」</a:t>
+              <a:t>「Clean room with ample amenities for a solo traveller, alt...」</a:t>
             </a:r>
             <a:endParaRPr lang="en-US" sz="900" dirty="0"/>
           </a:p>
@@ -11844,7 +11844,7 @@
                 <a:ea typeface="Arial" pitchFamily="34" charset="-122"/>
                 <a:cs typeface="Arial" pitchFamily="34" charset="-120"/>
               </a:rPr>
-              <a:t>5件</a:t>
+              <a:t>6件</a:t>
             </a:r>
             <a:endParaRPr lang="en-US" sz="900" dirty="0"/>
           </a:p>
@@ -11922,7 +11922,7 @@
                 <a:ea typeface="Arial" pitchFamily="34" charset="-122"/>
                 <a:cs typeface="Arial" pitchFamily="34" charset="-120"/>
               </a:rPr>
-              <a:t>近くには様々な飲食店やスーパーがあり娯楽施設もあります</a:t>
+              <a:t>また、意外とスーパーやショッピングセンターもあり長期出張にはもってこいです</a:t>
             </a:r>
             <a:endParaRPr lang="en-US" sz="900" dirty="0"/>
           </a:p>
@@ -11961,7 +11961,7 @@
                 <a:ea typeface="Arial" pitchFamily="34" charset="-122"/>
                 <a:cs typeface="Arial" pitchFamily="34" charset="-120"/>
               </a:rPr>
-              <a:t>「飲食店も近くに沢山あるし、男女入れ替え制ですが大浴場もあり、コスパ満足できました」</a:t>
+              <a:t>「近くには様々な飲食店やスーパーがあり娯楽施設もあります」</a:t>
             </a:r>
             <a:endParaRPr lang="en-US" sz="900" dirty="0"/>
           </a:p>

--- a/納品レポート/ホテル別レポート/apa_sagamihara_口コミ分析レポート.pptx
+++ b/納品レポート/ホテル別レポート/apa_sagamihara_口コミ分析レポート.pptx
@@ -217,7 +217,7 @@
                   <c:v>8.67</c:v>
                 </c:pt>
                 <c:pt idx="3">
-                  <c:v>7.89</c:v>
+                  <c:v>7.85</c:v>
                 </c:pt>
                 <c:pt idx="4">
                   <c:v>7.71</c:v>
@@ -569,7 +569,7 @@
                   <c:v>41</c:v>
                 </c:pt>
                 <c:pt idx="1">
-                  <c:v>17</c:v>
+                  <c:v>18</c:v>
                 </c:pt>
                 <c:pt idx="2">
                   <c:v>1</c:v>
@@ -804,7 +804,7 @@
                   <c:v>19</c:v>
                 </c:pt>
                 <c:pt idx="3">
-                  <c:v>7</c:v>
+                  <c:v>8</c:v>
                 </c:pt>
                 <c:pt idx="4">
                   <c:v>8</c:v>
@@ -2764,7 +2764,7 @@
                 <a:ea typeface="Arial" pitchFamily="34" charset="-122"/>
                 <a:cs typeface="Arial" pitchFamily="34" charset="-120"/>
               </a:rPr>
-              <a:t>レビュー総数：59件（6サイト）</a:t>
+              <a:t>レビュー総数：60件（6サイト）</a:t>
             </a:r>
             <a:endParaRPr lang="en-US" sz="1000" dirty="0"/>
           </a:p>
@@ -2784,7 +2784,7 @@
                 <a:ea typeface="Arial" pitchFamily="34" charset="-122"/>
                 <a:cs typeface="Arial" pitchFamily="34" charset="-120"/>
               </a:rPr>
-              <a:t>作成日：2026年3月20日</a:t>
+              <a:t>作成日：2026年3月21日</a:t>
             </a:r>
             <a:endParaRPr lang="en-US" sz="1000" dirty="0"/>
           </a:p>
@@ -3330,7 +3330,7 @@
                           <a:ea typeface="Arial" pitchFamily="34" charset="-122"/>
                           <a:cs typeface="Arial" pitchFamily="34" charset="-120"/>
                         </a:rPr>
-                        <a:t>8.12点</a:t>
+                        <a:t>8.10点</a:t>
                       </a:r>
                       <a:endParaRPr lang="en-US" sz="1000" dirty="0">
                         <a:latin typeface="Arial" charset="0"/>
@@ -3604,7 +3604,7 @@
                           <a:ea typeface="Arial" pitchFamily="34" charset="-122"/>
                           <a:cs typeface="Arial" pitchFamily="34" charset="-120"/>
                         </a:rPr>
-                        <a:t>69.5%</a:t>
+                        <a:t>68.3%</a:t>
                       </a:r>
                       <a:endParaRPr lang="en-US" sz="1000" dirty="0">
                         <a:latin typeface="Arial" charset="0"/>
@@ -3672,7 +3672,7 @@
                           <a:ea typeface="Arial" pitchFamily="34" charset="-122"/>
                           <a:cs typeface="Arial" pitchFamily="34" charset="-120"/>
                         </a:rPr>
-                        <a:t>80%以上</a:t>
+                        <a:t>78%以上</a:t>
                       </a:r>
                       <a:endParaRPr lang="en-US" sz="1000" dirty="0">
                         <a:latin typeface="Arial" charset="0"/>
@@ -5339,7 +5339,7 @@
                 <a:ea typeface="Arial" pitchFamily="34" charset="-122"/>
                 <a:cs typeface="Arial" pitchFamily="34" charset="-120"/>
               </a:rPr>
-              <a:t>8.12</a:t>
+              <a:t>8.10</a:t>
             </a:r>
             <a:endParaRPr lang="en-US" sz="3200" dirty="0"/>
           </a:p>
@@ -5464,7 +5464,7 @@
                 <a:ea typeface="Arial" pitchFamily="34" charset="-122"/>
                 <a:cs typeface="Arial" pitchFamily="34" charset="-120"/>
               </a:rPr>
-              <a:t>69.5%</a:t>
+              <a:t>68.3%</a:t>
             </a:r>
             <a:endParaRPr lang="en-US" sz="3200" dirty="0"/>
           </a:p>
@@ -5714,7 +5714,7 @@
                 <a:ea typeface="Arial" pitchFamily="34" charset="-122"/>
                 <a:cs typeface="Arial" pitchFamily="34" charset="-120"/>
               </a:rPr>
-              <a:t>59件</a:t>
+              <a:t>60件</a:t>
             </a:r>
             <a:endParaRPr lang="en-US" sz="3200" dirty="0"/>
           </a:p>
@@ -6523,7 +6523,7 @@
                 <a:ea typeface="Arial" pitchFamily="34" charset="-122"/>
                 <a:cs typeface="Arial" pitchFamily="34" charset="-120"/>
               </a:rPr>
-              <a:t>8.12</a:t>
+              <a:t>8.10</a:t>
             </a:r>
             <a:endParaRPr lang="en-US" sz="3200" dirty="0"/>
           </a:p>
@@ -6648,7 +6648,7 @@
                 <a:ea typeface="Arial" pitchFamily="34" charset="-122"/>
                 <a:cs typeface="Arial" pitchFamily="34" charset="-120"/>
               </a:rPr>
-              <a:t>69.5%</a:t>
+              <a:t>68.3%</a:t>
             </a:r>
             <a:endParaRPr lang="en-US" sz="3200" dirty="0"/>
           </a:p>
@@ -6898,7 +6898,7 @@
                 <a:ea typeface="Arial" pitchFamily="34" charset="-122"/>
                 <a:cs typeface="Arial" pitchFamily="34" charset="-120"/>
               </a:rPr>
-              <a:t>59件</a:t>
+              <a:t>60件</a:t>
             </a:r>
             <a:endParaRPr lang="en-US" sz="3200" dirty="0"/>
           </a:p>
@@ -8903,7 +8903,7 @@
                           <a:ea typeface="Arial" pitchFamily="34" charset="-122"/>
                           <a:cs typeface="Arial" pitchFamily="34" charset="-120"/>
                         </a:rPr>
-                        <a:t>19</a:t>
+                        <a:t>20</a:t>
                       </a:r>
                       <a:endParaRPr lang="en-US" sz="900" dirty="0">
                         <a:latin typeface="Arial" charset="0"/>
@@ -8971,7 +8971,7 @@
                           <a:ea typeface="Arial" pitchFamily="34" charset="-122"/>
                           <a:cs typeface="Arial" pitchFamily="34" charset="-120"/>
                         </a:rPr>
-                        <a:t>7.89</a:t>
+                        <a:t>7.85</a:t>
                       </a:r>
                       <a:endParaRPr lang="en-US" sz="900" dirty="0">
                         <a:latin typeface="Arial" charset="0"/>
@@ -9107,7 +9107,7 @@
                           <a:ea typeface="Arial" pitchFamily="34" charset="-122"/>
                           <a:cs typeface="Arial" pitchFamily="34" charset="-120"/>
                         </a:rPr>
-                        <a:t>7.89</a:t>
+                        <a:t>7.85</a:t>
                       </a:r>
                       <a:endParaRPr lang="en-US" sz="900" dirty="0">
                         <a:latin typeface="Arial" charset="0"/>
@@ -10199,7 +10199,7 @@
                 <a:ea typeface="Arial" pitchFamily="34" charset="-122"/>
                 <a:cs typeface="Arial" pitchFamily="34" charset="-120"/>
               </a:rPr>
-              <a:t>41件（69.5%）</a:t>
+              <a:t>41件（68.3%）</a:t>
             </a:r>
             <a:endParaRPr lang="en-US" sz="1100" dirty="0"/>
           </a:p>
@@ -10297,7 +10297,7 @@
                 <a:ea typeface="Arial" pitchFamily="34" charset="-122"/>
                 <a:cs typeface="Arial" pitchFamily="34" charset="-120"/>
               </a:rPr>
-              <a:t>17件（28.8%）</a:t>
+              <a:t>18件（30.0%）</a:t>
             </a:r>
             <a:endParaRPr lang="en-US" sz="1100" dirty="0"/>
           </a:p>

--- a/納品レポート/ホテル別レポート/apa_sagamihara_口コミ分析レポート.pptx
+++ b/納品レポート/ホテル別レポート/apa_sagamihara_口コミ分析レポート.pptx
@@ -217,7 +217,7 @@
                   <c:v>8.67</c:v>
                 </c:pt>
                 <c:pt idx="3">
-                  <c:v>7.85</c:v>
+                  <c:v>7.95</c:v>
                 </c:pt>
                 <c:pt idx="4">
                   <c:v>7.71</c:v>
@@ -566,7 +566,7 @@
               <c:numCache>
                 <c:ptCount val="3"/>
                 <c:pt idx="0">
-                  <c:v>41</c:v>
+                  <c:v>42</c:v>
                 </c:pt>
                 <c:pt idx="1">
                   <c:v>18</c:v>
@@ -795,7 +795,7 @@
                 <c:formatCode>General</c:formatCode>
                 <c:ptCount val="7"/>
                 <c:pt idx="0">
-                  <c:v>18</c:v>
+                  <c:v>19</c:v>
                 </c:pt>
                 <c:pt idx="1">
                   <c:v>4</c:v>
@@ -2764,7 +2764,7 @@
                 <a:ea typeface="Arial" pitchFamily="34" charset="-122"/>
                 <a:cs typeface="Arial" pitchFamily="34" charset="-120"/>
               </a:rPr>
-              <a:t>レビュー総数：60件（6サイト）</a:t>
+              <a:t>レビュー総数：61件（6サイト）</a:t>
             </a:r>
             <a:endParaRPr lang="en-US" sz="1000" dirty="0"/>
           </a:p>
@@ -2784,7 +2784,7 @@
                 <a:ea typeface="Arial" pitchFamily="34" charset="-122"/>
                 <a:cs typeface="Arial" pitchFamily="34" charset="-120"/>
               </a:rPr>
-              <a:t>作成日：2026年3月21日</a:t>
+              <a:t>作成日：2026年3月23日</a:t>
             </a:r>
             <a:endParaRPr lang="en-US" sz="1000" dirty="0"/>
           </a:p>
@@ -3330,7 +3330,7 @@
                           <a:ea typeface="Arial" pitchFamily="34" charset="-122"/>
                           <a:cs typeface="Arial" pitchFamily="34" charset="-120"/>
                         </a:rPr>
-                        <a:t>8.10点</a:t>
+                        <a:t>8.13点</a:t>
                       </a:r>
                       <a:endParaRPr lang="en-US" sz="1000" dirty="0">
                         <a:latin typeface="Arial" charset="0"/>
@@ -3604,7 +3604,7 @@
                           <a:ea typeface="Arial" pitchFamily="34" charset="-122"/>
                           <a:cs typeface="Arial" pitchFamily="34" charset="-120"/>
                         </a:rPr>
-                        <a:t>68.3%</a:t>
+                        <a:t>68.9%</a:t>
                       </a:r>
                       <a:endParaRPr lang="en-US" sz="1000" dirty="0">
                         <a:latin typeface="Arial" charset="0"/>
@@ -3672,7 +3672,7 @@
                           <a:ea typeface="Arial" pitchFamily="34" charset="-122"/>
                           <a:cs typeface="Arial" pitchFamily="34" charset="-120"/>
                         </a:rPr>
-                        <a:t>78%以上</a:t>
+                        <a:t>79%以上</a:t>
                       </a:r>
                       <a:endParaRPr lang="en-US" sz="1000" dirty="0">
                         <a:latin typeface="Arial" charset="0"/>
@@ -3878,7 +3878,7 @@
                           <a:ea typeface="Arial" pitchFamily="34" charset="-122"/>
                           <a:cs typeface="Arial" pitchFamily="34" charset="-120"/>
                         </a:rPr>
-                        <a:t>1.7%</a:t>
+                        <a:t>1.6%</a:t>
                       </a:r>
                       <a:endParaRPr lang="en-US" sz="1000" dirty="0">
                         <a:latin typeface="Arial" charset="0"/>
@@ -5339,7 +5339,7 @@
                 <a:ea typeface="Arial" pitchFamily="34" charset="-122"/>
                 <a:cs typeface="Arial" pitchFamily="34" charset="-120"/>
               </a:rPr>
-              <a:t>8.10</a:t>
+              <a:t>8.13</a:t>
             </a:r>
             <a:endParaRPr lang="en-US" sz="3200" dirty="0"/>
           </a:p>
@@ -5464,7 +5464,7 @@
                 <a:ea typeface="Arial" pitchFamily="34" charset="-122"/>
                 <a:cs typeface="Arial" pitchFamily="34" charset="-120"/>
               </a:rPr>
-              <a:t>68.3%</a:t>
+              <a:t>68.9%</a:t>
             </a:r>
             <a:endParaRPr lang="en-US" sz="3200" dirty="0"/>
           </a:p>
@@ -5589,7 +5589,7 @@
                 <a:ea typeface="Arial" pitchFamily="34" charset="-122"/>
                 <a:cs typeface="Arial" pitchFamily="34" charset="-120"/>
               </a:rPr>
-              <a:t>1.7%</a:t>
+              <a:t>1.6%</a:t>
             </a:r>
             <a:endParaRPr lang="en-US" sz="3200" dirty="0"/>
           </a:p>
@@ -5714,7 +5714,7 @@
                 <a:ea typeface="Arial" pitchFamily="34" charset="-122"/>
                 <a:cs typeface="Arial" pitchFamily="34" charset="-120"/>
               </a:rPr>
-              <a:t>60件</a:t>
+              <a:t>61件</a:t>
             </a:r>
             <a:endParaRPr lang="en-US" sz="3200" dirty="0"/>
           </a:p>
@@ -6523,7 +6523,7 @@
                 <a:ea typeface="Arial" pitchFamily="34" charset="-122"/>
                 <a:cs typeface="Arial" pitchFamily="34" charset="-120"/>
               </a:rPr>
-              <a:t>8.10</a:t>
+              <a:t>8.13</a:t>
             </a:r>
             <a:endParaRPr lang="en-US" sz="3200" dirty="0"/>
           </a:p>
@@ -6648,7 +6648,7 @@
                 <a:ea typeface="Arial" pitchFamily="34" charset="-122"/>
                 <a:cs typeface="Arial" pitchFamily="34" charset="-120"/>
               </a:rPr>
-              <a:t>68.3%</a:t>
+              <a:t>68.9%</a:t>
             </a:r>
             <a:endParaRPr lang="en-US" sz="3200" dirty="0"/>
           </a:p>
@@ -6773,7 +6773,7 @@
                 <a:ea typeface="Arial" pitchFamily="34" charset="-122"/>
                 <a:cs typeface="Arial" pitchFamily="34" charset="-120"/>
               </a:rPr>
-              <a:t>1.7%</a:t>
+              <a:t>1.6%</a:t>
             </a:r>
             <a:endParaRPr lang="en-US" sz="3200" dirty="0"/>
           </a:p>
@@ -6898,7 +6898,7 @@
                 <a:ea typeface="Arial" pitchFamily="34" charset="-122"/>
                 <a:cs typeface="Arial" pitchFamily="34" charset="-120"/>
               </a:rPr>
-              <a:t>60件</a:t>
+              <a:t>61件</a:t>
             </a:r>
             <a:endParaRPr lang="en-US" sz="3200" dirty="0"/>
           </a:p>
@@ -8903,7 +8903,7 @@
                           <a:ea typeface="Arial" pitchFamily="34" charset="-122"/>
                           <a:cs typeface="Arial" pitchFamily="34" charset="-120"/>
                         </a:rPr>
-                        <a:t>20</a:t>
+                        <a:t>21</a:t>
                       </a:r>
                       <a:endParaRPr lang="en-US" sz="900" dirty="0">
                         <a:latin typeface="Arial" charset="0"/>
@@ -8971,7 +8971,7 @@
                           <a:ea typeface="Arial" pitchFamily="34" charset="-122"/>
                           <a:cs typeface="Arial" pitchFamily="34" charset="-120"/>
                         </a:rPr>
-                        <a:t>7.85</a:t>
+                        <a:t>7.95</a:t>
                       </a:r>
                       <a:endParaRPr lang="en-US" sz="900" dirty="0">
                         <a:latin typeface="Arial" charset="0"/>
@@ -9107,7 +9107,7 @@
                           <a:ea typeface="Arial" pitchFamily="34" charset="-122"/>
                           <a:cs typeface="Arial" pitchFamily="34" charset="-120"/>
                         </a:rPr>
-                        <a:t>7.85</a:t>
+                        <a:t>7.95</a:t>
                       </a:r>
                       <a:endParaRPr lang="en-US" sz="900" dirty="0">
                         <a:latin typeface="Arial" charset="0"/>
@@ -10199,7 +10199,7 @@
                 <a:ea typeface="Arial" pitchFamily="34" charset="-122"/>
                 <a:cs typeface="Arial" pitchFamily="34" charset="-120"/>
               </a:rPr>
-              <a:t>41件（68.3%）</a:t>
+              <a:t>42件（68.9%）</a:t>
             </a:r>
             <a:endParaRPr lang="en-US" sz="1100" dirty="0"/>
           </a:p>
@@ -10297,7 +10297,7 @@
                 <a:ea typeface="Arial" pitchFamily="34" charset="-122"/>
                 <a:cs typeface="Arial" pitchFamily="34" charset="-120"/>
               </a:rPr>
-              <a:t>18件（30.0%）</a:t>
+              <a:t>18件（29.5%）</a:t>
             </a:r>
             <a:endParaRPr lang="en-US" sz="1100" dirty="0"/>
           </a:p>
@@ -10395,7 +10395,7 @@
                 <a:ea typeface="Arial" pitchFamily="34" charset="-122"/>
                 <a:cs typeface="Arial" pitchFamily="34" charset="-120"/>
               </a:rPr>
-              <a:t>1件（1.7%）</a:t>
+              <a:t>1件（1.6%）</a:t>
             </a:r>
             <a:endParaRPr lang="en-US" sz="1100" dirty="0"/>
           </a:p>

--- a/納品レポート/ホテル別レポート/apa_sagamihara_口コミ分析レポート.pptx
+++ b/納品レポート/ホテル別レポート/apa_sagamihara_口コミ分析レポート.pptx
@@ -211,7 +211,7 @@
                   <c:v>8.91</c:v>
                 </c:pt>
                 <c:pt idx="1">
-                  <c:v>8.8</c:v>
+                  <c:v>8.67</c:v>
                 </c:pt>
                 <c:pt idx="2">
                   <c:v>8.67</c:v>
@@ -566,7 +566,7 @@
               <c:numCache>
                 <c:ptCount val="3"/>
                 <c:pt idx="0">
-                  <c:v>42</c:v>
+                  <c:v>43</c:v>
                 </c:pt>
                 <c:pt idx="1">
                   <c:v>18</c:v>
@@ -801,7 +801,7 @@
                   <c:v>4</c:v>
                 </c:pt>
                 <c:pt idx="2">
-                  <c:v>19</c:v>
+                  <c:v>20</c:v>
                 </c:pt>
                 <c:pt idx="3">
                   <c:v>8</c:v>
@@ -2764,7 +2764,7 @@
                 <a:ea typeface="Arial" pitchFamily="34" charset="-122"/>
                 <a:cs typeface="Arial" pitchFamily="34" charset="-120"/>
               </a:rPr>
-              <a:t>レビュー総数：61件（6サイト）</a:t>
+              <a:t>レビュー総数：62件（6サイト）</a:t>
             </a:r>
             <a:endParaRPr lang="en-US" sz="1000" dirty="0"/>
           </a:p>
@@ -2784,7 +2784,7 @@
                 <a:ea typeface="Arial" pitchFamily="34" charset="-122"/>
                 <a:cs typeface="Arial" pitchFamily="34" charset="-120"/>
               </a:rPr>
-              <a:t>作成日：2026年3月23日</a:t>
+              <a:t>作成日：2026年3月24日</a:t>
             </a:r>
             <a:endParaRPr lang="en-US" sz="1000" dirty="0"/>
           </a:p>
@@ -3604,7 +3604,7 @@
                           <a:ea typeface="Arial" pitchFamily="34" charset="-122"/>
                           <a:cs typeface="Arial" pitchFamily="34" charset="-120"/>
                         </a:rPr>
-                        <a:t>68.9%</a:t>
+                        <a:t>69.4%</a:t>
                       </a:r>
                       <a:endParaRPr lang="en-US" sz="1000" dirty="0">
                         <a:latin typeface="Arial" charset="0"/>
@@ -5464,7 +5464,7 @@
                 <a:ea typeface="Arial" pitchFamily="34" charset="-122"/>
                 <a:cs typeface="Arial" pitchFamily="34" charset="-120"/>
               </a:rPr>
-              <a:t>68.9%</a:t>
+              <a:t>69.4%</a:t>
             </a:r>
             <a:endParaRPr lang="en-US" sz="3200" dirty="0"/>
           </a:p>
@@ -5714,7 +5714,7 @@
                 <a:ea typeface="Arial" pitchFamily="34" charset="-122"/>
                 <a:cs typeface="Arial" pitchFamily="34" charset="-120"/>
               </a:rPr>
-              <a:t>61件</a:t>
+              <a:t>62件</a:t>
             </a:r>
             <a:endParaRPr lang="en-US" sz="3200" dirty="0"/>
           </a:p>
@@ -6648,7 +6648,7 @@
                 <a:ea typeface="Arial" pitchFamily="34" charset="-122"/>
                 <a:cs typeface="Arial" pitchFamily="34" charset="-120"/>
               </a:rPr>
-              <a:t>68.9%</a:t>
+              <a:t>69.4%</a:t>
             </a:r>
             <a:endParaRPr lang="en-US" sz="3200" dirty="0"/>
           </a:p>
@@ -6898,7 +6898,7 @@
                 <a:ea typeface="Arial" pitchFamily="34" charset="-122"/>
                 <a:cs typeface="Arial" pitchFamily="34" charset="-120"/>
               </a:rPr>
-              <a:t>61件</a:t>
+              <a:t>62件</a:t>
             </a:r>
             <a:endParaRPr lang="en-US" sz="3200" dirty="0"/>
           </a:p>
@@ -8219,7 +8219,7 @@
                           <a:ea typeface="Arial" pitchFamily="34" charset="-122"/>
                           <a:cs typeface="Arial" pitchFamily="34" charset="-120"/>
                         </a:rPr>
-                        <a:t>5</a:t>
+                        <a:t>6</a:t>
                       </a:r>
                       <a:endParaRPr lang="en-US" sz="900" dirty="0">
                         <a:latin typeface="Arial" charset="0"/>
@@ -8287,7 +8287,7 @@
                           <a:ea typeface="Arial" pitchFamily="34" charset="-122"/>
                           <a:cs typeface="Arial" pitchFamily="34" charset="-120"/>
                         </a:rPr>
-                        <a:t>4.4</a:t>
+                        <a:t>4.33</a:t>
                       </a:r>
                       <a:endParaRPr lang="en-US" sz="900" dirty="0">
                         <a:latin typeface="Arial" charset="0"/>
@@ -8423,7 +8423,7 @@
                           <a:ea typeface="Arial" pitchFamily="34" charset="-122"/>
                           <a:cs typeface="Arial" pitchFamily="34" charset="-120"/>
                         </a:rPr>
-                        <a:t>8.8</a:t>
+                        <a:t>8.67</a:t>
                       </a:r>
                       <a:endParaRPr lang="en-US" sz="900" dirty="0">
                         <a:latin typeface="Arial" charset="0"/>
@@ -10199,7 +10199,7 @@
                 <a:ea typeface="Arial" pitchFamily="34" charset="-122"/>
                 <a:cs typeface="Arial" pitchFamily="34" charset="-120"/>
               </a:rPr>
-              <a:t>42件（68.9%）</a:t>
+              <a:t>43件（69.4%）</a:t>
             </a:r>
             <a:endParaRPr lang="en-US" sz="1100" dirty="0"/>
           </a:p>
@@ -10297,7 +10297,7 @@
                 <a:ea typeface="Arial" pitchFamily="34" charset="-122"/>
                 <a:cs typeface="Arial" pitchFamily="34" charset="-120"/>
               </a:rPr>
-              <a:t>18件（29.5%）</a:t>
+              <a:t>18件（29.0%）</a:t>
             </a:r>
             <a:endParaRPr lang="en-US" sz="1100" dirty="0"/>
           </a:p>

--- a/納品レポート/ホテル別レポート/apa_sagamihara_口コミ分析レポート.pptx
+++ b/納品レポート/ホテル別レポート/apa_sagamihara_口コミ分析レポート.pptx
@@ -192,10 +192,10 @@
                     <c:v>Booking.com</c:v>
                   </c:pt>
                   <c:pt idx="4">
-                    <c:v>楽天トラベル</c:v>
+                    <c:v>Agoda</c:v>
                   </c:pt>
                   <c:pt idx="5">
-                    <c:v>Agoda</c:v>
+                    <c:v>楽天トラベル</c:v>
                   </c:pt>
                 </c:lvl>
               </c:multiLvlStrCache>
@@ -220,10 +220,10 @@
                   <c:v>7.95</c:v>
                 </c:pt>
                 <c:pt idx="4">
-                  <c:v>7.71</c:v>
+                  <c:v>7.88</c:v>
                 </c:pt>
                 <c:pt idx="5">
-                  <c:v>7.57</c:v>
+                  <c:v>7.71</c:v>
                 </c:pt>
               </c:numCache>
             </c:numRef>
@@ -566,7 +566,7 @@
               <c:numCache>
                 <c:ptCount val="3"/>
                 <c:pt idx="0">
-                  <c:v>43</c:v>
+                  <c:v>44</c:v>
                 </c:pt>
                 <c:pt idx="1">
                   <c:v>18</c:v>
@@ -795,7 +795,7 @@
                 <c:formatCode>General</c:formatCode>
                 <c:ptCount val="7"/>
                 <c:pt idx="0">
-                  <c:v>19</c:v>
+                  <c:v>20</c:v>
                 </c:pt>
                 <c:pt idx="1">
                   <c:v>4</c:v>
@@ -2764,7 +2764,7 @@
                 <a:ea typeface="Arial" pitchFamily="34" charset="-122"/>
                 <a:cs typeface="Arial" pitchFamily="34" charset="-120"/>
               </a:rPr>
-              <a:t>レビュー総数：62件（6サイト）</a:t>
+              <a:t>レビュー総数：63件（6サイト）</a:t>
             </a:r>
             <a:endParaRPr lang="en-US" sz="1000" dirty="0"/>
           </a:p>
@@ -2784,7 +2784,7 @@
                 <a:ea typeface="Arial" pitchFamily="34" charset="-122"/>
                 <a:cs typeface="Arial" pitchFamily="34" charset="-120"/>
               </a:rPr>
-              <a:t>作成日：2026年3月24日</a:t>
+              <a:t>作成日：2026年3月25日</a:t>
             </a:r>
             <a:endParaRPr lang="en-US" sz="1000" dirty="0"/>
           </a:p>
@@ -3330,7 +3330,7 @@
                           <a:ea typeface="Arial" pitchFamily="34" charset="-122"/>
                           <a:cs typeface="Arial" pitchFamily="34" charset="-120"/>
                         </a:rPr>
-                        <a:t>8.13点</a:t>
+                        <a:t>8.16点</a:t>
                       </a:r>
                       <a:endParaRPr lang="en-US" sz="1000" dirty="0">
                         <a:latin typeface="Arial" charset="0"/>
@@ -3398,7 +3398,7 @@
                           <a:ea typeface="Arial" pitchFamily="34" charset="-122"/>
                           <a:cs typeface="Arial" pitchFamily="34" charset="-120"/>
                         </a:rPr>
-                        <a:t>8.4点以上</a:t>
+                        <a:t>8.5点以上</a:t>
                       </a:r>
                       <a:endParaRPr lang="en-US" sz="1000" dirty="0">
                         <a:latin typeface="Arial" charset="0"/>
@@ -3604,7 +3604,7 @@
                           <a:ea typeface="Arial" pitchFamily="34" charset="-122"/>
                           <a:cs typeface="Arial" pitchFamily="34" charset="-120"/>
                         </a:rPr>
-                        <a:t>69.4%</a:t>
+                        <a:t>69.8%</a:t>
                       </a:r>
                       <a:endParaRPr lang="en-US" sz="1000" dirty="0">
                         <a:latin typeface="Arial" charset="0"/>
@@ -3672,7 +3672,7 @@
                           <a:ea typeface="Arial" pitchFamily="34" charset="-122"/>
                           <a:cs typeface="Arial" pitchFamily="34" charset="-120"/>
                         </a:rPr>
-                        <a:t>79%以上</a:t>
+                        <a:t>80%以上</a:t>
                       </a:r>
                       <a:endParaRPr lang="en-US" sz="1000" dirty="0">
                         <a:latin typeface="Arial" charset="0"/>
@@ -4084,280 +4084,6 @@
                           <a:ea typeface="Arial" pitchFamily="34" charset="-122"/>
                           <a:cs typeface="Arial" pitchFamily="34" charset="-120"/>
                         </a:rPr>
-                        <a:t>Agoda平均評価</a:t>
-                      </a:r>
-                      <a:endParaRPr lang="en-US" sz="1000" dirty="0">
-                        <a:latin typeface="Arial" charset="0"/>
-                        <a:ea typeface="Arial" charset="0"/>
-                        <a:cs typeface="Arial" charset="0"/>
-                      </a:endParaRPr>
-                    </a:p>
-                  </a:txBody>
-                  <a:tcPr marL="91440" marR="91440" marT="45720" marB="45720">
-                    <a:lnL w="6350" cap="flat" cmpd="sng" algn="ctr">
-                      <a:solidFill>
-                        <a:srgbClr val="CBD5E1"/>
-                      </a:solidFill>
-                      <a:prstDash val="solid"/>
-                      <a:round/>
-                      <a:headEnd type="none" w="med" len="med"/>
-                      <a:tailEnd type="none" w="med" len="med"/>
-                    </a:lnL>
-                    <a:lnR w="6350" cap="flat" cmpd="sng" algn="ctr">
-                      <a:solidFill>
-                        <a:srgbClr val="CBD5E1"/>
-                      </a:solidFill>
-                      <a:prstDash val="solid"/>
-                      <a:round/>
-                      <a:headEnd type="none" w="med" len="med"/>
-                      <a:tailEnd type="none" w="med" len="med"/>
-                    </a:lnR>
-                    <a:lnT w="6350" cap="flat" cmpd="sng" algn="ctr">
-                      <a:solidFill>
-                        <a:srgbClr val="CBD5E1"/>
-                      </a:solidFill>
-                      <a:prstDash val="solid"/>
-                      <a:round/>
-                      <a:headEnd type="none" w="med" len="med"/>
-                      <a:tailEnd type="none" w="med" len="med"/>
-                    </a:lnT>
-                    <a:lnB w="6350" cap="flat" cmpd="sng" algn="ctr">
-                      <a:solidFill>
-                        <a:srgbClr val="CBD5E1"/>
-                      </a:solidFill>
-                      <a:prstDash val="solid"/>
-                      <a:round/>
-                      <a:headEnd type="none" w="med" len="med"/>
-                      <a:tailEnd type="none" w="med" len="med"/>
-                    </a:lnB>
-                    <a:solidFill>
-                      <a:srgbClr val="FFFFFF"/>
-                    </a:solidFill>
-                  </a:tcPr>
-                </a:tc>
-                <a:tc>
-                  <a:txBody>
-                    <a:bodyPr/>
-                    <a:lstStyle/>
-                    <a:p>
-                      <a:pPr algn="ctr" indent="0" marL="0">
-                        <a:buNone/>
-                      </a:pPr>
-                      <a:r>
-                        <a:rPr lang="en-US" sz="1000" dirty="0">
-                          <a:solidFill>
-                            <a:srgbClr val="64748B"/>
-                          </a:solidFill>
-                          <a:latin typeface="Arial" pitchFamily="34" charset="0"/>
-                          <a:ea typeface="Arial" pitchFamily="34" charset="-122"/>
-                          <a:cs typeface="Arial" pitchFamily="34" charset="-120"/>
-                        </a:rPr>
-                        <a:t>7.6点</a:t>
-                      </a:r>
-                      <a:endParaRPr lang="en-US" sz="1000" dirty="0">
-                        <a:latin typeface="Arial" charset="0"/>
-                        <a:ea typeface="Arial" charset="0"/>
-                        <a:cs typeface="Arial" charset="0"/>
-                      </a:endParaRPr>
-                    </a:p>
-                  </a:txBody>
-                  <a:tcPr marL="91440" marR="91440" marT="45720" marB="45720">
-                    <a:lnL w="6350" cap="flat" cmpd="sng" algn="ctr">
-                      <a:solidFill>
-                        <a:srgbClr val="CBD5E1"/>
-                      </a:solidFill>
-                      <a:prstDash val="solid"/>
-                      <a:round/>
-                      <a:headEnd type="none" w="med" len="med"/>
-                      <a:tailEnd type="none" w="med" len="med"/>
-                    </a:lnL>
-                    <a:lnR w="6350" cap="flat" cmpd="sng" algn="ctr">
-                      <a:solidFill>
-                        <a:srgbClr val="CBD5E1"/>
-                      </a:solidFill>
-                      <a:prstDash val="solid"/>
-                      <a:round/>
-                      <a:headEnd type="none" w="med" len="med"/>
-                      <a:tailEnd type="none" w="med" len="med"/>
-                    </a:lnR>
-                    <a:lnT w="6350" cap="flat" cmpd="sng" algn="ctr">
-                      <a:solidFill>
-                        <a:srgbClr val="CBD5E1"/>
-                      </a:solidFill>
-                      <a:prstDash val="solid"/>
-                      <a:round/>
-                      <a:headEnd type="none" w="med" len="med"/>
-                      <a:tailEnd type="none" w="med" len="med"/>
-                    </a:lnT>
-                    <a:lnB w="6350" cap="flat" cmpd="sng" algn="ctr">
-                      <a:solidFill>
-                        <a:srgbClr val="CBD5E1"/>
-                      </a:solidFill>
-                      <a:prstDash val="solid"/>
-                      <a:round/>
-                      <a:headEnd type="none" w="med" len="med"/>
-                      <a:tailEnd type="none" w="med" len="med"/>
-                    </a:lnB>
-                    <a:solidFill>
-                      <a:srgbClr val="FFFFFF"/>
-                    </a:solidFill>
-                  </a:tcPr>
-                </a:tc>
-                <a:tc>
-                  <a:txBody>
-                    <a:bodyPr/>
-                    <a:lstStyle/>
-                    <a:p>
-                      <a:pPr algn="ctr" indent="0" marL="0">
-                        <a:buNone/>
-                      </a:pPr>
-                      <a:r>
-                        <a:rPr lang="en-US" sz="1000" b="1" dirty="0">
-                          <a:solidFill>
-                            <a:srgbClr val="16A34A"/>
-                          </a:solidFill>
-                          <a:latin typeface="Arial" pitchFamily="34" charset="0"/>
-                          <a:ea typeface="Arial" pitchFamily="34" charset="-122"/>
-                          <a:cs typeface="Arial" pitchFamily="34" charset="-120"/>
-                        </a:rPr>
-                        <a:t>8.6点以上</a:t>
-                      </a:r>
-                      <a:endParaRPr lang="en-US" sz="1000" dirty="0">
-                        <a:latin typeface="Arial" charset="0"/>
-                        <a:ea typeface="Arial" charset="0"/>
-                        <a:cs typeface="Arial" charset="0"/>
-                      </a:endParaRPr>
-                    </a:p>
-                  </a:txBody>
-                  <a:tcPr marL="91440" marR="91440" marT="45720" marB="45720">
-                    <a:lnL w="6350" cap="flat" cmpd="sng" algn="ctr">
-                      <a:solidFill>
-                        <a:srgbClr val="CBD5E1"/>
-                      </a:solidFill>
-                      <a:prstDash val="solid"/>
-                      <a:round/>
-                      <a:headEnd type="none" w="med" len="med"/>
-                      <a:tailEnd type="none" w="med" len="med"/>
-                    </a:lnL>
-                    <a:lnR w="6350" cap="flat" cmpd="sng" algn="ctr">
-                      <a:solidFill>
-                        <a:srgbClr val="CBD5E1"/>
-                      </a:solidFill>
-                      <a:prstDash val="solid"/>
-                      <a:round/>
-                      <a:headEnd type="none" w="med" len="med"/>
-                      <a:tailEnd type="none" w="med" len="med"/>
-                    </a:lnR>
-                    <a:lnT w="6350" cap="flat" cmpd="sng" algn="ctr">
-                      <a:solidFill>
-                        <a:srgbClr val="CBD5E1"/>
-                      </a:solidFill>
-                      <a:prstDash val="solid"/>
-                      <a:round/>
-                      <a:headEnd type="none" w="med" len="med"/>
-                      <a:tailEnd type="none" w="med" len="med"/>
-                    </a:lnT>
-                    <a:lnB w="6350" cap="flat" cmpd="sng" algn="ctr">
-                      <a:solidFill>
-                        <a:srgbClr val="CBD5E1"/>
-                      </a:solidFill>
-                      <a:prstDash val="solid"/>
-                      <a:round/>
-                      <a:headEnd type="none" w="med" len="med"/>
-                      <a:tailEnd type="none" w="med" len="med"/>
-                    </a:lnB>
-                    <a:solidFill>
-                      <a:srgbClr val="FFFFFF"/>
-                    </a:solidFill>
-                  </a:tcPr>
-                </a:tc>
-                <a:tc>
-                  <a:txBody>
-                    <a:bodyPr/>
-                    <a:lstStyle/>
-                    <a:p>
-                      <a:pPr algn="ctr" indent="0" marL="0">
-                        <a:buNone/>
-                      </a:pPr>
-                      <a:r>
-                        <a:rPr lang="en-US" sz="1000" dirty="0">
-                          <a:solidFill>
-                            <a:srgbClr val="64748B"/>
-                          </a:solidFill>
-                          <a:latin typeface="Arial" pitchFamily="34" charset="0"/>
-                          <a:ea typeface="Arial" pitchFamily="34" charset="-122"/>
-                          <a:cs typeface="Arial" pitchFamily="34" charset="-120"/>
-                        </a:rPr>
-                        <a:t>2026年9月</a:t>
-                      </a:r>
-                      <a:endParaRPr lang="en-US" sz="1000" dirty="0">
-                        <a:latin typeface="Arial" charset="0"/>
-                        <a:ea typeface="Arial" charset="0"/>
-                        <a:cs typeface="Arial" charset="0"/>
-                      </a:endParaRPr>
-                    </a:p>
-                  </a:txBody>
-                  <a:tcPr marL="91440" marR="91440" marT="45720" marB="45720">
-                    <a:lnL w="6350" cap="flat" cmpd="sng" algn="ctr">
-                      <a:solidFill>
-                        <a:srgbClr val="CBD5E1"/>
-                      </a:solidFill>
-                      <a:prstDash val="solid"/>
-                      <a:round/>
-                      <a:headEnd type="none" w="med" len="med"/>
-                      <a:tailEnd type="none" w="med" len="med"/>
-                    </a:lnL>
-                    <a:lnR w="6350" cap="flat" cmpd="sng" algn="ctr">
-                      <a:solidFill>
-                        <a:srgbClr val="CBD5E1"/>
-                      </a:solidFill>
-                      <a:prstDash val="solid"/>
-                      <a:round/>
-                      <a:headEnd type="none" w="med" len="med"/>
-                      <a:tailEnd type="none" w="med" len="med"/>
-                    </a:lnR>
-                    <a:lnT w="6350" cap="flat" cmpd="sng" algn="ctr">
-                      <a:solidFill>
-                        <a:srgbClr val="CBD5E1"/>
-                      </a:solidFill>
-                      <a:prstDash val="solid"/>
-                      <a:round/>
-                      <a:headEnd type="none" w="med" len="med"/>
-                      <a:tailEnd type="none" w="med" len="med"/>
-                    </a:lnT>
-                    <a:lnB w="6350" cap="flat" cmpd="sng" algn="ctr">
-                      <a:solidFill>
-                        <a:srgbClr val="CBD5E1"/>
-                      </a:solidFill>
-                      <a:prstDash val="solid"/>
-                      <a:round/>
-                      <a:headEnd type="none" w="med" len="med"/>
-                      <a:tailEnd type="none" w="med" len="med"/>
-                    </a:lnB>
-                    <a:solidFill>
-                      <a:srgbClr val="FFFFFF"/>
-                    </a:solidFill>
-                  </a:tcPr>
-                </a:tc>
-              </a:tr>
-              <a:tr h="320040">
-                <a:tc>
-                  <a:txBody>
-                    <a:bodyPr/>
-                    <a:lstStyle/>
-                    <a:p>
-                      <a:pPr indent="0" marL="0">
-                        <a:buNone/>
-                      </a:pPr>
-                      <a:r>
-                        <a:rPr lang="en-US" sz="1000" b="1" dirty="0">
-                          <a:solidFill>
-                            <a:srgbClr val="334155"/>
-                          </a:solidFill>
-                          <a:latin typeface="Arial" pitchFamily="34" charset="0"/>
-                          <a:ea typeface="Arial" pitchFamily="34" charset="-122"/>
-                          <a:cs typeface="Arial" pitchFamily="34" charset="-120"/>
-                        </a:rPr>
                         <a:t>口コミ返信率</a:t>
                       </a:r>
                       <a:endParaRPr lang="en-US" sz="1000" dirty="0">
@@ -4405,7 +4131,7 @@
                       <a:tailEnd type="none" w="med" len="med"/>
                     </a:lnB>
                     <a:solidFill>
-                      <a:srgbClr val="E8EFF8"/>
+                      <a:srgbClr val="FFFFFF"/>
                     </a:solidFill>
                   </a:tcPr>
                 </a:tc>
@@ -4473,7 +4199,7 @@
                       <a:tailEnd type="none" w="med" len="med"/>
                     </a:lnB>
                     <a:solidFill>
-                      <a:srgbClr val="E8EFF8"/>
+                      <a:srgbClr val="FFFFFF"/>
                     </a:solidFill>
                   </a:tcPr>
                 </a:tc>
@@ -4541,7 +4267,7 @@
                       <a:tailEnd type="none" w="med" len="med"/>
                     </a:lnB>
                     <a:solidFill>
-                      <a:srgbClr val="E8EFF8"/>
+                      <a:srgbClr val="FFFFFF"/>
                     </a:solidFill>
                   </a:tcPr>
                 </a:tc>
@@ -4609,7 +4335,7 @@
                       <a:tailEnd type="none" w="med" len="med"/>
                     </a:lnB>
                     <a:solidFill>
-                      <a:srgbClr val="E8EFF8"/>
+                      <a:srgbClr val="FFFFFF"/>
                     </a:solidFill>
                   </a:tcPr>
                 </a:tc>
@@ -4679,7 +4405,7 @@
                       <a:tailEnd type="none" w="med" len="med"/>
                     </a:lnB>
                     <a:solidFill>
-                      <a:srgbClr val="FFFFFF"/>
+                      <a:srgbClr val="E8EFF8"/>
                     </a:solidFill>
                   </a:tcPr>
                 </a:tc>
@@ -4747,7 +4473,7 @@
                       <a:tailEnd type="none" w="med" len="med"/>
                     </a:lnB>
                     <a:solidFill>
-                      <a:srgbClr val="FFFFFF"/>
+                      <a:srgbClr val="E8EFF8"/>
                     </a:solidFill>
                   </a:tcPr>
                 </a:tc>
@@ -4815,7 +4541,7 @@
                       <a:tailEnd type="none" w="med" len="med"/>
                     </a:lnB>
                     <a:solidFill>
-                      <a:srgbClr val="FFFFFF"/>
+                      <a:srgbClr val="E8EFF8"/>
                     </a:solidFill>
                   </a:tcPr>
                 </a:tc>
@@ -4883,7 +4609,7 @@
                       <a:tailEnd type="none" w="med" len="med"/>
                     </a:lnB>
                     <a:solidFill>
-                      <a:srgbClr val="FFFFFF"/>
+                      <a:srgbClr val="E8EFF8"/>
                     </a:solidFill>
                   </a:tcPr>
                 </a:tc>
@@ -4900,7 +4626,7 @@
         </p:nvSpPr>
         <p:spPr>
           <a:xfrm>
-            <a:off x="457200" y="3429000"/>
+            <a:off x="457200" y="3108960"/>
             <a:ext cx="8229600" cy="640080"/>
           </a:xfrm>
           <a:prstGeom prst="rect">
@@ -4927,7 +4653,7 @@
         </p:nvSpPr>
         <p:spPr>
           <a:xfrm>
-            <a:off x="457200" y="3429000"/>
+            <a:off x="457200" y="3108960"/>
             <a:ext cx="54864" cy="640080"/>
           </a:xfrm>
           <a:prstGeom prst="rect">
@@ -4947,7 +4673,7 @@
         </p:nvSpPr>
         <p:spPr>
           <a:xfrm>
-            <a:off x="640080" y="3429000"/>
+            <a:off x="640080" y="3108960"/>
             <a:ext cx="7863840" cy="640080"/>
           </a:xfrm>
           <a:prstGeom prst="rect">
@@ -5339,7 +5065,7 @@
                 <a:ea typeface="Arial" pitchFamily="34" charset="-122"/>
                 <a:cs typeface="Arial" pitchFamily="34" charset="-120"/>
               </a:rPr>
-              <a:t>8.13</a:t>
+              <a:t>8.16</a:t>
             </a:r>
             <a:endParaRPr lang="en-US" sz="3200" dirty="0"/>
           </a:p>
@@ -5464,7 +5190,7 @@
                 <a:ea typeface="Arial" pitchFamily="34" charset="-122"/>
                 <a:cs typeface="Arial" pitchFamily="34" charset="-120"/>
               </a:rPr>
-              <a:t>69.4%</a:t>
+              <a:t>69.8%</a:t>
             </a:r>
             <a:endParaRPr lang="en-US" sz="3200" dirty="0"/>
           </a:p>
@@ -5714,7 +5440,7 @@
                 <a:ea typeface="Arial" pitchFamily="34" charset="-122"/>
                 <a:cs typeface="Arial" pitchFamily="34" charset="-120"/>
               </a:rPr>
-              <a:t>62件</a:t>
+              <a:t>63件</a:t>
             </a:r>
             <a:endParaRPr lang="en-US" sz="3200" dirty="0"/>
           </a:p>
@@ -5862,7 +5588,7 @@
                 <a:ea typeface="Arial" pitchFamily="34" charset="-122"/>
                 <a:cs typeface="Arial" pitchFamily="34" charset="-120"/>
               </a:rPr>
-              <a:t>  駅も近いし、部屋もひとりならじゅうぶんな広さです</a:t>
+              <a:t>  清潔感があり、スタッフの対応が良く立地も便利です</a:t>
             </a:r>
             <a:endParaRPr lang="en-US" sz="1100" dirty="0"/>
           </a:p>
@@ -5902,7 +5628,7 @@
                 <a:ea typeface="Arial" pitchFamily="34" charset="-122"/>
                 <a:cs typeface="Arial" pitchFamily="34" charset="-120"/>
               </a:rPr>
-              <a:t>  快適でした</a:t>
+              <a:t>  大浴場は快適でシャワーの水圧も十分です</a:t>
             </a:r>
             <a:endParaRPr lang="en-US" sz="1100" dirty="0"/>
           </a:p>
@@ -5942,7 +5668,7 @@
                 <a:ea typeface="Arial" pitchFamily="34" charset="-122"/>
                 <a:cs typeface="Arial" pitchFamily="34" charset="-120"/>
               </a:rPr>
-              <a:t>  意外とスタッフはおっちょこちょいな感じがします</a:t>
+              <a:t>  清潔感があり、スタッフの対応が良く立地も便利です</a:t>
             </a:r>
             <a:endParaRPr lang="en-US" sz="1100" dirty="0"/>
           </a:p>
@@ -6170,7 +5896,7 @@
                 <a:ea typeface="Arial" pitchFamily="34" charset="-122"/>
                 <a:cs typeface="Arial" pitchFamily="34" charset="-120"/>
               </a:rPr>
-              <a:t>  ユニットバスの水垢などが少し気になりましたが 嫌な匂いなどもなく快適でした ユニットバスの水垢などが少し気になりま...</a:t>
+              <a:t>  大浴場は快適でシャワーの水圧も十分です</a:t>
             </a:r>
             <a:endParaRPr lang="en-US" sz="1100" dirty="0"/>
           </a:p>
@@ -6523,7 +6249,7 @@
                 <a:ea typeface="Arial" pitchFamily="34" charset="-122"/>
                 <a:cs typeface="Arial" pitchFamily="34" charset="-120"/>
               </a:rPr>
-              <a:t>8.13</a:t>
+              <a:t>8.16</a:t>
             </a:r>
             <a:endParaRPr lang="en-US" sz="3200" dirty="0"/>
           </a:p>
@@ -6648,7 +6374,7 @@
                 <a:ea typeface="Arial" pitchFamily="34" charset="-122"/>
                 <a:cs typeface="Arial" pitchFamily="34" charset="-120"/>
               </a:rPr>
-              <a:t>69.4%</a:t>
+              <a:t>69.8%</a:t>
             </a:r>
             <a:endParaRPr lang="en-US" sz="3200" dirty="0"/>
           </a:p>
@@ -6898,7 +6624,7 @@
                 <a:ea typeface="Arial" pitchFamily="34" charset="-122"/>
                 <a:cs typeface="Arial" pitchFamily="34" charset="-120"/>
               </a:rPr>
-              <a:t>62件</a:t>
+              <a:t>63件</a:t>
             </a:r>
             <a:endParaRPr lang="en-US" sz="3200" dirty="0"/>
           </a:p>
@@ -7320,55 +7046,6 @@
                 <a:cs typeface="Arial" pitchFamily="34" charset="-120"/>
               </a:rPr>
               <a:t>じゃらん(8.91)が最高スコア。</a:t>
-            </a:r>
-            <a:endParaRPr lang="en-US" sz="1100" dirty="0"/>
-          </a:p>
-          <a:p>
-            <a:pPr indent="0" marL="0">
-              <a:spcAft>
-                <a:spcPts val="200"/>
-              </a:spcAft>
-              <a:buNone/>
-            </a:pPr>
-            <a:endParaRPr lang="en-US" sz="1100" dirty="0"/>
-          </a:p>
-          <a:p>
-            <a:pPr indent="0" marL="0">
-              <a:spcAft>
-                <a:spcPts val="200"/>
-              </a:spcAft>
-              <a:buNone/>
-            </a:pPr>
-            <a:r>
-              <a:rPr lang="en-US" sz="1100" b="1" dirty="0">
-                <a:solidFill>
-                  <a:srgbClr val="DC2626"/>
-                </a:solidFill>
-                <a:latin typeface="Arial" pitchFamily="34" charset="0"/>
-                <a:ea typeface="Arial" pitchFamily="34" charset="-122"/>
-                <a:cs typeface="Arial" pitchFamily="34" charset="-120"/>
-              </a:rPr>
-              <a:t>改善対象サイト</a:t>
-            </a:r>
-            <a:endParaRPr lang="en-US" sz="1100" dirty="0"/>
-          </a:p>
-          <a:p>
-            <a:pPr indent="0" marL="0">
-              <a:spcAft>
-                <a:spcPts val="200"/>
-              </a:spcAft>
-              <a:buNone/>
-            </a:pPr>
-            <a:r>
-              <a:rPr lang="en-US" sz="900" dirty="0">
-                <a:solidFill>
-                  <a:srgbClr val="64748B"/>
-                </a:solidFill>
-                <a:latin typeface="Arial" pitchFamily="34" charset="0"/>
-                <a:ea typeface="Arial" pitchFamily="34" charset="-122"/>
-                <a:cs typeface="Arial" pitchFamily="34" charset="-120"/>
-              </a:rPr>
-              <a:t>Agoda(7.6)が相対的に低い。口コミ返信の強化が急務</a:t>
             </a:r>
             <a:endParaRPr lang="en-US" sz="1100" dirty="0"/>
           </a:p>
@@ -9177,6 +8854,348 @@
                           <a:ea typeface="Arial" pitchFamily="34" charset="-122"/>
                           <a:cs typeface="Arial" pitchFamily="34" charset="-120"/>
                         </a:rPr>
+                        <a:t>Agoda</a:t>
+                      </a:r>
+                      <a:endParaRPr lang="en-US" sz="900" dirty="0">
+                        <a:latin typeface="Arial" charset="0"/>
+                        <a:ea typeface="Arial" charset="0"/>
+                        <a:cs typeface="Arial" charset="0"/>
+                      </a:endParaRPr>
+                    </a:p>
+                  </a:txBody>
+                  <a:tcPr marL="91440" marR="91440" marT="45720" marB="45720">
+                    <a:lnL w="6350" cap="flat" cmpd="sng" algn="ctr">
+                      <a:solidFill>
+                        <a:srgbClr val="CBD5E1"/>
+                      </a:solidFill>
+                      <a:prstDash val="solid"/>
+                      <a:round/>
+                      <a:headEnd type="none" w="med" len="med"/>
+                      <a:tailEnd type="none" w="med" len="med"/>
+                    </a:lnL>
+                    <a:lnR w="6350" cap="flat" cmpd="sng" algn="ctr">
+                      <a:solidFill>
+                        <a:srgbClr val="CBD5E1"/>
+                      </a:solidFill>
+                      <a:prstDash val="solid"/>
+                      <a:round/>
+                      <a:headEnd type="none" w="med" len="med"/>
+                      <a:tailEnd type="none" w="med" len="med"/>
+                    </a:lnR>
+                    <a:lnT w="6350" cap="flat" cmpd="sng" algn="ctr">
+                      <a:solidFill>
+                        <a:srgbClr val="CBD5E1"/>
+                      </a:solidFill>
+                      <a:prstDash val="solid"/>
+                      <a:round/>
+                      <a:headEnd type="none" w="med" len="med"/>
+                      <a:tailEnd type="none" w="med" len="med"/>
+                    </a:lnT>
+                    <a:lnB w="6350" cap="flat" cmpd="sng" algn="ctr">
+                      <a:solidFill>
+                        <a:srgbClr val="CBD5E1"/>
+                      </a:solidFill>
+                      <a:prstDash val="solid"/>
+                      <a:round/>
+                      <a:headEnd type="none" w="med" len="med"/>
+                      <a:tailEnd type="none" w="med" len="med"/>
+                    </a:lnB>
+                    <a:solidFill>
+                      <a:srgbClr val="E8EFF8"/>
+                    </a:solidFill>
+                  </a:tcPr>
+                </a:tc>
+                <a:tc>
+                  <a:txBody>
+                    <a:bodyPr/>
+                    <a:lstStyle/>
+                    <a:p>
+                      <a:pPr algn="ctr" indent="0" marL="0">
+                        <a:buNone/>
+                      </a:pPr>
+                      <a:r>
+                        <a:rPr lang="en-US" sz="900" dirty="0">
+                          <a:solidFill>
+                            <a:srgbClr val="000000"/>
+                          </a:solidFill>
+                          <a:latin typeface="Arial" pitchFamily="34" charset="0"/>
+                          <a:ea typeface="Arial" pitchFamily="34" charset="-122"/>
+                          <a:cs typeface="Arial" pitchFamily="34" charset="-120"/>
+                        </a:rPr>
+                        <a:t>8</a:t>
+                      </a:r>
+                      <a:endParaRPr lang="en-US" sz="900" dirty="0">
+                        <a:latin typeface="Arial" charset="0"/>
+                        <a:ea typeface="Arial" charset="0"/>
+                        <a:cs typeface="Arial" charset="0"/>
+                      </a:endParaRPr>
+                    </a:p>
+                  </a:txBody>
+                  <a:tcPr marL="91440" marR="91440" marT="45720" marB="45720">
+                    <a:lnL w="6350" cap="flat" cmpd="sng" algn="ctr">
+                      <a:solidFill>
+                        <a:srgbClr val="CBD5E1"/>
+                      </a:solidFill>
+                      <a:prstDash val="solid"/>
+                      <a:round/>
+                      <a:headEnd type="none" w="med" len="med"/>
+                      <a:tailEnd type="none" w="med" len="med"/>
+                    </a:lnL>
+                    <a:lnR w="6350" cap="flat" cmpd="sng" algn="ctr">
+                      <a:solidFill>
+                        <a:srgbClr val="CBD5E1"/>
+                      </a:solidFill>
+                      <a:prstDash val="solid"/>
+                      <a:round/>
+                      <a:headEnd type="none" w="med" len="med"/>
+                      <a:tailEnd type="none" w="med" len="med"/>
+                    </a:lnR>
+                    <a:lnT w="6350" cap="flat" cmpd="sng" algn="ctr">
+                      <a:solidFill>
+                        <a:srgbClr val="CBD5E1"/>
+                      </a:solidFill>
+                      <a:prstDash val="solid"/>
+                      <a:round/>
+                      <a:headEnd type="none" w="med" len="med"/>
+                      <a:tailEnd type="none" w="med" len="med"/>
+                    </a:lnT>
+                    <a:lnB w="6350" cap="flat" cmpd="sng" algn="ctr">
+                      <a:solidFill>
+                        <a:srgbClr val="CBD5E1"/>
+                      </a:solidFill>
+                      <a:prstDash val="solid"/>
+                      <a:round/>
+                      <a:headEnd type="none" w="med" len="med"/>
+                      <a:tailEnd type="none" w="med" len="med"/>
+                    </a:lnB>
+                    <a:solidFill>
+                      <a:srgbClr val="E8EFF8"/>
+                    </a:solidFill>
+                  </a:tcPr>
+                </a:tc>
+                <a:tc>
+                  <a:txBody>
+                    <a:bodyPr/>
+                    <a:lstStyle/>
+                    <a:p>
+                      <a:pPr algn="ctr" indent="0" marL="0">
+                        <a:buNone/>
+                      </a:pPr>
+                      <a:r>
+                        <a:rPr lang="en-US" sz="900" dirty="0">
+                          <a:solidFill>
+                            <a:srgbClr val="000000"/>
+                          </a:solidFill>
+                          <a:latin typeface="Arial" pitchFamily="34" charset="0"/>
+                          <a:ea typeface="Arial" pitchFamily="34" charset="-122"/>
+                          <a:cs typeface="Arial" pitchFamily="34" charset="-120"/>
+                        </a:rPr>
+                        <a:t>7.88</a:t>
+                      </a:r>
+                      <a:endParaRPr lang="en-US" sz="900" dirty="0">
+                        <a:latin typeface="Arial" charset="0"/>
+                        <a:ea typeface="Arial" charset="0"/>
+                        <a:cs typeface="Arial" charset="0"/>
+                      </a:endParaRPr>
+                    </a:p>
+                  </a:txBody>
+                  <a:tcPr marL="91440" marR="91440" marT="45720" marB="45720">
+                    <a:lnL w="6350" cap="flat" cmpd="sng" algn="ctr">
+                      <a:solidFill>
+                        <a:srgbClr val="CBD5E1"/>
+                      </a:solidFill>
+                      <a:prstDash val="solid"/>
+                      <a:round/>
+                      <a:headEnd type="none" w="med" len="med"/>
+                      <a:tailEnd type="none" w="med" len="med"/>
+                    </a:lnL>
+                    <a:lnR w="6350" cap="flat" cmpd="sng" algn="ctr">
+                      <a:solidFill>
+                        <a:srgbClr val="CBD5E1"/>
+                      </a:solidFill>
+                      <a:prstDash val="solid"/>
+                      <a:round/>
+                      <a:headEnd type="none" w="med" len="med"/>
+                      <a:tailEnd type="none" w="med" len="med"/>
+                    </a:lnR>
+                    <a:lnT w="6350" cap="flat" cmpd="sng" algn="ctr">
+                      <a:solidFill>
+                        <a:srgbClr val="CBD5E1"/>
+                      </a:solidFill>
+                      <a:prstDash val="solid"/>
+                      <a:round/>
+                      <a:headEnd type="none" w="med" len="med"/>
+                      <a:tailEnd type="none" w="med" len="med"/>
+                    </a:lnT>
+                    <a:lnB w="6350" cap="flat" cmpd="sng" algn="ctr">
+                      <a:solidFill>
+                        <a:srgbClr val="CBD5E1"/>
+                      </a:solidFill>
+                      <a:prstDash val="solid"/>
+                      <a:round/>
+                      <a:headEnd type="none" w="med" len="med"/>
+                      <a:tailEnd type="none" w="med" len="med"/>
+                    </a:lnB>
+                    <a:solidFill>
+                      <a:srgbClr val="E8EFF8"/>
+                    </a:solidFill>
+                  </a:tcPr>
+                </a:tc>
+                <a:tc>
+                  <a:txBody>
+                    <a:bodyPr/>
+                    <a:lstStyle/>
+                    <a:p>
+                      <a:pPr algn="ctr" indent="0" marL="0">
+                        <a:buNone/>
+                      </a:pPr>
+                      <a:r>
+                        <a:rPr lang="en-US" sz="900" dirty="0">
+                          <a:solidFill>
+                            <a:srgbClr val="000000"/>
+                          </a:solidFill>
+                          <a:latin typeface="Arial" pitchFamily="34" charset="0"/>
+                          <a:ea typeface="Arial" pitchFamily="34" charset="-122"/>
+                          <a:cs typeface="Arial" pitchFamily="34" charset="-120"/>
+                        </a:rPr>
+                        <a:t>/10</a:t>
+                      </a:r>
+                      <a:endParaRPr lang="en-US" sz="900" dirty="0">
+                        <a:latin typeface="Arial" charset="0"/>
+                        <a:ea typeface="Arial" charset="0"/>
+                        <a:cs typeface="Arial" charset="0"/>
+                      </a:endParaRPr>
+                    </a:p>
+                  </a:txBody>
+                  <a:tcPr marL="91440" marR="91440" marT="45720" marB="45720">
+                    <a:lnL w="6350" cap="flat" cmpd="sng" algn="ctr">
+                      <a:solidFill>
+                        <a:srgbClr val="CBD5E1"/>
+                      </a:solidFill>
+                      <a:prstDash val="solid"/>
+                      <a:round/>
+                      <a:headEnd type="none" w="med" len="med"/>
+                      <a:tailEnd type="none" w="med" len="med"/>
+                    </a:lnL>
+                    <a:lnR w="6350" cap="flat" cmpd="sng" algn="ctr">
+                      <a:solidFill>
+                        <a:srgbClr val="CBD5E1"/>
+                      </a:solidFill>
+                      <a:prstDash val="solid"/>
+                      <a:round/>
+                      <a:headEnd type="none" w="med" len="med"/>
+                      <a:tailEnd type="none" w="med" len="med"/>
+                    </a:lnR>
+                    <a:lnT w="6350" cap="flat" cmpd="sng" algn="ctr">
+                      <a:solidFill>
+                        <a:srgbClr val="CBD5E1"/>
+                      </a:solidFill>
+                      <a:prstDash val="solid"/>
+                      <a:round/>
+                      <a:headEnd type="none" w="med" len="med"/>
+                      <a:tailEnd type="none" w="med" len="med"/>
+                    </a:lnT>
+                    <a:lnB w="6350" cap="flat" cmpd="sng" algn="ctr">
+                      <a:solidFill>
+                        <a:srgbClr val="CBD5E1"/>
+                      </a:solidFill>
+                      <a:prstDash val="solid"/>
+                      <a:round/>
+                      <a:headEnd type="none" w="med" len="med"/>
+                      <a:tailEnd type="none" w="med" len="med"/>
+                    </a:lnB>
+                    <a:solidFill>
+                      <a:srgbClr val="E8EFF8"/>
+                    </a:solidFill>
+                  </a:tcPr>
+                </a:tc>
+                <a:tc>
+                  <a:txBody>
+                    <a:bodyPr/>
+                    <a:lstStyle/>
+                    <a:p>
+                      <a:pPr algn="ctr" indent="0" marL="0">
+                        <a:buNone/>
+                      </a:pPr>
+                      <a:r>
+                        <a:rPr lang="en-US" sz="900" dirty="0">
+                          <a:solidFill>
+                            <a:srgbClr val="000000"/>
+                          </a:solidFill>
+                          <a:latin typeface="Arial" pitchFamily="34" charset="0"/>
+                          <a:ea typeface="Arial" pitchFamily="34" charset="-122"/>
+                          <a:cs typeface="Arial" pitchFamily="34" charset="-120"/>
+                        </a:rPr>
+                        <a:t>7.88</a:t>
+                      </a:r>
+                      <a:endParaRPr lang="en-US" sz="900" dirty="0">
+                        <a:latin typeface="Arial" charset="0"/>
+                        <a:ea typeface="Arial" charset="0"/>
+                        <a:cs typeface="Arial" charset="0"/>
+                      </a:endParaRPr>
+                    </a:p>
+                  </a:txBody>
+                  <a:tcPr marL="91440" marR="91440" marT="45720" marB="45720">
+                    <a:lnL w="6350" cap="flat" cmpd="sng" algn="ctr">
+                      <a:solidFill>
+                        <a:srgbClr val="CBD5E1"/>
+                      </a:solidFill>
+                      <a:prstDash val="solid"/>
+                      <a:round/>
+                      <a:headEnd type="none" w="med" len="med"/>
+                      <a:tailEnd type="none" w="med" len="med"/>
+                    </a:lnL>
+                    <a:lnR w="6350" cap="flat" cmpd="sng" algn="ctr">
+                      <a:solidFill>
+                        <a:srgbClr val="CBD5E1"/>
+                      </a:solidFill>
+                      <a:prstDash val="solid"/>
+                      <a:round/>
+                      <a:headEnd type="none" w="med" len="med"/>
+                      <a:tailEnd type="none" w="med" len="med"/>
+                    </a:lnR>
+                    <a:lnT w="6350" cap="flat" cmpd="sng" algn="ctr">
+                      <a:solidFill>
+                        <a:srgbClr val="CBD5E1"/>
+                      </a:solidFill>
+                      <a:prstDash val="solid"/>
+                      <a:round/>
+                      <a:headEnd type="none" w="med" len="med"/>
+                      <a:tailEnd type="none" w="med" len="med"/>
+                    </a:lnT>
+                    <a:lnB w="6350" cap="flat" cmpd="sng" algn="ctr">
+                      <a:solidFill>
+                        <a:srgbClr val="CBD5E1"/>
+                      </a:solidFill>
+                      <a:prstDash val="solid"/>
+                      <a:round/>
+                      <a:headEnd type="none" w="med" len="med"/>
+                      <a:tailEnd type="none" w="med" len="med"/>
+                    </a:lnB>
+                    <a:solidFill>
+                      <a:srgbClr val="E8EFF8"/>
+                    </a:solidFill>
+                  </a:tcPr>
+                </a:tc>
+              </a:tr>
+              <a:tr h="201168">
+                <a:tc>
+                  <a:txBody>
+                    <a:bodyPr/>
+                    <a:lstStyle/>
+                    <a:p>
+                      <a:pPr algn="ctr" indent="0" marL="0">
+                        <a:buNone/>
+                      </a:pPr>
+                      <a:r>
+                        <a:rPr lang="en-US" sz="900" dirty="0">
+                          <a:solidFill>
+                            <a:srgbClr val="000000"/>
+                          </a:solidFill>
+                          <a:latin typeface="Arial" pitchFamily="34" charset="0"/>
+                          <a:ea typeface="Arial" pitchFamily="34" charset="-122"/>
+                          <a:cs typeface="Arial" pitchFamily="34" charset="-120"/>
+                        </a:rPr>
                         <a:t>楽天トラベル</a:t>
                       </a:r>
                       <a:endParaRPr lang="en-US" sz="900" dirty="0">
@@ -9224,7 +9243,7 @@
                       <a:tailEnd type="none" w="med" len="med"/>
                     </a:lnB>
                     <a:solidFill>
-                      <a:srgbClr val="E8EFF8"/>
+                      <a:srgbClr val="FFFFFF"/>
                     </a:solidFill>
                   </a:tcPr>
                 </a:tc>
@@ -9292,7 +9311,7 @@
                       <a:tailEnd type="none" w="med" len="med"/>
                     </a:lnB>
                     <a:solidFill>
-                      <a:srgbClr val="E8EFF8"/>
+                      <a:srgbClr val="FFFFFF"/>
                     </a:solidFill>
                   </a:tcPr>
                 </a:tc>
@@ -9360,7 +9379,7 @@
                       <a:tailEnd type="none" w="med" len="med"/>
                     </a:lnB>
                     <a:solidFill>
-                      <a:srgbClr val="E8EFF8"/>
+                      <a:srgbClr val="FFFFFF"/>
                     </a:solidFill>
                   </a:tcPr>
                 </a:tc>
@@ -9428,7 +9447,7 @@
                       <a:tailEnd type="none" w="med" len="med"/>
                     </a:lnB>
                     <a:solidFill>
-                      <a:srgbClr val="E8EFF8"/>
+                      <a:srgbClr val="FFFFFF"/>
                     </a:solidFill>
                   </a:tcPr>
                 </a:tc>
@@ -9450,348 +9469,6 @@
                           <a:cs typeface="Arial" pitchFamily="34" charset="-120"/>
                         </a:rPr>
                         <a:t>7.71</a:t>
-                      </a:r>
-                      <a:endParaRPr lang="en-US" sz="900" dirty="0">
-                        <a:latin typeface="Arial" charset="0"/>
-                        <a:ea typeface="Arial" charset="0"/>
-                        <a:cs typeface="Arial" charset="0"/>
-                      </a:endParaRPr>
-                    </a:p>
-                  </a:txBody>
-                  <a:tcPr marL="91440" marR="91440" marT="45720" marB="45720">
-                    <a:lnL w="6350" cap="flat" cmpd="sng" algn="ctr">
-                      <a:solidFill>
-                        <a:srgbClr val="CBD5E1"/>
-                      </a:solidFill>
-                      <a:prstDash val="solid"/>
-                      <a:round/>
-                      <a:headEnd type="none" w="med" len="med"/>
-                      <a:tailEnd type="none" w="med" len="med"/>
-                    </a:lnL>
-                    <a:lnR w="6350" cap="flat" cmpd="sng" algn="ctr">
-                      <a:solidFill>
-                        <a:srgbClr val="CBD5E1"/>
-                      </a:solidFill>
-                      <a:prstDash val="solid"/>
-                      <a:round/>
-                      <a:headEnd type="none" w="med" len="med"/>
-                      <a:tailEnd type="none" w="med" len="med"/>
-                    </a:lnR>
-                    <a:lnT w="6350" cap="flat" cmpd="sng" algn="ctr">
-                      <a:solidFill>
-                        <a:srgbClr val="CBD5E1"/>
-                      </a:solidFill>
-                      <a:prstDash val="solid"/>
-                      <a:round/>
-                      <a:headEnd type="none" w="med" len="med"/>
-                      <a:tailEnd type="none" w="med" len="med"/>
-                    </a:lnT>
-                    <a:lnB w="6350" cap="flat" cmpd="sng" algn="ctr">
-                      <a:solidFill>
-                        <a:srgbClr val="CBD5E1"/>
-                      </a:solidFill>
-                      <a:prstDash val="solid"/>
-                      <a:round/>
-                      <a:headEnd type="none" w="med" len="med"/>
-                      <a:tailEnd type="none" w="med" len="med"/>
-                    </a:lnB>
-                    <a:solidFill>
-                      <a:srgbClr val="E8EFF8"/>
-                    </a:solidFill>
-                  </a:tcPr>
-                </a:tc>
-              </a:tr>
-              <a:tr h="201168">
-                <a:tc>
-                  <a:txBody>
-                    <a:bodyPr/>
-                    <a:lstStyle/>
-                    <a:p>
-                      <a:pPr algn="ctr" indent="0" marL="0">
-                        <a:buNone/>
-                      </a:pPr>
-                      <a:r>
-                        <a:rPr lang="en-US" sz="900" dirty="0">
-                          <a:solidFill>
-                            <a:srgbClr val="000000"/>
-                          </a:solidFill>
-                          <a:latin typeface="Arial" pitchFamily="34" charset="0"/>
-                          <a:ea typeface="Arial" pitchFamily="34" charset="-122"/>
-                          <a:cs typeface="Arial" pitchFamily="34" charset="-120"/>
-                        </a:rPr>
-                        <a:t>Agoda</a:t>
-                      </a:r>
-                      <a:endParaRPr lang="en-US" sz="900" dirty="0">
-                        <a:latin typeface="Arial" charset="0"/>
-                        <a:ea typeface="Arial" charset="0"/>
-                        <a:cs typeface="Arial" charset="0"/>
-                      </a:endParaRPr>
-                    </a:p>
-                  </a:txBody>
-                  <a:tcPr marL="91440" marR="91440" marT="45720" marB="45720">
-                    <a:lnL w="6350" cap="flat" cmpd="sng" algn="ctr">
-                      <a:solidFill>
-                        <a:srgbClr val="CBD5E1"/>
-                      </a:solidFill>
-                      <a:prstDash val="solid"/>
-                      <a:round/>
-                      <a:headEnd type="none" w="med" len="med"/>
-                      <a:tailEnd type="none" w="med" len="med"/>
-                    </a:lnL>
-                    <a:lnR w="6350" cap="flat" cmpd="sng" algn="ctr">
-                      <a:solidFill>
-                        <a:srgbClr val="CBD5E1"/>
-                      </a:solidFill>
-                      <a:prstDash val="solid"/>
-                      <a:round/>
-                      <a:headEnd type="none" w="med" len="med"/>
-                      <a:tailEnd type="none" w="med" len="med"/>
-                    </a:lnR>
-                    <a:lnT w="6350" cap="flat" cmpd="sng" algn="ctr">
-                      <a:solidFill>
-                        <a:srgbClr val="CBD5E1"/>
-                      </a:solidFill>
-                      <a:prstDash val="solid"/>
-                      <a:round/>
-                      <a:headEnd type="none" w="med" len="med"/>
-                      <a:tailEnd type="none" w="med" len="med"/>
-                    </a:lnT>
-                    <a:lnB w="6350" cap="flat" cmpd="sng" algn="ctr">
-                      <a:solidFill>
-                        <a:srgbClr val="CBD5E1"/>
-                      </a:solidFill>
-                      <a:prstDash val="solid"/>
-                      <a:round/>
-                      <a:headEnd type="none" w="med" len="med"/>
-                      <a:tailEnd type="none" w="med" len="med"/>
-                    </a:lnB>
-                    <a:solidFill>
-                      <a:srgbClr val="FFFFFF"/>
-                    </a:solidFill>
-                  </a:tcPr>
-                </a:tc>
-                <a:tc>
-                  <a:txBody>
-                    <a:bodyPr/>
-                    <a:lstStyle/>
-                    <a:p>
-                      <a:pPr algn="ctr" indent="0" marL="0">
-                        <a:buNone/>
-                      </a:pPr>
-                      <a:r>
-                        <a:rPr lang="en-US" sz="900" dirty="0">
-                          <a:solidFill>
-                            <a:srgbClr val="000000"/>
-                          </a:solidFill>
-                          <a:latin typeface="Arial" pitchFamily="34" charset="0"/>
-                          <a:ea typeface="Arial" pitchFamily="34" charset="-122"/>
-                          <a:cs typeface="Arial" pitchFamily="34" charset="-120"/>
-                        </a:rPr>
-                        <a:t>7</a:t>
-                      </a:r>
-                      <a:endParaRPr lang="en-US" sz="900" dirty="0">
-                        <a:latin typeface="Arial" charset="0"/>
-                        <a:ea typeface="Arial" charset="0"/>
-                        <a:cs typeface="Arial" charset="0"/>
-                      </a:endParaRPr>
-                    </a:p>
-                  </a:txBody>
-                  <a:tcPr marL="91440" marR="91440" marT="45720" marB="45720">
-                    <a:lnL w="6350" cap="flat" cmpd="sng" algn="ctr">
-                      <a:solidFill>
-                        <a:srgbClr val="CBD5E1"/>
-                      </a:solidFill>
-                      <a:prstDash val="solid"/>
-                      <a:round/>
-                      <a:headEnd type="none" w="med" len="med"/>
-                      <a:tailEnd type="none" w="med" len="med"/>
-                    </a:lnL>
-                    <a:lnR w="6350" cap="flat" cmpd="sng" algn="ctr">
-                      <a:solidFill>
-                        <a:srgbClr val="CBD5E1"/>
-                      </a:solidFill>
-                      <a:prstDash val="solid"/>
-                      <a:round/>
-                      <a:headEnd type="none" w="med" len="med"/>
-                      <a:tailEnd type="none" w="med" len="med"/>
-                    </a:lnR>
-                    <a:lnT w="6350" cap="flat" cmpd="sng" algn="ctr">
-                      <a:solidFill>
-                        <a:srgbClr val="CBD5E1"/>
-                      </a:solidFill>
-                      <a:prstDash val="solid"/>
-                      <a:round/>
-                      <a:headEnd type="none" w="med" len="med"/>
-                      <a:tailEnd type="none" w="med" len="med"/>
-                    </a:lnT>
-                    <a:lnB w="6350" cap="flat" cmpd="sng" algn="ctr">
-                      <a:solidFill>
-                        <a:srgbClr val="CBD5E1"/>
-                      </a:solidFill>
-                      <a:prstDash val="solid"/>
-                      <a:round/>
-                      <a:headEnd type="none" w="med" len="med"/>
-                      <a:tailEnd type="none" w="med" len="med"/>
-                    </a:lnB>
-                    <a:solidFill>
-                      <a:srgbClr val="FFFFFF"/>
-                    </a:solidFill>
-                  </a:tcPr>
-                </a:tc>
-                <a:tc>
-                  <a:txBody>
-                    <a:bodyPr/>
-                    <a:lstStyle/>
-                    <a:p>
-                      <a:pPr algn="ctr" indent="0" marL="0">
-                        <a:buNone/>
-                      </a:pPr>
-                      <a:r>
-                        <a:rPr lang="en-US" sz="900" dirty="0">
-                          <a:solidFill>
-                            <a:srgbClr val="000000"/>
-                          </a:solidFill>
-                          <a:latin typeface="Arial" pitchFamily="34" charset="0"/>
-                          <a:ea typeface="Arial" pitchFamily="34" charset="-122"/>
-                          <a:cs typeface="Arial" pitchFamily="34" charset="-120"/>
-                        </a:rPr>
-                        <a:t>7.57</a:t>
-                      </a:r>
-                      <a:endParaRPr lang="en-US" sz="900" dirty="0">
-                        <a:latin typeface="Arial" charset="0"/>
-                        <a:ea typeface="Arial" charset="0"/>
-                        <a:cs typeface="Arial" charset="0"/>
-                      </a:endParaRPr>
-                    </a:p>
-                  </a:txBody>
-                  <a:tcPr marL="91440" marR="91440" marT="45720" marB="45720">
-                    <a:lnL w="6350" cap="flat" cmpd="sng" algn="ctr">
-                      <a:solidFill>
-                        <a:srgbClr val="CBD5E1"/>
-                      </a:solidFill>
-                      <a:prstDash val="solid"/>
-                      <a:round/>
-                      <a:headEnd type="none" w="med" len="med"/>
-                      <a:tailEnd type="none" w="med" len="med"/>
-                    </a:lnL>
-                    <a:lnR w="6350" cap="flat" cmpd="sng" algn="ctr">
-                      <a:solidFill>
-                        <a:srgbClr val="CBD5E1"/>
-                      </a:solidFill>
-                      <a:prstDash val="solid"/>
-                      <a:round/>
-                      <a:headEnd type="none" w="med" len="med"/>
-                      <a:tailEnd type="none" w="med" len="med"/>
-                    </a:lnR>
-                    <a:lnT w="6350" cap="flat" cmpd="sng" algn="ctr">
-                      <a:solidFill>
-                        <a:srgbClr val="CBD5E1"/>
-                      </a:solidFill>
-                      <a:prstDash val="solid"/>
-                      <a:round/>
-                      <a:headEnd type="none" w="med" len="med"/>
-                      <a:tailEnd type="none" w="med" len="med"/>
-                    </a:lnT>
-                    <a:lnB w="6350" cap="flat" cmpd="sng" algn="ctr">
-                      <a:solidFill>
-                        <a:srgbClr val="CBD5E1"/>
-                      </a:solidFill>
-                      <a:prstDash val="solid"/>
-                      <a:round/>
-                      <a:headEnd type="none" w="med" len="med"/>
-                      <a:tailEnd type="none" w="med" len="med"/>
-                    </a:lnB>
-                    <a:solidFill>
-                      <a:srgbClr val="FFFFFF"/>
-                    </a:solidFill>
-                  </a:tcPr>
-                </a:tc>
-                <a:tc>
-                  <a:txBody>
-                    <a:bodyPr/>
-                    <a:lstStyle/>
-                    <a:p>
-                      <a:pPr algn="ctr" indent="0" marL="0">
-                        <a:buNone/>
-                      </a:pPr>
-                      <a:r>
-                        <a:rPr lang="en-US" sz="900" dirty="0">
-                          <a:solidFill>
-                            <a:srgbClr val="000000"/>
-                          </a:solidFill>
-                          <a:latin typeface="Arial" pitchFamily="34" charset="0"/>
-                          <a:ea typeface="Arial" pitchFamily="34" charset="-122"/>
-                          <a:cs typeface="Arial" pitchFamily="34" charset="-120"/>
-                        </a:rPr>
-                        <a:t>/10</a:t>
-                      </a:r>
-                      <a:endParaRPr lang="en-US" sz="900" dirty="0">
-                        <a:latin typeface="Arial" charset="0"/>
-                        <a:ea typeface="Arial" charset="0"/>
-                        <a:cs typeface="Arial" charset="0"/>
-                      </a:endParaRPr>
-                    </a:p>
-                  </a:txBody>
-                  <a:tcPr marL="91440" marR="91440" marT="45720" marB="45720">
-                    <a:lnL w="6350" cap="flat" cmpd="sng" algn="ctr">
-                      <a:solidFill>
-                        <a:srgbClr val="CBD5E1"/>
-                      </a:solidFill>
-                      <a:prstDash val="solid"/>
-                      <a:round/>
-                      <a:headEnd type="none" w="med" len="med"/>
-                      <a:tailEnd type="none" w="med" len="med"/>
-                    </a:lnL>
-                    <a:lnR w="6350" cap="flat" cmpd="sng" algn="ctr">
-                      <a:solidFill>
-                        <a:srgbClr val="CBD5E1"/>
-                      </a:solidFill>
-                      <a:prstDash val="solid"/>
-                      <a:round/>
-                      <a:headEnd type="none" w="med" len="med"/>
-                      <a:tailEnd type="none" w="med" len="med"/>
-                    </a:lnR>
-                    <a:lnT w="6350" cap="flat" cmpd="sng" algn="ctr">
-                      <a:solidFill>
-                        <a:srgbClr val="CBD5E1"/>
-                      </a:solidFill>
-                      <a:prstDash val="solid"/>
-                      <a:round/>
-                      <a:headEnd type="none" w="med" len="med"/>
-                      <a:tailEnd type="none" w="med" len="med"/>
-                    </a:lnT>
-                    <a:lnB w="6350" cap="flat" cmpd="sng" algn="ctr">
-                      <a:solidFill>
-                        <a:srgbClr val="CBD5E1"/>
-                      </a:solidFill>
-                      <a:prstDash val="solid"/>
-                      <a:round/>
-                      <a:headEnd type="none" w="med" len="med"/>
-                      <a:tailEnd type="none" w="med" len="med"/>
-                    </a:lnB>
-                    <a:solidFill>
-                      <a:srgbClr val="FFFFFF"/>
-                    </a:solidFill>
-                  </a:tcPr>
-                </a:tc>
-                <a:tc>
-                  <a:txBody>
-                    <a:bodyPr/>
-                    <a:lstStyle/>
-                    <a:p>
-                      <a:pPr algn="ctr" indent="0" marL="0">
-                        <a:buNone/>
-                      </a:pPr>
-                      <a:r>
-                        <a:rPr lang="en-US" sz="900" dirty="0">
-                          <a:solidFill>
-                            <a:srgbClr val="000000"/>
-                          </a:solidFill>
-                          <a:latin typeface="Arial" pitchFamily="34" charset="0"/>
-                          <a:ea typeface="Arial" pitchFamily="34" charset="-122"/>
-                          <a:cs typeface="Arial" pitchFamily="34" charset="-120"/>
-                        </a:rPr>
-                        <a:t>7.57</a:t>
                       </a:r>
                       <a:endParaRPr lang="en-US" sz="900" dirty="0">
                         <a:latin typeface="Arial" charset="0"/>
@@ -10199,7 +9876,7 @@
                 <a:ea typeface="Arial" pitchFamily="34" charset="-122"/>
                 <a:cs typeface="Arial" pitchFamily="34" charset="-120"/>
               </a:rPr>
-              <a:t>43件（69.4%）</a:t>
+              <a:t>44件（69.8%）</a:t>
             </a:r>
             <a:endParaRPr lang="en-US" sz="1100" dirty="0"/>
           </a:p>
@@ -10297,7 +9974,7 @@
                 <a:ea typeface="Arial" pitchFamily="34" charset="-122"/>
                 <a:cs typeface="Arial" pitchFamily="34" charset="-120"/>
               </a:rPr>
-              <a:t>18件（29.0%）</a:t>
+              <a:t>18件（28.6%）</a:t>
             </a:r>
             <a:endParaRPr lang="en-US" sz="1100" dirty="0"/>
           </a:p>
@@ -10729,7 +10406,7 @@
                 <a:ea typeface="Arial" pitchFamily="34" charset="-122"/>
                 <a:cs typeface="Arial" pitchFamily="34" charset="-120"/>
               </a:rPr>
-              <a:t>10件+</a:t>
+              <a:t>20件+</a:t>
             </a:r>
             <a:endParaRPr lang="en-US" sz="900" dirty="0"/>
           </a:p>
@@ -10807,7 +10484,7 @@
                 <a:ea typeface="Arial" pitchFamily="34" charset="-122"/>
                 <a:cs typeface="Arial" pitchFamily="34" charset="-120"/>
               </a:rPr>
-              <a:t>駅も近いし、部屋もひとりならじゅうぶんな広さです</a:t>
+              <a:t>清潔感があり、スタッフの対応が良く立地も便利です</a:t>
             </a:r>
             <a:endParaRPr lang="en-US" sz="900" dirty="0"/>
           </a:p>
@@ -10846,7 +10523,7 @@
                 <a:ea typeface="Arial" pitchFamily="34" charset="-122"/>
                 <a:cs typeface="Arial" pitchFamily="34" charset="-120"/>
               </a:rPr>
-              <a:t>「駅近で、近くに飲食店がいろいろあり立地は申し分ないです」</a:t>
+              <a:t>「駅も近いし、部屋もひとりならじゅうぶんな広さです」</a:t>
             </a:r>
             <a:endParaRPr lang="en-US" sz="900" dirty="0"/>
           </a:p>
@@ -11030,7 +10707,7 @@
                 <a:ea typeface="Arial" pitchFamily="34" charset="-122"/>
                 <a:cs typeface="Arial" pitchFamily="34" charset="-120"/>
               </a:rPr>
-              <a:t>快適でした</a:t>
+              <a:t>大浴場は快適でシャワーの水圧も十分です</a:t>
             </a:r>
             <a:endParaRPr lang="en-US" sz="900" dirty="0"/>
           </a:p>
@@ -11069,7 +10746,7 @@
                 <a:ea typeface="Arial" pitchFamily="34" charset="-122"/>
                 <a:cs typeface="Arial" pitchFamily="34" charset="-120"/>
               </a:rPr>
-              <a:t>「Clean room with ample amenities for a solo traveller, alt...」</a:t>
+              <a:t>「快適でした」</a:t>
             </a:r>
             <a:endParaRPr lang="en-US" sz="900" dirty="0"/>
           </a:p>
@@ -11253,7 +10930,7 @@
                 <a:ea typeface="Arial" pitchFamily="34" charset="-122"/>
                 <a:cs typeface="Arial" pitchFamily="34" charset="-120"/>
               </a:rPr>
-              <a:t>意外とスタッフはおっちょこちょいな感じがします</a:t>
+              <a:t>清潔感があり、スタッフの対応が良く立地も便利です</a:t>
             </a:r>
             <a:endParaRPr lang="en-US" sz="900" dirty="0"/>
           </a:p>
@@ -11292,7 +10969,7 @@
                 <a:ea typeface="Arial" pitchFamily="34" charset="-122"/>
                 <a:cs typeface="Arial" pitchFamily="34" charset="-120"/>
               </a:rPr>
-              <a:t>「フロントにてカードキーと大浴場専用カードキーを交換とのこと」</a:t>
+              <a:t>「意外とスタッフはおっちょこちょいな感じがします」</a:t>
             </a:r>
             <a:endParaRPr lang="en-US" sz="900" dirty="0"/>
           </a:p>
@@ -11476,7 +11153,7 @@
                 <a:ea typeface="Arial" pitchFamily="34" charset="-122"/>
                 <a:cs typeface="Arial" pitchFamily="34" charset="-120"/>
               </a:rPr>
-              <a:t>意外と新しいホテルで凄く綺麗で良かったです(*^^*)  大浴場もあり良いのですが…風呂が熱すぎる</a:t>
+              <a:t>清潔感があり、スタッフの対応が良く立地も便利です</a:t>
             </a:r>
             <a:endParaRPr lang="en-US" sz="900" dirty="0"/>
           </a:p>
@@ -11515,7 +11192,7 @@
                 <a:ea typeface="Arial" pitchFamily="34" charset="-122"/>
                 <a:cs typeface="Arial" pitchFamily="34" charset="-120"/>
               </a:rPr>
-              <a:t>「Clean room with ample amenities for a solo traveller, alt...」</a:t>
+              <a:t>「意外と新しいホテルで凄く綺麗で良かったです(*^^*)  大浴場もあり良いのですが…風呂が熱すぎる」</a:t>
             </a:r>
             <a:endParaRPr lang="en-US" sz="900" dirty="0"/>
           </a:p>
@@ -13199,7 +12876,7 @@
                           <a:ea typeface="Arial" pitchFamily="34" charset="-122"/>
                           <a:cs typeface="Arial" pitchFamily="34" charset="-120"/>
                         </a:rPr>
-                        <a:t>ユニットバスの水垢などが少し気になりましたが 嫌な匂いなどもなく快適でした ユニットバスの水垢などが少し気になりま...</a:t>
+                        <a:t>大浴場は快適でシャワーの水圧も十分です</a:t>
                       </a:r>
                       <a:endParaRPr lang="en-US" sz="900" dirty="0">
                         <a:latin typeface="Arial" charset="0"/>
@@ -13267,7 +12944,7 @@
                           <a:ea typeface="Arial" pitchFamily="34" charset="-122"/>
                           <a:cs typeface="Arial" pitchFamily="34" charset="-120"/>
                         </a:rPr>
-                        <a:t>4件</a:t>
+                        <a:t>5件</a:t>
                       </a:r>
                       <a:endParaRPr lang="en-US" sz="900" dirty="0">
                         <a:latin typeface="Arial" charset="0"/>

--- a/納品レポート/ホテル別レポート/apa_sagamihara_口コミ分析レポート.pptx
+++ b/納品レポート/ホテル別レポート/apa_sagamihara_口コミ分析レポート.pptx
@@ -217,7 +217,7 @@
                   <c:v>8.67</c:v>
                 </c:pt>
                 <c:pt idx="3">
-                  <c:v>7.95</c:v>
+                  <c:v>8</c:v>
                 </c:pt>
                 <c:pt idx="4">
                   <c:v>7.88</c:v>
@@ -566,7 +566,7 @@
               <c:numCache>
                 <c:ptCount val="3"/>
                 <c:pt idx="0">
-                  <c:v>44</c:v>
+                  <c:v>45</c:v>
                 </c:pt>
                 <c:pt idx="1">
                   <c:v>18</c:v>
@@ -798,7 +798,7 @@
                   <c:v>20</c:v>
                 </c:pt>
                 <c:pt idx="1">
-                  <c:v>4</c:v>
+                  <c:v>5</c:v>
                 </c:pt>
                 <c:pt idx="2">
                   <c:v>20</c:v>
@@ -2764,7 +2764,7 @@
                 <a:ea typeface="Arial" pitchFamily="34" charset="-122"/>
                 <a:cs typeface="Arial" pitchFamily="34" charset="-120"/>
               </a:rPr>
-              <a:t>レビュー総数：63件（6サイト）</a:t>
+              <a:t>レビュー総数：64件（6サイト）</a:t>
             </a:r>
             <a:endParaRPr lang="en-US" sz="1000" dirty="0"/>
           </a:p>
@@ -2784,7 +2784,7 @@
                 <a:ea typeface="Arial" pitchFamily="34" charset="-122"/>
                 <a:cs typeface="Arial" pitchFamily="34" charset="-120"/>
               </a:rPr>
-              <a:t>作成日：2026年3月25日</a:t>
+              <a:t>作成日：2026年3月26日</a:t>
             </a:r>
             <a:endParaRPr lang="en-US" sz="1000" dirty="0"/>
           </a:p>
@@ -3330,7 +3330,7 @@
                           <a:ea typeface="Arial" pitchFamily="34" charset="-122"/>
                           <a:cs typeface="Arial" pitchFamily="34" charset="-120"/>
                         </a:rPr>
-                        <a:t>8.16点</a:t>
+                        <a:t>8.17点</a:t>
                       </a:r>
                       <a:endParaRPr lang="en-US" sz="1000" dirty="0">
                         <a:latin typeface="Arial" charset="0"/>
@@ -3604,7 +3604,7 @@
                           <a:ea typeface="Arial" pitchFamily="34" charset="-122"/>
                           <a:cs typeface="Arial" pitchFamily="34" charset="-120"/>
                         </a:rPr>
-                        <a:t>69.8%</a:t>
+                        <a:t>70.3%</a:t>
                       </a:r>
                       <a:endParaRPr lang="en-US" sz="1000" dirty="0">
                         <a:latin typeface="Arial" charset="0"/>
@@ -3672,7 +3672,7 @@
                           <a:ea typeface="Arial" pitchFamily="34" charset="-122"/>
                           <a:cs typeface="Arial" pitchFamily="34" charset="-120"/>
                         </a:rPr>
-                        <a:t>80%以上</a:t>
+                        <a:t>75%以上</a:t>
                       </a:r>
                       <a:endParaRPr lang="en-US" sz="1000" dirty="0">
                         <a:latin typeface="Arial" charset="0"/>
@@ -5065,7 +5065,7 @@
                 <a:ea typeface="Arial" pitchFamily="34" charset="-122"/>
                 <a:cs typeface="Arial" pitchFamily="34" charset="-120"/>
               </a:rPr>
-              <a:t>8.16</a:t>
+              <a:t>8.17</a:t>
             </a:r>
             <a:endParaRPr lang="en-US" sz="3200" dirty="0"/>
           </a:p>
@@ -5190,7 +5190,7 @@
                 <a:ea typeface="Arial" pitchFamily="34" charset="-122"/>
                 <a:cs typeface="Arial" pitchFamily="34" charset="-120"/>
               </a:rPr>
-              <a:t>69.8%</a:t>
+              <a:t>70.3%</a:t>
             </a:r>
             <a:endParaRPr lang="en-US" sz="3200" dirty="0"/>
           </a:p>
@@ -5440,7 +5440,7 @@
                 <a:ea typeface="Arial" pitchFamily="34" charset="-122"/>
                 <a:cs typeface="Arial" pitchFamily="34" charset="-120"/>
               </a:rPr>
-              <a:t>63件</a:t>
+              <a:t>64件</a:t>
             </a:r>
             <a:endParaRPr lang="en-US" sz="3200" dirty="0"/>
           </a:p>
@@ -6249,7 +6249,7 @@
                 <a:ea typeface="Arial" pitchFamily="34" charset="-122"/>
                 <a:cs typeface="Arial" pitchFamily="34" charset="-120"/>
               </a:rPr>
-              <a:t>8.16</a:t>
+              <a:t>8.17</a:t>
             </a:r>
             <a:endParaRPr lang="en-US" sz="3200" dirty="0"/>
           </a:p>
@@ -6374,7 +6374,7 @@
                 <a:ea typeface="Arial" pitchFamily="34" charset="-122"/>
                 <a:cs typeface="Arial" pitchFamily="34" charset="-120"/>
               </a:rPr>
-              <a:t>69.8%</a:t>
+              <a:t>70.3%</a:t>
             </a:r>
             <a:endParaRPr lang="en-US" sz="3200" dirty="0"/>
           </a:p>
@@ -6624,7 +6624,7 @@
                 <a:ea typeface="Arial" pitchFamily="34" charset="-122"/>
                 <a:cs typeface="Arial" pitchFamily="34" charset="-120"/>
               </a:rPr>
-              <a:t>63件</a:t>
+              <a:t>64件</a:t>
             </a:r>
             <a:endParaRPr lang="en-US" sz="3200" dirty="0"/>
           </a:p>
@@ -8580,7 +8580,7 @@
                           <a:ea typeface="Arial" pitchFamily="34" charset="-122"/>
                           <a:cs typeface="Arial" pitchFamily="34" charset="-120"/>
                         </a:rPr>
-                        <a:t>21</a:t>
+                        <a:t>22</a:t>
                       </a:r>
                       <a:endParaRPr lang="en-US" sz="900" dirty="0">
                         <a:latin typeface="Arial" charset="0"/>
@@ -8648,7 +8648,7 @@
                           <a:ea typeface="Arial" pitchFamily="34" charset="-122"/>
                           <a:cs typeface="Arial" pitchFamily="34" charset="-120"/>
                         </a:rPr>
-                        <a:t>7.95</a:t>
+                        <a:t>8</a:t>
                       </a:r>
                       <a:endParaRPr lang="en-US" sz="900" dirty="0">
                         <a:latin typeface="Arial" charset="0"/>
@@ -8784,7 +8784,7 @@
                           <a:ea typeface="Arial" pitchFamily="34" charset="-122"/>
                           <a:cs typeface="Arial" pitchFamily="34" charset="-120"/>
                         </a:rPr>
-                        <a:t>7.95</a:t>
+                        <a:t>8</a:t>
                       </a:r>
                       <a:endParaRPr lang="en-US" sz="900" dirty="0">
                         <a:latin typeface="Arial" charset="0"/>
@@ -9876,7 +9876,7 @@
                 <a:ea typeface="Arial" pitchFamily="34" charset="-122"/>
                 <a:cs typeface="Arial" pitchFamily="34" charset="-120"/>
               </a:rPr>
-              <a:t>44件（69.8%）</a:t>
+              <a:t>45件（70.3%）</a:t>
             </a:r>
             <a:endParaRPr lang="en-US" sz="1100" dirty="0"/>
           </a:p>
@@ -9974,7 +9974,7 @@
                 <a:ea typeface="Arial" pitchFamily="34" charset="-122"/>
                 <a:cs typeface="Arial" pitchFamily="34" charset="-120"/>
               </a:rPr>
-              <a:t>18件（28.6%）</a:t>
+              <a:t>18件（28.1%）</a:t>
             </a:r>
             <a:endParaRPr lang="en-US" sz="1100" dirty="0"/>
           </a:p>
@@ -10969,7 +10969,7 @@
                 <a:ea typeface="Arial" pitchFamily="34" charset="-122"/>
                 <a:cs typeface="Arial" pitchFamily="34" charset="-120"/>
               </a:rPr>
-              <a:t>「意外とスタッフはおっちょこちょいな感じがします」</a:t>
+              <a:t>「フロントの方々の対応がとても丁寧でした」</a:t>
             </a:r>
             <a:endParaRPr lang="en-US" sz="900" dirty="0"/>
           </a:p>

--- a/納品レポート/ホテル別レポート/apa_sagamihara_口コミ分析レポート.pptx
+++ b/納品レポート/ホテル別レポート/apa_sagamihara_口コミ分析レポート.pptx
@@ -2784,7 +2784,7 @@
                 <a:ea typeface="Arial" pitchFamily="34" charset="-122"/>
                 <a:cs typeface="Arial" pitchFamily="34" charset="-120"/>
               </a:rPr>
-              <a:t>作成日：2026年3月26日</a:t>
+              <a:t>作成日：2026年3月27日</a:t>
             </a:r>
             <a:endParaRPr lang="en-US" sz="1000" dirty="0"/>
           </a:p>

--- a/納品レポート/ホテル別レポート/apa_sagamihara_口コミ分析レポート.pptx
+++ b/納品レポート/ホテル別レポート/apa_sagamihara_口コミ分析レポート.pptx
@@ -2784,7 +2784,7 @@
                 <a:ea typeface="Arial" pitchFamily="34" charset="-122"/>
                 <a:cs typeface="Arial" pitchFamily="34" charset="-120"/>
               </a:rPr>
-              <a:t>作成日：2026年3月27日</a:t>
+              <a:t>作成日：2026年3月28日</a:t>
             </a:r>
             <a:endParaRPr lang="en-US" sz="1000" dirty="0"/>
           </a:p>

--- a/納品レポート/ホテル別レポート/apa_sagamihara_口コミ分析レポート.pptx
+++ b/納品レポート/ホテル別レポート/apa_sagamihara_口コミ分析レポート.pptx
@@ -249,10 +249,10 @@
                     <c:v>じゃらん</c:v>
                   </c:pt>
                   <c:pt idx="1">
-                    <c:v>Google</c:v>
+                    <c:v>Trip.com</c:v>
                   </c:pt>
                   <c:pt idx="2">
-                    <c:v>Trip.com</c:v>
+                    <c:v>Google</c:v>
                   </c:pt>
                   <c:pt idx="3">
                     <c:v>Booking.com</c:v>
@@ -280,7 +280,7 @@
                   <c:v>8.67</c:v>
                 </c:pt>
                 <c:pt idx="2">
-                  <c:v>8.67</c:v>
+                  <c:v>8.57</c:v>
                 </c:pt>
                 <c:pt idx="3">
                   <c:v>8</c:v>
@@ -289,7 +289,7 @@
                   <c:v>7.88</c:v>
                 </c:pt>
                 <c:pt idx="5">
-                  <c:v>7.71</c:v>
+                  <c:v>7.88</c:v>
                 </c:pt>
               </c:numCache>
             </c:numRef>
@@ -614,13 +614,13 @@
                 <c:formatCode>General</c:formatCode>
                 <c:ptCount val="7"/>
                 <c:pt idx="0">
-                  <c:v>20</c:v>
+                  <c:v>21</c:v>
                 </c:pt>
                 <c:pt idx="1">
                   <c:v>5</c:v>
                 </c:pt>
                 <c:pt idx="2">
-                  <c:v>20</c:v>
+                  <c:v>22</c:v>
                 </c:pt>
                 <c:pt idx="3">
                   <c:v>8</c:v>
@@ -2520,7 +2520,7 @@
                 <a:ea typeface="Arial" pitchFamily="34" charset="-122"/>
                 <a:cs typeface="Arial" pitchFamily="34" charset="-120"/>
               </a:rPr>
-              <a:t>レビュー総数：64件</a:t>
+              <a:t>レビュー総数：67件</a:t>
             </a:r>
             <a:endParaRPr lang="en-US" sz="1000" dirty="0"/>
           </a:p>
@@ -2800,7 +2800,7 @@
                 <a:ea typeface="Arial" pitchFamily="34" charset="-122"/>
                 <a:cs typeface="Arial" pitchFamily="34" charset="-120"/>
               </a:rPr>
-              <a:t>アパホテル相模原橋本駅東は全体平均8.17点（10pt換算）、高評価率70.3%を達成しています。本レポートで示した改善施策を段階的に実施することで、さらなる顧客満足度向上が期待できます。</a:t>
+              <a:t>アパホテル相模原橋本駅東は全体平均8.19点（10pt換算）、高評価率71.6%を達成しています。本レポートで示した改善施策を段階的に実施することで、さらなる顧客満足度向上が期待できます。</a:t>
             </a:r>
             <a:endParaRPr lang="en-US" sz="1200" dirty="0"/>
           </a:p>
@@ -3237,7 +3237,7 @@
                 <a:ea typeface="Arial" pitchFamily="34" charset="-122"/>
                 <a:cs typeface="Arial" pitchFamily="34" charset="-120"/>
               </a:rPr>
-              <a:t>8.17</a:t>
+              <a:t>8.19</a:t>
             </a:r>
             <a:endParaRPr lang="en-US" sz="2800" dirty="0"/>
           </a:p>
@@ -3355,7 +3355,7 @@
                 <a:ea typeface="Arial" pitchFamily="34" charset="-122"/>
                 <a:cs typeface="Arial" pitchFamily="34" charset="-120"/>
               </a:rPr>
-              <a:t>70.3%</a:t>
+              <a:t>71.6%</a:t>
             </a:r>
             <a:endParaRPr lang="en-US" sz="2800" dirty="0"/>
           </a:p>
@@ -3473,7 +3473,7 @@
                 <a:ea typeface="Arial" pitchFamily="34" charset="-122"/>
                 <a:cs typeface="Arial" pitchFamily="34" charset="-120"/>
               </a:rPr>
-              <a:t>1.6%</a:t>
+              <a:t>1.5%</a:t>
             </a:r>
             <a:endParaRPr lang="en-US" sz="2800" dirty="0"/>
           </a:p>
@@ -3591,7 +3591,7 @@
                 <a:ea typeface="Arial" pitchFamily="34" charset="-122"/>
                 <a:cs typeface="Arial" pitchFamily="34" charset="-120"/>
               </a:rPr>
-              <a:t>64件</a:t>
+              <a:t>67件</a:t>
             </a:r>
             <a:endParaRPr lang="en-US" sz="2800" dirty="0"/>
           </a:p>
@@ -4604,7 +4604,7 @@
                           <a:ea typeface="Arial" pitchFamily="34" charset="-122"/>
                           <a:cs typeface="Arial" pitchFamily="34" charset="-120"/>
                         </a:rPr>
-                        <a:t>Google</a:t>
+                        <a:t>Trip.com</a:t>
                       </a:r>
                       <a:endParaRPr lang="en-US" sz="800" dirty="0">
                         <a:latin typeface="Arial" charset="0"/>
@@ -4672,7 +4672,7 @@
                           <a:ea typeface="Arial" pitchFamily="34" charset="-122"/>
                           <a:cs typeface="Arial" pitchFamily="34" charset="-120"/>
                         </a:rPr>
-                        <a:t>6</a:t>
+                        <a:t>3</a:t>
                       </a:r>
                       <a:endParaRPr lang="en-US" sz="800" dirty="0">
                         <a:latin typeface="Arial" charset="0"/>
@@ -4740,7 +4740,7 @@
                           <a:ea typeface="Arial" pitchFamily="34" charset="-122"/>
                           <a:cs typeface="Arial" pitchFamily="34" charset="-120"/>
                         </a:rPr>
-                        <a:t>4.33/5</a:t>
+                        <a:t>8.67/10</a:t>
                       </a:r>
                       <a:endParaRPr lang="en-US" sz="800" dirty="0">
                         <a:latin typeface="Arial" charset="0"/>
@@ -4946,7 +4946,7 @@
                           <a:ea typeface="Arial" pitchFamily="34" charset="-122"/>
                           <a:cs typeface="Arial" pitchFamily="34" charset="-120"/>
                         </a:rPr>
-                        <a:t>Trip.com</a:t>
+                        <a:t>Google</a:t>
                       </a:r>
                       <a:endParaRPr lang="en-US" sz="800" dirty="0">
                         <a:latin typeface="Arial" charset="0"/>
@@ -5014,7 +5014,7 @@
                           <a:ea typeface="Arial" pitchFamily="34" charset="-122"/>
                           <a:cs typeface="Arial" pitchFamily="34" charset="-120"/>
                         </a:rPr>
-                        <a:t>3</a:t>
+                        <a:t>7</a:t>
                       </a:r>
                       <a:endParaRPr lang="en-US" sz="800" dirty="0">
                         <a:latin typeface="Arial" charset="0"/>
@@ -5082,7 +5082,7 @@
                           <a:ea typeface="Arial" pitchFamily="34" charset="-122"/>
                           <a:cs typeface="Arial" pitchFamily="34" charset="-120"/>
                         </a:rPr>
-                        <a:t>8.67/10</a:t>
+                        <a:t>4.29/5</a:t>
                       </a:r>
                       <a:endParaRPr lang="en-US" sz="800" dirty="0">
                         <a:latin typeface="Arial" charset="0"/>
@@ -5150,7 +5150,7 @@
                           <a:ea typeface="Arial" pitchFamily="34" charset="-122"/>
                           <a:cs typeface="Arial" pitchFamily="34" charset="-120"/>
                         </a:rPr>
-                        <a:t>8.67</a:t>
+                        <a:t>8.57</a:t>
                       </a:r>
                       <a:endParaRPr lang="en-US" sz="800" dirty="0">
                         <a:latin typeface="Arial" charset="0"/>
@@ -6040,7 +6040,7 @@
                           <a:ea typeface="Arial" pitchFamily="34" charset="-122"/>
                           <a:cs typeface="Arial" pitchFamily="34" charset="-120"/>
                         </a:rPr>
-                        <a:t>14</a:t>
+                        <a:t>16</a:t>
                       </a:r>
                       <a:endParaRPr lang="en-US" sz="800" dirty="0">
                         <a:latin typeface="Arial" charset="0"/>
@@ -6108,7 +6108,7 @@
                           <a:ea typeface="Arial" pitchFamily="34" charset="-122"/>
                           <a:cs typeface="Arial" pitchFamily="34" charset="-120"/>
                         </a:rPr>
-                        <a:t>3.86/5</a:t>
+                        <a:t>3.94/5</a:t>
                       </a:r>
                       <a:endParaRPr lang="en-US" sz="800" dirty="0">
                         <a:latin typeface="Arial" charset="0"/>
@@ -6176,7 +6176,7 @@
                           <a:ea typeface="Arial" pitchFamily="34" charset="-122"/>
                           <a:cs typeface="Arial" pitchFamily="34" charset="-120"/>
                         </a:rPr>
-                        <a:t>7.71</a:t>
+                        <a:t>7.88</a:t>
                       </a:r>
                       <a:endParaRPr lang="en-US" sz="800" dirty="0">
                         <a:latin typeface="Arial" charset="0"/>
@@ -6629,7 +6629,7 @@
                 <a:ea typeface="Arial" pitchFamily="34" charset="-122"/>
                 <a:cs typeface="Arial" pitchFamily="34" charset="-120"/>
               </a:rPr>
-              <a:t>45件（70.3%）</a:t>
+              <a:t>48件（71.6%）</a:t>
             </a:r>
             <a:endParaRPr lang="en-US" sz="1600" dirty="0"/>
           </a:p>
@@ -6727,7 +6727,7 @@
                 <a:ea typeface="Arial" pitchFamily="34" charset="-122"/>
                 <a:cs typeface="Arial" pitchFamily="34" charset="-120"/>
               </a:rPr>
-              <a:t>18件（28.1%）</a:t>
+              <a:t>18件（26.9%）</a:t>
             </a:r>
             <a:endParaRPr lang="en-US" sz="1600" dirty="0"/>
           </a:p>
@@ -6825,7 +6825,7 @@
                 <a:ea typeface="Arial" pitchFamily="34" charset="-122"/>
                 <a:cs typeface="Arial" pitchFamily="34" charset="-120"/>
               </a:rPr>
-              <a:t>1件（1.6%）</a:t>
+              <a:t>1件（1.5%）</a:t>
             </a:r>
             <a:endParaRPr lang="en-US" sz="1600" dirty="0"/>
           </a:p>
@@ -6987,7 +6987,7 @@
                 <a:ea typeface="Arial" pitchFamily="34" charset="-122"/>
                 <a:cs typeface="Arial" pitchFamily="34" charset="-120"/>
               </a:rPr>
-              <a:t>高評価レビュー（8-10点: 45件）の分析から、主要な強みテーマを抽出しています。立地・アクセス、客室清潔感、スタッフ対応が高評価の中心的テーマです。</a:t>
+              <a:t>高評価レビュー（8-10点: 48件）の分析から、主要な強みテーマを抽出しています。立地・アクセス、客室清潔感、スタッフ対応が高評価の中心的テーマです。</a:t>
             </a:r>
             <a:endParaRPr lang="en-US" sz="1200" dirty="0"/>
           </a:p>
@@ -8027,7 +8027,7 @@
                 <a:ea typeface="Arial" pitchFamily="34" charset="-122"/>
                 <a:cs typeface="Arial" pitchFamily="34" charset="-120"/>
               </a:rPr>
-              <a:t>全体平均 8.17点 → 目標 8.67点</a:t>
+              <a:t>全体平均 8.19点 → 目標 8.69点</a:t>
             </a:r>
             <a:endParaRPr lang="en-US" sz="1200" dirty="0"/>
           </a:p>
@@ -8044,7 +8044,7 @@
                 <a:ea typeface="Arial" pitchFamily="34" charset="-122"/>
                 <a:cs typeface="Arial" pitchFamily="34" charset="-120"/>
               </a:rPr>
-              <a:t>高評価率 70.3% → 目標 75.3%</a:t>
+              <a:t>高評価率 71.6% → 目標 76.6%</a:t>
             </a:r>
             <a:endParaRPr lang="en-US" sz="1200" dirty="0"/>
           </a:p>
@@ -8061,7 +8061,7 @@
                 <a:ea typeface="Arial" pitchFamily="34" charset="-122"/>
                 <a:cs typeface="Arial" pitchFamily="34" charset="-120"/>
               </a:rPr>
-              <a:t>低評価率 1.6% → 目標 0.0%</a:t>
+              <a:t>低評価率 1.5% → 目標 0.0%</a:t>
             </a:r>
             <a:endParaRPr lang="en-US" sz="1200" dirty="0"/>
           </a:p>

--- a/納品レポート/ホテル別レポート/apa_sagamihara_口コミ分析レポート.pptx
+++ b/納品レポート/ホテル別レポート/apa_sagamihara_口コミ分析レポート.pptx
@@ -249,10 +249,10 @@
                     <c:v>じゃらん</c:v>
                   </c:pt>
                   <c:pt idx="1">
-                    <c:v>Trip.com</c:v>
+                    <c:v>Google</c:v>
                   </c:pt>
                   <c:pt idx="2">
-                    <c:v>Google</c:v>
+                    <c:v>Trip.com</c:v>
                   </c:pt>
                   <c:pt idx="3">
                     <c:v>Booking.com</c:v>
@@ -277,10 +277,10 @@
                   <c:v>8.91</c:v>
                 </c:pt>
                 <c:pt idx="1">
-                  <c:v>8.67</c:v>
+                  <c:v>8.75</c:v>
                 </c:pt>
                 <c:pt idx="2">
-                  <c:v>8.57</c:v>
+                  <c:v>8.67</c:v>
                 </c:pt>
                 <c:pt idx="3">
                   <c:v>8</c:v>
@@ -614,7 +614,7 @@
                 <c:formatCode>General</c:formatCode>
                 <c:ptCount val="7"/>
                 <c:pt idx="0">
-                  <c:v>21</c:v>
+                  <c:v>22</c:v>
                 </c:pt>
                 <c:pt idx="1">
                   <c:v>5</c:v>
@@ -2520,7 +2520,7 @@
                 <a:ea typeface="Arial" pitchFamily="34" charset="-122"/>
                 <a:cs typeface="Arial" pitchFamily="34" charset="-120"/>
               </a:rPr>
-              <a:t>レビュー総数：67件</a:t>
+              <a:t>レビュー総数：68件</a:t>
             </a:r>
             <a:endParaRPr lang="en-US" sz="1000" dirty="0"/>
           </a:p>
@@ -2800,7 +2800,7 @@
                 <a:ea typeface="Arial" pitchFamily="34" charset="-122"/>
                 <a:cs typeface="Arial" pitchFamily="34" charset="-120"/>
               </a:rPr>
-              <a:t>アパホテル相模原橋本駅東は全体平均8.19点（10pt換算）、高評価率71.6%を達成しています。本レポートで示した改善施策を段階的に実施することで、さらなる顧客満足度向上が期待できます。</a:t>
+              <a:t>アパホテル相模原橋本駅東は全体平均8.22点（10pt換算）、高評価率72.1%を達成しています。本レポートで示した改善施策を段階的に実施することで、さらなる顧客満足度向上が期待できます。</a:t>
             </a:r>
             <a:endParaRPr lang="en-US" sz="1200" dirty="0"/>
           </a:p>
@@ -3237,7 +3237,7 @@
                 <a:ea typeface="Arial" pitchFamily="34" charset="-122"/>
                 <a:cs typeface="Arial" pitchFamily="34" charset="-120"/>
               </a:rPr>
-              <a:t>8.19</a:t>
+              <a:t>8.22</a:t>
             </a:r>
             <a:endParaRPr lang="en-US" sz="2800" dirty="0"/>
           </a:p>
@@ -3355,7 +3355,7 @@
                 <a:ea typeface="Arial" pitchFamily="34" charset="-122"/>
                 <a:cs typeface="Arial" pitchFamily="34" charset="-120"/>
               </a:rPr>
-              <a:t>71.6%</a:t>
+              <a:t>72.1%</a:t>
             </a:r>
             <a:endParaRPr lang="en-US" sz="2800" dirty="0"/>
           </a:p>
@@ -3591,7 +3591,7 @@
                 <a:ea typeface="Arial" pitchFamily="34" charset="-122"/>
                 <a:cs typeface="Arial" pitchFamily="34" charset="-120"/>
               </a:rPr>
-              <a:t>67件</a:t>
+              <a:t>68件</a:t>
             </a:r>
             <a:endParaRPr lang="en-US" sz="2800" dirty="0"/>
           </a:p>
@@ -4604,6 +4604,348 @@
                           <a:ea typeface="Arial" pitchFamily="34" charset="-122"/>
                           <a:cs typeface="Arial" pitchFamily="34" charset="-120"/>
                         </a:rPr>
+                        <a:t>Google</a:t>
+                      </a:r>
+                      <a:endParaRPr lang="en-US" sz="800" dirty="0">
+                        <a:latin typeface="Arial" charset="0"/>
+                        <a:ea typeface="Arial" charset="0"/>
+                        <a:cs typeface="Arial" charset="0"/>
+                      </a:endParaRPr>
+                    </a:p>
+                  </a:txBody>
+                  <a:tcPr marL="91440" marR="91440" marT="45720" marB="45720">
+                    <a:lnL w="6350" cap="flat" cmpd="sng" algn="ctr">
+                      <a:solidFill>
+                        <a:srgbClr val="CCCCCC"/>
+                      </a:solidFill>
+                      <a:prstDash val="solid"/>
+                      <a:round/>
+                      <a:headEnd type="none" w="med" len="med"/>
+                      <a:tailEnd type="none" w="med" len="med"/>
+                    </a:lnL>
+                    <a:lnR w="6350" cap="flat" cmpd="sng" algn="ctr">
+                      <a:solidFill>
+                        <a:srgbClr val="CCCCCC"/>
+                      </a:solidFill>
+                      <a:prstDash val="solid"/>
+                      <a:round/>
+                      <a:headEnd type="none" w="med" len="med"/>
+                      <a:tailEnd type="none" w="med" len="med"/>
+                    </a:lnR>
+                    <a:lnT w="6350" cap="flat" cmpd="sng" algn="ctr">
+                      <a:solidFill>
+                        <a:srgbClr val="CCCCCC"/>
+                      </a:solidFill>
+                      <a:prstDash val="solid"/>
+                      <a:round/>
+                      <a:headEnd type="none" w="med" len="med"/>
+                      <a:tailEnd type="none" w="med" len="med"/>
+                    </a:lnT>
+                    <a:lnB w="6350" cap="flat" cmpd="sng" algn="ctr">
+                      <a:solidFill>
+                        <a:srgbClr val="CCCCCC"/>
+                      </a:solidFill>
+                      <a:prstDash val="solid"/>
+                      <a:round/>
+                      <a:headEnd type="none" w="med" len="med"/>
+                      <a:tailEnd type="none" w="med" len="med"/>
+                    </a:lnB>
+                    <a:solidFill>
+                      <a:srgbClr val="FFFFFF"/>
+                    </a:solidFill>
+                  </a:tcPr>
+                </a:tc>
+                <a:tc>
+                  <a:txBody>
+                    <a:bodyPr/>
+                    <a:lstStyle/>
+                    <a:p>
+                      <a:pPr algn="ctr" indent="0" marL="0">
+                        <a:buNone/>
+                      </a:pPr>
+                      <a:r>
+                        <a:rPr lang="en-US" sz="800" dirty="0">
+                          <a:solidFill>
+                            <a:srgbClr val="000000"/>
+                          </a:solidFill>
+                          <a:latin typeface="Arial" pitchFamily="34" charset="0"/>
+                          <a:ea typeface="Arial" pitchFamily="34" charset="-122"/>
+                          <a:cs typeface="Arial" pitchFamily="34" charset="-120"/>
+                        </a:rPr>
+                        <a:t>8</a:t>
+                      </a:r>
+                      <a:endParaRPr lang="en-US" sz="800" dirty="0">
+                        <a:latin typeface="Arial" charset="0"/>
+                        <a:ea typeface="Arial" charset="0"/>
+                        <a:cs typeface="Arial" charset="0"/>
+                      </a:endParaRPr>
+                    </a:p>
+                  </a:txBody>
+                  <a:tcPr marL="91440" marR="91440" marT="45720" marB="45720">
+                    <a:lnL w="6350" cap="flat" cmpd="sng" algn="ctr">
+                      <a:solidFill>
+                        <a:srgbClr val="CCCCCC"/>
+                      </a:solidFill>
+                      <a:prstDash val="solid"/>
+                      <a:round/>
+                      <a:headEnd type="none" w="med" len="med"/>
+                      <a:tailEnd type="none" w="med" len="med"/>
+                    </a:lnL>
+                    <a:lnR w="6350" cap="flat" cmpd="sng" algn="ctr">
+                      <a:solidFill>
+                        <a:srgbClr val="CCCCCC"/>
+                      </a:solidFill>
+                      <a:prstDash val="solid"/>
+                      <a:round/>
+                      <a:headEnd type="none" w="med" len="med"/>
+                      <a:tailEnd type="none" w="med" len="med"/>
+                    </a:lnR>
+                    <a:lnT w="6350" cap="flat" cmpd="sng" algn="ctr">
+                      <a:solidFill>
+                        <a:srgbClr val="CCCCCC"/>
+                      </a:solidFill>
+                      <a:prstDash val="solid"/>
+                      <a:round/>
+                      <a:headEnd type="none" w="med" len="med"/>
+                      <a:tailEnd type="none" w="med" len="med"/>
+                    </a:lnT>
+                    <a:lnB w="6350" cap="flat" cmpd="sng" algn="ctr">
+                      <a:solidFill>
+                        <a:srgbClr val="CCCCCC"/>
+                      </a:solidFill>
+                      <a:prstDash val="solid"/>
+                      <a:round/>
+                      <a:headEnd type="none" w="med" len="med"/>
+                      <a:tailEnd type="none" w="med" len="med"/>
+                    </a:lnB>
+                    <a:solidFill>
+                      <a:srgbClr val="FFFFFF"/>
+                    </a:solidFill>
+                  </a:tcPr>
+                </a:tc>
+                <a:tc>
+                  <a:txBody>
+                    <a:bodyPr/>
+                    <a:lstStyle/>
+                    <a:p>
+                      <a:pPr algn="ctr" indent="0" marL="0">
+                        <a:buNone/>
+                      </a:pPr>
+                      <a:r>
+                        <a:rPr lang="en-US" sz="800" dirty="0">
+                          <a:solidFill>
+                            <a:srgbClr val="000000"/>
+                          </a:solidFill>
+                          <a:latin typeface="Arial" pitchFamily="34" charset="0"/>
+                          <a:ea typeface="Arial" pitchFamily="34" charset="-122"/>
+                          <a:cs typeface="Arial" pitchFamily="34" charset="-120"/>
+                        </a:rPr>
+                        <a:t>4.38/5</a:t>
+                      </a:r>
+                      <a:endParaRPr lang="en-US" sz="800" dirty="0">
+                        <a:latin typeface="Arial" charset="0"/>
+                        <a:ea typeface="Arial" charset="0"/>
+                        <a:cs typeface="Arial" charset="0"/>
+                      </a:endParaRPr>
+                    </a:p>
+                  </a:txBody>
+                  <a:tcPr marL="91440" marR="91440" marT="45720" marB="45720">
+                    <a:lnL w="6350" cap="flat" cmpd="sng" algn="ctr">
+                      <a:solidFill>
+                        <a:srgbClr val="CCCCCC"/>
+                      </a:solidFill>
+                      <a:prstDash val="solid"/>
+                      <a:round/>
+                      <a:headEnd type="none" w="med" len="med"/>
+                      <a:tailEnd type="none" w="med" len="med"/>
+                    </a:lnL>
+                    <a:lnR w="6350" cap="flat" cmpd="sng" algn="ctr">
+                      <a:solidFill>
+                        <a:srgbClr val="CCCCCC"/>
+                      </a:solidFill>
+                      <a:prstDash val="solid"/>
+                      <a:round/>
+                      <a:headEnd type="none" w="med" len="med"/>
+                      <a:tailEnd type="none" w="med" len="med"/>
+                    </a:lnR>
+                    <a:lnT w="6350" cap="flat" cmpd="sng" algn="ctr">
+                      <a:solidFill>
+                        <a:srgbClr val="CCCCCC"/>
+                      </a:solidFill>
+                      <a:prstDash val="solid"/>
+                      <a:round/>
+                      <a:headEnd type="none" w="med" len="med"/>
+                      <a:tailEnd type="none" w="med" len="med"/>
+                    </a:lnT>
+                    <a:lnB w="6350" cap="flat" cmpd="sng" algn="ctr">
+                      <a:solidFill>
+                        <a:srgbClr val="CCCCCC"/>
+                      </a:solidFill>
+                      <a:prstDash val="solid"/>
+                      <a:round/>
+                      <a:headEnd type="none" w="med" len="med"/>
+                      <a:tailEnd type="none" w="med" len="med"/>
+                    </a:lnB>
+                    <a:solidFill>
+                      <a:srgbClr val="FFFFFF"/>
+                    </a:solidFill>
+                  </a:tcPr>
+                </a:tc>
+                <a:tc>
+                  <a:txBody>
+                    <a:bodyPr/>
+                    <a:lstStyle/>
+                    <a:p>
+                      <a:pPr algn="ctr" indent="0" marL="0">
+                        <a:buNone/>
+                      </a:pPr>
+                      <a:r>
+                        <a:rPr lang="en-US" sz="800" dirty="0">
+                          <a:solidFill>
+                            <a:srgbClr val="000000"/>
+                          </a:solidFill>
+                          <a:latin typeface="Arial" pitchFamily="34" charset="0"/>
+                          <a:ea typeface="Arial" pitchFamily="34" charset="-122"/>
+                          <a:cs typeface="Arial" pitchFamily="34" charset="-120"/>
+                        </a:rPr>
+                        <a:t>8.75</a:t>
+                      </a:r>
+                      <a:endParaRPr lang="en-US" sz="800" dirty="0">
+                        <a:latin typeface="Arial" charset="0"/>
+                        <a:ea typeface="Arial" charset="0"/>
+                        <a:cs typeface="Arial" charset="0"/>
+                      </a:endParaRPr>
+                    </a:p>
+                  </a:txBody>
+                  <a:tcPr marL="91440" marR="91440" marT="45720" marB="45720">
+                    <a:lnL w="6350" cap="flat" cmpd="sng" algn="ctr">
+                      <a:solidFill>
+                        <a:srgbClr val="CCCCCC"/>
+                      </a:solidFill>
+                      <a:prstDash val="solid"/>
+                      <a:round/>
+                      <a:headEnd type="none" w="med" len="med"/>
+                      <a:tailEnd type="none" w="med" len="med"/>
+                    </a:lnL>
+                    <a:lnR w="6350" cap="flat" cmpd="sng" algn="ctr">
+                      <a:solidFill>
+                        <a:srgbClr val="CCCCCC"/>
+                      </a:solidFill>
+                      <a:prstDash val="solid"/>
+                      <a:round/>
+                      <a:headEnd type="none" w="med" len="med"/>
+                      <a:tailEnd type="none" w="med" len="med"/>
+                    </a:lnR>
+                    <a:lnT w="6350" cap="flat" cmpd="sng" algn="ctr">
+                      <a:solidFill>
+                        <a:srgbClr val="CCCCCC"/>
+                      </a:solidFill>
+                      <a:prstDash val="solid"/>
+                      <a:round/>
+                      <a:headEnd type="none" w="med" len="med"/>
+                      <a:tailEnd type="none" w="med" len="med"/>
+                    </a:lnT>
+                    <a:lnB w="6350" cap="flat" cmpd="sng" algn="ctr">
+                      <a:solidFill>
+                        <a:srgbClr val="CCCCCC"/>
+                      </a:solidFill>
+                      <a:prstDash val="solid"/>
+                      <a:round/>
+                      <a:headEnd type="none" w="med" len="med"/>
+                      <a:tailEnd type="none" w="med" len="med"/>
+                    </a:lnB>
+                    <a:solidFill>
+                      <a:srgbClr val="FFFFFF"/>
+                    </a:solidFill>
+                  </a:tcPr>
+                </a:tc>
+                <a:tc>
+                  <a:txBody>
+                    <a:bodyPr/>
+                    <a:lstStyle/>
+                    <a:p>
+                      <a:pPr algn="ctr" indent="0" marL="0">
+                        <a:buNone/>
+                      </a:pPr>
+                      <a:r>
+                        <a:rPr lang="en-US" sz="800" dirty="0">
+                          <a:solidFill>
+                            <a:srgbClr val="000000"/>
+                          </a:solidFill>
+                          <a:latin typeface="Arial" pitchFamily="34" charset="0"/>
+                          <a:ea typeface="Arial" pitchFamily="34" charset="-122"/>
+                          <a:cs typeface="Arial" pitchFamily="34" charset="-120"/>
+                        </a:rPr>
+                        <a:t>良好</a:t>
+                      </a:r>
+                      <a:endParaRPr lang="en-US" sz="800" dirty="0">
+                        <a:latin typeface="Arial" charset="0"/>
+                        <a:ea typeface="Arial" charset="0"/>
+                        <a:cs typeface="Arial" charset="0"/>
+                      </a:endParaRPr>
+                    </a:p>
+                  </a:txBody>
+                  <a:tcPr marL="91440" marR="91440" marT="45720" marB="45720">
+                    <a:lnL w="6350" cap="flat" cmpd="sng" algn="ctr">
+                      <a:solidFill>
+                        <a:srgbClr val="CCCCCC"/>
+                      </a:solidFill>
+                      <a:prstDash val="solid"/>
+                      <a:round/>
+                      <a:headEnd type="none" w="med" len="med"/>
+                      <a:tailEnd type="none" w="med" len="med"/>
+                    </a:lnL>
+                    <a:lnR w="6350" cap="flat" cmpd="sng" algn="ctr">
+                      <a:solidFill>
+                        <a:srgbClr val="CCCCCC"/>
+                      </a:solidFill>
+                      <a:prstDash val="solid"/>
+                      <a:round/>
+                      <a:headEnd type="none" w="med" len="med"/>
+                      <a:tailEnd type="none" w="med" len="med"/>
+                    </a:lnR>
+                    <a:lnT w="6350" cap="flat" cmpd="sng" algn="ctr">
+                      <a:solidFill>
+                        <a:srgbClr val="CCCCCC"/>
+                      </a:solidFill>
+                      <a:prstDash val="solid"/>
+                      <a:round/>
+                      <a:headEnd type="none" w="med" len="med"/>
+                      <a:tailEnd type="none" w="med" len="med"/>
+                    </a:lnT>
+                    <a:lnB w="6350" cap="flat" cmpd="sng" algn="ctr">
+                      <a:solidFill>
+                        <a:srgbClr val="CCCCCC"/>
+                      </a:solidFill>
+                      <a:prstDash val="solid"/>
+                      <a:round/>
+                      <a:headEnd type="none" w="med" len="med"/>
+                      <a:tailEnd type="none" w="med" len="med"/>
+                    </a:lnB>
+                    <a:solidFill>
+                      <a:srgbClr val="FFFFFF"/>
+                    </a:solidFill>
+                  </a:tcPr>
+                </a:tc>
+              </a:tr>
+              <a:tr h="0">
+                <a:tc>
+                  <a:txBody>
+                    <a:bodyPr/>
+                    <a:lstStyle/>
+                    <a:p>
+                      <a:pPr algn="ctr" indent="0" marL="0">
+                        <a:buNone/>
+                      </a:pPr>
+                      <a:r>
+                        <a:rPr lang="en-US" sz="800" dirty="0">
+                          <a:solidFill>
+                            <a:srgbClr val="000000"/>
+                          </a:solidFill>
+                          <a:latin typeface="Arial" pitchFamily="34" charset="0"/>
+                          <a:ea typeface="Arial" pitchFamily="34" charset="-122"/>
+                          <a:cs typeface="Arial" pitchFamily="34" charset="-120"/>
+                        </a:rPr>
                         <a:t>Trip.com</a:t>
                       </a:r>
                       <a:endParaRPr lang="en-US" sz="800" dirty="0">
@@ -4809,348 +5151,6 @@
                           <a:cs typeface="Arial" pitchFamily="34" charset="-120"/>
                         </a:rPr>
                         <a:t>8.67</a:t>
-                      </a:r>
-                      <a:endParaRPr lang="en-US" sz="800" dirty="0">
-                        <a:latin typeface="Arial" charset="0"/>
-                        <a:ea typeface="Arial" charset="0"/>
-                        <a:cs typeface="Arial" charset="0"/>
-                      </a:endParaRPr>
-                    </a:p>
-                  </a:txBody>
-                  <a:tcPr marL="91440" marR="91440" marT="45720" marB="45720">
-                    <a:lnL w="6350" cap="flat" cmpd="sng" algn="ctr">
-                      <a:solidFill>
-                        <a:srgbClr val="CCCCCC"/>
-                      </a:solidFill>
-                      <a:prstDash val="solid"/>
-                      <a:round/>
-                      <a:headEnd type="none" w="med" len="med"/>
-                      <a:tailEnd type="none" w="med" len="med"/>
-                    </a:lnL>
-                    <a:lnR w="6350" cap="flat" cmpd="sng" algn="ctr">
-                      <a:solidFill>
-                        <a:srgbClr val="CCCCCC"/>
-                      </a:solidFill>
-                      <a:prstDash val="solid"/>
-                      <a:round/>
-                      <a:headEnd type="none" w="med" len="med"/>
-                      <a:tailEnd type="none" w="med" len="med"/>
-                    </a:lnR>
-                    <a:lnT w="6350" cap="flat" cmpd="sng" algn="ctr">
-                      <a:solidFill>
-                        <a:srgbClr val="CCCCCC"/>
-                      </a:solidFill>
-                      <a:prstDash val="solid"/>
-                      <a:round/>
-                      <a:headEnd type="none" w="med" len="med"/>
-                      <a:tailEnd type="none" w="med" len="med"/>
-                    </a:lnT>
-                    <a:lnB w="6350" cap="flat" cmpd="sng" algn="ctr">
-                      <a:solidFill>
-                        <a:srgbClr val="CCCCCC"/>
-                      </a:solidFill>
-                      <a:prstDash val="solid"/>
-                      <a:round/>
-                      <a:headEnd type="none" w="med" len="med"/>
-                      <a:tailEnd type="none" w="med" len="med"/>
-                    </a:lnB>
-                    <a:solidFill>
-                      <a:srgbClr val="FFFFFF"/>
-                    </a:solidFill>
-                  </a:tcPr>
-                </a:tc>
-                <a:tc>
-                  <a:txBody>
-                    <a:bodyPr/>
-                    <a:lstStyle/>
-                    <a:p>
-                      <a:pPr algn="ctr" indent="0" marL="0">
-                        <a:buNone/>
-                      </a:pPr>
-                      <a:r>
-                        <a:rPr lang="en-US" sz="800" dirty="0">
-                          <a:solidFill>
-                            <a:srgbClr val="000000"/>
-                          </a:solidFill>
-                          <a:latin typeface="Arial" pitchFamily="34" charset="0"/>
-                          <a:ea typeface="Arial" pitchFamily="34" charset="-122"/>
-                          <a:cs typeface="Arial" pitchFamily="34" charset="-120"/>
-                        </a:rPr>
-                        <a:t>良好</a:t>
-                      </a:r>
-                      <a:endParaRPr lang="en-US" sz="800" dirty="0">
-                        <a:latin typeface="Arial" charset="0"/>
-                        <a:ea typeface="Arial" charset="0"/>
-                        <a:cs typeface="Arial" charset="0"/>
-                      </a:endParaRPr>
-                    </a:p>
-                  </a:txBody>
-                  <a:tcPr marL="91440" marR="91440" marT="45720" marB="45720">
-                    <a:lnL w="6350" cap="flat" cmpd="sng" algn="ctr">
-                      <a:solidFill>
-                        <a:srgbClr val="CCCCCC"/>
-                      </a:solidFill>
-                      <a:prstDash val="solid"/>
-                      <a:round/>
-                      <a:headEnd type="none" w="med" len="med"/>
-                      <a:tailEnd type="none" w="med" len="med"/>
-                    </a:lnL>
-                    <a:lnR w="6350" cap="flat" cmpd="sng" algn="ctr">
-                      <a:solidFill>
-                        <a:srgbClr val="CCCCCC"/>
-                      </a:solidFill>
-                      <a:prstDash val="solid"/>
-                      <a:round/>
-                      <a:headEnd type="none" w="med" len="med"/>
-                      <a:tailEnd type="none" w="med" len="med"/>
-                    </a:lnR>
-                    <a:lnT w="6350" cap="flat" cmpd="sng" algn="ctr">
-                      <a:solidFill>
-                        <a:srgbClr val="CCCCCC"/>
-                      </a:solidFill>
-                      <a:prstDash val="solid"/>
-                      <a:round/>
-                      <a:headEnd type="none" w="med" len="med"/>
-                      <a:tailEnd type="none" w="med" len="med"/>
-                    </a:lnT>
-                    <a:lnB w="6350" cap="flat" cmpd="sng" algn="ctr">
-                      <a:solidFill>
-                        <a:srgbClr val="CCCCCC"/>
-                      </a:solidFill>
-                      <a:prstDash val="solid"/>
-                      <a:round/>
-                      <a:headEnd type="none" w="med" len="med"/>
-                      <a:tailEnd type="none" w="med" len="med"/>
-                    </a:lnB>
-                    <a:solidFill>
-                      <a:srgbClr val="FFFFFF"/>
-                    </a:solidFill>
-                  </a:tcPr>
-                </a:tc>
-              </a:tr>
-              <a:tr h="0">
-                <a:tc>
-                  <a:txBody>
-                    <a:bodyPr/>
-                    <a:lstStyle/>
-                    <a:p>
-                      <a:pPr algn="ctr" indent="0" marL="0">
-                        <a:buNone/>
-                      </a:pPr>
-                      <a:r>
-                        <a:rPr lang="en-US" sz="800" dirty="0">
-                          <a:solidFill>
-                            <a:srgbClr val="000000"/>
-                          </a:solidFill>
-                          <a:latin typeface="Arial" pitchFamily="34" charset="0"/>
-                          <a:ea typeface="Arial" pitchFamily="34" charset="-122"/>
-                          <a:cs typeface="Arial" pitchFamily="34" charset="-120"/>
-                        </a:rPr>
-                        <a:t>Google</a:t>
-                      </a:r>
-                      <a:endParaRPr lang="en-US" sz="800" dirty="0">
-                        <a:latin typeface="Arial" charset="0"/>
-                        <a:ea typeface="Arial" charset="0"/>
-                        <a:cs typeface="Arial" charset="0"/>
-                      </a:endParaRPr>
-                    </a:p>
-                  </a:txBody>
-                  <a:tcPr marL="91440" marR="91440" marT="45720" marB="45720">
-                    <a:lnL w="6350" cap="flat" cmpd="sng" algn="ctr">
-                      <a:solidFill>
-                        <a:srgbClr val="CCCCCC"/>
-                      </a:solidFill>
-                      <a:prstDash val="solid"/>
-                      <a:round/>
-                      <a:headEnd type="none" w="med" len="med"/>
-                      <a:tailEnd type="none" w="med" len="med"/>
-                    </a:lnL>
-                    <a:lnR w="6350" cap="flat" cmpd="sng" algn="ctr">
-                      <a:solidFill>
-                        <a:srgbClr val="CCCCCC"/>
-                      </a:solidFill>
-                      <a:prstDash val="solid"/>
-                      <a:round/>
-                      <a:headEnd type="none" w="med" len="med"/>
-                      <a:tailEnd type="none" w="med" len="med"/>
-                    </a:lnR>
-                    <a:lnT w="6350" cap="flat" cmpd="sng" algn="ctr">
-                      <a:solidFill>
-                        <a:srgbClr val="CCCCCC"/>
-                      </a:solidFill>
-                      <a:prstDash val="solid"/>
-                      <a:round/>
-                      <a:headEnd type="none" w="med" len="med"/>
-                      <a:tailEnd type="none" w="med" len="med"/>
-                    </a:lnT>
-                    <a:lnB w="6350" cap="flat" cmpd="sng" algn="ctr">
-                      <a:solidFill>
-                        <a:srgbClr val="CCCCCC"/>
-                      </a:solidFill>
-                      <a:prstDash val="solid"/>
-                      <a:round/>
-                      <a:headEnd type="none" w="med" len="med"/>
-                      <a:tailEnd type="none" w="med" len="med"/>
-                    </a:lnB>
-                    <a:solidFill>
-                      <a:srgbClr val="FFFFFF"/>
-                    </a:solidFill>
-                  </a:tcPr>
-                </a:tc>
-                <a:tc>
-                  <a:txBody>
-                    <a:bodyPr/>
-                    <a:lstStyle/>
-                    <a:p>
-                      <a:pPr algn="ctr" indent="0" marL="0">
-                        <a:buNone/>
-                      </a:pPr>
-                      <a:r>
-                        <a:rPr lang="en-US" sz="800" dirty="0">
-                          <a:solidFill>
-                            <a:srgbClr val="000000"/>
-                          </a:solidFill>
-                          <a:latin typeface="Arial" pitchFamily="34" charset="0"/>
-                          <a:ea typeface="Arial" pitchFamily="34" charset="-122"/>
-                          <a:cs typeface="Arial" pitchFamily="34" charset="-120"/>
-                        </a:rPr>
-                        <a:t>7</a:t>
-                      </a:r>
-                      <a:endParaRPr lang="en-US" sz="800" dirty="0">
-                        <a:latin typeface="Arial" charset="0"/>
-                        <a:ea typeface="Arial" charset="0"/>
-                        <a:cs typeface="Arial" charset="0"/>
-                      </a:endParaRPr>
-                    </a:p>
-                  </a:txBody>
-                  <a:tcPr marL="91440" marR="91440" marT="45720" marB="45720">
-                    <a:lnL w="6350" cap="flat" cmpd="sng" algn="ctr">
-                      <a:solidFill>
-                        <a:srgbClr val="CCCCCC"/>
-                      </a:solidFill>
-                      <a:prstDash val="solid"/>
-                      <a:round/>
-                      <a:headEnd type="none" w="med" len="med"/>
-                      <a:tailEnd type="none" w="med" len="med"/>
-                    </a:lnL>
-                    <a:lnR w="6350" cap="flat" cmpd="sng" algn="ctr">
-                      <a:solidFill>
-                        <a:srgbClr val="CCCCCC"/>
-                      </a:solidFill>
-                      <a:prstDash val="solid"/>
-                      <a:round/>
-                      <a:headEnd type="none" w="med" len="med"/>
-                      <a:tailEnd type="none" w="med" len="med"/>
-                    </a:lnR>
-                    <a:lnT w="6350" cap="flat" cmpd="sng" algn="ctr">
-                      <a:solidFill>
-                        <a:srgbClr val="CCCCCC"/>
-                      </a:solidFill>
-                      <a:prstDash val="solid"/>
-                      <a:round/>
-                      <a:headEnd type="none" w="med" len="med"/>
-                      <a:tailEnd type="none" w="med" len="med"/>
-                    </a:lnT>
-                    <a:lnB w="6350" cap="flat" cmpd="sng" algn="ctr">
-                      <a:solidFill>
-                        <a:srgbClr val="CCCCCC"/>
-                      </a:solidFill>
-                      <a:prstDash val="solid"/>
-                      <a:round/>
-                      <a:headEnd type="none" w="med" len="med"/>
-                      <a:tailEnd type="none" w="med" len="med"/>
-                    </a:lnB>
-                    <a:solidFill>
-                      <a:srgbClr val="FFFFFF"/>
-                    </a:solidFill>
-                  </a:tcPr>
-                </a:tc>
-                <a:tc>
-                  <a:txBody>
-                    <a:bodyPr/>
-                    <a:lstStyle/>
-                    <a:p>
-                      <a:pPr algn="ctr" indent="0" marL="0">
-                        <a:buNone/>
-                      </a:pPr>
-                      <a:r>
-                        <a:rPr lang="en-US" sz="800" dirty="0">
-                          <a:solidFill>
-                            <a:srgbClr val="000000"/>
-                          </a:solidFill>
-                          <a:latin typeface="Arial" pitchFamily="34" charset="0"/>
-                          <a:ea typeface="Arial" pitchFamily="34" charset="-122"/>
-                          <a:cs typeface="Arial" pitchFamily="34" charset="-120"/>
-                        </a:rPr>
-                        <a:t>4.29/5</a:t>
-                      </a:r>
-                      <a:endParaRPr lang="en-US" sz="800" dirty="0">
-                        <a:latin typeface="Arial" charset="0"/>
-                        <a:ea typeface="Arial" charset="0"/>
-                        <a:cs typeface="Arial" charset="0"/>
-                      </a:endParaRPr>
-                    </a:p>
-                  </a:txBody>
-                  <a:tcPr marL="91440" marR="91440" marT="45720" marB="45720">
-                    <a:lnL w="6350" cap="flat" cmpd="sng" algn="ctr">
-                      <a:solidFill>
-                        <a:srgbClr val="CCCCCC"/>
-                      </a:solidFill>
-                      <a:prstDash val="solid"/>
-                      <a:round/>
-                      <a:headEnd type="none" w="med" len="med"/>
-                      <a:tailEnd type="none" w="med" len="med"/>
-                    </a:lnL>
-                    <a:lnR w="6350" cap="flat" cmpd="sng" algn="ctr">
-                      <a:solidFill>
-                        <a:srgbClr val="CCCCCC"/>
-                      </a:solidFill>
-                      <a:prstDash val="solid"/>
-                      <a:round/>
-                      <a:headEnd type="none" w="med" len="med"/>
-                      <a:tailEnd type="none" w="med" len="med"/>
-                    </a:lnR>
-                    <a:lnT w="6350" cap="flat" cmpd="sng" algn="ctr">
-                      <a:solidFill>
-                        <a:srgbClr val="CCCCCC"/>
-                      </a:solidFill>
-                      <a:prstDash val="solid"/>
-                      <a:round/>
-                      <a:headEnd type="none" w="med" len="med"/>
-                      <a:tailEnd type="none" w="med" len="med"/>
-                    </a:lnT>
-                    <a:lnB w="6350" cap="flat" cmpd="sng" algn="ctr">
-                      <a:solidFill>
-                        <a:srgbClr val="CCCCCC"/>
-                      </a:solidFill>
-                      <a:prstDash val="solid"/>
-                      <a:round/>
-                      <a:headEnd type="none" w="med" len="med"/>
-                      <a:tailEnd type="none" w="med" len="med"/>
-                    </a:lnB>
-                    <a:solidFill>
-                      <a:srgbClr val="FFFFFF"/>
-                    </a:solidFill>
-                  </a:tcPr>
-                </a:tc>
-                <a:tc>
-                  <a:txBody>
-                    <a:bodyPr/>
-                    <a:lstStyle/>
-                    <a:p>
-                      <a:pPr algn="ctr" indent="0" marL="0">
-                        <a:buNone/>
-                      </a:pPr>
-                      <a:r>
-                        <a:rPr lang="en-US" sz="800" dirty="0">
-                          <a:solidFill>
-                            <a:srgbClr val="000000"/>
-                          </a:solidFill>
-                          <a:latin typeface="Arial" pitchFamily="34" charset="0"/>
-                          <a:ea typeface="Arial" pitchFamily="34" charset="-122"/>
-                          <a:cs typeface="Arial" pitchFamily="34" charset="-120"/>
-                        </a:rPr>
-                        <a:t>8.57</a:t>
                       </a:r>
                       <a:endParaRPr lang="en-US" sz="800" dirty="0">
                         <a:latin typeface="Arial" charset="0"/>
@@ -6629,7 +6629,7 @@
                 <a:ea typeface="Arial" pitchFamily="34" charset="-122"/>
                 <a:cs typeface="Arial" pitchFamily="34" charset="-120"/>
               </a:rPr>
-              <a:t>48件（71.6%）</a:t>
+              <a:t>49件（72.1%）</a:t>
             </a:r>
             <a:endParaRPr lang="en-US" sz="1600" dirty="0"/>
           </a:p>
@@ -6727,7 +6727,7 @@
                 <a:ea typeface="Arial" pitchFamily="34" charset="-122"/>
                 <a:cs typeface="Arial" pitchFamily="34" charset="-120"/>
               </a:rPr>
-              <a:t>18件（26.9%）</a:t>
+              <a:t>18件（26.5%）</a:t>
             </a:r>
             <a:endParaRPr lang="en-US" sz="1600" dirty="0"/>
           </a:p>
@@ -6987,7 +6987,7 @@
                 <a:ea typeface="Arial" pitchFamily="34" charset="-122"/>
                 <a:cs typeface="Arial" pitchFamily="34" charset="-120"/>
               </a:rPr>
-              <a:t>高評価レビュー（8-10点: 48件）の分析から、主要な強みテーマを抽出しています。立地・アクセス、客室清潔感、スタッフ対応が高評価の中心的テーマです。</a:t>
+              <a:t>高評価レビュー（8-10点: 49件）の分析から、主要な強みテーマを抽出しています。立地・アクセス、客室清潔感、スタッフ対応が高評価の中心的テーマです。</a:t>
             </a:r>
             <a:endParaRPr lang="en-US" sz="1200" dirty="0"/>
           </a:p>
@@ -8027,7 +8027,7 @@
                 <a:ea typeface="Arial" pitchFamily="34" charset="-122"/>
                 <a:cs typeface="Arial" pitchFamily="34" charset="-120"/>
               </a:rPr>
-              <a:t>全体平均 8.19点 → 目標 8.69点</a:t>
+              <a:t>全体平均 8.22点 → 目標 8.72点</a:t>
             </a:r>
             <a:endParaRPr lang="en-US" sz="1200" dirty="0"/>
           </a:p>
@@ -8044,7 +8044,7 @@
                 <a:ea typeface="Arial" pitchFamily="34" charset="-122"/>
                 <a:cs typeface="Arial" pitchFamily="34" charset="-120"/>
               </a:rPr>
-              <a:t>高評価率 71.6% → 目標 76.6%</a:t>
+              <a:t>高評価率 72.1% → 目標 77.1%</a:t>
             </a:r>
             <a:endParaRPr lang="en-US" sz="1200" dirty="0"/>
           </a:p>

--- a/納品レポート/ホテル別レポート/apa_sagamihara_口コミ分析レポート.pptx
+++ b/納品レポート/ホテル別レポート/apa_sagamihara_口コミ分析レポート.pptx
@@ -2784,7 +2784,7 @@
                 <a:ea typeface="Arial" pitchFamily="34" charset="-122"/>
                 <a:cs typeface="Arial" pitchFamily="34" charset="-120"/>
               </a:rPr>
-              <a:t>作成日：2026年4月2日</a:t>
+              <a:t>作成日：2026年4月5日</a:t>
             </a:r>
             <a:endParaRPr lang="en-US" sz="1000" dirty="0"/>
           </a:p>

--- a/納品レポート/ホテル別レポート/apa_sagamihara_口コミ分析レポート.pptx
+++ b/納品レポート/ホテル別レポート/apa_sagamihara_口コミ分析レポート.pptx
@@ -180,22 +180,22 @@
                 <c:ptCount val="6"/>
                 <c:lvl>
                   <c:pt idx="0">
-                    <c:v>じゃらん</c:v>
+                    <c:v>Google</c:v>
                   </c:pt>
                   <c:pt idx="1">
-                    <c:v>Google</c:v>
+                    <c:v>Agoda</c:v>
                   </c:pt>
                   <c:pt idx="2">
-                    <c:v>Trip.com</c:v>
+                    <c:v>じゃらん</c:v>
                   </c:pt>
                   <c:pt idx="3">
                     <c:v>Booking.com</c:v>
                   </c:pt>
                   <c:pt idx="4">
-                    <c:v>Agoda</c:v>
+                    <c:v>楽天トラベル</c:v>
                   </c:pt>
                   <c:pt idx="5">
-                    <c:v>楽天トラベル</c:v>
+                    <c:v>Trip.com</c:v>
                   </c:pt>
                 </c:lvl>
               </c:multiLvlStrCache>
@@ -208,22 +208,22 @@
                 <c:formatCode>General</c:formatCode>
                 <c:ptCount val="6"/>
                 <c:pt idx="0">
-                  <c:v>8.91</c:v>
+                  <c:v>8.67</c:v>
                 </c:pt>
                 <c:pt idx="1">
-                  <c:v>8.75</c:v>
+                  <c:v>8.17</c:v>
                 </c:pt>
                 <c:pt idx="2">
-                  <c:v>8.67</c:v>
+                  <c:v>8</c:v>
                 </c:pt>
                 <c:pt idx="3">
-                  <c:v>8</c:v>
+                  <c:v>7.89</c:v>
                 </c:pt>
                 <c:pt idx="4">
-                  <c:v>7.88</c:v>
+                  <c:v>7.67</c:v>
                 </c:pt>
                 <c:pt idx="5">
-                  <c:v>7.88</c:v>
+                  <c:v>6</c:v>
                 </c:pt>
               </c:numCache>
             </c:numRef>
@@ -566,13 +566,13 @@
               <c:numCache>
                 <c:ptCount val="3"/>
                 <c:pt idx="0">
-                  <c:v>49</c:v>
+                  <c:v>20</c:v>
                 </c:pt>
                 <c:pt idx="1">
-                  <c:v>18</c:v>
+                  <c:v>10</c:v>
                 </c:pt>
                 <c:pt idx="2">
-                  <c:v>1</c:v>
+                  <c:v>0</c:v>
                 </c:pt>
               </c:numCache>
             </c:numRef>
@@ -735,33 +735,11 @@
               <a:effectLst/>
             </c:spPr>
           </c:dPt>
-          <c:dPt>
-            <c:idx val="5"/>
-            <c:invertIfNegative val="0"/>
-            <c:bubble3D val="0"/>
-            <c:spPr>
-              <a:solidFill>
-                <a:srgbClr val="D4A843"/>
-              </a:solidFill>
-              <a:effectLst/>
-            </c:spPr>
-          </c:dPt>
-          <c:dPt>
-            <c:idx val="6"/>
-            <c:invertIfNegative val="0"/>
-            <c:bubble3D val="0"/>
-            <c:spPr>
-              <a:solidFill>
-                <a:srgbClr val="DC2626"/>
-              </a:solidFill>
-              <a:effectLst/>
-            </c:spPr>
-          </c:dPt>
           <c:cat>
             <c:multiLvlStrRef>
-              <c:f>Sheet1!$A$2:$A$8</c:f>
+              <c:f>Sheet1!$A$2:$A$6</c:f>
               <c:multiLvlStrCache>
-                <c:ptCount val="7"/>
+                <c:ptCount val="5"/>
                 <c:lvl>
                   <c:pt idx="0">
                     <c:v>10点</c:v>
@@ -778,42 +756,30 @@
                   <c:pt idx="4">
                     <c:v>6点</c:v>
                   </c:pt>
-                  <c:pt idx="5">
-                    <c:v>5点</c:v>
-                  </c:pt>
-                  <c:pt idx="6">
-                    <c:v>4点</c:v>
-                  </c:pt>
                 </c:lvl>
               </c:multiLvlStrCache>
             </c:multiLvlStrRef>
           </c:cat>
           <c:val>
             <c:numRef>
-              <c:f>Sheet1!$B$2:$B$8</c:f>
+              <c:f>Sheet1!$B$2:$B$6</c:f>
               <c:numCache>
                 <c:formatCode>General</c:formatCode>
-                <c:ptCount val="7"/>
+                <c:ptCount val="5"/>
                 <c:pt idx="0">
-                  <c:v>22</c:v>
+                  <c:v>6</c:v>
                 </c:pt>
                 <c:pt idx="1">
+                  <c:v>3</c:v>
+                </c:pt>
+                <c:pt idx="2">
+                  <c:v>11</c:v>
+                </c:pt>
+                <c:pt idx="3">
                   <c:v>5</c:v>
                 </c:pt>
-                <c:pt idx="2">
-                  <c:v>22</c:v>
-                </c:pt>
-                <c:pt idx="3">
-                  <c:v>8</c:v>
-                </c:pt>
                 <c:pt idx="4">
-                  <c:v>8</c:v>
-                </c:pt>
-                <c:pt idx="5">
-                  <c:v>2</c:v>
-                </c:pt>
-                <c:pt idx="6">
-                  <c:v>1</c:v>
+                  <c:v>5</c:v>
                 </c:pt>
               </c:numCache>
             </c:numRef>
@@ -2744,7 +2710,7 @@
                 <a:ea typeface="Arial" pitchFamily="34" charset="-122"/>
                 <a:cs typeface="Arial" pitchFamily="34" charset="-120"/>
               </a:rPr>
-              <a:t>分析対象期間：2026年2月〜3月</a:t>
+              <a:t>分析対象期間：2026年3月</a:t>
             </a:r>
             <a:endParaRPr lang="en-US" sz="1000" dirty="0"/>
           </a:p>
@@ -2764,7 +2730,7 @@
                 <a:ea typeface="Arial" pitchFamily="34" charset="-122"/>
                 <a:cs typeface="Arial" pitchFamily="34" charset="-120"/>
               </a:rPr>
-              <a:t>レビュー総数：68件（6サイト）</a:t>
+              <a:t>レビュー総数：30件（6サイト）</a:t>
             </a:r>
             <a:endParaRPr lang="en-US" sz="1000" dirty="0"/>
           </a:p>
@@ -3330,7 +3296,7 @@
                           <a:ea typeface="Arial" pitchFamily="34" charset="-122"/>
                           <a:cs typeface="Arial" pitchFamily="34" charset="-120"/>
                         </a:rPr>
-                        <a:t>8.22点</a:t>
+                        <a:t>8.00点</a:t>
                       </a:r>
                       <a:endParaRPr lang="en-US" sz="1000" dirty="0">
                         <a:latin typeface="Arial" charset="0"/>
@@ -3398,7 +3364,7 @@
                           <a:ea typeface="Arial" pitchFamily="34" charset="-122"/>
                           <a:cs typeface="Arial" pitchFamily="34" charset="-120"/>
                         </a:rPr>
-                        <a:t>8.5点以上</a:t>
+                        <a:t>8.3点以上</a:t>
                       </a:r>
                       <a:endParaRPr lang="en-US" sz="1000" dirty="0">
                         <a:latin typeface="Arial" charset="0"/>
@@ -3604,7 +3570,7 @@
                           <a:ea typeface="Arial" pitchFamily="34" charset="-122"/>
                           <a:cs typeface="Arial" pitchFamily="34" charset="-120"/>
                         </a:rPr>
-                        <a:t>72.1%</a:t>
+                        <a:t>66.7%</a:t>
                       </a:r>
                       <a:endParaRPr lang="en-US" sz="1000" dirty="0">
                         <a:latin typeface="Arial" charset="0"/>
@@ -3878,7 +3844,7 @@
                           <a:ea typeface="Arial" pitchFamily="34" charset="-122"/>
                           <a:cs typeface="Arial" pitchFamily="34" charset="-120"/>
                         </a:rPr>
-                        <a:t>1.5%</a:t>
+                        <a:t>0.0%</a:t>
                       </a:r>
                       <a:endParaRPr lang="en-US" sz="1000" dirty="0">
                         <a:latin typeface="Arial" charset="0"/>
@@ -4084,6 +4050,280 @@
                           <a:ea typeface="Arial" pitchFamily="34" charset="-122"/>
                           <a:cs typeface="Arial" pitchFamily="34" charset="-120"/>
                         </a:rPr>
+                        <a:t>Trip.com平均評価</a:t>
+                      </a:r>
+                      <a:endParaRPr lang="en-US" sz="1000" dirty="0">
+                        <a:latin typeface="Arial" charset="0"/>
+                        <a:ea typeface="Arial" charset="0"/>
+                        <a:cs typeface="Arial" charset="0"/>
+                      </a:endParaRPr>
+                    </a:p>
+                  </a:txBody>
+                  <a:tcPr marL="91440" marR="91440" marT="45720" marB="45720">
+                    <a:lnL w="6350" cap="flat" cmpd="sng" algn="ctr">
+                      <a:solidFill>
+                        <a:srgbClr val="CBD5E1"/>
+                      </a:solidFill>
+                      <a:prstDash val="solid"/>
+                      <a:round/>
+                      <a:headEnd type="none" w="med" len="med"/>
+                      <a:tailEnd type="none" w="med" len="med"/>
+                    </a:lnL>
+                    <a:lnR w="6350" cap="flat" cmpd="sng" algn="ctr">
+                      <a:solidFill>
+                        <a:srgbClr val="CBD5E1"/>
+                      </a:solidFill>
+                      <a:prstDash val="solid"/>
+                      <a:round/>
+                      <a:headEnd type="none" w="med" len="med"/>
+                      <a:tailEnd type="none" w="med" len="med"/>
+                    </a:lnR>
+                    <a:lnT w="6350" cap="flat" cmpd="sng" algn="ctr">
+                      <a:solidFill>
+                        <a:srgbClr val="CBD5E1"/>
+                      </a:solidFill>
+                      <a:prstDash val="solid"/>
+                      <a:round/>
+                      <a:headEnd type="none" w="med" len="med"/>
+                      <a:tailEnd type="none" w="med" len="med"/>
+                    </a:lnT>
+                    <a:lnB w="6350" cap="flat" cmpd="sng" algn="ctr">
+                      <a:solidFill>
+                        <a:srgbClr val="CBD5E1"/>
+                      </a:solidFill>
+                      <a:prstDash val="solid"/>
+                      <a:round/>
+                      <a:headEnd type="none" w="med" len="med"/>
+                      <a:tailEnd type="none" w="med" len="med"/>
+                    </a:lnB>
+                    <a:solidFill>
+                      <a:srgbClr val="FFFFFF"/>
+                    </a:solidFill>
+                  </a:tcPr>
+                </a:tc>
+                <a:tc>
+                  <a:txBody>
+                    <a:bodyPr/>
+                    <a:lstStyle/>
+                    <a:p>
+                      <a:pPr algn="ctr" indent="0" marL="0">
+                        <a:buNone/>
+                      </a:pPr>
+                      <a:r>
+                        <a:rPr lang="en-US" sz="1000" dirty="0">
+                          <a:solidFill>
+                            <a:srgbClr val="64748B"/>
+                          </a:solidFill>
+                          <a:latin typeface="Arial" pitchFamily="34" charset="0"/>
+                          <a:ea typeface="Arial" pitchFamily="34" charset="-122"/>
+                          <a:cs typeface="Arial" pitchFamily="34" charset="-120"/>
+                        </a:rPr>
+                        <a:t>6.0点</a:t>
+                      </a:r>
+                      <a:endParaRPr lang="en-US" sz="1000" dirty="0">
+                        <a:latin typeface="Arial" charset="0"/>
+                        <a:ea typeface="Arial" charset="0"/>
+                        <a:cs typeface="Arial" charset="0"/>
+                      </a:endParaRPr>
+                    </a:p>
+                  </a:txBody>
+                  <a:tcPr marL="91440" marR="91440" marT="45720" marB="45720">
+                    <a:lnL w="6350" cap="flat" cmpd="sng" algn="ctr">
+                      <a:solidFill>
+                        <a:srgbClr val="CBD5E1"/>
+                      </a:solidFill>
+                      <a:prstDash val="solid"/>
+                      <a:round/>
+                      <a:headEnd type="none" w="med" len="med"/>
+                      <a:tailEnd type="none" w="med" len="med"/>
+                    </a:lnL>
+                    <a:lnR w="6350" cap="flat" cmpd="sng" algn="ctr">
+                      <a:solidFill>
+                        <a:srgbClr val="CBD5E1"/>
+                      </a:solidFill>
+                      <a:prstDash val="solid"/>
+                      <a:round/>
+                      <a:headEnd type="none" w="med" len="med"/>
+                      <a:tailEnd type="none" w="med" len="med"/>
+                    </a:lnR>
+                    <a:lnT w="6350" cap="flat" cmpd="sng" algn="ctr">
+                      <a:solidFill>
+                        <a:srgbClr val="CBD5E1"/>
+                      </a:solidFill>
+                      <a:prstDash val="solid"/>
+                      <a:round/>
+                      <a:headEnd type="none" w="med" len="med"/>
+                      <a:tailEnd type="none" w="med" len="med"/>
+                    </a:lnT>
+                    <a:lnB w="6350" cap="flat" cmpd="sng" algn="ctr">
+                      <a:solidFill>
+                        <a:srgbClr val="CBD5E1"/>
+                      </a:solidFill>
+                      <a:prstDash val="solid"/>
+                      <a:round/>
+                      <a:headEnd type="none" w="med" len="med"/>
+                      <a:tailEnd type="none" w="med" len="med"/>
+                    </a:lnB>
+                    <a:solidFill>
+                      <a:srgbClr val="FFFFFF"/>
+                    </a:solidFill>
+                  </a:tcPr>
+                </a:tc>
+                <a:tc>
+                  <a:txBody>
+                    <a:bodyPr/>
+                    <a:lstStyle/>
+                    <a:p>
+                      <a:pPr algn="ctr" indent="0" marL="0">
+                        <a:buNone/>
+                      </a:pPr>
+                      <a:r>
+                        <a:rPr lang="en-US" sz="1000" b="1" dirty="0">
+                          <a:solidFill>
+                            <a:srgbClr val="16A34A"/>
+                          </a:solidFill>
+                          <a:latin typeface="Arial" pitchFamily="34" charset="0"/>
+                          <a:ea typeface="Arial" pitchFamily="34" charset="-122"/>
+                          <a:cs typeface="Arial" pitchFamily="34" charset="-120"/>
+                        </a:rPr>
+                        <a:t>7.0点以上</a:t>
+                      </a:r>
+                      <a:endParaRPr lang="en-US" sz="1000" dirty="0">
+                        <a:latin typeface="Arial" charset="0"/>
+                        <a:ea typeface="Arial" charset="0"/>
+                        <a:cs typeface="Arial" charset="0"/>
+                      </a:endParaRPr>
+                    </a:p>
+                  </a:txBody>
+                  <a:tcPr marL="91440" marR="91440" marT="45720" marB="45720">
+                    <a:lnL w="6350" cap="flat" cmpd="sng" algn="ctr">
+                      <a:solidFill>
+                        <a:srgbClr val="CBD5E1"/>
+                      </a:solidFill>
+                      <a:prstDash val="solid"/>
+                      <a:round/>
+                      <a:headEnd type="none" w="med" len="med"/>
+                      <a:tailEnd type="none" w="med" len="med"/>
+                    </a:lnL>
+                    <a:lnR w="6350" cap="flat" cmpd="sng" algn="ctr">
+                      <a:solidFill>
+                        <a:srgbClr val="CBD5E1"/>
+                      </a:solidFill>
+                      <a:prstDash val="solid"/>
+                      <a:round/>
+                      <a:headEnd type="none" w="med" len="med"/>
+                      <a:tailEnd type="none" w="med" len="med"/>
+                    </a:lnR>
+                    <a:lnT w="6350" cap="flat" cmpd="sng" algn="ctr">
+                      <a:solidFill>
+                        <a:srgbClr val="CBD5E1"/>
+                      </a:solidFill>
+                      <a:prstDash val="solid"/>
+                      <a:round/>
+                      <a:headEnd type="none" w="med" len="med"/>
+                      <a:tailEnd type="none" w="med" len="med"/>
+                    </a:lnT>
+                    <a:lnB w="6350" cap="flat" cmpd="sng" algn="ctr">
+                      <a:solidFill>
+                        <a:srgbClr val="CBD5E1"/>
+                      </a:solidFill>
+                      <a:prstDash val="solid"/>
+                      <a:round/>
+                      <a:headEnd type="none" w="med" len="med"/>
+                      <a:tailEnd type="none" w="med" len="med"/>
+                    </a:lnB>
+                    <a:solidFill>
+                      <a:srgbClr val="FFFFFF"/>
+                    </a:solidFill>
+                  </a:tcPr>
+                </a:tc>
+                <a:tc>
+                  <a:txBody>
+                    <a:bodyPr/>
+                    <a:lstStyle/>
+                    <a:p>
+                      <a:pPr algn="ctr" indent="0" marL="0">
+                        <a:buNone/>
+                      </a:pPr>
+                      <a:r>
+                        <a:rPr lang="en-US" sz="1000" dirty="0">
+                          <a:solidFill>
+                            <a:srgbClr val="64748B"/>
+                          </a:solidFill>
+                          <a:latin typeface="Arial" pitchFamily="34" charset="0"/>
+                          <a:ea typeface="Arial" pitchFamily="34" charset="-122"/>
+                          <a:cs typeface="Arial" pitchFamily="34" charset="-120"/>
+                        </a:rPr>
+                        <a:t>2026年9月</a:t>
+                      </a:r>
+                      <a:endParaRPr lang="en-US" sz="1000" dirty="0">
+                        <a:latin typeface="Arial" charset="0"/>
+                        <a:ea typeface="Arial" charset="0"/>
+                        <a:cs typeface="Arial" charset="0"/>
+                      </a:endParaRPr>
+                    </a:p>
+                  </a:txBody>
+                  <a:tcPr marL="91440" marR="91440" marT="45720" marB="45720">
+                    <a:lnL w="6350" cap="flat" cmpd="sng" algn="ctr">
+                      <a:solidFill>
+                        <a:srgbClr val="CBD5E1"/>
+                      </a:solidFill>
+                      <a:prstDash val="solid"/>
+                      <a:round/>
+                      <a:headEnd type="none" w="med" len="med"/>
+                      <a:tailEnd type="none" w="med" len="med"/>
+                    </a:lnL>
+                    <a:lnR w="6350" cap="flat" cmpd="sng" algn="ctr">
+                      <a:solidFill>
+                        <a:srgbClr val="CBD5E1"/>
+                      </a:solidFill>
+                      <a:prstDash val="solid"/>
+                      <a:round/>
+                      <a:headEnd type="none" w="med" len="med"/>
+                      <a:tailEnd type="none" w="med" len="med"/>
+                    </a:lnR>
+                    <a:lnT w="6350" cap="flat" cmpd="sng" algn="ctr">
+                      <a:solidFill>
+                        <a:srgbClr val="CBD5E1"/>
+                      </a:solidFill>
+                      <a:prstDash val="solid"/>
+                      <a:round/>
+                      <a:headEnd type="none" w="med" len="med"/>
+                      <a:tailEnd type="none" w="med" len="med"/>
+                    </a:lnT>
+                    <a:lnB w="6350" cap="flat" cmpd="sng" algn="ctr">
+                      <a:solidFill>
+                        <a:srgbClr val="CBD5E1"/>
+                      </a:solidFill>
+                      <a:prstDash val="solid"/>
+                      <a:round/>
+                      <a:headEnd type="none" w="med" len="med"/>
+                      <a:tailEnd type="none" w="med" len="med"/>
+                    </a:lnB>
+                    <a:solidFill>
+                      <a:srgbClr val="FFFFFF"/>
+                    </a:solidFill>
+                  </a:tcPr>
+                </a:tc>
+              </a:tr>
+              <a:tr h="320040">
+                <a:tc>
+                  <a:txBody>
+                    <a:bodyPr/>
+                    <a:lstStyle/>
+                    <a:p>
+                      <a:pPr indent="0" marL="0">
+                        <a:buNone/>
+                      </a:pPr>
+                      <a:r>
+                        <a:rPr lang="en-US" sz="1000" b="1" dirty="0">
+                          <a:solidFill>
+                            <a:srgbClr val="334155"/>
+                          </a:solidFill>
+                          <a:latin typeface="Arial" pitchFamily="34" charset="0"/>
+                          <a:ea typeface="Arial" pitchFamily="34" charset="-122"/>
+                          <a:cs typeface="Arial" pitchFamily="34" charset="-120"/>
+                        </a:rPr>
                         <a:t>口コミ返信率</a:t>
                       </a:r>
                       <a:endParaRPr lang="en-US" sz="1000" dirty="0">
@@ -4131,7 +4371,7 @@
                       <a:tailEnd type="none" w="med" len="med"/>
                     </a:lnB>
                     <a:solidFill>
-                      <a:srgbClr val="FFFFFF"/>
+                      <a:srgbClr val="E8EFF8"/>
                     </a:solidFill>
                   </a:tcPr>
                 </a:tc>
@@ -4199,7 +4439,7 @@
                       <a:tailEnd type="none" w="med" len="med"/>
                     </a:lnB>
                     <a:solidFill>
-                      <a:srgbClr val="FFFFFF"/>
+                      <a:srgbClr val="E8EFF8"/>
                     </a:solidFill>
                   </a:tcPr>
                 </a:tc>
@@ -4267,7 +4507,7 @@
                       <a:tailEnd type="none" w="med" len="med"/>
                     </a:lnB>
                     <a:solidFill>
-                      <a:srgbClr val="FFFFFF"/>
+                      <a:srgbClr val="E8EFF8"/>
                     </a:solidFill>
                   </a:tcPr>
                 </a:tc>
@@ -4335,7 +4575,7 @@
                       <a:tailEnd type="none" w="med" len="med"/>
                     </a:lnB>
                     <a:solidFill>
-                      <a:srgbClr val="FFFFFF"/>
+                      <a:srgbClr val="E8EFF8"/>
                     </a:solidFill>
                   </a:tcPr>
                 </a:tc>
@@ -4405,7 +4645,7 @@
                       <a:tailEnd type="none" w="med" len="med"/>
                     </a:lnB>
                     <a:solidFill>
-                      <a:srgbClr val="E8EFF8"/>
+                      <a:srgbClr val="FFFFFF"/>
                     </a:solidFill>
                   </a:tcPr>
                 </a:tc>
@@ -4426,7 +4666,7 @@
                           <a:ea typeface="Arial" pitchFamily="34" charset="-122"/>
                           <a:cs typeface="Arial" pitchFamily="34" charset="-120"/>
                         </a:rPr>
-                        <a:t>約7件/期間</a:t>
+                        <a:t>約3件/期間</a:t>
                       </a:r>
                       <a:endParaRPr lang="en-US" sz="1000" dirty="0">
                         <a:latin typeface="Arial" charset="0"/>
@@ -4473,7 +4713,7 @@
                       <a:tailEnd type="none" w="med" len="med"/>
                     </a:lnB>
                     <a:solidFill>
-                      <a:srgbClr val="E8EFF8"/>
+                      <a:srgbClr val="FFFFFF"/>
                     </a:solidFill>
                   </a:tcPr>
                 </a:tc>
@@ -4494,7 +4734,7 @@
                           <a:ea typeface="Arial" pitchFamily="34" charset="-122"/>
                           <a:cs typeface="Arial" pitchFamily="34" charset="-120"/>
                         </a:rPr>
-                        <a:t>3件以下</a:t>
+                        <a:t>1件以下</a:t>
                       </a:r>
                       <a:endParaRPr lang="en-US" sz="1000" dirty="0">
                         <a:latin typeface="Arial" charset="0"/>
@@ -4541,7 +4781,7 @@
                       <a:tailEnd type="none" w="med" len="med"/>
                     </a:lnB>
                     <a:solidFill>
-                      <a:srgbClr val="E8EFF8"/>
+                      <a:srgbClr val="FFFFFF"/>
                     </a:solidFill>
                   </a:tcPr>
                 </a:tc>
@@ -4609,7 +4849,7 @@
                       <a:tailEnd type="none" w="med" len="med"/>
                     </a:lnB>
                     <a:solidFill>
-                      <a:srgbClr val="E8EFF8"/>
+                      <a:srgbClr val="FFFFFF"/>
                     </a:solidFill>
                   </a:tcPr>
                 </a:tc>
@@ -4626,7 +4866,7 @@
         </p:nvSpPr>
         <p:spPr>
           <a:xfrm>
-            <a:off x="457200" y="3108960"/>
+            <a:off x="457200" y="3429000"/>
             <a:ext cx="8229600" cy="640080"/>
           </a:xfrm>
           <a:prstGeom prst="rect">
@@ -4653,7 +4893,7 @@
         </p:nvSpPr>
         <p:spPr>
           <a:xfrm>
-            <a:off x="457200" y="3108960"/>
+            <a:off x="457200" y="3429000"/>
             <a:ext cx="54864" cy="640080"/>
           </a:xfrm>
           <a:prstGeom prst="rect">
@@ -4673,7 +4913,7 @@
         </p:nvSpPr>
         <p:spPr>
           <a:xfrm>
-            <a:off x="640080" y="3108960"/>
+            <a:off x="640080" y="3429000"/>
             <a:ext cx="7863840" cy="640080"/>
           </a:xfrm>
           <a:prstGeom prst="rect">
@@ -5065,7 +5305,7 @@
                 <a:ea typeface="Arial" pitchFamily="34" charset="-122"/>
                 <a:cs typeface="Arial" pitchFamily="34" charset="-120"/>
               </a:rPr>
-              <a:t>8.22</a:t>
+              <a:t>8.00</a:t>
             </a:r>
             <a:endParaRPr lang="en-US" sz="3200" dirty="0"/>
           </a:p>
@@ -5190,7 +5430,7 @@
                 <a:ea typeface="Arial" pitchFamily="34" charset="-122"/>
                 <a:cs typeface="Arial" pitchFamily="34" charset="-120"/>
               </a:rPr>
-              <a:t>72.1%</a:t>
+              <a:t>66.7%</a:t>
             </a:r>
             <a:endParaRPr lang="en-US" sz="3200" dirty="0"/>
           </a:p>
@@ -5315,7 +5555,7 @@
                 <a:ea typeface="Arial" pitchFamily="34" charset="-122"/>
                 <a:cs typeface="Arial" pitchFamily="34" charset="-120"/>
               </a:rPr>
-              <a:t>1.5%</a:t>
+              <a:t>0.0%</a:t>
             </a:r>
             <a:endParaRPr lang="en-US" sz="3200" dirty="0"/>
           </a:p>
@@ -5440,7 +5680,7 @@
                 <a:ea typeface="Arial" pitchFamily="34" charset="-122"/>
                 <a:cs typeface="Arial" pitchFamily="34" charset="-120"/>
               </a:rPr>
-              <a:t>68件</a:t>
+              <a:t>30件</a:t>
             </a:r>
             <a:endParaRPr lang="en-US" sz="3200" dirty="0"/>
           </a:p>
@@ -5568,6 +5808,46 @@
                 <a:ea typeface="Arial" pitchFamily="34" charset="-122"/>
                 <a:cs typeface="Arial" pitchFamily="34" charset="-120"/>
               </a:rPr>
+              <a:t>快適さ・設備 </a:t>
+            </a:r>
+            <a:endParaRPr lang="en-US" sz="1100" dirty="0"/>
+          </a:p>
+          <a:p>
+            <a:pPr indent="0" marL="0">
+              <a:spcAft>
+                <a:spcPts val="200"/>
+              </a:spcAft>
+              <a:buNone/>
+            </a:pPr>
+            <a:r>
+              <a:rPr lang="en-US" sz="900" dirty="0">
+                <a:solidFill>
+                  <a:srgbClr val="64748B"/>
+                </a:solidFill>
+                <a:latin typeface="Arial" pitchFamily="34" charset="0"/>
+                <a:ea typeface="Arial" pitchFamily="34" charset="-122"/>
+                <a:cs typeface="Arial" pitchFamily="34" charset="-120"/>
+              </a:rPr>
+              <a:t>  部屋は清潔感あるし、浴衣あったりアメニティなども充実してる</a:t>
+            </a:r>
+            <a:endParaRPr lang="en-US" sz="1100" dirty="0"/>
+          </a:p>
+          <a:p>
+            <a:pPr indent="0" marL="0">
+              <a:spcAft>
+                <a:spcPts val="200"/>
+              </a:spcAft>
+              <a:buNone/>
+            </a:pPr>
+            <a:r>
+              <a:rPr lang="en-US" sz="1100" b="1" dirty="0">
+                <a:solidFill>
+                  <a:srgbClr val="334155"/>
+                </a:solidFill>
+                <a:latin typeface="Arial" pitchFamily="34" charset="0"/>
+                <a:ea typeface="Arial" pitchFamily="34" charset="-122"/>
+                <a:cs typeface="Arial" pitchFamily="34" charset="-120"/>
+              </a:rPr>
               <a:t>立地・アクセス </a:t>
             </a:r>
             <a:endParaRPr lang="en-US" sz="1100" dirty="0"/>
@@ -5608,7 +5888,7 @@
                 <a:ea typeface="Arial" pitchFamily="34" charset="-122"/>
                 <a:cs typeface="Arial" pitchFamily="34" charset="-120"/>
               </a:rPr>
-              <a:t>快適さ・設備 </a:t>
+              <a:t>清潔さ・清掃 </a:t>
             </a:r>
             <a:endParaRPr lang="en-US" sz="1100" dirty="0"/>
           </a:p>
@@ -5632,46 +5912,6 @@
             </a:r>
             <a:endParaRPr lang="en-US" sz="1100" dirty="0"/>
           </a:p>
-          <a:p>
-            <a:pPr indent="0" marL="0">
-              <a:spcAft>
-                <a:spcPts val="200"/>
-              </a:spcAft>
-              <a:buNone/>
-            </a:pPr>
-            <a:r>
-              <a:rPr lang="en-US" sz="1100" b="1" dirty="0">
-                <a:solidFill>
-                  <a:srgbClr val="334155"/>
-                </a:solidFill>
-                <a:latin typeface="Arial" pitchFamily="34" charset="0"/>
-                <a:ea typeface="Arial" pitchFamily="34" charset="-122"/>
-                <a:cs typeface="Arial" pitchFamily="34" charset="-120"/>
-              </a:rPr>
-              <a:t>スタッフの対応 </a:t>
-            </a:r>
-            <a:endParaRPr lang="en-US" sz="1100" dirty="0"/>
-          </a:p>
-          <a:p>
-            <a:pPr indent="0" marL="0">
-              <a:spcAft>
-                <a:spcPts val="200"/>
-              </a:spcAft>
-              <a:buNone/>
-            </a:pPr>
-            <a:r>
-              <a:rPr lang="en-US" sz="900" dirty="0">
-                <a:solidFill>
-                  <a:srgbClr val="64748B"/>
-                </a:solidFill>
-                <a:latin typeface="Arial" pitchFamily="34" charset="0"/>
-                <a:ea typeface="Arial" pitchFamily="34" charset="-122"/>
-                <a:cs typeface="Arial" pitchFamily="34" charset="-120"/>
-              </a:rPr>
-              <a:t>  清潔感があり、スタッフの対応が良く立地も便利です</a:t>
-            </a:r>
-            <a:endParaRPr lang="en-US" sz="1100" dirty="0"/>
-          </a:p>
         </p:txBody>
       </p:sp>
       <p:sp>
@@ -5836,6 +6076,46 @@
                 <a:ea typeface="Arial" pitchFamily="34" charset="-122"/>
                 <a:cs typeface="Arial" pitchFamily="34" charset="-120"/>
               </a:rPr>
+              <a:t>浴室・水回り </a:t>
+            </a:r>
+            <a:endParaRPr lang="en-US" sz="1100" dirty="0"/>
+          </a:p>
+          <a:p>
+            <a:pPr indent="0" marL="0">
+              <a:spcAft>
+                <a:spcPts val="200"/>
+              </a:spcAft>
+              <a:buNone/>
+            </a:pPr>
+            <a:r>
+              <a:rPr lang="en-US" sz="900" dirty="0">
+                <a:solidFill>
+                  <a:srgbClr val="64748B"/>
+                </a:solidFill>
+                <a:latin typeface="Arial" pitchFamily="34" charset="0"/>
+                <a:ea typeface="Arial" pitchFamily="34" charset="-122"/>
+                <a:cs typeface="Arial" pitchFamily="34" charset="-120"/>
+              </a:rPr>
+              <a:t>  大浴場は快適でシャワーの水圧も十分です</a:t>
+            </a:r>
+            <a:endParaRPr lang="en-US" sz="1100" dirty="0"/>
+          </a:p>
+          <a:p>
+            <a:pPr indent="0" marL="0">
+              <a:spcAft>
+                <a:spcPts val="200"/>
+              </a:spcAft>
+              <a:buNone/>
+            </a:pPr>
+            <a:r>
+              <a:rPr lang="en-US" sz="1100" b="1" dirty="0">
+                <a:solidFill>
+                  <a:srgbClr val="334155"/>
+                </a:solidFill>
+                <a:latin typeface="Arial" pitchFamily="34" charset="0"/>
+                <a:ea typeface="Arial" pitchFamily="34" charset="-122"/>
+                <a:cs typeface="Arial" pitchFamily="34" charset="-120"/>
+              </a:rPr>
               <a:t>防音性能 </a:t>
             </a:r>
             <a:endParaRPr lang="en-US" sz="1100" dirty="0"/>
@@ -5857,46 +6137,6 @@
                 <a:cs typeface="Arial" pitchFamily="34" charset="-120"/>
               </a:rPr>
               <a:t>  駅チカなだけあって、電車の音が</a:t>
-            </a:r>
-            <a:endParaRPr lang="en-US" sz="1100" dirty="0"/>
-          </a:p>
-          <a:p>
-            <a:pPr indent="0" marL="0">
-              <a:spcAft>
-                <a:spcPts val="200"/>
-              </a:spcAft>
-              <a:buNone/>
-            </a:pPr>
-            <a:r>
-              <a:rPr lang="en-US" sz="1100" b="1" dirty="0">
-                <a:solidFill>
-                  <a:srgbClr val="334155"/>
-                </a:solidFill>
-                <a:latin typeface="Arial" pitchFamily="34" charset="0"/>
-                <a:ea typeface="Arial" pitchFamily="34" charset="-122"/>
-                <a:cs typeface="Arial" pitchFamily="34" charset="-120"/>
-              </a:rPr>
-              <a:t>浴室・水回り </a:t>
-            </a:r>
-            <a:endParaRPr lang="en-US" sz="1100" dirty="0"/>
-          </a:p>
-          <a:p>
-            <a:pPr indent="0" marL="0">
-              <a:spcAft>
-                <a:spcPts val="200"/>
-              </a:spcAft>
-              <a:buNone/>
-            </a:pPr>
-            <a:r>
-              <a:rPr lang="en-US" sz="900" dirty="0">
-                <a:solidFill>
-                  <a:srgbClr val="64748B"/>
-                </a:solidFill>
-                <a:latin typeface="Arial" pitchFamily="34" charset="0"/>
-                <a:ea typeface="Arial" pitchFamily="34" charset="-122"/>
-                <a:cs typeface="Arial" pitchFamily="34" charset="-120"/>
-              </a:rPr>
-              <a:t>  大浴場は快適でシャワーの水圧も十分です</a:t>
             </a:r>
             <a:endParaRPr lang="en-US" sz="1100" dirty="0"/>
           </a:p>
@@ -6249,7 +6489,7 @@
                 <a:ea typeface="Arial" pitchFamily="34" charset="-122"/>
                 <a:cs typeface="Arial" pitchFamily="34" charset="-120"/>
               </a:rPr>
-              <a:t>8.22</a:t>
+              <a:t>8.00</a:t>
             </a:r>
             <a:endParaRPr lang="en-US" sz="3200" dirty="0"/>
           </a:p>
@@ -6374,7 +6614,7 @@
                 <a:ea typeface="Arial" pitchFamily="34" charset="-122"/>
                 <a:cs typeface="Arial" pitchFamily="34" charset="-120"/>
               </a:rPr>
-              <a:t>72.1%</a:t>
+              <a:t>66.7%</a:t>
             </a:r>
             <a:endParaRPr lang="en-US" sz="3200" dirty="0"/>
           </a:p>
@@ -6499,7 +6739,7 @@
                 <a:ea typeface="Arial" pitchFamily="34" charset="-122"/>
                 <a:cs typeface="Arial" pitchFamily="34" charset="-120"/>
               </a:rPr>
-              <a:t>1.5%</a:t>
+              <a:t>0.0%</a:t>
             </a:r>
             <a:endParaRPr lang="en-US" sz="3200" dirty="0"/>
           </a:p>
@@ -6624,7 +6864,7 @@
                 <a:ea typeface="Arial" pitchFamily="34" charset="-122"/>
                 <a:cs typeface="Arial" pitchFamily="34" charset="-120"/>
               </a:rPr>
-              <a:t>68件</a:t>
+              <a:t>30件</a:t>
             </a:r>
             <a:endParaRPr lang="en-US" sz="3200" dirty="0"/>
           </a:p>
@@ -7045,7 +7285,56 @@
                 <a:ea typeface="Arial" pitchFamily="34" charset="-122"/>
                 <a:cs typeface="Arial" pitchFamily="34" charset="-120"/>
               </a:rPr>
-              <a:t>じゃらん(8.91)が最高スコア。</a:t>
+              <a:t>Google(8.67)が最高スコア。</a:t>
+            </a:r>
+            <a:endParaRPr lang="en-US" sz="1100" dirty="0"/>
+          </a:p>
+          <a:p>
+            <a:pPr indent="0" marL="0">
+              <a:spcAft>
+                <a:spcPts val="200"/>
+              </a:spcAft>
+              <a:buNone/>
+            </a:pPr>
+            <a:endParaRPr lang="en-US" sz="1100" dirty="0"/>
+          </a:p>
+          <a:p>
+            <a:pPr indent="0" marL="0">
+              <a:spcAft>
+                <a:spcPts val="200"/>
+              </a:spcAft>
+              <a:buNone/>
+            </a:pPr>
+            <a:r>
+              <a:rPr lang="en-US" sz="1100" b="1" dirty="0">
+                <a:solidFill>
+                  <a:srgbClr val="DC2626"/>
+                </a:solidFill>
+                <a:latin typeface="Arial" pitchFamily="34" charset="0"/>
+                <a:ea typeface="Arial" pitchFamily="34" charset="-122"/>
+                <a:cs typeface="Arial" pitchFamily="34" charset="-120"/>
+              </a:rPr>
+              <a:t>改善対象サイト</a:t>
+            </a:r>
+            <a:endParaRPr lang="en-US" sz="1100" dirty="0"/>
+          </a:p>
+          <a:p>
+            <a:pPr indent="0" marL="0">
+              <a:spcAft>
+                <a:spcPts val="200"/>
+              </a:spcAft>
+              <a:buNone/>
+            </a:pPr>
+            <a:r>
+              <a:rPr lang="en-US" sz="900" dirty="0">
+                <a:solidFill>
+                  <a:srgbClr val="64748B"/>
+                </a:solidFill>
+                <a:latin typeface="Arial" pitchFamily="34" charset="0"/>
+                <a:ea typeface="Arial" pitchFamily="34" charset="-122"/>
+                <a:cs typeface="Arial" pitchFamily="34" charset="-120"/>
+              </a:rPr>
+              <a:t>Trip.com(6.0)が相対的に低い。口コミ返信の強化が急務</a:t>
             </a:r>
             <a:endParaRPr lang="en-US" sz="1100" dirty="0"/>
           </a:p>
@@ -7486,7 +7775,7 @@
                           <a:ea typeface="Arial" pitchFamily="34" charset="-122"/>
                           <a:cs typeface="Arial" pitchFamily="34" charset="-120"/>
                         </a:rPr>
-                        <a:t>じゃらん</a:t>
+                        <a:t>Google</a:t>
                       </a:r>
                       <a:endParaRPr lang="en-US" sz="900" dirty="0">
                         <a:latin typeface="Arial" charset="0"/>
@@ -7554,7 +7843,7 @@
                           <a:ea typeface="Arial" pitchFamily="34" charset="-122"/>
                           <a:cs typeface="Arial" pitchFamily="34" charset="-120"/>
                         </a:rPr>
-                        <a:t>11</a:t>
+                        <a:t>6</a:t>
                       </a:r>
                       <a:endParaRPr lang="en-US" sz="900" dirty="0">
                         <a:latin typeface="Arial" charset="0"/>
@@ -7622,7 +7911,7 @@
                           <a:ea typeface="Arial" pitchFamily="34" charset="-122"/>
                           <a:cs typeface="Arial" pitchFamily="34" charset="-120"/>
                         </a:rPr>
-                        <a:t>4.45</a:t>
+                        <a:t>4.33</a:t>
                       </a:r>
                       <a:endParaRPr lang="en-US" sz="900" dirty="0">
                         <a:latin typeface="Arial" charset="0"/>
@@ -7758,7 +8047,7 @@
                           <a:ea typeface="Arial" pitchFamily="34" charset="-122"/>
                           <a:cs typeface="Arial" pitchFamily="34" charset="-120"/>
                         </a:rPr>
-                        <a:t>8.91</a:t>
+                        <a:t>8.67</a:t>
                       </a:r>
                       <a:endParaRPr lang="en-US" sz="900" dirty="0">
                         <a:latin typeface="Arial" charset="0"/>
@@ -7828,7 +8117,7 @@
                           <a:ea typeface="Arial" pitchFamily="34" charset="-122"/>
                           <a:cs typeface="Arial" pitchFamily="34" charset="-120"/>
                         </a:rPr>
-                        <a:t>Google</a:t>
+                        <a:t>Agoda</a:t>
                       </a:r>
                       <a:endParaRPr lang="en-US" sz="900" dirty="0">
                         <a:latin typeface="Arial" charset="0"/>
@@ -7896,7 +8185,7 @@
                           <a:ea typeface="Arial" pitchFamily="34" charset="-122"/>
                           <a:cs typeface="Arial" pitchFamily="34" charset="-120"/>
                         </a:rPr>
-                        <a:t>8</a:t>
+                        <a:t>6</a:t>
                       </a:r>
                       <a:endParaRPr lang="en-US" sz="900" dirty="0">
                         <a:latin typeface="Arial" charset="0"/>
@@ -7964,7 +8253,7 @@
                           <a:ea typeface="Arial" pitchFamily="34" charset="-122"/>
                           <a:cs typeface="Arial" pitchFamily="34" charset="-120"/>
                         </a:rPr>
-                        <a:t>4.38</a:t>
+                        <a:t>8.17</a:t>
                       </a:r>
                       <a:endParaRPr lang="en-US" sz="900" dirty="0">
                         <a:latin typeface="Arial" charset="0"/>
@@ -8012,6 +8301,348 @@
                     </a:lnB>
                     <a:solidFill>
                       <a:srgbClr val="FFFFFF"/>
+                    </a:solidFill>
+                  </a:tcPr>
+                </a:tc>
+                <a:tc>
+                  <a:txBody>
+                    <a:bodyPr/>
+                    <a:lstStyle/>
+                    <a:p>
+                      <a:pPr algn="ctr" indent="0" marL="0">
+                        <a:buNone/>
+                      </a:pPr>
+                      <a:r>
+                        <a:rPr lang="en-US" sz="900" dirty="0">
+                          <a:solidFill>
+                            <a:srgbClr val="000000"/>
+                          </a:solidFill>
+                          <a:latin typeface="Arial" pitchFamily="34" charset="0"/>
+                          <a:ea typeface="Arial" pitchFamily="34" charset="-122"/>
+                          <a:cs typeface="Arial" pitchFamily="34" charset="-120"/>
+                        </a:rPr>
+                        <a:t>/10</a:t>
+                      </a:r>
+                      <a:endParaRPr lang="en-US" sz="900" dirty="0">
+                        <a:latin typeface="Arial" charset="0"/>
+                        <a:ea typeface="Arial" charset="0"/>
+                        <a:cs typeface="Arial" charset="0"/>
+                      </a:endParaRPr>
+                    </a:p>
+                  </a:txBody>
+                  <a:tcPr marL="91440" marR="91440" marT="45720" marB="45720">
+                    <a:lnL w="6350" cap="flat" cmpd="sng" algn="ctr">
+                      <a:solidFill>
+                        <a:srgbClr val="CBD5E1"/>
+                      </a:solidFill>
+                      <a:prstDash val="solid"/>
+                      <a:round/>
+                      <a:headEnd type="none" w="med" len="med"/>
+                      <a:tailEnd type="none" w="med" len="med"/>
+                    </a:lnL>
+                    <a:lnR w="6350" cap="flat" cmpd="sng" algn="ctr">
+                      <a:solidFill>
+                        <a:srgbClr val="CBD5E1"/>
+                      </a:solidFill>
+                      <a:prstDash val="solid"/>
+                      <a:round/>
+                      <a:headEnd type="none" w="med" len="med"/>
+                      <a:tailEnd type="none" w="med" len="med"/>
+                    </a:lnR>
+                    <a:lnT w="6350" cap="flat" cmpd="sng" algn="ctr">
+                      <a:solidFill>
+                        <a:srgbClr val="CBD5E1"/>
+                      </a:solidFill>
+                      <a:prstDash val="solid"/>
+                      <a:round/>
+                      <a:headEnd type="none" w="med" len="med"/>
+                      <a:tailEnd type="none" w="med" len="med"/>
+                    </a:lnT>
+                    <a:lnB w="6350" cap="flat" cmpd="sng" algn="ctr">
+                      <a:solidFill>
+                        <a:srgbClr val="CBD5E1"/>
+                      </a:solidFill>
+                      <a:prstDash val="solid"/>
+                      <a:round/>
+                      <a:headEnd type="none" w="med" len="med"/>
+                      <a:tailEnd type="none" w="med" len="med"/>
+                    </a:lnB>
+                    <a:solidFill>
+                      <a:srgbClr val="FFFFFF"/>
+                    </a:solidFill>
+                  </a:tcPr>
+                </a:tc>
+                <a:tc>
+                  <a:txBody>
+                    <a:bodyPr/>
+                    <a:lstStyle/>
+                    <a:p>
+                      <a:pPr algn="ctr" indent="0" marL="0">
+                        <a:buNone/>
+                      </a:pPr>
+                      <a:r>
+                        <a:rPr lang="en-US" sz="900" dirty="0">
+                          <a:solidFill>
+                            <a:srgbClr val="000000"/>
+                          </a:solidFill>
+                          <a:latin typeface="Arial" pitchFamily="34" charset="0"/>
+                          <a:ea typeface="Arial" pitchFamily="34" charset="-122"/>
+                          <a:cs typeface="Arial" pitchFamily="34" charset="-120"/>
+                        </a:rPr>
+                        <a:t>8.17</a:t>
+                      </a:r>
+                      <a:endParaRPr lang="en-US" sz="900" dirty="0">
+                        <a:latin typeface="Arial" charset="0"/>
+                        <a:ea typeface="Arial" charset="0"/>
+                        <a:cs typeface="Arial" charset="0"/>
+                      </a:endParaRPr>
+                    </a:p>
+                  </a:txBody>
+                  <a:tcPr marL="91440" marR="91440" marT="45720" marB="45720">
+                    <a:lnL w="6350" cap="flat" cmpd="sng" algn="ctr">
+                      <a:solidFill>
+                        <a:srgbClr val="CBD5E1"/>
+                      </a:solidFill>
+                      <a:prstDash val="solid"/>
+                      <a:round/>
+                      <a:headEnd type="none" w="med" len="med"/>
+                      <a:tailEnd type="none" w="med" len="med"/>
+                    </a:lnL>
+                    <a:lnR w="6350" cap="flat" cmpd="sng" algn="ctr">
+                      <a:solidFill>
+                        <a:srgbClr val="CBD5E1"/>
+                      </a:solidFill>
+                      <a:prstDash val="solid"/>
+                      <a:round/>
+                      <a:headEnd type="none" w="med" len="med"/>
+                      <a:tailEnd type="none" w="med" len="med"/>
+                    </a:lnR>
+                    <a:lnT w="6350" cap="flat" cmpd="sng" algn="ctr">
+                      <a:solidFill>
+                        <a:srgbClr val="CBD5E1"/>
+                      </a:solidFill>
+                      <a:prstDash val="solid"/>
+                      <a:round/>
+                      <a:headEnd type="none" w="med" len="med"/>
+                      <a:tailEnd type="none" w="med" len="med"/>
+                    </a:lnT>
+                    <a:lnB w="6350" cap="flat" cmpd="sng" algn="ctr">
+                      <a:solidFill>
+                        <a:srgbClr val="CBD5E1"/>
+                      </a:solidFill>
+                      <a:prstDash val="solid"/>
+                      <a:round/>
+                      <a:headEnd type="none" w="med" len="med"/>
+                      <a:tailEnd type="none" w="med" len="med"/>
+                    </a:lnB>
+                    <a:solidFill>
+                      <a:srgbClr val="FFFFFF"/>
+                    </a:solidFill>
+                  </a:tcPr>
+                </a:tc>
+              </a:tr>
+              <a:tr h="201168">
+                <a:tc>
+                  <a:txBody>
+                    <a:bodyPr/>
+                    <a:lstStyle/>
+                    <a:p>
+                      <a:pPr algn="ctr" indent="0" marL="0">
+                        <a:buNone/>
+                      </a:pPr>
+                      <a:r>
+                        <a:rPr lang="en-US" sz="900" dirty="0">
+                          <a:solidFill>
+                            <a:srgbClr val="000000"/>
+                          </a:solidFill>
+                          <a:latin typeface="Arial" pitchFamily="34" charset="0"/>
+                          <a:ea typeface="Arial" pitchFamily="34" charset="-122"/>
+                          <a:cs typeface="Arial" pitchFamily="34" charset="-120"/>
+                        </a:rPr>
+                        <a:t>じゃらん</a:t>
+                      </a:r>
+                      <a:endParaRPr lang="en-US" sz="900" dirty="0">
+                        <a:latin typeface="Arial" charset="0"/>
+                        <a:ea typeface="Arial" charset="0"/>
+                        <a:cs typeface="Arial" charset="0"/>
+                      </a:endParaRPr>
+                    </a:p>
+                  </a:txBody>
+                  <a:tcPr marL="91440" marR="91440" marT="45720" marB="45720">
+                    <a:lnL w="6350" cap="flat" cmpd="sng" algn="ctr">
+                      <a:solidFill>
+                        <a:srgbClr val="CBD5E1"/>
+                      </a:solidFill>
+                      <a:prstDash val="solid"/>
+                      <a:round/>
+                      <a:headEnd type="none" w="med" len="med"/>
+                      <a:tailEnd type="none" w="med" len="med"/>
+                    </a:lnL>
+                    <a:lnR w="6350" cap="flat" cmpd="sng" algn="ctr">
+                      <a:solidFill>
+                        <a:srgbClr val="CBD5E1"/>
+                      </a:solidFill>
+                      <a:prstDash val="solid"/>
+                      <a:round/>
+                      <a:headEnd type="none" w="med" len="med"/>
+                      <a:tailEnd type="none" w="med" len="med"/>
+                    </a:lnR>
+                    <a:lnT w="6350" cap="flat" cmpd="sng" algn="ctr">
+                      <a:solidFill>
+                        <a:srgbClr val="CBD5E1"/>
+                      </a:solidFill>
+                      <a:prstDash val="solid"/>
+                      <a:round/>
+                      <a:headEnd type="none" w="med" len="med"/>
+                      <a:tailEnd type="none" w="med" len="med"/>
+                    </a:lnT>
+                    <a:lnB w="6350" cap="flat" cmpd="sng" algn="ctr">
+                      <a:solidFill>
+                        <a:srgbClr val="CBD5E1"/>
+                      </a:solidFill>
+                      <a:prstDash val="solid"/>
+                      <a:round/>
+                      <a:headEnd type="none" w="med" len="med"/>
+                      <a:tailEnd type="none" w="med" len="med"/>
+                    </a:lnB>
+                    <a:solidFill>
+                      <a:srgbClr val="E8EFF8"/>
+                    </a:solidFill>
+                  </a:tcPr>
+                </a:tc>
+                <a:tc>
+                  <a:txBody>
+                    <a:bodyPr/>
+                    <a:lstStyle/>
+                    <a:p>
+                      <a:pPr algn="ctr" indent="0" marL="0">
+                        <a:buNone/>
+                      </a:pPr>
+                      <a:r>
+                        <a:rPr lang="en-US" sz="900" dirty="0">
+                          <a:solidFill>
+                            <a:srgbClr val="000000"/>
+                          </a:solidFill>
+                          <a:latin typeface="Arial" pitchFamily="34" charset="0"/>
+                          <a:ea typeface="Arial" pitchFamily="34" charset="-122"/>
+                          <a:cs typeface="Arial" pitchFamily="34" charset="-120"/>
+                        </a:rPr>
+                        <a:t>2</a:t>
+                      </a:r>
+                      <a:endParaRPr lang="en-US" sz="900" dirty="0">
+                        <a:latin typeface="Arial" charset="0"/>
+                        <a:ea typeface="Arial" charset="0"/>
+                        <a:cs typeface="Arial" charset="0"/>
+                      </a:endParaRPr>
+                    </a:p>
+                  </a:txBody>
+                  <a:tcPr marL="91440" marR="91440" marT="45720" marB="45720">
+                    <a:lnL w="6350" cap="flat" cmpd="sng" algn="ctr">
+                      <a:solidFill>
+                        <a:srgbClr val="CBD5E1"/>
+                      </a:solidFill>
+                      <a:prstDash val="solid"/>
+                      <a:round/>
+                      <a:headEnd type="none" w="med" len="med"/>
+                      <a:tailEnd type="none" w="med" len="med"/>
+                    </a:lnL>
+                    <a:lnR w="6350" cap="flat" cmpd="sng" algn="ctr">
+                      <a:solidFill>
+                        <a:srgbClr val="CBD5E1"/>
+                      </a:solidFill>
+                      <a:prstDash val="solid"/>
+                      <a:round/>
+                      <a:headEnd type="none" w="med" len="med"/>
+                      <a:tailEnd type="none" w="med" len="med"/>
+                    </a:lnR>
+                    <a:lnT w="6350" cap="flat" cmpd="sng" algn="ctr">
+                      <a:solidFill>
+                        <a:srgbClr val="CBD5E1"/>
+                      </a:solidFill>
+                      <a:prstDash val="solid"/>
+                      <a:round/>
+                      <a:headEnd type="none" w="med" len="med"/>
+                      <a:tailEnd type="none" w="med" len="med"/>
+                    </a:lnT>
+                    <a:lnB w="6350" cap="flat" cmpd="sng" algn="ctr">
+                      <a:solidFill>
+                        <a:srgbClr val="CBD5E1"/>
+                      </a:solidFill>
+                      <a:prstDash val="solid"/>
+                      <a:round/>
+                      <a:headEnd type="none" w="med" len="med"/>
+                      <a:tailEnd type="none" w="med" len="med"/>
+                    </a:lnB>
+                    <a:solidFill>
+                      <a:srgbClr val="E8EFF8"/>
+                    </a:solidFill>
+                  </a:tcPr>
+                </a:tc>
+                <a:tc>
+                  <a:txBody>
+                    <a:bodyPr/>
+                    <a:lstStyle/>
+                    <a:p>
+                      <a:pPr algn="ctr" indent="0" marL="0">
+                        <a:buNone/>
+                      </a:pPr>
+                      <a:r>
+                        <a:rPr lang="en-US" sz="900" dirty="0">
+                          <a:solidFill>
+                            <a:srgbClr val="000000"/>
+                          </a:solidFill>
+                          <a:latin typeface="Arial" pitchFamily="34" charset="0"/>
+                          <a:ea typeface="Arial" pitchFamily="34" charset="-122"/>
+                          <a:cs typeface="Arial" pitchFamily="34" charset="-120"/>
+                        </a:rPr>
+                        <a:t>4</a:t>
+                      </a:r>
+                      <a:endParaRPr lang="en-US" sz="900" dirty="0">
+                        <a:latin typeface="Arial" charset="0"/>
+                        <a:ea typeface="Arial" charset="0"/>
+                        <a:cs typeface="Arial" charset="0"/>
+                      </a:endParaRPr>
+                    </a:p>
+                  </a:txBody>
+                  <a:tcPr marL="91440" marR="91440" marT="45720" marB="45720">
+                    <a:lnL w="6350" cap="flat" cmpd="sng" algn="ctr">
+                      <a:solidFill>
+                        <a:srgbClr val="CBD5E1"/>
+                      </a:solidFill>
+                      <a:prstDash val="solid"/>
+                      <a:round/>
+                      <a:headEnd type="none" w="med" len="med"/>
+                      <a:tailEnd type="none" w="med" len="med"/>
+                    </a:lnL>
+                    <a:lnR w="6350" cap="flat" cmpd="sng" algn="ctr">
+                      <a:solidFill>
+                        <a:srgbClr val="CBD5E1"/>
+                      </a:solidFill>
+                      <a:prstDash val="solid"/>
+                      <a:round/>
+                      <a:headEnd type="none" w="med" len="med"/>
+                      <a:tailEnd type="none" w="med" len="med"/>
+                    </a:lnR>
+                    <a:lnT w="6350" cap="flat" cmpd="sng" algn="ctr">
+                      <a:solidFill>
+                        <a:srgbClr val="CBD5E1"/>
+                      </a:solidFill>
+                      <a:prstDash val="solid"/>
+                      <a:round/>
+                      <a:headEnd type="none" w="med" len="med"/>
+                      <a:tailEnd type="none" w="med" len="med"/>
+                    </a:lnT>
+                    <a:lnB w="6350" cap="flat" cmpd="sng" algn="ctr">
+                      <a:solidFill>
+                        <a:srgbClr val="CBD5E1"/>
+                      </a:solidFill>
+                      <a:prstDash val="solid"/>
+                      <a:round/>
+                      <a:headEnd type="none" w="med" len="med"/>
+                      <a:tailEnd type="none" w="med" len="med"/>
+                    </a:lnB>
+                    <a:solidFill>
+                      <a:srgbClr val="E8EFF8"/>
                     </a:solidFill>
                   </a:tcPr>
                 </a:tc>
@@ -8079,144 +8710,6 @@
                       <a:tailEnd type="none" w="med" len="med"/>
                     </a:lnB>
                     <a:solidFill>
-                      <a:srgbClr val="FFFFFF"/>
-                    </a:solidFill>
-                  </a:tcPr>
-                </a:tc>
-                <a:tc>
-                  <a:txBody>
-                    <a:bodyPr/>
-                    <a:lstStyle/>
-                    <a:p>
-                      <a:pPr algn="ctr" indent="0" marL="0">
-                        <a:buNone/>
-                      </a:pPr>
-                      <a:r>
-                        <a:rPr lang="en-US" sz="900" dirty="0">
-                          <a:solidFill>
-                            <a:srgbClr val="000000"/>
-                          </a:solidFill>
-                          <a:latin typeface="Arial" pitchFamily="34" charset="0"/>
-                          <a:ea typeface="Arial" pitchFamily="34" charset="-122"/>
-                          <a:cs typeface="Arial" pitchFamily="34" charset="-120"/>
-                        </a:rPr>
-                        <a:t>8.75</a:t>
-                      </a:r>
-                      <a:endParaRPr lang="en-US" sz="900" dirty="0">
-                        <a:latin typeface="Arial" charset="0"/>
-                        <a:ea typeface="Arial" charset="0"/>
-                        <a:cs typeface="Arial" charset="0"/>
-                      </a:endParaRPr>
-                    </a:p>
-                  </a:txBody>
-                  <a:tcPr marL="91440" marR="91440" marT="45720" marB="45720">
-                    <a:lnL w="6350" cap="flat" cmpd="sng" algn="ctr">
-                      <a:solidFill>
-                        <a:srgbClr val="CBD5E1"/>
-                      </a:solidFill>
-                      <a:prstDash val="solid"/>
-                      <a:round/>
-                      <a:headEnd type="none" w="med" len="med"/>
-                      <a:tailEnd type="none" w="med" len="med"/>
-                    </a:lnL>
-                    <a:lnR w="6350" cap="flat" cmpd="sng" algn="ctr">
-                      <a:solidFill>
-                        <a:srgbClr val="CBD5E1"/>
-                      </a:solidFill>
-                      <a:prstDash val="solid"/>
-                      <a:round/>
-                      <a:headEnd type="none" w="med" len="med"/>
-                      <a:tailEnd type="none" w="med" len="med"/>
-                    </a:lnR>
-                    <a:lnT w="6350" cap="flat" cmpd="sng" algn="ctr">
-                      <a:solidFill>
-                        <a:srgbClr val="CBD5E1"/>
-                      </a:solidFill>
-                      <a:prstDash val="solid"/>
-                      <a:round/>
-                      <a:headEnd type="none" w="med" len="med"/>
-                      <a:tailEnd type="none" w="med" len="med"/>
-                    </a:lnT>
-                    <a:lnB w="6350" cap="flat" cmpd="sng" algn="ctr">
-                      <a:solidFill>
-                        <a:srgbClr val="CBD5E1"/>
-                      </a:solidFill>
-                      <a:prstDash val="solid"/>
-                      <a:round/>
-                      <a:headEnd type="none" w="med" len="med"/>
-                      <a:tailEnd type="none" w="med" len="med"/>
-                    </a:lnB>
-                    <a:solidFill>
-                      <a:srgbClr val="FFFFFF"/>
-                    </a:solidFill>
-                  </a:tcPr>
-                </a:tc>
-              </a:tr>
-              <a:tr h="201168">
-                <a:tc>
-                  <a:txBody>
-                    <a:bodyPr/>
-                    <a:lstStyle/>
-                    <a:p>
-                      <a:pPr algn="ctr" indent="0" marL="0">
-                        <a:buNone/>
-                      </a:pPr>
-                      <a:r>
-                        <a:rPr lang="en-US" sz="900" dirty="0">
-                          <a:solidFill>
-                            <a:srgbClr val="000000"/>
-                          </a:solidFill>
-                          <a:latin typeface="Arial" pitchFamily="34" charset="0"/>
-                          <a:ea typeface="Arial" pitchFamily="34" charset="-122"/>
-                          <a:cs typeface="Arial" pitchFamily="34" charset="-120"/>
-                        </a:rPr>
-                        <a:t>Trip.com</a:t>
-                      </a:r>
-                      <a:endParaRPr lang="en-US" sz="900" dirty="0">
-                        <a:latin typeface="Arial" charset="0"/>
-                        <a:ea typeface="Arial" charset="0"/>
-                        <a:cs typeface="Arial" charset="0"/>
-                      </a:endParaRPr>
-                    </a:p>
-                  </a:txBody>
-                  <a:tcPr marL="91440" marR="91440" marT="45720" marB="45720">
-                    <a:lnL w="6350" cap="flat" cmpd="sng" algn="ctr">
-                      <a:solidFill>
-                        <a:srgbClr val="CBD5E1"/>
-                      </a:solidFill>
-                      <a:prstDash val="solid"/>
-                      <a:round/>
-                      <a:headEnd type="none" w="med" len="med"/>
-                      <a:tailEnd type="none" w="med" len="med"/>
-                    </a:lnL>
-                    <a:lnR w="6350" cap="flat" cmpd="sng" algn="ctr">
-                      <a:solidFill>
-                        <a:srgbClr val="CBD5E1"/>
-                      </a:solidFill>
-                      <a:prstDash val="solid"/>
-                      <a:round/>
-                      <a:headEnd type="none" w="med" len="med"/>
-                      <a:tailEnd type="none" w="med" len="med"/>
-                    </a:lnR>
-                    <a:lnT w="6350" cap="flat" cmpd="sng" algn="ctr">
-                      <a:solidFill>
-                        <a:srgbClr val="CBD5E1"/>
-                      </a:solidFill>
-                      <a:prstDash val="solid"/>
-                      <a:round/>
-                      <a:headEnd type="none" w="med" len="med"/>
-                      <a:tailEnd type="none" w="med" len="med"/>
-                    </a:lnT>
-                    <a:lnB w="6350" cap="flat" cmpd="sng" algn="ctr">
-                      <a:solidFill>
-                        <a:srgbClr val="CBD5E1"/>
-                      </a:solidFill>
-                      <a:prstDash val="solid"/>
-                      <a:round/>
-                      <a:headEnd type="none" w="med" len="med"/>
-                      <a:tailEnd type="none" w="med" len="med"/>
-                    </a:lnB>
-                    <a:solidFill>
                       <a:srgbClr val="E8EFF8"/>
                     </a:solidFill>
                   </a:tcPr>
@@ -8238,211 +8731,7 @@
                           <a:ea typeface="Arial" pitchFamily="34" charset="-122"/>
                           <a:cs typeface="Arial" pitchFamily="34" charset="-120"/>
                         </a:rPr>
-                        <a:t>3</a:t>
-                      </a:r>
-                      <a:endParaRPr lang="en-US" sz="900" dirty="0">
-                        <a:latin typeface="Arial" charset="0"/>
-                        <a:ea typeface="Arial" charset="0"/>
-                        <a:cs typeface="Arial" charset="0"/>
-                      </a:endParaRPr>
-                    </a:p>
-                  </a:txBody>
-                  <a:tcPr marL="91440" marR="91440" marT="45720" marB="45720">
-                    <a:lnL w="6350" cap="flat" cmpd="sng" algn="ctr">
-                      <a:solidFill>
-                        <a:srgbClr val="CBD5E1"/>
-                      </a:solidFill>
-                      <a:prstDash val="solid"/>
-                      <a:round/>
-                      <a:headEnd type="none" w="med" len="med"/>
-                      <a:tailEnd type="none" w="med" len="med"/>
-                    </a:lnL>
-                    <a:lnR w="6350" cap="flat" cmpd="sng" algn="ctr">
-                      <a:solidFill>
-                        <a:srgbClr val="CBD5E1"/>
-                      </a:solidFill>
-                      <a:prstDash val="solid"/>
-                      <a:round/>
-                      <a:headEnd type="none" w="med" len="med"/>
-                      <a:tailEnd type="none" w="med" len="med"/>
-                    </a:lnR>
-                    <a:lnT w="6350" cap="flat" cmpd="sng" algn="ctr">
-                      <a:solidFill>
-                        <a:srgbClr val="CBD5E1"/>
-                      </a:solidFill>
-                      <a:prstDash val="solid"/>
-                      <a:round/>
-                      <a:headEnd type="none" w="med" len="med"/>
-                      <a:tailEnd type="none" w="med" len="med"/>
-                    </a:lnT>
-                    <a:lnB w="6350" cap="flat" cmpd="sng" algn="ctr">
-                      <a:solidFill>
-                        <a:srgbClr val="CBD5E1"/>
-                      </a:solidFill>
-                      <a:prstDash val="solid"/>
-                      <a:round/>
-                      <a:headEnd type="none" w="med" len="med"/>
-                      <a:tailEnd type="none" w="med" len="med"/>
-                    </a:lnB>
-                    <a:solidFill>
-                      <a:srgbClr val="E8EFF8"/>
-                    </a:solidFill>
-                  </a:tcPr>
-                </a:tc>
-                <a:tc>
-                  <a:txBody>
-                    <a:bodyPr/>
-                    <a:lstStyle/>
-                    <a:p>
-                      <a:pPr algn="ctr" indent="0" marL="0">
-                        <a:buNone/>
-                      </a:pPr>
-                      <a:r>
-                        <a:rPr lang="en-US" sz="900" dirty="0">
-                          <a:solidFill>
-                            <a:srgbClr val="000000"/>
-                          </a:solidFill>
-                          <a:latin typeface="Arial" pitchFamily="34" charset="0"/>
-                          <a:ea typeface="Arial" pitchFamily="34" charset="-122"/>
-                          <a:cs typeface="Arial" pitchFamily="34" charset="-120"/>
-                        </a:rPr>
-                        <a:t>8.67</a:t>
-                      </a:r>
-                      <a:endParaRPr lang="en-US" sz="900" dirty="0">
-                        <a:latin typeface="Arial" charset="0"/>
-                        <a:ea typeface="Arial" charset="0"/>
-                        <a:cs typeface="Arial" charset="0"/>
-                      </a:endParaRPr>
-                    </a:p>
-                  </a:txBody>
-                  <a:tcPr marL="91440" marR="91440" marT="45720" marB="45720">
-                    <a:lnL w="6350" cap="flat" cmpd="sng" algn="ctr">
-                      <a:solidFill>
-                        <a:srgbClr val="CBD5E1"/>
-                      </a:solidFill>
-                      <a:prstDash val="solid"/>
-                      <a:round/>
-                      <a:headEnd type="none" w="med" len="med"/>
-                      <a:tailEnd type="none" w="med" len="med"/>
-                    </a:lnL>
-                    <a:lnR w="6350" cap="flat" cmpd="sng" algn="ctr">
-                      <a:solidFill>
-                        <a:srgbClr val="CBD5E1"/>
-                      </a:solidFill>
-                      <a:prstDash val="solid"/>
-                      <a:round/>
-                      <a:headEnd type="none" w="med" len="med"/>
-                      <a:tailEnd type="none" w="med" len="med"/>
-                    </a:lnR>
-                    <a:lnT w="6350" cap="flat" cmpd="sng" algn="ctr">
-                      <a:solidFill>
-                        <a:srgbClr val="CBD5E1"/>
-                      </a:solidFill>
-                      <a:prstDash val="solid"/>
-                      <a:round/>
-                      <a:headEnd type="none" w="med" len="med"/>
-                      <a:tailEnd type="none" w="med" len="med"/>
-                    </a:lnT>
-                    <a:lnB w="6350" cap="flat" cmpd="sng" algn="ctr">
-                      <a:solidFill>
-                        <a:srgbClr val="CBD5E1"/>
-                      </a:solidFill>
-                      <a:prstDash val="solid"/>
-                      <a:round/>
-                      <a:headEnd type="none" w="med" len="med"/>
-                      <a:tailEnd type="none" w="med" len="med"/>
-                    </a:lnB>
-                    <a:solidFill>
-                      <a:srgbClr val="E8EFF8"/>
-                    </a:solidFill>
-                  </a:tcPr>
-                </a:tc>
-                <a:tc>
-                  <a:txBody>
-                    <a:bodyPr/>
-                    <a:lstStyle/>
-                    <a:p>
-                      <a:pPr algn="ctr" indent="0" marL="0">
-                        <a:buNone/>
-                      </a:pPr>
-                      <a:r>
-                        <a:rPr lang="en-US" sz="900" dirty="0">
-                          <a:solidFill>
-                            <a:srgbClr val="000000"/>
-                          </a:solidFill>
-                          <a:latin typeface="Arial" pitchFamily="34" charset="0"/>
-                          <a:ea typeface="Arial" pitchFamily="34" charset="-122"/>
-                          <a:cs typeface="Arial" pitchFamily="34" charset="-120"/>
-                        </a:rPr>
-                        <a:t>/10</a:t>
-                      </a:r>
-                      <a:endParaRPr lang="en-US" sz="900" dirty="0">
-                        <a:latin typeface="Arial" charset="0"/>
-                        <a:ea typeface="Arial" charset="0"/>
-                        <a:cs typeface="Arial" charset="0"/>
-                      </a:endParaRPr>
-                    </a:p>
-                  </a:txBody>
-                  <a:tcPr marL="91440" marR="91440" marT="45720" marB="45720">
-                    <a:lnL w="6350" cap="flat" cmpd="sng" algn="ctr">
-                      <a:solidFill>
-                        <a:srgbClr val="CBD5E1"/>
-                      </a:solidFill>
-                      <a:prstDash val="solid"/>
-                      <a:round/>
-                      <a:headEnd type="none" w="med" len="med"/>
-                      <a:tailEnd type="none" w="med" len="med"/>
-                    </a:lnL>
-                    <a:lnR w="6350" cap="flat" cmpd="sng" algn="ctr">
-                      <a:solidFill>
-                        <a:srgbClr val="CBD5E1"/>
-                      </a:solidFill>
-                      <a:prstDash val="solid"/>
-                      <a:round/>
-                      <a:headEnd type="none" w="med" len="med"/>
-                      <a:tailEnd type="none" w="med" len="med"/>
-                    </a:lnR>
-                    <a:lnT w="6350" cap="flat" cmpd="sng" algn="ctr">
-                      <a:solidFill>
-                        <a:srgbClr val="CBD5E1"/>
-                      </a:solidFill>
-                      <a:prstDash val="solid"/>
-                      <a:round/>
-                      <a:headEnd type="none" w="med" len="med"/>
-                      <a:tailEnd type="none" w="med" len="med"/>
-                    </a:lnT>
-                    <a:lnB w="6350" cap="flat" cmpd="sng" algn="ctr">
-                      <a:solidFill>
-                        <a:srgbClr val="CBD5E1"/>
-                      </a:solidFill>
-                      <a:prstDash val="solid"/>
-                      <a:round/>
-                      <a:headEnd type="none" w="med" len="med"/>
-                      <a:tailEnd type="none" w="med" len="med"/>
-                    </a:lnB>
-                    <a:solidFill>
-                      <a:srgbClr val="E8EFF8"/>
-                    </a:solidFill>
-                  </a:tcPr>
-                </a:tc>
-                <a:tc>
-                  <a:txBody>
-                    <a:bodyPr/>
-                    <a:lstStyle/>
-                    <a:p>
-                      <a:pPr algn="ctr" indent="0" marL="0">
-                        <a:buNone/>
-                      </a:pPr>
-                      <a:r>
-                        <a:rPr lang="en-US" sz="900" dirty="0">
-                          <a:solidFill>
-                            <a:srgbClr val="000000"/>
-                          </a:solidFill>
-                          <a:latin typeface="Arial" pitchFamily="34" charset="0"/>
-                          <a:ea typeface="Arial" pitchFamily="34" charset="-122"/>
-                          <a:cs typeface="Arial" pitchFamily="34" charset="-120"/>
-                        </a:rPr>
-                        <a:t>8.67</a:t>
+                        <a:t>8</a:t>
                       </a:r>
                       <a:endParaRPr lang="en-US" sz="900" dirty="0">
                         <a:latin typeface="Arial" charset="0"/>
@@ -8580,7 +8869,7 @@
                           <a:ea typeface="Arial" pitchFamily="34" charset="-122"/>
                           <a:cs typeface="Arial" pitchFamily="34" charset="-120"/>
                         </a:rPr>
-                        <a:t>22</a:t>
+                        <a:t>9</a:t>
                       </a:r>
                       <a:endParaRPr lang="en-US" sz="900" dirty="0">
                         <a:latin typeface="Arial" charset="0"/>
@@ -8648,7 +8937,7 @@
                           <a:ea typeface="Arial" pitchFamily="34" charset="-122"/>
                           <a:cs typeface="Arial" pitchFamily="34" charset="-120"/>
                         </a:rPr>
-                        <a:t>8</a:t>
+                        <a:t>7.89</a:t>
                       </a:r>
                       <a:endParaRPr lang="en-US" sz="900" dirty="0">
                         <a:latin typeface="Arial" charset="0"/>
@@ -8784,7 +9073,7 @@
                           <a:ea typeface="Arial" pitchFamily="34" charset="-122"/>
                           <a:cs typeface="Arial" pitchFamily="34" charset="-120"/>
                         </a:rPr>
-                        <a:t>8</a:t>
+                        <a:t>7.89</a:t>
                       </a:r>
                       <a:endParaRPr lang="en-US" sz="900" dirty="0">
                         <a:latin typeface="Arial" charset="0"/>
@@ -8832,348 +9121,6 @@
                     </a:lnB>
                     <a:solidFill>
                       <a:srgbClr val="FFFFFF"/>
-                    </a:solidFill>
-                  </a:tcPr>
-                </a:tc>
-              </a:tr>
-              <a:tr h="201168">
-                <a:tc>
-                  <a:txBody>
-                    <a:bodyPr/>
-                    <a:lstStyle/>
-                    <a:p>
-                      <a:pPr algn="ctr" indent="0" marL="0">
-                        <a:buNone/>
-                      </a:pPr>
-                      <a:r>
-                        <a:rPr lang="en-US" sz="900" dirty="0">
-                          <a:solidFill>
-                            <a:srgbClr val="000000"/>
-                          </a:solidFill>
-                          <a:latin typeface="Arial" pitchFamily="34" charset="0"/>
-                          <a:ea typeface="Arial" pitchFamily="34" charset="-122"/>
-                          <a:cs typeface="Arial" pitchFamily="34" charset="-120"/>
-                        </a:rPr>
-                        <a:t>Agoda</a:t>
-                      </a:r>
-                      <a:endParaRPr lang="en-US" sz="900" dirty="0">
-                        <a:latin typeface="Arial" charset="0"/>
-                        <a:ea typeface="Arial" charset="0"/>
-                        <a:cs typeface="Arial" charset="0"/>
-                      </a:endParaRPr>
-                    </a:p>
-                  </a:txBody>
-                  <a:tcPr marL="91440" marR="91440" marT="45720" marB="45720">
-                    <a:lnL w="6350" cap="flat" cmpd="sng" algn="ctr">
-                      <a:solidFill>
-                        <a:srgbClr val="CBD5E1"/>
-                      </a:solidFill>
-                      <a:prstDash val="solid"/>
-                      <a:round/>
-                      <a:headEnd type="none" w="med" len="med"/>
-                      <a:tailEnd type="none" w="med" len="med"/>
-                    </a:lnL>
-                    <a:lnR w="6350" cap="flat" cmpd="sng" algn="ctr">
-                      <a:solidFill>
-                        <a:srgbClr val="CBD5E1"/>
-                      </a:solidFill>
-                      <a:prstDash val="solid"/>
-                      <a:round/>
-                      <a:headEnd type="none" w="med" len="med"/>
-                      <a:tailEnd type="none" w="med" len="med"/>
-                    </a:lnR>
-                    <a:lnT w="6350" cap="flat" cmpd="sng" algn="ctr">
-                      <a:solidFill>
-                        <a:srgbClr val="CBD5E1"/>
-                      </a:solidFill>
-                      <a:prstDash val="solid"/>
-                      <a:round/>
-                      <a:headEnd type="none" w="med" len="med"/>
-                      <a:tailEnd type="none" w="med" len="med"/>
-                    </a:lnT>
-                    <a:lnB w="6350" cap="flat" cmpd="sng" algn="ctr">
-                      <a:solidFill>
-                        <a:srgbClr val="CBD5E1"/>
-                      </a:solidFill>
-                      <a:prstDash val="solid"/>
-                      <a:round/>
-                      <a:headEnd type="none" w="med" len="med"/>
-                      <a:tailEnd type="none" w="med" len="med"/>
-                    </a:lnB>
-                    <a:solidFill>
-                      <a:srgbClr val="E8EFF8"/>
-                    </a:solidFill>
-                  </a:tcPr>
-                </a:tc>
-                <a:tc>
-                  <a:txBody>
-                    <a:bodyPr/>
-                    <a:lstStyle/>
-                    <a:p>
-                      <a:pPr algn="ctr" indent="0" marL="0">
-                        <a:buNone/>
-                      </a:pPr>
-                      <a:r>
-                        <a:rPr lang="en-US" sz="900" dirty="0">
-                          <a:solidFill>
-                            <a:srgbClr val="000000"/>
-                          </a:solidFill>
-                          <a:latin typeface="Arial" pitchFamily="34" charset="0"/>
-                          <a:ea typeface="Arial" pitchFamily="34" charset="-122"/>
-                          <a:cs typeface="Arial" pitchFamily="34" charset="-120"/>
-                        </a:rPr>
-                        <a:t>8</a:t>
-                      </a:r>
-                      <a:endParaRPr lang="en-US" sz="900" dirty="0">
-                        <a:latin typeface="Arial" charset="0"/>
-                        <a:ea typeface="Arial" charset="0"/>
-                        <a:cs typeface="Arial" charset="0"/>
-                      </a:endParaRPr>
-                    </a:p>
-                  </a:txBody>
-                  <a:tcPr marL="91440" marR="91440" marT="45720" marB="45720">
-                    <a:lnL w="6350" cap="flat" cmpd="sng" algn="ctr">
-                      <a:solidFill>
-                        <a:srgbClr val="CBD5E1"/>
-                      </a:solidFill>
-                      <a:prstDash val="solid"/>
-                      <a:round/>
-                      <a:headEnd type="none" w="med" len="med"/>
-                      <a:tailEnd type="none" w="med" len="med"/>
-                    </a:lnL>
-                    <a:lnR w="6350" cap="flat" cmpd="sng" algn="ctr">
-                      <a:solidFill>
-                        <a:srgbClr val="CBD5E1"/>
-                      </a:solidFill>
-                      <a:prstDash val="solid"/>
-                      <a:round/>
-                      <a:headEnd type="none" w="med" len="med"/>
-                      <a:tailEnd type="none" w="med" len="med"/>
-                    </a:lnR>
-                    <a:lnT w="6350" cap="flat" cmpd="sng" algn="ctr">
-                      <a:solidFill>
-                        <a:srgbClr val="CBD5E1"/>
-                      </a:solidFill>
-                      <a:prstDash val="solid"/>
-                      <a:round/>
-                      <a:headEnd type="none" w="med" len="med"/>
-                      <a:tailEnd type="none" w="med" len="med"/>
-                    </a:lnT>
-                    <a:lnB w="6350" cap="flat" cmpd="sng" algn="ctr">
-                      <a:solidFill>
-                        <a:srgbClr val="CBD5E1"/>
-                      </a:solidFill>
-                      <a:prstDash val="solid"/>
-                      <a:round/>
-                      <a:headEnd type="none" w="med" len="med"/>
-                      <a:tailEnd type="none" w="med" len="med"/>
-                    </a:lnB>
-                    <a:solidFill>
-                      <a:srgbClr val="E8EFF8"/>
-                    </a:solidFill>
-                  </a:tcPr>
-                </a:tc>
-                <a:tc>
-                  <a:txBody>
-                    <a:bodyPr/>
-                    <a:lstStyle/>
-                    <a:p>
-                      <a:pPr algn="ctr" indent="0" marL="0">
-                        <a:buNone/>
-                      </a:pPr>
-                      <a:r>
-                        <a:rPr lang="en-US" sz="900" dirty="0">
-                          <a:solidFill>
-                            <a:srgbClr val="000000"/>
-                          </a:solidFill>
-                          <a:latin typeface="Arial" pitchFamily="34" charset="0"/>
-                          <a:ea typeface="Arial" pitchFamily="34" charset="-122"/>
-                          <a:cs typeface="Arial" pitchFamily="34" charset="-120"/>
-                        </a:rPr>
-                        <a:t>7.88</a:t>
-                      </a:r>
-                      <a:endParaRPr lang="en-US" sz="900" dirty="0">
-                        <a:latin typeface="Arial" charset="0"/>
-                        <a:ea typeface="Arial" charset="0"/>
-                        <a:cs typeface="Arial" charset="0"/>
-                      </a:endParaRPr>
-                    </a:p>
-                  </a:txBody>
-                  <a:tcPr marL="91440" marR="91440" marT="45720" marB="45720">
-                    <a:lnL w="6350" cap="flat" cmpd="sng" algn="ctr">
-                      <a:solidFill>
-                        <a:srgbClr val="CBD5E1"/>
-                      </a:solidFill>
-                      <a:prstDash val="solid"/>
-                      <a:round/>
-                      <a:headEnd type="none" w="med" len="med"/>
-                      <a:tailEnd type="none" w="med" len="med"/>
-                    </a:lnL>
-                    <a:lnR w="6350" cap="flat" cmpd="sng" algn="ctr">
-                      <a:solidFill>
-                        <a:srgbClr val="CBD5E1"/>
-                      </a:solidFill>
-                      <a:prstDash val="solid"/>
-                      <a:round/>
-                      <a:headEnd type="none" w="med" len="med"/>
-                      <a:tailEnd type="none" w="med" len="med"/>
-                    </a:lnR>
-                    <a:lnT w="6350" cap="flat" cmpd="sng" algn="ctr">
-                      <a:solidFill>
-                        <a:srgbClr val="CBD5E1"/>
-                      </a:solidFill>
-                      <a:prstDash val="solid"/>
-                      <a:round/>
-                      <a:headEnd type="none" w="med" len="med"/>
-                      <a:tailEnd type="none" w="med" len="med"/>
-                    </a:lnT>
-                    <a:lnB w="6350" cap="flat" cmpd="sng" algn="ctr">
-                      <a:solidFill>
-                        <a:srgbClr val="CBD5E1"/>
-                      </a:solidFill>
-                      <a:prstDash val="solid"/>
-                      <a:round/>
-                      <a:headEnd type="none" w="med" len="med"/>
-                      <a:tailEnd type="none" w="med" len="med"/>
-                    </a:lnB>
-                    <a:solidFill>
-                      <a:srgbClr val="E8EFF8"/>
-                    </a:solidFill>
-                  </a:tcPr>
-                </a:tc>
-                <a:tc>
-                  <a:txBody>
-                    <a:bodyPr/>
-                    <a:lstStyle/>
-                    <a:p>
-                      <a:pPr algn="ctr" indent="0" marL="0">
-                        <a:buNone/>
-                      </a:pPr>
-                      <a:r>
-                        <a:rPr lang="en-US" sz="900" dirty="0">
-                          <a:solidFill>
-                            <a:srgbClr val="000000"/>
-                          </a:solidFill>
-                          <a:latin typeface="Arial" pitchFamily="34" charset="0"/>
-                          <a:ea typeface="Arial" pitchFamily="34" charset="-122"/>
-                          <a:cs typeface="Arial" pitchFamily="34" charset="-120"/>
-                        </a:rPr>
-                        <a:t>/10</a:t>
-                      </a:r>
-                      <a:endParaRPr lang="en-US" sz="900" dirty="0">
-                        <a:latin typeface="Arial" charset="0"/>
-                        <a:ea typeface="Arial" charset="0"/>
-                        <a:cs typeface="Arial" charset="0"/>
-                      </a:endParaRPr>
-                    </a:p>
-                  </a:txBody>
-                  <a:tcPr marL="91440" marR="91440" marT="45720" marB="45720">
-                    <a:lnL w="6350" cap="flat" cmpd="sng" algn="ctr">
-                      <a:solidFill>
-                        <a:srgbClr val="CBD5E1"/>
-                      </a:solidFill>
-                      <a:prstDash val="solid"/>
-                      <a:round/>
-                      <a:headEnd type="none" w="med" len="med"/>
-                      <a:tailEnd type="none" w="med" len="med"/>
-                    </a:lnL>
-                    <a:lnR w="6350" cap="flat" cmpd="sng" algn="ctr">
-                      <a:solidFill>
-                        <a:srgbClr val="CBD5E1"/>
-                      </a:solidFill>
-                      <a:prstDash val="solid"/>
-                      <a:round/>
-                      <a:headEnd type="none" w="med" len="med"/>
-                      <a:tailEnd type="none" w="med" len="med"/>
-                    </a:lnR>
-                    <a:lnT w="6350" cap="flat" cmpd="sng" algn="ctr">
-                      <a:solidFill>
-                        <a:srgbClr val="CBD5E1"/>
-                      </a:solidFill>
-                      <a:prstDash val="solid"/>
-                      <a:round/>
-                      <a:headEnd type="none" w="med" len="med"/>
-                      <a:tailEnd type="none" w="med" len="med"/>
-                    </a:lnT>
-                    <a:lnB w="6350" cap="flat" cmpd="sng" algn="ctr">
-                      <a:solidFill>
-                        <a:srgbClr val="CBD5E1"/>
-                      </a:solidFill>
-                      <a:prstDash val="solid"/>
-                      <a:round/>
-                      <a:headEnd type="none" w="med" len="med"/>
-                      <a:tailEnd type="none" w="med" len="med"/>
-                    </a:lnB>
-                    <a:solidFill>
-                      <a:srgbClr val="E8EFF8"/>
-                    </a:solidFill>
-                  </a:tcPr>
-                </a:tc>
-                <a:tc>
-                  <a:txBody>
-                    <a:bodyPr/>
-                    <a:lstStyle/>
-                    <a:p>
-                      <a:pPr algn="ctr" indent="0" marL="0">
-                        <a:buNone/>
-                      </a:pPr>
-                      <a:r>
-                        <a:rPr lang="en-US" sz="900" dirty="0">
-                          <a:solidFill>
-                            <a:srgbClr val="000000"/>
-                          </a:solidFill>
-                          <a:latin typeface="Arial" pitchFamily="34" charset="0"/>
-                          <a:ea typeface="Arial" pitchFamily="34" charset="-122"/>
-                          <a:cs typeface="Arial" pitchFamily="34" charset="-120"/>
-                        </a:rPr>
-                        <a:t>7.88</a:t>
-                      </a:r>
-                      <a:endParaRPr lang="en-US" sz="900" dirty="0">
-                        <a:latin typeface="Arial" charset="0"/>
-                        <a:ea typeface="Arial" charset="0"/>
-                        <a:cs typeface="Arial" charset="0"/>
-                      </a:endParaRPr>
-                    </a:p>
-                  </a:txBody>
-                  <a:tcPr marL="91440" marR="91440" marT="45720" marB="45720">
-                    <a:lnL w="6350" cap="flat" cmpd="sng" algn="ctr">
-                      <a:solidFill>
-                        <a:srgbClr val="CBD5E1"/>
-                      </a:solidFill>
-                      <a:prstDash val="solid"/>
-                      <a:round/>
-                      <a:headEnd type="none" w="med" len="med"/>
-                      <a:tailEnd type="none" w="med" len="med"/>
-                    </a:lnL>
-                    <a:lnR w="6350" cap="flat" cmpd="sng" algn="ctr">
-                      <a:solidFill>
-                        <a:srgbClr val="CBD5E1"/>
-                      </a:solidFill>
-                      <a:prstDash val="solid"/>
-                      <a:round/>
-                      <a:headEnd type="none" w="med" len="med"/>
-                      <a:tailEnd type="none" w="med" len="med"/>
-                    </a:lnR>
-                    <a:lnT w="6350" cap="flat" cmpd="sng" algn="ctr">
-                      <a:solidFill>
-                        <a:srgbClr val="CBD5E1"/>
-                      </a:solidFill>
-                      <a:prstDash val="solid"/>
-                      <a:round/>
-                      <a:headEnd type="none" w="med" len="med"/>
-                      <a:tailEnd type="none" w="med" len="med"/>
-                    </a:lnT>
-                    <a:lnB w="6350" cap="flat" cmpd="sng" algn="ctr">
-                      <a:solidFill>
-                        <a:srgbClr val="CBD5E1"/>
-                      </a:solidFill>
-                      <a:prstDash val="solid"/>
-                      <a:round/>
-                      <a:headEnd type="none" w="med" len="med"/>
-                      <a:tailEnd type="none" w="med" len="med"/>
-                    </a:lnB>
-                    <a:solidFill>
-                      <a:srgbClr val="E8EFF8"/>
                     </a:solidFill>
                   </a:tcPr>
                 </a:tc>
@@ -9243,7 +9190,7 @@
                       <a:tailEnd type="none" w="med" len="med"/>
                     </a:lnB>
                     <a:solidFill>
-                      <a:srgbClr val="FFFFFF"/>
+                      <a:srgbClr val="E8EFF8"/>
                     </a:solidFill>
                   </a:tcPr>
                 </a:tc>
@@ -9264,7 +9211,7 @@
                           <a:ea typeface="Arial" pitchFamily="34" charset="-122"/>
                           <a:cs typeface="Arial" pitchFamily="34" charset="-120"/>
                         </a:rPr>
-                        <a:t>16</a:t>
+                        <a:t>6</a:t>
                       </a:r>
                       <a:endParaRPr lang="en-US" sz="900" dirty="0">
                         <a:latin typeface="Arial" charset="0"/>
@@ -9311,7 +9258,7 @@
                       <a:tailEnd type="none" w="med" len="med"/>
                     </a:lnB>
                     <a:solidFill>
-                      <a:srgbClr val="FFFFFF"/>
+                      <a:srgbClr val="E8EFF8"/>
                     </a:solidFill>
                   </a:tcPr>
                 </a:tc>
@@ -9332,7 +9279,7 @@
                           <a:ea typeface="Arial" pitchFamily="34" charset="-122"/>
                           <a:cs typeface="Arial" pitchFamily="34" charset="-120"/>
                         </a:rPr>
-                        <a:t>3.94</a:t>
+                        <a:t>3.83</a:t>
                       </a:r>
                       <a:endParaRPr lang="en-US" sz="900" dirty="0">
                         <a:latin typeface="Arial" charset="0"/>
@@ -9379,7 +9326,7 @@
                       <a:tailEnd type="none" w="med" len="med"/>
                     </a:lnB>
                     <a:solidFill>
-                      <a:srgbClr val="FFFFFF"/>
+                      <a:srgbClr val="E8EFF8"/>
                     </a:solidFill>
                   </a:tcPr>
                 </a:tc>
@@ -9447,6 +9394,144 @@
                       <a:tailEnd type="none" w="med" len="med"/>
                     </a:lnB>
                     <a:solidFill>
+                      <a:srgbClr val="E8EFF8"/>
+                    </a:solidFill>
+                  </a:tcPr>
+                </a:tc>
+                <a:tc>
+                  <a:txBody>
+                    <a:bodyPr/>
+                    <a:lstStyle/>
+                    <a:p>
+                      <a:pPr algn="ctr" indent="0" marL="0">
+                        <a:buNone/>
+                      </a:pPr>
+                      <a:r>
+                        <a:rPr lang="en-US" sz="900" dirty="0">
+                          <a:solidFill>
+                            <a:srgbClr val="000000"/>
+                          </a:solidFill>
+                          <a:latin typeface="Arial" pitchFamily="34" charset="0"/>
+                          <a:ea typeface="Arial" pitchFamily="34" charset="-122"/>
+                          <a:cs typeface="Arial" pitchFamily="34" charset="-120"/>
+                        </a:rPr>
+                        <a:t>7.67</a:t>
+                      </a:r>
+                      <a:endParaRPr lang="en-US" sz="900" dirty="0">
+                        <a:latin typeface="Arial" charset="0"/>
+                        <a:ea typeface="Arial" charset="0"/>
+                        <a:cs typeface="Arial" charset="0"/>
+                      </a:endParaRPr>
+                    </a:p>
+                  </a:txBody>
+                  <a:tcPr marL="91440" marR="91440" marT="45720" marB="45720">
+                    <a:lnL w="6350" cap="flat" cmpd="sng" algn="ctr">
+                      <a:solidFill>
+                        <a:srgbClr val="CBD5E1"/>
+                      </a:solidFill>
+                      <a:prstDash val="solid"/>
+                      <a:round/>
+                      <a:headEnd type="none" w="med" len="med"/>
+                      <a:tailEnd type="none" w="med" len="med"/>
+                    </a:lnL>
+                    <a:lnR w="6350" cap="flat" cmpd="sng" algn="ctr">
+                      <a:solidFill>
+                        <a:srgbClr val="CBD5E1"/>
+                      </a:solidFill>
+                      <a:prstDash val="solid"/>
+                      <a:round/>
+                      <a:headEnd type="none" w="med" len="med"/>
+                      <a:tailEnd type="none" w="med" len="med"/>
+                    </a:lnR>
+                    <a:lnT w="6350" cap="flat" cmpd="sng" algn="ctr">
+                      <a:solidFill>
+                        <a:srgbClr val="CBD5E1"/>
+                      </a:solidFill>
+                      <a:prstDash val="solid"/>
+                      <a:round/>
+                      <a:headEnd type="none" w="med" len="med"/>
+                      <a:tailEnd type="none" w="med" len="med"/>
+                    </a:lnT>
+                    <a:lnB w="6350" cap="flat" cmpd="sng" algn="ctr">
+                      <a:solidFill>
+                        <a:srgbClr val="CBD5E1"/>
+                      </a:solidFill>
+                      <a:prstDash val="solid"/>
+                      <a:round/>
+                      <a:headEnd type="none" w="med" len="med"/>
+                      <a:tailEnd type="none" w="med" len="med"/>
+                    </a:lnB>
+                    <a:solidFill>
+                      <a:srgbClr val="E8EFF8"/>
+                    </a:solidFill>
+                  </a:tcPr>
+                </a:tc>
+              </a:tr>
+              <a:tr h="201168">
+                <a:tc>
+                  <a:txBody>
+                    <a:bodyPr/>
+                    <a:lstStyle/>
+                    <a:p>
+                      <a:pPr algn="ctr" indent="0" marL="0">
+                        <a:buNone/>
+                      </a:pPr>
+                      <a:r>
+                        <a:rPr lang="en-US" sz="900" dirty="0">
+                          <a:solidFill>
+                            <a:srgbClr val="000000"/>
+                          </a:solidFill>
+                          <a:latin typeface="Arial" pitchFamily="34" charset="0"/>
+                          <a:ea typeface="Arial" pitchFamily="34" charset="-122"/>
+                          <a:cs typeface="Arial" pitchFamily="34" charset="-120"/>
+                        </a:rPr>
+                        <a:t>Trip.com</a:t>
+                      </a:r>
+                      <a:endParaRPr lang="en-US" sz="900" dirty="0">
+                        <a:latin typeface="Arial" charset="0"/>
+                        <a:ea typeface="Arial" charset="0"/>
+                        <a:cs typeface="Arial" charset="0"/>
+                      </a:endParaRPr>
+                    </a:p>
+                  </a:txBody>
+                  <a:tcPr marL="91440" marR="91440" marT="45720" marB="45720">
+                    <a:lnL w="6350" cap="flat" cmpd="sng" algn="ctr">
+                      <a:solidFill>
+                        <a:srgbClr val="CBD5E1"/>
+                      </a:solidFill>
+                      <a:prstDash val="solid"/>
+                      <a:round/>
+                      <a:headEnd type="none" w="med" len="med"/>
+                      <a:tailEnd type="none" w="med" len="med"/>
+                    </a:lnL>
+                    <a:lnR w="6350" cap="flat" cmpd="sng" algn="ctr">
+                      <a:solidFill>
+                        <a:srgbClr val="CBD5E1"/>
+                      </a:solidFill>
+                      <a:prstDash val="solid"/>
+                      <a:round/>
+                      <a:headEnd type="none" w="med" len="med"/>
+                      <a:tailEnd type="none" w="med" len="med"/>
+                    </a:lnR>
+                    <a:lnT w="6350" cap="flat" cmpd="sng" algn="ctr">
+                      <a:solidFill>
+                        <a:srgbClr val="CBD5E1"/>
+                      </a:solidFill>
+                      <a:prstDash val="solid"/>
+                      <a:round/>
+                      <a:headEnd type="none" w="med" len="med"/>
+                      <a:tailEnd type="none" w="med" len="med"/>
+                    </a:lnT>
+                    <a:lnB w="6350" cap="flat" cmpd="sng" algn="ctr">
+                      <a:solidFill>
+                        <a:srgbClr val="CBD5E1"/>
+                      </a:solidFill>
+                      <a:prstDash val="solid"/>
+                      <a:round/>
+                      <a:headEnd type="none" w="med" len="med"/>
+                      <a:tailEnd type="none" w="med" len="med"/>
+                    </a:lnB>
+                    <a:solidFill>
                       <a:srgbClr val="FFFFFF"/>
                     </a:solidFill>
                   </a:tcPr>
@@ -9468,7 +9553,211 @@
                           <a:ea typeface="Arial" pitchFamily="34" charset="-122"/>
                           <a:cs typeface="Arial" pitchFamily="34" charset="-120"/>
                         </a:rPr>
-                        <a:t>7.88</a:t>
+                        <a:t>1</a:t>
+                      </a:r>
+                      <a:endParaRPr lang="en-US" sz="900" dirty="0">
+                        <a:latin typeface="Arial" charset="0"/>
+                        <a:ea typeface="Arial" charset="0"/>
+                        <a:cs typeface="Arial" charset="0"/>
+                      </a:endParaRPr>
+                    </a:p>
+                  </a:txBody>
+                  <a:tcPr marL="91440" marR="91440" marT="45720" marB="45720">
+                    <a:lnL w="6350" cap="flat" cmpd="sng" algn="ctr">
+                      <a:solidFill>
+                        <a:srgbClr val="CBD5E1"/>
+                      </a:solidFill>
+                      <a:prstDash val="solid"/>
+                      <a:round/>
+                      <a:headEnd type="none" w="med" len="med"/>
+                      <a:tailEnd type="none" w="med" len="med"/>
+                    </a:lnL>
+                    <a:lnR w="6350" cap="flat" cmpd="sng" algn="ctr">
+                      <a:solidFill>
+                        <a:srgbClr val="CBD5E1"/>
+                      </a:solidFill>
+                      <a:prstDash val="solid"/>
+                      <a:round/>
+                      <a:headEnd type="none" w="med" len="med"/>
+                      <a:tailEnd type="none" w="med" len="med"/>
+                    </a:lnR>
+                    <a:lnT w="6350" cap="flat" cmpd="sng" algn="ctr">
+                      <a:solidFill>
+                        <a:srgbClr val="CBD5E1"/>
+                      </a:solidFill>
+                      <a:prstDash val="solid"/>
+                      <a:round/>
+                      <a:headEnd type="none" w="med" len="med"/>
+                      <a:tailEnd type="none" w="med" len="med"/>
+                    </a:lnT>
+                    <a:lnB w="6350" cap="flat" cmpd="sng" algn="ctr">
+                      <a:solidFill>
+                        <a:srgbClr val="CBD5E1"/>
+                      </a:solidFill>
+                      <a:prstDash val="solid"/>
+                      <a:round/>
+                      <a:headEnd type="none" w="med" len="med"/>
+                      <a:tailEnd type="none" w="med" len="med"/>
+                    </a:lnB>
+                    <a:solidFill>
+                      <a:srgbClr val="FFFFFF"/>
+                    </a:solidFill>
+                  </a:tcPr>
+                </a:tc>
+                <a:tc>
+                  <a:txBody>
+                    <a:bodyPr/>
+                    <a:lstStyle/>
+                    <a:p>
+                      <a:pPr algn="ctr" indent="0" marL="0">
+                        <a:buNone/>
+                      </a:pPr>
+                      <a:r>
+                        <a:rPr lang="en-US" sz="900" dirty="0">
+                          <a:solidFill>
+                            <a:srgbClr val="000000"/>
+                          </a:solidFill>
+                          <a:latin typeface="Arial" pitchFamily="34" charset="0"/>
+                          <a:ea typeface="Arial" pitchFamily="34" charset="-122"/>
+                          <a:cs typeface="Arial" pitchFamily="34" charset="-120"/>
+                        </a:rPr>
+                        <a:t>6</a:t>
+                      </a:r>
+                      <a:endParaRPr lang="en-US" sz="900" dirty="0">
+                        <a:latin typeface="Arial" charset="0"/>
+                        <a:ea typeface="Arial" charset="0"/>
+                        <a:cs typeface="Arial" charset="0"/>
+                      </a:endParaRPr>
+                    </a:p>
+                  </a:txBody>
+                  <a:tcPr marL="91440" marR="91440" marT="45720" marB="45720">
+                    <a:lnL w="6350" cap="flat" cmpd="sng" algn="ctr">
+                      <a:solidFill>
+                        <a:srgbClr val="CBD5E1"/>
+                      </a:solidFill>
+                      <a:prstDash val="solid"/>
+                      <a:round/>
+                      <a:headEnd type="none" w="med" len="med"/>
+                      <a:tailEnd type="none" w="med" len="med"/>
+                    </a:lnL>
+                    <a:lnR w="6350" cap="flat" cmpd="sng" algn="ctr">
+                      <a:solidFill>
+                        <a:srgbClr val="CBD5E1"/>
+                      </a:solidFill>
+                      <a:prstDash val="solid"/>
+                      <a:round/>
+                      <a:headEnd type="none" w="med" len="med"/>
+                      <a:tailEnd type="none" w="med" len="med"/>
+                    </a:lnR>
+                    <a:lnT w="6350" cap="flat" cmpd="sng" algn="ctr">
+                      <a:solidFill>
+                        <a:srgbClr val="CBD5E1"/>
+                      </a:solidFill>
+                      <a:prstDash val="solid"/>
+                      <a:round/>
+                      <a:headEnd type="none" w="med" len="med"/>
+                      <a:tailEnd type="none" w="med" len="med"/>
+                    </a:lnT>
+                    <a:lnB w="6350" cap="flat" cmpd="sng" algn="ctr">
+                      <a:solidFill>
+                        <a:srgbClr val="CBD5E1"/>
+                      </a:solidFill>
+                      <a:prstDash val="solid"/>
+                      <a:round/>
+                      <a:headEnd type="none" w="med" len="med"/>
+                      <a:tailEnd type="none" w="med" len="med"/>
+                    </a:lnB>
+                    <a:solidFill>
+                      <a:srgbClr val="FFFFFF"/>
+                    </a:solidFill>
+                  </a:tcPr>
+                </a:tc>
+                <a:tc>
+                  <a:txBody>
+                    <a:bodyPr/>
+                    <a:lstStyle/>
+                    <a:p>
+                      <a:pPr algn="ctr" indent="0" marL="0">
+                        <a:buNone/>
+                      </a:pPr>
+                      <a:r>
+                        <a:rPr lang="en-US" sz="900" dirty="0">
+                          <a:solidFill>
+                            <a:srgbClr val="000000"/>
+                          </a:solidFill>
+                          <a:latin typeface="Arial" pitchFamily="34" charset="0"/>
+                          <a:ea typeface="Arial" pitchFamily="34" charset="-122"/>
+                          <a:cs typeface="Arial" pitchFamily="34" charset="-120"/>
+                        </a:rPr>
+                        <a:t>/10</a:t>
+                      </a:r>
+                      <a:endParaRPr lang="en-US" sz="900" dirty="0">
+                        <a:latin typeface="Arial" charset="0"/>
+                        <a:ea typeface="Arial" charset="0"/>
+                        <a:cs typeface="Arial" charset="0"/>
+                      </a:endParaRPr>
+                    </a:p>
+                  </a:txBody>
+                  <a:tcPr marL="91440" marR="91440" marT="45720" marB="45720">
+                    <a:lnL w="6350" cap="flat" cmpd="sng" algn="ctr">
+                      <a:solidFill>
+                        <a:srgbClr val="CBD5E1"/>
+                      </a:solidFill>
+                      <a:prstDash val="solid"/>
+                      <a:round/>
+                      <a:headEnd type="none" w="med" len="med"/>
+                      <a:tailEnd type="none" w="med" len="med"/>
+                    </a:lnL>
+                    <a:lnR w="6350" cap="flat" cmpd="sng" algn="ctr">
+                      <a:solidFill>
+                        <a:srgbClr val="CBD5E1"/>
+                      </a:solidFill>
+                      <a:prstDash val="solid"/>
+                      <a:round/>
+                      <a:headEnd type="none" w="med" len="med"/>
+                      <a:tailEnd type="none" w="med" len="med"/>
+                    </a:lnR>
+                    <a:lnT w="6350" cap="flat" cmpd="sng" algn="ctr">
+                      <a:solidFill>
+                        <a:srgbClr val="CBD5E1"/>
+                      </a:solidFill>
+                      <a:prstDash val="solid"/>
+                      <a:round/>
+                      <a:headEnd type="none" w="med" len="med"/>
+                      <a:tailEnd type="none" w="med" len="med"/>
+                    </a:lnT>
+                    <a:lnB w="6350" cap="flat" cmpd="sng" algn="ctr">
+                      <a:solidFill>
+                        <a:srgbClr val="CBD5E1"/>
+                      </a:solidFill>
+                      <a:prstDash val="solid"/>
+                      <a:round/>
+                      <a:headEnd type="none" w="med" len="med"/>
+                      <a:tailEnd type="none" w="med" len="med"/>
+                    </a:lnB>
+                    <a:solidFill>
+                      <a:srgbClr val="FFFFFF"/>
+                    </a:solidFill>
+                  </a:tcPr>
+                </a:tc>
+                <a:tc>
+                  <a:txBody>
+                    <a:bodyPr/>
+                    <a:lstStyle/>
+                    <a:p>
+                      <a:pPr algn="ctr" indent="0" marL="0">
+                        <a:buNone/>
+                      </a:pPr>
+                      <a:r>
+                        <a:rPr lang="en-US" sz="900" dirty="0">
+                          <a:solidFill>
+                            <a:srgbClr val="000000"/>
+                          </a:solidFill>
+                          <a:latin typeface="Arial" pitchFamily="34" charset="0"/>
+                          <a:ea typeface="Arial" pitchFamily="34" charset="-122"/>
+                          <a:cs typeface="Arial" pitchFamily="34" charset="-120"/>
+                        </a:rPr>
+                        <a:t>6</a:t>
                       </a:r>
                       <a:endParaRPr lang="en-US" sz="900" dirty="0">
                         <a:latin typeface="Arial" charset="0"/>
@@ -9876,7 +10165,7 @@
                 <a:ea typeface="Arial" pitchFamily="34" charset="-122"/>
                 <a:cs typeface="Arial" pitchFamily="34" charset="-120"/>
               </a:rPr>
-              <a:t>49件（72.1%）</a:t>
+              <a:t>20件（66.7%）</a:t>
             </a:r>
             <a:endParaRPr lang="en-US" sz="1100" dirty="0"/>
           </a:p>
@@ -9974,7 +10263,7 @@
                 <a:ea typeface="Arial" pitchFamily="34" charset="-122"/>
                 <a:cs typeface="Arial" pitchFamily="34" charset="-120"/>
               </a:rPr>
-              <a:t>18件（26.5%）</a:t>
+              <a:t>10件（33.3%）</a:t>
             </a:r>
             <a:endParaRPr lang="en-US" sz="1100" dirty="0"/>
           </a:p>
@@ -10072,7 +10361,7 @@
                 <a:ea typeface="Arial" pitchFamily="34" charset="-122"/>
                 <a:cs typeface="Arial" pitchFamily="34" charset="-120"/>
               </a:rPr>
-              <a:t>1件（1.5%）</a:t>
+              <a:t>0件（0.0%）</a:t>
             </a:r>
             <a:endParaRPr lang="en-US" sz="1100" dirty="0"/>
           </a:p>
@@ -10406,7 +10695,7 @@
                 <a:ea typeface="Arial" pitchFamily="34" charset="-122"/>
                 <a:cs typeface="Arial" pitchFamily="34" charset="-120"/>
               </a:rPr>
-              <a:t>20件+</a:t>
+              <a:t>10件+</a:t>
             </a:r>
             <a:endParaRPr lang="en-US" sz="900" dirty="0"/>
           </a:p>
@@ -10421,6 +10710,229 @@
         <p:spPr>
           <a:xfrm>
             <a:off x="594360" y="1124712"/>
+            <a:ext cx="1645920" cy="274320"/>
+          </a:xfrm>
+          <a:prstGeom prst="rect">
+            <a:avLst/>
+          </a:prstGeom>
+          <a:noFill/>
+          <a:ln/>
+        </p:spPr>
+        <p:txBody>
+          <a:bodyPr wrap="square" lIns="0" tIns="0" rIns="0" bIns="0" rtlCol="0" anchor="ctr"/>
+          <a:lstStyle/>
+          <a:p>
+            <a:pPr indent="0" marL="0">
+              <a:buNone/>
+            </a:pPr>
+            <a:r>
+              <a:rPr lang="en-US" sz="1300" b="1" dirty="0">
+                <a:solidFill>
+                  <a:srgbClr val="1A2744"/>
+                </a:solidFill>
+                <a:latin typeface="Arial" pitchFamily="34" charset="0"/>
+                <a:ea typeface="Arial" pitchFamily="34" charset="-122"/>
+                <a:cs typeface="Arial" pitchFamily="34" charset="-120"/>
+              </a:rPr>
+              <a:t>快適さ・設備</a:t>
+            </a:r>
+            <a:endParaRPr lang="en-US" sz="1300" dirty="0"/>
+          </a:p>
+        </p:txBody>
+      </p:sp>
+      <p:sp>
+        <p:nvSpPr>
+          <p:cNvPr id="10" name="Text 8"/>
+          <p:cNvSpPr/>
+          <p:nvPr/>
+        </p:nvSpPr>
+        <p:spPr>
+          <a:xfrm>
+            <a:off x="594360" y="1417320"/>
+            <a:ext cx="2377440" cy="365760"/>
+          </a:xfrm>
+          <a:prstGeom prst="rect">
+            <a:avLst/>
+          </a:prstGeom>
+          <a:noFill/>
+          <a:ln/>
+        </p:spPr>
+        <p:txBody>
+          <a:bodyPr wrap="square" lIns="0" tIns="0" rIns="0" bIns="0" rtlCol="0" anchor="ctr"/>
+          <a:lstStyle/>
+          <a:p>
+            <a:pPr indent="0" marL="0">
+              <a:buNone/>
+            </a:pPr>
+            <a:r>
+              <a:rPr lang="en-US" sz="900" dirty="0">
+                <a:solidFill>
+                  <a:srgbClr val="64748B"/>
+                </a:solidFill>
+                <a:latin typeface="Arial" pitchFamily="34" charset="0"/>
+                <a:ea typeface="Arial" pitchFamily="34" charset="-122"/>
+                <a:cs typeface="Arial" pitchFamily="34" charset="-120"/>
+              </a:rPr>
+              <a:t>部屋は清潔感あるし、浴衣あったりアメニティなども充実してる</a:t>
+            </a:r>
+            <a:endParaRPr lang="en-US" sz="900" dirty="0"/>
+          </a:p>
+        </p:txBody>
+      </p:sp>
+      <p:sp>
+        <p:nvSpPr>
+          <p:cNvPr id="11" name="Text 9"/>
+          <p:cNvSpPr/>
+          <p:nvPr/>
+        </p:nvSpPr>
+        <p:spPr>
+          <a:xfrm>
+            <a:off x="594360" y="1828800"/>
+            <a:ext cx="2377440" cy="640080"/>
+          </a:xfrm>
+          <a:prstGeom prst="rect">
+            <a:avLst/>
+          </a:prstGeom>
+          <a:noFill/>
+          <a:ln/>
+        </p:spPr>
+        <p:txBody>
+          <a:bodyPr wrap="square" lIns="0" tIns="0" rIns="0" bIns="0" rtlCol="0" anchor="ctr"/>
+          <a:lstStyle/>
+          <a:p>
+            <a:pPr indent="0" marL="0">
+              <a:buNone/>
+            </a:pPr>
+            <a:r>
+              <a:rPr lang="en-US" sz="900" i="1" dirty="0">
+                <a:solidFill>
+                  <a:srgbClr val="3B7DD8"/>
+                </a:solidFill>
+                <a:latin typeface="Arial" pitchFamily="34" charset="0"/>
+                <a:ea typeface="Arial" pitchFamily="34" charset="-122"/>
+                <a:cs typeface="Arial" pitchFamily="34" charset="-120"/>
+              </a:rPr>
+              <a:t>「大浴場は快適でシャワーの水圧も十分です」</a:t>
+            </a:r>
+            <a:endParaRPr lang="en-US" sz="900" dirty="0"/>
+          </a:p>
+        </p:txBody>
+      </p:sp>
+      <p:sp>
+        <p:nvSpPr>
+          <p:cNvPr id="12" name="Shape 10"/>
+          <p:cNvSpPr/>
+          <p:nvPr/>
+        </p:nvSpPr>
+        <p:spPr>
+          <a:xfrm>
+            <a:off x="3291840" y="1051560"/>
+            <a:ext cx="2651760" cy="1600200"/>
+          </a:xfrm>
+          <a:prstGeom prst="rect">
+            <a:avLst/>
+          </a:prstGeom>
+          <a:solidFill>
+            <a:srgbClr val="FFFFFF"/>
+          </a:solidFill>
+          <a:ln/>
+          <a:effectLst>
+            <a:outerShdw sx="100000" sy="100000" kx="0" ky="0" algn="bl" rotWithShape="0" blurRad="50800" dist="25400" dir="8100000">
+              <a:srgbClr val="000000">
+                <a:alpha val="10000"/>
+              </a:srgbClr>
+            </a:outerShdw>
+          </a:effectLst>
+        </p:spPr>
+      </p:sp>
+      <p:sp>
+        <p:nvSpPr>
+          <p:cNvPr id="13" name="Shape 11"/>
+          <p:cNvSpPr/>
+          <p:nvPr/>
+        </p:nvSpPr>
+        <p:spPr>
+          <a:xfrm>
+            <a:off x="3291840" y="1051560"/>
+            <a:ext cx="54864" cy="1600200"/>
+          </a:xfrm>
+          <a:prstGeom prst="rect">
+            <a:avLst/>
+          </a:prstGeom>
+          <a:solidFill>
+            <a:srgbClr val="16A34A"/>
+          </a:solidFill>
+          <a:ln/>
+        </p:spPr>
+      </p:sp>
+      <p:sp>
+        <p:nvSpPr>
+          <p:cNvPr id="14" name="Shape 12"/>
+          <p:cNvSpPr/>
+          <p:nvPr/>
+        </p:nvSpPr>
+        <p:spPr>
+          <a:xfrm>
+            <a:off x="5120640" y="1124712"/>
+            <a:ext cx="658368" cy="228600"/>
+          </a:xfrm>
+          <a:prstGeom prst="rect">
+            <a:avLst/>
+          </a:prstGeom>
+          <a:solidFill>
+            <a:srgbClr val="DCFCE7"/>
+          </a:solidFill>
+          <a:ln/>
+        </p:spPr>
+      </p:sp>
+      <p:sp>
+        <p:nvSpPr>
+          <p:cNvPr id="15" name="Text 13"/>
+          <p:cNvSpPr/>
+          <p:nvPr/>
+        </p:nvSpPr>
+        <p:spPr>
+          <a:xfrm>
+            <a:off x="5120640" y="1124712"/>
+            <a:ext cx="658368" cy="228600"/>
+          </a:xfrm>
+          <a:prstGeom prst="rect">
+            <a:avLst/>
+          </a:prstGeom>
+          <a:noFill/>
+          <a:ln/>
+        </p:spPr>
+        <p:txBody>
+          <a:bodyPr wrap="square" lIns="0" tIns="0" rIns="0" bIns="0" rtlCol="0" anchor="ctr"/>
+          <a:lstStyle/>
+          <a:p>
+            <a:pPr algn="ctr" indent="0" marL="0">
+              <a:buNone/>
+            </a:pPr>
+            <a:r>
+              <a:rPr lang="en-US" sz="900" b="1" dirty="0">
+                <a:solidFill>
+                  <a:srgbClr val="16A34A"/>
+                </a:solidFill>
+                <a:latin typeface="Arial" pitchFamily="34" charset="0"/>
+                <a:ea typeface="Arial" pitchFamily="34" charset="-122"/>
+                <a:cs typeface="Arial" pitchFamily="34" charset="-120"/>
+              </a:rPr>
+              <a:t>9件</a:t>
+            </a:r>
+            <a:endParaRPr lang="en-US" sz="900" dirty="0"/>
+          </a:p>
+        </p:txBody>
+      </p:sp>
+      <p:sp>
+        <p:nvSpPr>
+          <p:cNvPr id="16" name="Text 14"/>
+          <p:cNvSpPr/>
+          <p:nvPr/>
+        </p:nvSpPr>
+        <p:spPr>
+          <a:xfrm>
+            <a:off x="3429000" y="1124712"/>
             <a:ext cx="1645920" cy="274320"/>
           </a:xfrm>
           <a:prstGeom prst="rect">
@@ -10453,13 +10965,13 @@
       </p:sp>
       <p:sp>
         <p:nvSpPr>
-          <p:cNvPr id="10" name="Text 8"/>
-          <p:cNvSpPr/>
-          <p:nvPr/>
-        </p:nvSpPr>
-        <p:spPr>
-          <a:xfrm>
-            <a:off x="594360" y="1417320"/>
+          <p:cNvPr id="17" name="Text 15"/>
+          <p:cNvSpPr/>
+          <p:nvPr/>
+        </p:nvSpPr>
+        <p:spPr>
+          <a:xfrm>
+            <a:off x="3429000" y="1417320"/>
             <a:ext cx="2377440" cy="365760"/>
           </a:xfrm>
           <a:prstGeom prst="rect">
@@ -10492,13 +11004,13 @@
       </p:sp>
       <p:sp>
         <p:nvSpPr>
-          <p:cNvPr id="11" name="Text 9"/>
-          <p:cNvSpPr/>
-          <p:nvPr/>
-        </p:nvSpPr>
-        <p:spPr>
-          <a:xfrm>
-            <a:off x="594360" y="1828800"/>
+          <p:cNvPr id="18" name="Text 16"/>
+          <p:cNvSpPr/>
+          <p:nvPr/>
+        </p:nvSpPr>
+        <p:spPr>
+          <a:xfrm>
+            <a:off x="3429000" y="1828800"/>
             <a:ext cx="2377440" cy="640080"/>
           </a:xfrm>
           <a:prstGeom prst="rect">
@@ -10531,13 +11043,13 @@
       </p:sp>
       <p:sp>
         <p:nvSpPr>
-          <p:cNvPr id="12" name="Shape 10"/>
-          <p:cNvSpPr/>
-          <p:nvPr/>
-        </p:nvSpPr>
-        <p:spPr>
-          <a:xfrm>
-            <a:off x="3291840" y="1051560"/>
+          <p:cNvPr id="19" name="Shape 17"/>
+          <p:cNvSpPr/>
+          <p:nvPr/>
+        </p:nvSpPr>
+        <p:spPr>
+          <a:xfrm>
+            <a:off x="6126480" y="1051560"/>
             <a:ext cx="2651760" cy="1600200"/>
           </a:xfrm>
           <a:prstGeom prst="rect">
@@ -10558,13 +11070,13 @@
       </p:sp>
       <p:sp>
         <p:nvSpPr>
-          <p:cNvPr id="13" name="Shape 11"/>
-          <p:cNvSpPr/>
-          <p:nvPr/>
-        </p:nvSpPr>
-        <p:spPr>
-          <a:xfrm>
-            <a:off x="3291840" y="1051560"/>
+          <p:cNvPr id="20" name="Shape 18"/>
+          <p:cNvSpPr/>
+          <p:nvPr/>
+        </p:nvSpPr>
+        <p:spPr>
+          <a:xfrm>
+            <a:off x="6126480" y="1051560"/>
             <a:ext cx="54864" cy="1600200"/>
           </a:xfrm>
           <a:prstGeom prst="rect">
@@ -10578,13 +11090,13 @@
       </p:sp>
       <p:sp>
         <p:nvSpPr>
-          <p:cNvPr id="14" name="Shape 12"/>
-          <p:cNvSpPr/>
-          <p:nvPr/>
-        </p:nvSpPr>
-        <p:spPr>
-          <a:xfrm>
-            <a:off x="5120640" y="1124712"/>
+          <p:cNvPr id="21" name="Shape 19"/>
+          <p:cNvSpPr/>
+          <p:nvPr/>
+        </p:nvSpPr>
+        <p:spPr>
+          <a:xfrm>
+            <a:off x="7955280" y="1124712"/>
             <a:ext cx="658368" cy="228600"/>
           </a:xfrm>
           <a:prstGeom prst="rect">
@@ -10598,13 +11110,13 @@
       </p:sp>
       <p:sp>
         <p:nvSpPr>
-          <p:cNvPr id="15" name="Text 13"/>
-          <p:cNvSpPr/>
-          <p:nvPr/>
-        </p:nvSpPr>
-        <p:spPr>
-          <a:xfrm>
-            <a:off x="5120640" y="1124712"/>
+          <p:cNvPr id="22" name="Text 20"/>
+          <p:cNvSpPr/>
+          <p:nvPr/>
+        </p:nvSpPr>
+        <p:spPr>
+          <a:xfrm>
+            <a:off x="7955280" y="1124712"/>
             <a:ext cx="658368" cy="228600"/>
           </a:xfrm>
           <a:prstGeom prst="rect">
@@ -10629,7 +11141,7 @@
                 <a:ea typeface="Arial" pitchFamily="34" charset="-122"/>
                 <a:cs typeface="Arial" pitchFamily="34" charset="-120"/>
               </a:rPr>
-              <a:t>20件+</a:t>
+              <a:t>8件</a:t>
             </a:r>
             <a:endParaRPr lang="en-US" sz="900" dirty="0"/>
           </a:p>
@@ -10637,13 +11149,13 @@
       </p:sp>
       <p:sp>
         <p:nvSpPr>
-          <p:cNvPr id="16" name="Text 14"/>
-          <p:cNvSpPr/>
-          <p:nvPr/>
-        </p:nvSpPr>
-        <p:spPr>
-          <a:xfrm>
-            <a:off x="3429000" y="1124712"/>
+          <p:cNvPr id="23" name="Text 21"/>
+          <p:cNvSpPr/>
+          <p:nvPr/>
+        </p:nvSpPr>
+        <p:spPr>
+          <a:xfrm>
+            <a:off x="6263640" y="1124712"/>
             <a:ext cx="1645920" cy="274320"/>
           </a:xfrm>
           <a:prstGeom prst="rect">
@@ -10668,7 +11180,7 @@
                 <a:ea typeface="Arial" pitchFamily="34" charset="-122"/>
                 <a:cs typeface="Arial" pitchFamily="34" charset="-120"/>
               </a:rPr>
-              <a:t>快適さ・設備</a:t>
+              <a:t>清潔さ・清掃</a:t>
             </a:r>
             <a:endParaRPr lang="en-US" sz="1300" dirty="0"/>
           </a:p>
@@ -10676,13 +11188,13 @@
       </p:sp>
       <p:sp>
         <p:nvSpPr>
-          <p:cNvPr id="17" name="Text 15"/>
-          <p:cNvSpPr/>
-          <p:nvPr/>
-        </p:nvSpPr>
-        <p:spPr>
-          <a:xfrm>
-            <a:off x="3429000" y="1417320"/>
+          <p:cNvPr id="24" name="Text 22"/>
+          <p:cNvSpPr/>
+          <p:nvPr/>
+        </p:nvSpPr>
+        <p:spPr>
+          <a:xfrm>
+            <a:off x="6263640" y="1417320"/>
             <a:ext cx="2377440" cy="365760"/>
           </a:xfrm>
           <a:prstGeom prst="rect">
@@ -10715,13 +11227,13 @@
       </p:sp>
       <p:sp>
         <p:nvSpPr>
-          <p:cNvPr id="18" name="Text 16"/>
-          <p:cNvSpPr/>
-          <p:nvPr/>
-        </p:nvSpPr>
-        <p:spPr>
-          <a:xfrm>
-            <a:off x="3429000" y="1828800"/>
+          <p:cNvPr id="25" name="Text 23"/>
+          <p:cNvSpPr/>
+          <p:nvPr/>
+        </p:nvSpPr>
+        <p:spPr>
+          <a:xfrm>
+            <a:off x="6263640" y="1828800"/>
             <a:ext cx="2377440" cy="640080"/>
           </a:xfrm>
           <a:prstGeom prst="rect">
@@ -10746,7 +11258,7 @@
                 <a:ea typeface="Arial" pitchFamily="34" charset="-122"/>
                 <a:cs typeface="Arial" pitchFamily="34" charset="-120"/>
               </a:rPr>
-              <a:t>「大浴場は快適でシャワーの水圧も十分です」</a:t>
+              <a:t>「清潔感があり、スタッフの対応が良く立地も便利です」</a:t>
             </a:r>
             <a:endParaRPr lang="en-US" sz="900" dirty="0"/>
           </a:p>
@@ -10754,13 +11266,13 @@
       </p:sp>
       <p:sp>
         <p:nvSpPr>
-          <p:cNvPr id="19" name="Shape 17"/>
-          <p:cNvSpPr/>
-          <p:nvPr/>
-        </p:nvSpPr>
-        <p:spPr>
-          <a:xfrm>
-            <a:off x="6126480" y="1051560"/>
+          <p:cNvPr id="26" name="Shape 24"/>
+          <p:cNvSpPr/>
+          <p:nvPr/>
+        </p:nvSpPr>
+        <p:spPr>
+          <a:xfrm>
+            <a:off x="457200" y="2880360"/>
             <a:ext cx="2651760" cy="1600200"/>
           </a:xfrm>
           <a:prstGeom prst="rect">
@@ -10781,13 +11293,13 @@
       </p:sp>
       <p:sp>
         <p:nvSpPr>
-          <p:cNvPr id="20" name="Shape 18"/>
-          <p:cNvSpPr/>
-          <p:nvPr/>
-        </p:nvSpPr>
-        <p:spPr>
-          <a:xfrm>
-            <a:off x="6126480" y="1051560"/>
+          <p:cNvPr id="27" name="Shape 25"/>
+          <p:cNvSpPr/>
+          <p:nvPr/>
+        </p:nvSpPr>
+        <p:spPr>
+          <a:xfrm>
+            <a:off x="457200" y="2880360"/>
             <a:ext cx="54864" cy="1600200"/>
           </a:xfrm>
           <a:prstGeom prst="rect">
@@ -10801,13 +11313,13 @@
       </p:sp>
       <p:sp>
         <p:nvSpPr>
-          <p:cNvPr id="21" name="Shape 19"/>
-          <p:cNvSpPr/>
-          <p:nvPr/>
-        </p:nvSpPr>
-        <p:spPr>
-          <a:xfrm>
-            <a:off x="7955280" y="1124712"/>
+          <p:cNvPr id="28" name="Shape 26"/>
+          <p:cNvSpPr/>
+          <p:nvPr/>
+        </p:nvSpPr>
+        <p:spPr>
+          <a:xfrm>
+            <a:off x="2286000" y="2953512"/>
             <a:ext cx="658368" cy="228600"/>
           </a:xfrm>
           <a:prstGeom prst="rect">
@@ -10821,13 +11333,13 @@
       </p:sp>
       <p:sp>
         <p:nvSpPr>
-          <p:cNvPr id="22" name="Text 20"/>
-          <p:cNvSpPr/>
-          <p:nvPr/>
-        </p:nvSpPr>
-        <p:spPr>
-          <a:xfrm>
-            <a:off x="7955280" y="1124712"/>
+          <p:cNvPr id="29" name="Text 27"/>
+          <p:cNvSpPr/>
+          <p:nvPr/>
+        </p:nvSpPr>
+        <p:spPr>
+          <a:xfrm>
+            <a:off x="2286000" y="2953512"/>
             <a:ext cx="658368" cy="228600"/>
           </a:xfrm>
           <a:prstGeom prst="rect">
@@ -10852,7 +11364,7 @@
                 <a:ea typeface="Arial" pitchFamily="34" charset="-122"/>
                 <a:cs typeface="Arial" pitchFamily="34" charset="-120"/>
               </a:rPr>
-              <a:t>10件+</a:t>
+              <a:t>5件</a:t>
             </a:r>
             <a:endParaRPr lang="en-US" sz="900" dirty="0"/>
           </a:p>
@@ -10860,13 +11372,13 @@
       </p:sp>
       <p:sp>
         <p:nvSpPr>
-          <p:cNvPr id="23" name="Text 21"/>
-          <p:cNvSpPr/>
-          <p:nvPr/>
-        </p:nvSpPr>
-        <p:spPr>
-          <a:xfrm>
-            <a:off x="6263640" y="1124712"/>
+          <p:cNvPr id="30" name="Text 28"/>
+          <p:cNvSpPr/>
+          <p:nvPr/>
+        </p:nvSpPr>
+        <p:spPr>
+          <a:xfrm>
+            <a:off x="594360" y="2953512"/>
             <a:ext cx="1645920" cy="274320"/>
           </a:xfrm>
           <a:prstGeom prst="rect">
@@ -10899,13 +11411,13 @@
       </p:sp>
       <p:sp>
         <p:nvSpPr>
-          <p:cNvPr id="24" name="Text 22"/>
-          <p:cNvSpPr/>
-          <p:nvPr/>
-        </p:nvSpPr>
-        <p:spPr>
-          <a:xfrm>
-            <a:off x="6263640" y="1417320"/>
+          <p:cNvPr id="31" name="Text 29"/>
+          <p:cNvSpPr/>
+          <p:nvPr/>
+        </p:nvSpPr>
+        <p:spPr>
+          <a:xfrm>
+            <a:off x="594360" y="3246120"/>
             <a:ext cx="2377440" cy="365760"/>
           </a:xfrm>
           <a:prstGeom prst="rect">
@@ -10938,13 +11450,13 @@
       </p:sp>
       <p:sp>
         <p:nvSpPr>
-          <p:cNvPr id="25" name="Text 23"/>
-          <p:cNvSpPr/>
-          <p:nvPr/>
-        </p:nvSpPr>
-        <p:spPr>
-          <a:xfrm>
-            <a:off x="6263640" y="1828800"/>
+          <p:cNvPr id="32" name="Text 30"/>
+          <p:cNvSpPr/>
+          <p:nvPr/>
+        </p:nvSpPr>
+        <p:spPr>
+          <a:xfrm>
+            <a:off x="594360" y="3657600"/>
             <a:ext cx="2377440" cy="640080"/>
           </a:xfrm>
           <a:prstGeom prst="rect">
@@ -10977,13 +11489,13 @@
       </p:sp>
       <p:sp>
         <p:nvSpPr>
-          <p:cNvPr id="26" name="Shape 24"/>
-          <p:cNvSpPr/>
-          <p:nvPr/>
-        </p:nvSpPr>
-        <p:spPr>
-          <a:xfrm>
-            <a:off x="457200" y="2880360"/>
+          <p:cNvPr id="33" name="Shape 31"/>
+          <p:cNvSpPr/>
+          <p:nvPr/>
+        </p:nvSpPr>
+        <p:spPr>
+          <a:xfrm>
+            <a:off x="3291840" y="2880360"/>
             <a:ext cx="2651760" cy="1600200"/>
           </a:xfrm>
           <a:prstGeom prst="rect">
@@ -11004,13 +11516,13 @@
       </p:sp>
       <p:sp>
         <p:nvSpPr>
-          <p:cNvPr id="27" name="Shape 25"/>
-          <p:cNvSpPr/>
-          <p:nvPr/>
-        </p:nvSpPr>
-        <p:spPr>
-          <a:xfrm>
-            <a:off x="457200" y="2880360"/>
+          <p:cNvPr id="34" name="Shape 32"/>
+          <p:cNvSpPr/>
+          <p:nvPr/>
+        </p:nvSpPr>
+        <p:spPr>
+          <a:xfrm>
+            <a:off x="3291840" y="2880360"/>
             <a:ext cx="54864" cy="1600200"/>
           </a:xfrm>
           <a:prstGeom prst="rect">
@@ -11024,13 +11536,13 @@
       </p:sp>
       <p:sp>
         <p:nvSpPr>
-          <p:cNvPr id="28" name="Shape 26"/>
-          <p:cNvSpPr/>
-          <p:nvPr/>
-        </p:nvSpPr>
-        <p:spPr>
-          <a:xfrm>
-            <a:off x="2286000" y="2953512"/>
+          <p:cNvPr id="35" name="Shape 33"/>
+          <p:cNvSpPr/>
+          <p:nvPr/>
+        </p:nvSpPr>
+        <p:spPr>
+          <a:xfrm>
+            <a:off x="5120640" y="2953512"/>
             <a:ext cx="658368" cy="228600"/>
           </a:xfrm>
           <a:prstGeom prst="rect">
@@ -11044,13 +11556,13 @@
       </p:sp>
       <p:sp>
         <p:nvSpPr>
-          <p:cNvPr id="29" name="Text 27"/>
-          <p:cNvSpPr/>
-          <p:nvPr/>
-        </p:nvSpPr>
-        <p:spPr>
-          <a:xfrm>
-            <a:off x="2286000" y="2953512"/>
+          <p:cNvPr id="36" name="Text 34"/>
+          <p:cNvSpPr/>
+          <p:nvPr/>
+        </p:nvSpPr>
+        <p:spPr>
+          <a:xfrm>
+            <a:off x="5120640" y="2953512"/>
             <a:ext cx="658368" cy="228600"/>
           </a:xfrm>
           <a:prstGeom prst="rect">
@@ -11075,230 +11587,7 @@
                 <a:ea typeface="Arial" pitchFamily="34" charset="-122"/>
                 <a:cs typeface="Arial" pitchFamily="34" charset="-120"/>
               </a:rPr>
-              <a:t>10件+</a:t>
-            </a:r>
-            <a:endParaRPr lang="en-US" sz="900" dirty="0"/>
-          </a:p>
-        </p:txBody>
-      </p:sp>
-      <p:sp>
-        <p:nvSpPr>
-          <p:cNvPr id="30" name="Text 28"/>
-          <p:cNvSpPr/>
-          <p:nvPr/>
-        </p:nvSpPr>
-        <p:spPr>
-          <a:xfrm>
-            <a:off x="594360" y="2953512"/>
-            <a:ext cx="1645920" cy="274320"/>
-          </a:xfrm>
-          <a:prstGeom prst="rect">
-            <a:avLst/>
-          </a:prstGeom>
-          <a:noFill/>
-          <a:ln/>
-        </p:spPr>
-        <p:txBody>
-          <a:bodyPr wrap="square" lIns="0" tIns="0" rIns="0" bIns="0" rtlCol="0" anchor="ctr"/>
-          <a:lstStyle/>
-          <a:p>
-            <a:pPr indent="0" marL="0">
-              <a:buNone/>
-            </a:pPr>
-            <a:r>
-              <a:rPr lang="en-US" sz="1300" b="1" dirty="0">
-                <a:solidFill>
-                  <a:srgbClr val="1A2744"/>
-                </a:solidFill>
-                <a:latin typeface="Arial" pitchFamily="34" charset="0"/>
-                <a:ea typeface="Arial" pitchFamily="34" charset="-122"/>
-                <a:cs typeface="Arial" pitchFamily="34" charset="-120"/>
-              </a:rPr>
-              <a:t>清潔さ・清掃</a:t>
-            </a:r>
-            <a:endParaRPr lang="en-US" sz="1300" dirty="0"/>
-          </a:p>
-        </p:txBody>
-      </p:sp>
-      <p:sp>
-        <p:nvSpPr>
-          <p:cNvPr id="31" name="Text 29"/>
-          <p:cNvSpPr/>
-          <p:nvPr/>
-        </p:nvSpPr>
-        <p:spPr>
-          <a:xfrm>
-            <a:off x="594360" y="3246120"/>
-            <a:ext cx="2377440" cy="365760"/>
-          </a:xfrm>
-          <a:prstGeom prst="rect">
-            <a:avLst/>
-          </a:prstGeom>
-          <a:noFill/>
-          <a:ln/>
-        </p:spPr>
-        <p:txBody>
-          <a:bodyPr wrap="square" lIns="0" tIns="0" rIns="0" bIns="0" rtlCol="0" anchor="ctr"/>
-          <a:lstStyle/>
-          <a:p>
-            <a:pPr indent="0" marL="0">
-              <a:buNone/>
-            </a:pPr>
-            <a:r>
-              <a:rPr lang="en-US" sz="900" dirty="0">
-                <a:solidFill>
-                  <a:srgbClr val="64748B"/>
-                </a:solidFill>
-                <a:latin typeface="Arial" pitchFamily="34" charset="0"/>
-                <a:ea typeface="Arial" pitchFamily="34" charset="-122"/>
-                <a:cs typeface="Arial" pitchFamily="34" charset="-120"/>
-              </a:rPr>
-              <a:t>部屋は清潔感あるし、浴衣あったりアメニティなども充実してる</a:t>
-            </a:r>
-            <a:endParaRPr lang="en-US" sz="900" dirty="0"/>
-          </a:p>
-        </p:txBody>
-      </p:sp>
-      <p:sp>
-        <p:nvSpPr>
-          <p:cNvPr id="32" name="Text 30"/>
-          <p:cNvSpPr/>
-          <p:nvPr/>
-        </p:nvSpPr>
-        <p:spPr>
-          <a:xfrm>
-            <a:off x="594360" y="3657600"/>
-            <a:ext cx="2377440" cy="640080"/>
-          </a:xfrm>
-          <a:prstGeom prst="rect">
-            <a:avLst/>
-          </a:prstGeom>
-          <a:noFill/>
-          <a:ln/>
-        </p:spPr>
-        <p:txBody>
-          <a:bodyPr wrap="square" lIns="0" tIns="0" rIns="0" bIns="0" rtlCol="0" anchor="ctr"/>
-          <a:lstStyle/>
-          <a:p>
-            <a:pPr indent="0" marL="0">
-              <a:buNone/>
-            </a:pPr>
-            <a:r>
-              <a:rPr lang="en-US" sz="900" i="1" dirty="0">
-                <a:solidFill>
-                  <a:srgbClr val="3B7DD8"/>
-                </a:solidFill>
-                <a:latin typeface="Arial" pitchFamily="34" charset="0"/>
-                <a:ea typeface="Arial" pitchFamily="34" charset="-122"/>
-                <a:cs typeface="Arial" pitchFamily="34" charset="-120"/>
-              </a:rPr>
-              <a:t>「清潔感があり、スタッフの対応が良く立地も便利です」</a:t>
-            </a:r>
-            <a:endParaRPr lang="en-US" sz="900" dirty="0"/>
-          </a:p>
-        </p:txBody>
-      </p:sp>
-      <p:sp>
-        <p:nvSpPr>
-          <p:cNvPr id="33" name="Shape 31"/>
-          <p:cNvSpPr/>
-          <p:nvPr/>
-        </p:nvSpPr>
-        <p:spPr>
-          <a:xfrm>
-            <a:off x="3291840" y="2880360"/>
-            <a:ext cx="2651760" cy="1600200"/>
-          </a:xfrm>
-          <a:prstGeom prst="rect">
-            <a:avLst/>
-          </a:prstGeom>
-          <a:solidFill>
-            <a:srgbClr val="FFFFFF"/>
-          </a:solidFill>
-          <a:ln/>
-          <a:effectLst>
-            <a:outerShdw sx="100000" sy="100000" kx="0" ky="0" algn="bl" rotWithShape="0" blurRad="50800" dist="25400" dir="8100000">
-              <a:srgbClr val="000000">
-                <a:alpha val="10000"/>
-              </a:srgbClr>
-            </a:outerShdw>
-          </a:effectLst>
-        </p:spPr>
-      </p:sp>
-      <p:sp>
-        <p:nvSpPr>
-          <p:cNvPr id="34" name="Shape 32"/>
-          <p:cNvSpPr/>
-          <p:nvPr/>
-        </p:nvSpPr>
-        <p:spPr>
-          <a:xfrm>
-            <a:off x="3291840" y="2880360"/>
-            <a:ext cx="54864" cy="1600200"/>
-          </a:xfrm>
-          <a:prstGeom prst="rect">
-            <a:avLst/>
-          </a:prstGeom>
-          <a:solidFill>
-            <a:srgbClr val="16A34A"/>
-          </a:solidFill>
-          <a:ln/>
-        </p:spPr>
-      </p:sp>
-      <p:sp>
-        <p:nvSpPr>
-          <p:cNvPr id="35" name="Shape 33"/>
-          <p:cNvSpPr/>
-          <p:nvPr/>
-        </p:nvSpPr>
-        <p:spPr>
-          <a:xfrm>
-            <a:off x="5120640" y="2953512"/>
-            <a:ext cx="658368" cy="228600"/>
-          </a:xfrm>
-          <a:prstGeom prst="rect">
-            <a:avLst/>
-          </a:prstGeom>
-          <a:solidFill>
-            <a:srgbClr val="DCFCE7"/>
-          </a:solidFill>
-          <a:ln/>
-        </p:spPr>
-      </p:sp>
-      <p:sp>
-        <p:nvSpPr>
-          <p:cNvPr id="36" name="Text 34"/>
-          <p:cNvSpPr/>
-          <p:nvPr/>
-        </p:nvSpPr>
-        <p:spPr>
-          <a:xfrm>
-            <a:off x="5120640" y="2953512"/>
-            <a:ext cx="658368" cy="228600"/>
-          </a:xfrm>
-          <a:prstGeom prst="rect">
-            <a:avLst/>
-          </a:prstGeom>
-          <a:noFill/>
-          <a:ln/>
-        </p:spPr>
-        <p:txBody>
-          <a:bodyPr wrap="square" lIns="0" tIns="0" rIns="0" bIns="0" rtlCol="0" anchor="ctr"/>
-          <a:lstStyle/>
-          <a:p>
-            <a:pPr algn="ctr" indent="0" marL="0">
-              <a:buNone/>
-            </a:pPr>
-            <a:r>
-              <a:rPr lang="en-US" sz="900" b="1" dirty="0">
-                <a:solidFill>
-                  <a:srgbClr val="16A34A"/>
-                </a:solidFill>
-                <a:latin typeface="Arial" pitchFamily="34" charset="0"/>
-                <a:ea typeface="Arial" pitchFamily="34" charset="-122"/>
-                <a:cs typeface="Arial" pitchFamily="34" charset="-120"/>
-              </a:rPr>
-              <a:t>10件+</a:t>
+              <a:t>3件</a:t>
             </a:r>
             <a:endParaRPr lang="en-US" sz="900" dirty="0"/>
           </a:p>
@@ -11521,7 +11810,7 @@
                 <a:ea typeface="Arial" pitchFamily="34" charset="-122"/>
                 <a:cs typeface="Arial" pitchFamily="34" charset="-120"/>
               </a:rPr>
-              <a:t>6件</a:t>
+              <a:t>2件</a:t>
             </a:r>
             <a:endParaRPr lang="en-US" sz="900" dirty="0"/>
           </a:p>
@@ -11560,7 +11849,7 @@
                 <a:ea typeface="Arial" pitchFamily="34" charset="-122"/>
                 <a:cs typeface="Arial" pitchFamily="34" charset="-120"/>
               </a:rPr>
-              <a:t>コンビニ・周辺施設</a:t>
+              <a:t>部屋の広さ</a:t>
             </a:r>
             <a:endParaRPr lang="en-US" sz="1300" dirty="0"/>
           </a:p>
@@ -11599,7 +11888,7 @@
                 <a:ea typeface="Arial" pitchFamily="34" charset="-122"/>
                 <a:cs typeface="Arial" pitchFamily="34" charset="-120"/>
               </a:rPr>
-              <a:t>また、意外とスーパーやショッピングセンターもあり長期出張にはもってこいです</a:t>
+              <a:t>Clean room with ample amenities for a solo traveller, alt...</a:t>
             </a:r>
             <a:endParaRPr lang="en-US" sz="900" dirty="0"/>
           </a:p>
@@ -11638,7 +11927,7 @@
                 <a:ea typeface="Arial" pitchFamily="34" charset="-122"/>
                 <a:cs typeface="Arial" pitchFamily="34" charset="-120"/>
               </a:rPr>
-              <a:t>「近くには様々な飲食店やスーパーがあり娯楽施設もあります」</a:t>
+              <a:t>「テレビ大きい」</a:t>
             </a:r>
             <a:endParaRPr lang="en-US" sz="900" dirty="0"/>
           </a:p>
@@ -12396,7 +12685,7 @@
                           <a:ea typeface="Arial" pitchFamily="34" charset="-122"/>
                           <a:cs typeface="Arial" pitchFamily="34" charset="-120"/>
                         </a:rPr>
-                        <a:t>7件</a:t>
+                        <a:t>3件</a:t>
                       </a:r>
                       <a:endParaRPr lang="en-US" sz="900" dirty="0">
                         <a:latin typeface="Arial" charset="0"/>
@@ -12534,7 +12823,7 @@
                           <a:ea typeface="Arial" pitchFamily="34" charset="-122"/>
                           <a:cs typeface="Arial" pitchFamily="34" charset="-120"/>
                         </a:rPr>
-                        <a:t>防音性能</a:t>
+                        <a:t>浴室・水回り</a:t>
                       </a:r>
                       <a:endParaRPr lang="en-US" sz="900" dirty="0">
                         <a:latin typeface="Arial" charset="0"/>
@@ -12602,7 +12891,7 @@
                           <a:ea typeface="Arial" pitchFamily="34" charset="-122"/>
                           <a:cs typeface="Arial" pitchFamily="34" charset="-120"/>
                         </a:rPr>
-                        <a:t>駅チカなだけあって、電車の音が</a:t>
+                        <a:t>大浴場は快適でシャワーの水圧も十分です</a:t>
                       </a:r>
                       <a:endParaRPr lang="en-US" sz="900" dirty="0">
                         <a:latin typeface="Arial" charset="0"/>
@@ -12670,7 +12959,7 @@
                           <a:ea typeface="Arial" pitchFamily="34" charset="-122"/>
                           <a:cs typeface="Arial" pitchFamily="34" charset="-120"/>
                         </a:rPr>
-                        <a:t>5件</a:t>
+                        <a:t>2件</a:t>
                       </a:r>
                       <a:endParaRPr lang="en-US" sz="900" dirty="0">
                         <a:latin typeface="Arial" charset="0"/>
@@ -12808,7 +13097,7 @@
                           <a:ea typeface="Arial" pitchFamily="34" charset="-122"/>
                           <a:cs typeface="Arial" pitchFamily="34" charset="-120"/>
                         </a:rPr>
-                        <a:t>浴室・水回り</a:t>
+                        <a:t>防音性能</a:t>
                       </a:r>
                       <a:endParaRPr lang="en-US" sz="900" dirty="0">
                         <a:latin typeface="Arial" charset="0"/>
@@ -12876,7 +13165,7 @@
                           <a:ea typeface="Arial" pitchFamily="34" charset="-122"/>
                           <a:cs typeface="Arial" pitchFamily="34" charset="-120"/>
                         </a:rPr>
-                        <a:t>大浴場は快適でシャワーの水圧も十分です</a:t>
+                        <a:t>駅チカなだけあって、電車の音が</a:t>
                       </a:r>
                       <a:endParaRPr lang="en-US" sz="900" dirty="0">
                         <a:latin typeface="Arial" charset="0"/>
@@ -12944,7 +13233,7 @@
                           <a:ea typeface="Arial" pitchFamily="34" charset="-122"/>
                           <a:cs typeface="Arial" pitchFamily="34" charset="-120"/>
                         </a:rPr>
-                        <a:t>5件</a:t>
+                        <a:t>1件</a:t>
                       </a:r>
                       <a:endParaRPr lang="en-US" sz="900" dirty="0">
                         <a:latin typeface="Arial" charset="0"/>
@@ -13218,7 +13507,7 @@
                           <a:ea typeface="Arial" pitchFamily="34" charset="-122"/>
                           <a:cs typeface="Arial" pitchFamily="34" charset="-120"/>
                         </a:rPr>
-                        <a:t>2件</a:t>
+                        <a:t>1件</a:t>
                       </a:r>
                       <a:endParaRPr lang="en-US" sz="900" dirty="0">
                         <a:latin typeface="Arial" charset="0"/>
@@ -13356,7 +13645,7 @@
                           <a:ea typeface="Arial" pitchFamily="34" charset="-122"/>
                           <a:cs typeface="Arial" pitchFamily="34" charset="-120"/>
                         </a:rPr>
-                        <a:t>エアコン・空調</a:t>
+                        <a:t>臭い・匂い</a:t>
                       </a:r>
                       <a:endParaRPr lang="en-US" sz="900" dirty="0">
                         <a:latin typeface="Arial" charset="0"/>
@@ -13424,7 +13713,7 @@
                           <a:ea typeface="Arial" pitchFamily="34" charset="-122"/>
                           <a:cs typeface="Arial" pitchFamily="34" charset="-120"/>
                         </a:rPr>
-                        <a:t>料金も安く、サウナの温度もちょうど良く快適でした</a:t>
+                        <a:t>ユニットバスの水垢などが少し気になりましたが 嫌な匂いなどもなく快適でした ユニットバスの水垢などが少し気になりま...</a:t>
                       </a:r>
                       <a:endParaRPr lang="en-US" sz="900" dirty="0">
                         <a:latin typeface="Arial" charset="0"/>
@@ -13492,7 +13781,7 @@
                           <a:ea typeface="Arial" pitchFamily="34" charset="-122"/>
                           <a:cs typeface="Arial" pitchFamily="34" charset="-120"/>
                         </a:rPr>
-                        <a:t>2件</a:t>
+                        <a:t>1件</a:t>
                       </a:r>
                       <a:endParaRPr lang="en-US" sz="900" dirty="0">
                         <a:latin typeface="Arial" charset="0"/>
@@ -13630,7 +13919,7 @@
                           <a:ea typeface="Arial" pitchFamily="34" charset="-122"/>
                           <a:cs typeface="Arial" pitchFamily="34" charset="-120"/>
                         </a:rPr>
-                        <a:t>臭い・匂い</a:t>
+                        <a:t>エアコン・空調</a:t>
                       </a:r>
                       <a:endParaRPr lang="en-US" sz="900" dirty="0">
                         <a:latin typeface="Arial" charset="0"/>
@@ -13698,7 +13987,7 @@
                           <a:ea typeface="Arial" pitchFamily="34" charset="-122"/>
                           <a:cs typeface="Arial" pitchFamily="34" charset="-120"/>
                         </a:rPr>
-                        <a:t>ユニットバスの水垢などが少し気になりましたが 嫌な匂いなどもなく快適でした ユニットバスの水垢などが少し気になりま...</a:t>
+                        <a:t>料金も安く、サウナの温度もちょうど良く快適でした</a:t>
                       </a:r>
                       <a:endParaRPr lang="en-US" sz="900" dirty="0">
                         <a:latin typeface="Arial" charset="0"/>
@@ -13818,554 +14107,6 @@
                   </a:tcPr>
                 </a:tc>
               </a:tr>
-              <a:tr h="320040">
-                <a:tc>
-                  <a:txBody>
-                    <a:bodyPr/>
-                    <a:lstStyle/>
-                    <a:p>
-                      <a:pPr algn="ctr" indent="0" marL="0">
-                        <a:buNone/>
-                      </a:pPr>
-                      <a:r>
-                        <a:rPr lang="en-US" sz="1200" b="1" dirty="0">
-                          <a:solidFill>
-                            <a:srgbClr val="94A3B8"/>
-                          </a:solidFill>
-                          <a:latin typeface="Arial" pitchFamily="34" charset="0"/>
-                          <a:ea typeface="Arial" pitchFamily="34" charset="-122"/>
-                          <a:cs typeface="Arial" pitchFamily="34" charset="-120"/>
-                        </a:rPr>
-                        <a:t>C</a:t>
-                      </a:r>
-                      <a:endParaRPr lang="en-US" sz="1200" dirty="0">
-                        <a:latin typeface="Arial" charset="0"/>
-                        <a:ea typeface="Arial" charset="0"/>
-                        <a:cs typeface="Arial" charset="0"/>
-                      </a:endParaRPr>
-                    </a:p>
-                  </a:txBody>
-                  <a:tcPr marL="91440" marR="91440" marT="45720" marB="45720">
-                    <a:lnL w="6350" cap="flat" cmpd="sng" algn="ctr">
-                      <a:solidFill>
-                        <a:srgbClr val="CBD5E1"/>
-                      </a:solidFill>
-                      <a:prstDash val="solid"/>
-                      <a:round/>
-                      <a:headEnd type="none" w="med" len="med"/>
-                      <a:tailEnd type="none" w="med" len="med"/>
-                    </a:lnL>
-                    <a:lnR w="6350" cap="flat" cmpd="sng" algn="ctr">
-                      <a:solidFill>
-                        <a:srgbClr val="CBD5E1"/>
-                      </a:solidFill>
-                      <a:prstDash val="solid"/>
-                      <a:round/>
-                      <a:headEnd type="none" w="med" len="med"/>
-                      <a:tailEnd type="none" w="med" len="med"/>
-                    </a:lnR>
-                    <a:lnT w="6350" cap="flat" cmpd="sng" algn="ctr">
-                      <a:solidFill>
-                        <a:srgbClr val="CBD5E1"/>
-                      </a:solidFill>
-                      <a:prstDash val="solid"/>
-                      <a:round/>
-                      <a:headEnd type="none" w="med" len="med"/>
-                      <a:tailEnd type="none" w="med" len="med"/>
-                    </a:lnT>
-                    <a:lnB w="6350" cap="flat" cmpd="sng" algn="ctr">
-                      <a:solidFill>
-                        <a:srgbClr val="CBD5E1"/>
-                      </a:solidFill>
-                      <a:prstDash val="solid"/>
-                      <a:round/>
-                      <a:headEnd type="none" w="med" len="med"/>
-                      <a:tailEnd type="none" w="med" len="med"/>
-                    </a:lnB>
-                    <a:solidFill>
-                      <a:srgbClr val="E8EFF8"/>
-                    </a:solidFill>
-                  </a:tcPr>
-                </a:tc>
-                <a:tc>
-                  <a:txBody>
-                    <a:bodyPr/>
-                    <a:lstStyle/>
-                    <a:p>
-                      <a:pPr indent="0" marL="0">
-                        <a:buNone/>
-                      </a:pPr>
-                      <a:r>
-                        <a:rPr lang="en-US" sz="900" b="1" dirty="0">
-                          <a:solidFill>
-                            <a:srgbClr val="334155"/>
-                          </a:solidFill>
-                          <a:latin typeface="Arial" pitchFamily="34" charset="0"/>
-                          <a:ea typeface="Arial" pitchFamily="34" charset="-122"/>
-                          <a:cs typeface="Arial" pitchFamily="34" charset="-120"/>
-                        </a:rPr>
-                        <a:t>朝食の改善要望</a:t>
-                      </a:r>
-                      <a:endParaRPr lang="en-US" sz="900" dirty="0">
-                        <a:latin typeface="Arial" charset="0"/>
-                        <a:ea typeface="Arial" charset="0"/>
-                        <a:cs typeface="Arial" charset="0"/>
-                      </a:endParaRPr>
-                    </a:p>
-                  </a:txBody>
-                  <a:tcPr marL="91440" marR="91440" marT="45720" marB="45720">
-                    <a:lnL w="6350" cap="flat" cmpd="sng" algn="ctr">
-                      <a:solidFill>
-                        <a:srgbClr val="CBD5E1"/>
-                      </a:solidFill>
-                      <a:prstDash val="solid"/>
-                      <a:round/>
-                      <a:headEnd type="none" w="med" len="med"/>
-                      <a:tailEnd type="none" w="med" len="med"/>
-                    </a:lnL>
-                    <a:lnR w="6350" cap="flat" cmpd="sng" algn="ctr">
-                      <a:solidFill>
-                        <a:srgbClr val="CBD5E1"/>
-                      </a:solidFill>
-                      <a:prstDash val="solid"/>
-                      <a:round/>
-                      <a:headEnd type="none" w="med" len="med"/>
-                      <a:tailEnd type="none" w="med" len="med"/>
-                    </a:lnR>
-                    <a:lnT w="6350" cap="flat" cmpd="sng" algn="ctr">
-                      <a:solidFill>
-                        <a:srgbClr val="CBD5E1"/>
-                      </a:solidFill>
-                      <a:prstDash val="solid"/>
-                      <a:round/>
-                      <a:headEnd type="none" w="med" len="med"/>
-                      <a:tailEnd type="none" w="med" len="med"/>
-                    </a:lnT>
-                    <a:lnB w="6350" cap="flat" cmpd="sng" algn="ctr">
-                      <a:solidFill>
-                        <a:srgbClr val="CBD5E1"/>
-                      </a:solidFill>
-                      <a:prstDash val="solid"/>
-                      <a:round/>
-                      <a:headEnd type="none" w="med" len="med"/>
-                      <a:tailEnd type="none" w="med" len="med"/>
-                    </a:lnB>
-                    <a:solidFill>
-                      <a:srgbClr val="E8EFF8"/>
-                    </a:solidFill>
-                  </a:tcPr>
-                </a:tc>
-                <a:tc>
-                  <a:txBody>
-                    <a:bodyPr/>
-                    <a:lstStyle/>
-                    <a:p>
-                      <a:pPr indent="0" marL="0">
-                        <a:buNone/>
-                      </a:pPr>
-                      <a:r>
-                        <a:rPr lang="en-US" sz="900" dirty="0">
-                          <a:solidFill>
-                            <a:srgbClr val="64748B"/>
-                          </a:solidFill>
-                          <a:latin typeface="Arial" pitchFamily="34" charset="0"/>
-                          <a:ea typeface="Arial" pitchFamily="34" charset="-122"/>
-                          <a:cs typeface="Arial" pitchFamily="34" charset="-120"/>
-                        </a:rPr>
-                        <a:t>日曜日の宿泊だからか品数少なく、卵は生卵だけ</a:t>
-                      </a:r>
-                      <a:endParaRPr lang="en-US" sz="900" dirty="0">
-                        <a:latin typeface="Arial" charset="0"/>
-                        <a:ea typeface="Arial" charset="0"/>
-                        <a:cs typeface="Arial" charset="0"/>
-                      </a:endParaRPr>
-                    </a:p>
-                  </a:txBody>
-                  <a:tcPr marL="91440" marR="91440" marT="45720" marB="45720">
-                    <a:lnL w="6350" cap="flat" cmpd="sng" algn="ctr">
-                      <a:solidFill>
-                        <a:srgbClr val="CBD5E1"/>
-                      </a:solidFill>
-                      <a:prstDash val="solid"/>
-                      <a:round/>
-                      <a:headEnd type="none" w="med" len="med"/>
-                      <a:tailEnd type="none" w="med" len="med"/>
-                    </a:lnL>
-                    <a:lnR w="6350" cap="flat" cmpd="sng" algn="ctr">
-                      <a:solidFill>
-                        <a:srgbClr val="CBD5E1"/>
-                      </a:solidFill>
-                      <a:prstDash val="solid"/>
-                      <a:round/>
-                      <a:headEnd type="none" w="med" len="med"/>
-                      <a:tailEnd type="none" w="med" len="med"/>
-                    </a:lnR>
-                    <a:lnT w="6350" cap="flat" cmpd="sng" algn="ctr">
-                      <a:solidFill>
-                        <a:srgbClr val="CBD5E1"/>
-                      </a:solidFill>
-                      <a:prstDash val="solid"/>
-                      <a:round/>
-                      <a:headEnd type="none" w="med" len="med"/>
-                      <a:tailEnd type="none" w="med" len="med"/>
-                    </a:lnT>
-                    <a:lnB w="6350" cap="flat" cmpd="sng" algn="ctr">
-                      <a:solidFill>
-                        <a:srgbClr val="CBD5E1"/>
-                      </a:solidFill>
-                      <a:prstDash val="solid"/>
-                      <a:round/>
-                      <a:headEnd type="none" w="med" len="med"/>
-                      <a:tailEnd type="none" w="med" len="med"/>
-                    </a:lnB>
-                    <a:solidFill>
-                      <a:srgbClr val="E8EFF8"/>
-                    </a:solidFill>
-                  </a:tcPr>
-                </a:tc>
-                <a:tc>
-                  <a:txBody>
-                    <a:bodyPr/>
-                    <a:lstStyle/>
-                    <a:p>
-                      <a:pPr algn="ctr" indent="0" marL="0">
-                        <a:buNone/>
-                      </a:pPr>
-                      <a:r>
-                        <a:rPr lang="en-US" sz="900" dirty="0">
-                          <a:solidFill>
-                            <a:srgbClr val="334155"/>
-                          </a:solidFill>
-                          <a:latin typeface="Arial" pitchFamily="34" charset="0"/>
-                          <a:ea typeface="Arial" pitchFamily="34" charset="-122"/>
-                          <a:cs typeface="Arial" pitchFamily="34" charset="-120"/>
-                        </a:rPr>
-                        <a:t>1件</a:t>
-                      </a:r>
-                      <a:endParaRPr lang="en-US" sz="900" dirty="0">
-                        <a:latin typeface="Arial" charset="0"/>
-                        <a:ea typeface="Arial" charset="0"/>
-                        <a:cs typeface="Arial" charset="0"/>
-                      </a:endParaRPr>
-                    </a:p>
-                  </a:txBody>
-                  <a:tcPr marL="91440" marR="91440" marT="45720" marB="45720">
-                    <a:lnL w="6350" cap="flat" cmpd="sng" algn="ctr">
-                      <a:solidFill>
-                        <a:srgbClr val="CBD5E1"/>
-                      </a:solidFill>
-                      <a:prstDash val="solid"/>
-                      <a:round/>
-                      <a:headEnd type="none" w="med" len="med"/>
-                      <a:tailEnd type="none" w="med" len="med"/>
-                    </a:lnL>
-                    <a:lnR w="6350" cap="flat" cmpd="sng" algn="ctr">
-                      <a:solidFill>
-                        <a:srgbClr val="CBD5E1"/>
-                      </a:solidFill>
-                      <a:prstDash val="solid"/>
-                      <a:round/>
-                      <a:headEnd type="none" w="med" len="med"/>
-                      <a:tailEnd type="none" w="med" len="med"/>
-                    </a:lnR>
-                    <a:lnT w="6350" cap="flat" cmpd="sng" algn="ctr">
-                      <a:solidFill>
-                        <a:srgbClr val="CBD5E1"/>
-                      </a:solidFill>
-                      <a:prstDash val="solid"/>
-                      <a:round/>
-                      <a:headEnd type="none" w="med" len="med"/>
-                      <a:tailEnd type="none" w="med" len="med"/>
-                    </a:lnT>
-                    <a:lnB w="6350" cap="flat" cmpd="sng" algn="ctr">
-                      <a:solidFill>
-                        <a:srgbClr val="CBD5E1"/>
-                      </a:solidFill>
-                      <a:prstDash val="solid"/>
-                      <a:round/>
-                      <a:headEnd type="none" w="med" len="med"/>
-                      <a:tailEnd type="none" w="med" len="med"/>
-                    </a:lnB>
-                    <a:solidFill>
-                      <a:srgbClr val="E8EFF8"/>
-                    </a:solidFill>
-                  </a:tcPr>
-                </a:tc>
-              </a:tr>
-              <a:tr h="320040">
-                <a:tc>
-                  <a:txBody>
-                    <a:bodyPr/>
-                    <a:lstStyle/>
-                    <a:p>
-                      <a:pPr algn="ctr" indent="0" marL="0">
-                        <a:buNone/>
-                      </a:pPr>
-                      <a:r>
-                        <a:rPr lang="en-US" sz="1200" b="1" dirty="0">
-                          <a:solidFill>
-                            <a:srgbClr val="94A3B8"/>
-                          </a:solidFill>
-                          <a:latin typeface="Arial" pitchFamily="34" charset="0"/>
-                          <a:ea typeface="Arial" pitchFamily="34" charset="-122"/>
-                          <a:cs typeface="Arial" pitchFamily="34" charset="-120"/>
-                        </a:rPr>
-                        <a:t>C</a:t>
-                      </a:r>
-                      <a:endParaRPr lang="en-US" sz="1200" dirty="0">
-                        <a:latin typeface="Arial" charset="0"/>
-                        <a:ea typeface="Arial" charset="0"/>
-                        <a:cs typeface="Arial" charset="0"/>
-                      </a:endParaRPr>
-                    </a:p>
-                  </a:txBody>
-                  <a:tcPr marL="91440" marR="91440" marT="45720" marB="45720">
-                    <a:lnL w="6350" cap="flat" cmpd="sng" algn="ctr">
-                      <a:solidFill>
-                        <a:srgbClr val="CBD5E1"/>
-                      </a:solidFill>
-                      <a:prstDash val="solid"/>
-                      <a:round/>
-                      <a:headEnd type="none" w="med" len="med"/>
-                      <a:tailEnd type="none" w="med" len="med"/>
-                    </a:lnL>
-                    <a:lnR w="6350" cap="flat" cmpd="sng" algn="ctr">
-                      <a:solidFill>
-                        <a:srgbClr val="CBD5E1"/>
-                      </a:solidFill>
-                      <a:prstDash val="solid"/>
-                      <a:round/>
-                      <a:headEnd type="none" w="med" len="med"/>
-                      <a:tailEnd type="none" w="med" len="med"/>
-                    </a:lnR>
-                    <a:lnT w="6350" cap="flat" cmpd="sng" algn="ctr">
-                      <a:solidFill>
-                        <a:srgbClr val="CBD5E1"/>
-                      </a:solidFill>
-                      <a:prstDash val="solid"/>
-                      <a:round/>
-                      <a:headEnd type="none" w="med" len="med"/>
-                      <a:tailEnd type="none" w="med" len="med"/>
-                    </a:lnT>
-                    <a:lnB w="6350" cap="flat" cmpd="sng" algn="ctr">
-                      <a:solidFill>
-                        <a:srgbClr val="CBD5E1"/>
-                      </a:solidFill>
-                      <a:prstDash val="solid"/>
-                      <a:round/>
-                      <a:headEnd type="none" w="med" len="med"/>
-                      <a:tailEnd type="none" w="med" len="med"/>
-                    </a:lnB>
-                    <a:solidFill>
-                      <a:srgbClr val="FFFFFF"/>
-                    </a:solidFill>
-                  </a:tcPr>
-                </a:tc>
-                <a:tc>
-                  <a:txBody>
-                    <a:bodyPr/>
-                    <a:lstStyle/>
-                    <a:p>
-                      <a:pPr indent="0" marL="0">
-                        <a:buNone/>
-                      </a:pPr>
-                      <a:r>
-                        <a:rPr lang="en-US" sz="900" b="1" dirty="0">
-                          <a:solidFill>
-                            <a:srgbClr val="334155"/>
-                          </a:solidFill>
-                          <a:latin typeface="Arial" pitchFamily="34" charset="0"/>
-                          <a:ea typeface="Arial" pitchFamily="34" charset="-122"/>
-                          <a:cs typeface="Arial" pitchFamily="34" charset="-120"/>
-                        </a:rPr>
-                        <a:t>窓・採光</a:t>
-                      </a:r>
-                      <a:endParaRPr lang="en-US" sz="900" dirty="0">
-                        <a:latin typeface="Arial" charset="0"/>
-                        <a:ea typeface="Arial" charset="0"/>
-                        <a:cs typeface="Arial" charset="0"/>
-                      </a:endParaRPr>
-                    </a:p>
-                  </a:txBody>
-                  <a:tcPr marL="91440" marR="91440" marT="45720" marB="45720">
-                    <a:lnL w="6350" cap="flat" cmpd="sng" algn="ctr">
-                      <a:solidFill>
-                        <a:srgbClr val="CBD5E1"/>
-                      </a:solidFill>
-                      <a:prstDash val="solid"/>
-                      <a:round/>
-                      <a:headEnd type="none" w="med" len="med"/>
-                      <a:tailEnd type="none" w="med" len="med"/>
-                    </a:lnL>
-                    <a:lnR w="6350" cap="flat" cmpd="sng" algn="ctr">
-                      <a:solidFill>
-                        <a:srgbClr val="CBD5E1"/>
-                      </a:solidFill>
-                      <a:prstDash val="solid"/>
-                      <a:round/>
-                      <a:headEnd type="none" w="med" len="med"/>
-                      <a:tailEnd type="none" w="med" len="med"/>
-                    </a:lnR>
-                    <a:lnT w="6350" cap="flat" cmpd="sng" algn="ctr">
-                      <a:solidFill>
-                        <a:srgbClr val="CBD5E1"/>
-                      </a:solidFill>
-                      <a:prstDash val="solid"/>
-                      <a:round/>
-                      <a:headEnd type="none" w="med" len="med"/>
-                      <a:tailEnd type="none" w="med" len="med"/>
-                    </a:lnT>
-                    <a:lnB w="6350" cap="flat" cmpd="sng" algn="ctr">
-                      <a:solidFill>
-                        <a:srgbClr val="CBD5E1"/>
-                      </a:solidFill>
-                      <a:prstDash val="solid"/>
-                      <a:round/>
-                      <a:headEnd type="none" w="med" len="med"/>
-                      <a:tailEnd type="none" w="med" len="med"/>
-                    </a:lnB>
-                    <a:solidFill>
-                      <a:srgbClr val="FFFFFF"/>
-                    </a:solidFill>
-                  </a:tcPr>
-                </a:tc>
-                <a:tc>
-                  <a:txBody>
-                    <a:bodyPr/>
-                    <a:lstStyle/>
-                    <a:p>
-                      <a:pPr indent="0" marL="0">
-                        <a:buNone/>
-                      </a:pPr>
-                      <a:r>
-                        <a:rPr lang="en-US" sz="900" dirty="0">
-                          <a:solidFill>
-                            <a:srgbClr val="64748B"/>
-                          </a:solidFill>
-                          <a:latin typeface="Arial" pitchFamily="34" charset="0"/>
-                          <a:ea typeface="Arial" pitchFamily="34" charset="-122"/>
-                          <a:cs typeface="Arial" pitchFamily="34" charset="-120"/>
-                        </a:rPr>
-                        <a:t>客室も清潔でスタッフも明るくフレンドリーでした</a:t>
-                      </a:r>
-                      <a:endParaRPr lang="en-US" sz="900" dirty="0">
-                        <a:latin typeface="Arial" charset="0"/>
-                        <a:ea typeface="Arial" charset="0"/>
-                        <a:cs typeface="Arial" charset="0"/>
-                      </a:endParaRPr>
-                    </a:p>
-                  </a:txBody>
-                  <a:tcPr marL="91440" marR="91440" marT="45720" marB="45720">
-                    <a:lnL w="6350" cap="flat" cmpd="sng" algn="ctr">
-                      <a:solidFill>
-                        <a:srgbClr val="CBD5E1"/>
-                      </a:solidFill>
-                      <a:prstDash val="solid"/>
-                      <a:round/>
-                      <a:headEnd type="none" w="med" len="med"/>
-                      <a:tailEnd type="none" w="med" len="med"/>
-                    </a:lnL>
-                    <a:lnR w="6350" cap="flat" cmpd="sng" algn="ctr">
-                      <a:solidFill>
-                        <a:srgbClr val="CBD5E1"/>
-                      </a:solidFill>
-                      <a:prstDash val="solid"/>
-                      <a:round/>
-                      <a:headEnd type="none" w="med" len="med"/>
-                      <a:tailEnd type="none" w="med" len="med"/>
-                    </a:lnR>
-                    <a:lnT w="6350" cap="flat" cmpd="sng" algn="ctr">
-                      <a:solidFill>
-                        <a:srgbClr val="CBD5E1"/>
-                      </a:solidFill>
-                      <a:prstDash val="solid"/>
-                      <a:round/>
-                      <a:headEnd type="none" w="med" len="med"/>
-                      <a:tailEnd type="none" w="med" len="med"/>
-                    </a:lnT>
-                    <a:lnB w="6350" cap="flat" cmpd="sng" algn="ctr">
-                      <a:solidFill>
-                        <a:srgbClr val="CBD5E1"/>
-                      </a:solidFill>
-                      <a:prstDash val="solid"/>
-                      <a:round/>
-                      <a:headEnd type="none" w="med" len="med"/>
-                      <a:tailEnd type="none" w="med" len="med"/>
-                    </a:lnB>
-                    <a:solidFill>
-                      <a:srgbClr val="FFFFFF"/>
-                    </a:solidFill>
-                  </a:tcPr>
-                </a:tc>
-                <a:tc>
-                  <a:txBody>
-                    <a:bodyPr/>
-                    <a:lstStyle/>
-                    <a:p>
-                      <a:pPr algn="ctr" indent="0" marL="0">
-                        <a:buNone/>
-                      </a:pPr>
-                      <a:r>
-                        <a:rPr lang="en-US" sz="900" dirty="0">
-                          <a:solidFill>
-                            <a:srgbClr val="334155"/>
-                          </a:solidFill>
-                          <a:latin typeface="Arial" pitchFamily="34" charset="0"/>
-                          <a:ea typeface="Arial" pitchFamily="34" charset="-122"/>
-                          <a:cs typeface="Arial" pitchFamily="34" charset="-120"/>
-                        </a:rPr>
-                        <a:t>1件</a:t>
-                      </a:r>
-                      <a:endParaRPr lang="en-US" sz="900" dirty="0">
-                        <a:latin typeface="Arial" charset="0"/>
-                        <a:ea typeface="Arial" charset="0"/>
-                        <a:cs typeface="Arial" charset="0"/>
-                      </a:endParaRPr>
-                    </a:p>
-                  </a:txBody>
-                  <a:tcPr marL="91440" marR="91440" marT="45720" marB="45720">
-                    <a:lnL w="6350" cap="flat" cmpd="sng" algn="ctr">
-                      <a:solidFill>
-                        <a:srgbClr val="CBD5E1"/>
-                      </a:solidFill>
-                      <a:prstDash val="solid"/>
-                      <a:round/>
-                      <a:headEnd type="none" w="med" len="med"/>
-                      <a:tailEnd type="none" w="med" len="med"/>
-                    </a:lnL>
-                    <a:lnR w="6350" cap="flat" cmpd="sng" algn="ctr">
-                      <a:solidFill>
-                        <a:srgbClr val="CBD5E1"/>
-                      </a:solidFill>
-                      <a:prstDash val="solid"/>
-                      <a:round/>
-                      <a:headEnd type="none" w="med" len="med"/>
-                      <a:tailEnd type="none" w="med" len="med"/>
-                    </a:lnR>
-                    <a:lnT w="6350" cap="flat" cmpd="sng" algn="ctr">
-                      <a:solidFill>
-                        <a:srgbClr val="CBD5E1"/>
-                      </a:solidFill>
-                      <a:prstDash val="solid"/>
-                      <a:round/>
-                      <a:headEnd type="none" w="med" len="med"/>
-                      <a:tailEnd type="none" w="med" len="med"/>
-                    </a:lnT>
-                    <a:lnB w="6350" cap="flat" cmpd="sng" algn="ctr">
-                      <a:solidFill>
-                        <a:srgbClr val="CBD5E1"/>
-                      </a:solidFill>
-                      <a:prstDash val="solid"/>
-                      <a:round/>
-                      <a:headEnd type="none" w="med" len="med"/>
-                      <a:tailEnd type="none" w="med" len="med"/>
-                    </a:lnB>
-                    <a:solidFill>
-                      <a:srgbClr val="FFFFFF"/>
-                    </a:solidFill>
-                  </a:tcPr>
-                </a:tc>
-              </a:tr>
             </a:tbl>
           </a:graphicData>
         </a:graphic>
@@ -15025,7 +14766,7 @@
                 <a:ea typeface="Arial" pitchFamily="34" charset="-122"/>
                 <a:cs typeface="Arial" pitchFamily="34" charset="-120"/>
               </a:rPr>
-              <a:t>朝食サービスの改善</a:t>
+              <a:t>エアコン・空調の定期点検強化</a:t>
             </a:r>
             <a:endParaRPr lang="en-US" sz="1200" dirty="0"/>
           </a:p>
@@ -15040,177 +14781,6 @@
         <p:spPr>
           <a:xfrm>
             <a:off x="4800600" y="1600200"/>
-            <a:ext cx="3657600" cy="1188720"/>
-          </a:xfrm>
-          <a:prstGeom prst="rect">
-            <a:avLst/>
-          </a:prstGeom>
-          <a:noFill/>
-          <a:ln/>
-        </p:spPr>
-        <p:txBody>
-          <a:bodyPr wrap="square" lIns="0" tIns="0" rIns="0" bIns="0" rtlCol="0" anchor="ctr"/>
-          <a:lstStyle/>
-          <a:p>
-            <a:pPr marL="342900" indent="-342900">
-              <a:spcAft>
-                <a:spcPts val="300"/>
-              </a:spcAft>
-              <a:buSzPct val="100000"/>
-              <a:buChar char="•"/>
-            </a:pPr>
-            <a:r>
-              <a:rPr lang="en-US" sz="900" dirty="0">
-                <a:solidFill>
-                  <a:srgbClr val="334155"/>
-                </a:solidFill>
-                <a:latin typeface="Arial" pitchFamily="34" charset="0"/>
-                <a:ea typeface="Arial" pitchFamily="34" charset="-122"/>
-                <a:cs typeface="Arial" pitchFamily="34" charset="-120"/>
-              </a:rPr>
-              <a:t>メニューの定期的な見直しとバリエーション追加</a:t>
-            </a:r>
-            <a:endParaRPr lang="en-US" sz="900" dirty="0"/>
-          </a:p>
-          <a:p>
-            <a:pPr marL="342900" indent="-342900">
-              <a:spcAft>
-                <a:spcPts val="300"/>
-              </a:spcAft>
-              <a:buSzPct val="100000"/>
-              <a:buChar char="•"/>
-            </a:pPr>
-            <a:r>
-              <a:rPr lang="en-US" sz="900" dirty="0">
-                <a:solidFill>
-                  <a:srgbClr val="334155"/>
-                </a:solidFill>
-                <a:latin typeface="Arial" pitchFamily="34" charset="0"/>
-                <a:ea typeface="Arial" pitchFamily="34" charset="-122"/>
-                <a:cs typeface="Arial" pitchFamily="34" charset="-120"/>
-              </a:rPr>
-              <a:t>補充頻度の向上と品切れ防止</a:t>
-            </a:r>
-            <a:endParaRPr lang="en-US" sz="900" dirty="0"/>
-          </a:p>
-          <a:p>
-            <a:pPr marL="342900" indent="-342900">
-              <a:spcAft>
-                <a:spcPts val="300"/>
-              </a:spcAft>
-              <a:buSzPct val="100000"/>
-              <a:buChar char="•"/>
-            </a:pPr>
-            <a:r>
-              <a:rPr lang="en-US" sz="900" dirty="0">
-                <a:solidFill>
-                  <a:srgbClr val="334155"/>
-                </a:solidFill>
-                <a:latin typeface="Arial" pitchFamily="34" charset="0"/>
-                <a:ea typeface="Arial" pitchFamily="34" charset="-122"/>
-                <a:cs typeface="Arial" pitchFamily="34" charset="-120"/>
-              </a:rPr>
-              <a:t>宿泊客数に応じた朝食準備量の最適化</a:t>
-            </a:r>
-            <a:endParaRPr lang="en-US" sz="900" dirty="0"/>
-          </a:p>
-        </p:txBody>
-      </p:sp>
-      <p:sp>
-        <p:nvSpPr>
-          <p:cNvPr id="14" name="Shape 12"/>
-          <p:cNvSpPr/>
-          <p:nvPr/>
-        </p:nvSpPr>
-        <p:spPr>
-          <a:xfrm>
-            <a:off x="457200" y="3017520"/>
-            <a:ext cx="3977640" cy="1600200"/>
-          </a:xfrm>
-          <a:prstGeom prst="rect">
-            <a:avLst/>
-          </a:prstGeom>
-          <a:solidFill>
-            <a:srgbClr val="FFFFFF"/>
-          </a:solidFill>
-          <a:ln/>
-          <a:effectLst>
-            <a:outerShdw sx="100000" sy="100000" kx="0" ky="0" algn="bl" rotWithShape="0" blurRad="50800" dist="25400" dir="8100000">
-              <a:srgbClr val="000000">
-                <a:alpha val="10000"/>
-              </a:srgbClr>
-            </a:outerShdw>
-          </a:effectLst>
-        </p:spPr>
-      </p:sp>
-      <p:sp>
-        <p:nvSpPr>
-          <p:cNvPr id="15" name="Shape 13"/>
-          <p:cNvSpPr/>
-          <p:nvPr/>
-        </p:nvSpPr>
-        <p:spPr>
-          <a:xfrm>
-            <a:off x="457200" y="3017520"/>
-            <a:ext cx="54864" cy="1600200"/>
-          </a:xfrm>
-          <a:prstGeom prst="rect">
-            <a:avLst/>
-          </a:prstGeom>
-          <a:solidFill>
-            <a:srgbClr val="3B7DD8"/>
-          </a:solidFill>
-          <a:ln/>
-        </p:spPr>
-      </p:sp>
-      <p:sp>
-        <p:nvSpPr>
-          <p:cNvPr id="16" name="Text 14"/>
-          <p:cNvSpPr/>
-          <p:nvPr/>
-        </p:nvSpPr>
-        <p:spPr>
-          <a:xfrm>
-            <a:off x="594360" y="3063240"/>
-            <a:ext cx="3657600" cy="320040"/>
-          </a:xfrm>
-          <a:prstGeom prst="rect">
-            <a:avLst/>
-          </a:prstGeom>
-          <a:noFill/>
-          <a:ln/>
-        </p:spPr>
-        <p:txBody>
-          <a:bodyPr wrap="square" lIns="0" tIns="0" rIns="0" bIns="0" rtlCol="0" anchor="ctr"/>
-          <a:lstStyle/>
-          <a:p>
-            <a:pPr indent="0" marL="0">
-              <a:buNone/>
-            </a:pPr>
-            <a:r>
-              <a:rPr lang="en-US" sz="1200" b="1" dirty="0">
-                <a:solidFill>
-                  <a:srgbClr val="1A2744"/>
-                </a:solidFill>
-                <a:latin typeface="Arial" pitchFamily="34" charset="0"/>
-                <a:ea typeface="Arial" pitchFamily="34" charset="-122"/>
-                <a:cs typeface="Arial" pitchFamily="34" charset="-120"/>
-              </a:rPr>
-              <a:t>エアコン・空調の定期点検強化</a:t>
-            </a:r>
-            <a:endParaRPr lang="en-US" sz="1200" dirty="0"/>
-          </a:p>
-        </p:txBody>
-      </p:sp>
-      <p:sp>
-        <p:nvSpPr>
-          <p:cNvPr id="17" name="Text 15"/>
-          <p:cNvSpPr/>
-          <p:nvPr/>
-        </p:nvSpPr>
-        <p:spPr>
-          <a:xfrm>
-            <a:off x="594360" y="3383280"/>
             <a:ext cx="3657600" cy="1188720"/>
           </a:xfrm>
           <a:prstGeom prst="rect">
@@ -15289,13 +14859,13 @@
       </p:sp>
       <p:sp>
         <p:nvSpPr>
-          <p:cNvPr id="18" name="Shape 16"/>
-          <p:cNvSpPr/>
-          <p:nvPr/>
-        </p:nvSpPr>
-        <p:spPr>
-          <a:xfrm>
-            <a:off x="4663440" y="3017520"/>
+          <p:cNvPr id="14" name="Shape 12"/>
+          <p:cNvSpPr/>
+          <p:nvPr/>
+        </p:nvSpPr>
+        <p:spPr>
+          <a:xfrm>
+            <a:off x="457200" y="3017520"/>
             <a:ext cx="3977640" cy="1600200"/>
           </a:xfrm>
           <a:prstGeom prst="rect">
@@ -15316,13 +14886,13 @@
       </p:sp>
       <p:sp>
         <p:nvSpPr>
-          <p:cNvPr id="19" name="Shape 17"/>
-          <p:cNvSpPr/>
-          <p:nvPr/>
-        </p:nvSpPr>
-        <p:spPr>
-          <a:xfrm>
-            <a:off x="4663440" y="3017520"/>
+          <p:cNvPr id="15" name="Shape 13"/>
+          <p:cNvSpPr/>
+          <p:nvPr/>
+        </p:nvSpPr>
+        <p:spPr>
+          <a:xfrm>
+            <a:off x="457200" y="3017520"/>
             <a:ext cx="54864" cy="1600200"/>
           </a:xfrm>
           <a:prstGeom prst="rect">
@@ -15336,13 +14906,13 @@
       </p:sp>
       <p:sp>
         <p:nvSpPr>
-          <p:cNvPr id="20" name="Text 18"/>
-          <p:cNvSpPr/>
-          <p:nvPr/>
-        </p:nvSpPr>
-        <p:spPr>
-          <a:xfrm>
-            <a:off x="4800600" y="3063240"/>
+          <p:cNvPr id="16" name="Text 14"/>
+          <p:cNvSpPr/>
+          <p:nvPr/>
+        </p:nvSpPr>
+        <p:spPr>
+          <a:xfrm>
+            <a:off x="594360" y="3063240"/>
             <a:ext cx="3657600" cy="320040"/>
           </a:xfrm>
           <a:prstGeom prst="rect">
@@ -15375,13 +14945,13 @@
       </p:sp>
       <p:sp>
         <p:nvSpPr>
-          <p:cNvPr id="21" name="Text 19"/>
-          <p:cNvSpPr/>
-          <p:nvPr/>
-        </p:nvSpPr>
-        <p:spPr>
-          <a:xfrm>
-            <a:off x="4800600" y="3383280"/>
+          <p:cNvPr id="17" name="Text 15"/>
+          <p:cNvSpPr/>
+          <p:nvPr/>
+        </p:nvSpPr>
+        <p:spPr>
+          <a:xfrm>
+            <a:off x="594360" y="3383280"/>
             <a:ext cx="3657600" cy="1188720"/>
           </a:xfrm>
           <a:prstGeom prst="rect">
@@ -15460,7 +15030,7 @@
       </p:sp>
       <p:sp>
         <p:nvSpPr>
-          <p:cNvPr id="22" name="Shape 20"/>
+          <p:cNvPr id="18" name="Shape 16"/>
           <p:cNvSpPr/>
           <p:nvPr/>
         </p:nvSpPr>
@@ -15480,7 +15050,7 @@
       </p:sp>
       <p:sp>
         <p:nvSpPr>
-          <p:cNvPr id="23" name="Text 21"/>
+          <p:cNvPr id="19" name="Text 17"/>
           <p:cNvSpPr/>
           <p:nvPr/>
         </p:nvSpPr>
@@ -15519,7 +15089,7 @@
       </p:sp>
       <p:sp>
         <p:nvSpPr>
-          <p:cNvPr id="24" name="Text 22"/>
+          <p:cNvPr id="20" name="Text 18"/>
           <p:cNvSpPr/>
           <p:nvPr/>
         </p:nvSpPr>
@@ -16053,7 +15623,7 @@
                 <a:ea typeface="Arial" pitchFamily="34" charset="-122"/>
                 <a:cs typeface="Arial" pitchFamily="34" charset="-120"/>
               </a:rPr>
-              <a:t>窓・採光環境の改善</a:t>
+              <a:t>口コミ返信体制の構築</a:t>
             </a:r>
             <a:endParaRPr lang="en-US" sz="1000" dirty="0"/>
           </a:p>
@@ -16068,7 +15638,7 @@
         <p:spPr>
           <a:xfrm>
             <a:off x="640080" y="3803904"/>
-            <a:ext cx="3474720" cy="694944"/>
+            <a:ext cx="3474720" cy="493776"/>
           </a:xfrm>
           <a:prstGeom prst="rect">
             <a:avLst/>
@@ -16096,7 +15666,7 @@
                 <a:ea typeface="Arial" pitchFamily="34" charset="-122"/>
                 <a:cs typeface="Arial" pitchFamily="34" charset="-120"/>
               </a:rPr>
-              <a:t>遮光カーテンとレースカーテンの品質見直し</a:t>
+              <a:t>全サイトの口コミに48時間以内の返信を目標に設定</a:t>
             </a:r>
             <a:endParaRPr lang="en-US" sz="900" dirty="0"/>
           </a:p>
@@ -16117,28 +15687,7 @@
                 <a:ea typeface="Arial" pitchFamily="34" charset="-122"/>
                 <a:cs typeface="Arial" pitchFamily="34" charset="-120"/>
               </a:rPr>
-              <a:t>窓の開閉可否に関する事前案内の徹底</a:t>
-            </a:r>
-            <a:endParaRPr lang="en-US" sz="900" dirty="0"/>
-          </a:p>
-          <a:p>
-            <a:pPr marL="342900" indent="-342900">
-              <a:spcAft>
-                <a:spcPts val="200"/>
-              </a:spcAft>
-              <a:buSzPct val="100000"/>
-              <a:buChar char="•"/>
-            </a:pPr>
-            <a:r>
-              <a:rPr lang="en-US" sz="900" dirty="0">
-                <a:solidFill>
-                  <a:srgbClr val="64748B"/>
-                </a:solidFill>
-                <a:latin typeface="Arial" pitchFamily="34" charset="0"/>
-                <a:ea typeface="Arial" pitchFamily="34" charset="-122"/>
-                <a:cs typeface="Arial" pitchFamily="34" charset="-120"/>
-              </a:rPr>
-              <a:t>採光の良い客室の優先割り当てルール整備</a:t>
+              <a:t>特に低評価レビューへのフォローアップ強化</a:t>
             </a:r>
             <a:endParaRPr lang="en-US" sz="900" dirty="0"/>
           </a:p>

--- a/納品レポート/ホテル別レポート/apa_sagamihara_口コミ分析レポート.pptx
+++ b/納品レポート/ホテル別レポート/apa_sagamihara_口コミ分析レポート.pptx
@@ -189,10 +189,10 @@
                     <c:v>じゃらん</c:v>
                   </c:pt>
                   <c:pt idx="3">
-                    <c:v>Booking.com</c:v>
+                    <c:v>楽天トラベル</c:v>
                   </c:pt>
                   <c:pt idx="4">
-                    <c:v>楽天トラベル</c:v>
+                    <c:v>Booking.com</c:v>
                   </c:pt>
                   <c:pt idx="5">
                     <c:v>Trip.com</c:v>
@@ -217,10 +217,10 @@
                   <c:v>8</c:v>
                 </c:pt>
                 <c:pt idx="3">
-                  <c:v>7.89</c:v>
+                  <c:v>8</c:v>
                 </c:pt>
                 <c:pt idx="4">
-                  <c:v>7.67</c:v>
+                  <c:v>7.89</c:v>
                 </c:pt>
                 <c:pt idx="5">
                   <c:v>6</c:v>
@@ -566,7 +566,7 @@
               <c:numCache>
                 <c:ptCount val="3"/>
                 <c:pt idx="0">
-                  <c:v>20</c:v>
+                  <c:v>21</c:v>
                 </c:pt>
                 <c:pt idx="1">
                   <c:v>10</c:v>
@@ -767,7 +767,7 @@
                 <c:formatCode>General</c:formatCode>
                 <c:ptCount val="5"/>
                 <c:pt idx="0">
-                  <c:v>6</c:v>
+                  <c:v>7</c:v>
                 </c:pt>
                 <c:pt idx="1">
                   <c:v>3</c:v>
@@ -2710,7 +2710,7 @@
                 <a:ea typeface="Arial" pitchFamily="34" charset="-122"/>
                 <a:cs typeface="Arial" pitchFamily="34" charset="-120"/>
               </a:rPr>
-              <a:t>分析対象期間：2026年3月</a:t>
+              <a:t>分析対象期間：2026年3月〜4月</a:t>
             </a:r>
             <a:endParaRPr lang="en-US" sz="1000" dirty="0"/>
           </a:p>
@@ -2730,7 +2730,7 @@
                 <a:ea typeface="Arial" pitchFamily="34" charset="-122"/>
                 <a:cs typeface="Arial" pitchFamily="34" charset="-120"/>
               </a:rPr>
-              <a:t>レビュー総数：30件（6サイト）</a:t>
+              <a:t>レビュー総数：31件（6サイト）</a:t>
             </a:r>
             <a:endParaRPr lang="en-US" sz="1000" dirty="0"/>
           </a:p>
@@ -3296,7 +3296,7 @@
                           <a:ea typeface="Arial" pitchFamily="34" charset="-122"/>
                           <a:cs typeface="Arial" pitchFamily="34" charset="-120"/>
                         </a:rPr>
-                        <a:t>8.00点</a:t>
+                        <a:t>8.06点</a:t>
                       </a:r>
                       <a:endParaRPr lang="en-US" sz="1000" dirty="0">
                         <a:latin typeface="Arial" charset="0"/>
@@ -3364,7 +3364,7 @@
                           <a:ea typeface="Arial" pitchFamily="34" charset="-122"/>
                           <a:cs typeface="Arial" pitchFamily="34" charset="-120"/>
                         </a:rPr>
-                        <a:t>8.3点以上</a:t>
+                        <a:t>8.4点以上</a:t>
                       </a:r>
                       <a:endParaRPr lang="en-US" sz="1000" dirty="0">
                         <a:latin typeface="Arial" charset="0"/>
@@ -3570,7 +3570,7 @@
                           <a:ea typeface="Arial" pitchFamily="34" charset="-122"/>
                           <a:cs typeface="Arial" pitchFamily="34" charset="-120"/>
                         </a:rPr>
-                        <a:t>66.7%</a:t>
+                        <a:t>67.7%</a:t>
                       </a:r>
                       <a:endParaRPr lang="en-US" sz="1000" dirty="0">
                         <a:latin typeface="Arial" charset="0"/>
@@ -3638,7 +3638,7 @@
                           <a:ea typeface="Arial" pitchFamily="34" charset="-122"/>
                           <a:cs typeface="Arial" pitchFamily="34" charset="-120"/>
                         </a:rPr>
-                        <a:t>77%以上</a:t>
+                        <a:t>78%以上</a:t>
                       </a:r>
                       <a:endParaRPr lang="en-US" sz="1000" dirty="0">
                         <a:latin typeface="Arial" charset="0"/>
@@ -4666,7 +4666,7 @@
                           <a:ea typeface="Arial" pitchFamily="34" charset="-122"/>
                           <a:cs typeface="Arial" pitchFamily="34" charset="-120"/>
                         </a:rPr>
-                        <a:t>約3件/期間</a:t>
+                        <a:t>約4件/期間</a:t>
                       </a:r>
                       <a:endParaRPr lang="en-US" sz="1000" dirty="0">
                         <a:latin typeface="Arial" charset="0"/>
@@ -4734,7 +4734,7 @@
                           <a:ea typeface="Arial" pitchFamily="34" charset="-122"/>
                           <a:cs typeface="Arial" pitchFamily="34" charset="-120"/>
                         </a:rPr>
-                        <a:t>1件以下</a:t>
+                        <a:t>2件以下</a:t>
                       </a:r>
                       <a:endParaRPr lang="en-US" sz="1000" dirty="0">
                         <a:latin typeface="Arial" charset="0"/>
@@ -5305,7 +5305,7 @@
                 <a:ea typeface="Arial" pitchFamily="34" charset="-122"/>
                 <a:cs typeface="Arial" pitchFamily="34" charset="-120"/>
               </a:rPr>
-              <a:t>8.00</a:t>
+              <a:t>8.06</a:t>
             </a:r>
             <a:endParaRPr lang="en-US" sz="3200" dirty="0"/>
           </a:p>
@@ -5430,7 +5430,7 @@
                 <a:ea typeface="Arial" pitchFamily="34" charset="-122"/>
                 <a:cs typeface="Arial" pitchFamily="34" charset="-120"/>
               </a:rPr>
-              <a:t>66.7%</a:t>
+              <a:t>67.7%</a:t>
             </a:r>
             <a:endParaRPr lang="en-US" sz="3200" dirty="0"/>
           </a:p>
@@ -5680,7 +5680,7 @@
                 <a:ea typeface="Arial" pitchFamily="34" charset="-122"/>
                 <a:cs typeface="Arial" pitchFamily="34" charset="-120"/>
               </a:rPr>
-              <a:t>30件</a:t>
+              <a:t>31件</a:t>
             </a:r>
             <a:endParaRPr lang="en-US" sz="3200" dirty="0"/>
           </a:p>
@@ -5908,7 +5908,7 @@
                 <a:ea typeface="Arial" pitchFamily="34" charset="-122"/>
                 <a:cs typeface="Arial" pitchFamily="34" charset="-120"/>
               </a:rPr>
-              <a:t>  部屋は清潔感あるし、浴衣あったりアメニティなども充実してる</a:t>
+              <a:t>  館内は部屋も大浴場も清潔に掃除されていた</a:t>
             </a:r>
             <a:endParaRPr lang="en-US" sz="1100" dirty="0"/>
           </a:p>
@@ -6056,7 +6056,7 @@
                 <a:ea typeface="Arial" pitchFamily="34" charset="-122"/>
                 <a:cs typeface="Arial" pitchFamily="34" charset="-120"/>
               </a:rPr>
-              <a:t>  大浴場はあるけど、男女時間交代制なのでタイミング悪く、使用できなかったのは残念だった</a:t>
+              <a:t>  朝食の種類が少なく、和食のみでデザートや飲み物があまりないところが残念</a:t>
             </a:r>
             <a:endParaRPr lang="en-US" sz="1100" dirty="0"/>
           </a:p>
@@ -6489,7 +6489,7 @@
                 <a:ea typeface="Arial" pitchFamily="34" charset="-122"/>
                 <a:cs typeface="Arial" pitchFamily="34" charset="-120"/>
               </a:rPr>
-              <a:t>8.00</a:t>
+              <a:t>8.06</a:t>
             </a:r>
             <a:endParaRPr lang="en-US" sz="3200" dirty="0"/>
           </a:p>
@@ -6614,7 +6614,7 @@
                 <a:ea typeface="Arial" pitchFamily="34" charset="-122"/>
                 <a:cs typeface="Arial" pitchFamily="34" charset="-120"/>
               </a:rPr>
-              <a:t>66.7%</a:t>
+              <a:t>67.7%</a:t>
             </a:r>
             <a:endParaRPr lang="en-US" sz="3200" dirty="0"/>
           </a:p>
@@ -6864,7 +6864,7 @@
                 <a:ea typeface="Arial" pitchFamily="34" charset="-122"/>
                 <a:cs typeface="Arial" pitchFamily="34" charset="-120"/>
               </a:rPr>
-              <a:t>30件</a:t>
+              <a:t>31件</a:t>
             </a:r>
             <a:endParaRPr lang="en-US" sz="3200" dirty="0"/>
           </a:p>
@@ -8801,6 +8801,348 @@
                           <a:ea typeface="Arial" pitchFamily="34" charset="-122"/>
                           <a:cs typeface="Arial" pitchFamily="34" charset="-120"/>
                         </a:rPr>
+                        <a:t>楽天トラベル</a:t>
+                      </a:r>
+                      <a:endParaRPr lang="en-US" sz="900" dirty="0">
+                        <a:latin typeface="Arial" charset="0"/>
+                        <a:ea typeface="Arial" charset="0"/>
+                        <a:cs typeface="Arial" charset="0"/>
+                      </a:endParaRPr>
+                    </a:p>
+                  </a:txBody>
+                  <a:tcPr marL="91440" marR="91440" marT="45720" marB="45720">
+                    <a:lnL w="6350" cap="flat" cmpd="sng" algn="ctr">
+                      <a:solidFill>
+                        <a:srgbClr val="CBD5E1"/>
+                      </a:solidFill>
+                      <a:prstDash val="solid"/>
+                      <a:round/>
+                      <a:headEnd type="none" w="med" len="med"/>
+                      <a:tailEnd type="none" w="med" len="med"/>
+                    </a:lnL>
+                    <a:lnR w="6350" cap="flat" cmpd="sng" algn="ctr">
+                      <a:solidFill>
+                        <a:srgbClr val="CBD5E1"/>
+                      </a:solidFill>
+                      <a:prstDash val="solid"/>
+                      <a:round/>
+                      <a:headEnd type="none" w="med" len="med"/>
+                      <a:tailEnd type="none" w="med" len="med"/>
+                    </a:lnR>
+                    <a:lnT w="6350" cap="flat" cmpd="sng" algn="ctr">
+                      <a:solidFill>
+                        <a:srgbClr val="CBD5E1"/>
+                      </a:solidFill>
+                      <a:prstDash val="solid"/>
+                      <a:round/>
+                      <a:headEnd type="none" w="med" len="med"/>
+                      <a:tailEnd type="none" w="med" len="med"/>
+                    </a:lnT>
+                    <a:lnB w="6350" cap="flat" cmpd="sng" algn="ctr">
+                      <a:solidFill>
+                        <a:srgbClr val="CBD5E1"/>
+                      </a:solidFill>
+                      <a:prstDash val="solid"/>
+                      <a:round/>
+                      <a:headEnd type="none" w="med" len="med"/>
+                      <a:tailEnd type="none" w="med" len="med"/>
+                    </a:lnB>
+                    <a:solidFill>
+                      <a:srgbClr val="FFFFFF"/>
+                    </a:solidFill>
+                  </a:tcPr>
+                </a:tc>
+                <a:tc>
+                  <a:txBody>
+                    <a:bodyPr/>
+                    <a:lstStyle/>
+                    <a:p>
+                      <a:pPr algn="ctr" indent="0" marL="0">
+                        <a:buNone/>
+                      </a:pPr>
+                      <a:r>
+                        <a:rPr lang="en-US" sz="900" dirty="0">
+                          <a:solidFill>
+                            <a:srgbClr val="000000"/>
+                          </a:solidFill>
+                          <a:latin typeface="Arial" pitchFamily="34" charset="0"/>
+                          <a:ea typeface="Arial" pitchFamily="34" charset="-122"/>
+                          <a:cs typeface="Arial" pitchFamily="34" charset="-120"/>
+                        </a:rPr>
+                        <a:t>7</a:t>
+                      </a:r>
+                      <a:endParaRPr lang="en-US" sz="900" dirty="0">
+                        <a:latin typeface="Arial" charset="0"/>
+                        <a:ea typeface="Arial" charset="0"/>
+                        <a:cs typeface="Arial" charset="0"/>
+                      </a:endParaRPr>
+                    </a:p>
+                  </a:txBody>
+                  <a:tcPr marL="91440" marR="91440" marT="45720" marB="45720">
+                    <a:lnL w="6350" cap="flat" cmpd="sng" algn="ctr">
+                      <a:solidFill>
+                        <a:srgbClr val="CBD5E1"/>
+                      </a:solidFill>
+                      <a:prstDash val="solid"/>
+                      <a:round/>
+                      <a:headEnd type="none" w="med" len="med"/>
+                      <a:tailEnd type="none" w="med" len="med"/>
+                    </a:lnL>
+                    <a:lnR w="6350" cap="flat" cmpd="sng" algn="ctr">
+                      <a:solidFill>
+                        <a:srgbClr val="CBD5E1"/>
+                      </a:solidFill>
+                      <a:prstDash val="solid"/>
+                      <a:round/>
+                      <a:headEnd type="none" w="med" len="med"/>
+                      <a:tailEnd type="none" w="med" len="med"/>
+                    </a:lnR>
+                    <a:lnT w="6350" cap="flat" cmpd="sng" algn="ctr">
+                      <a:solidFill>
+                        <a:srgbClr val="CBD5E1"/>
+                      </a:solidFill>
+                      <a:prstDash val="solid"/>
+                      <a:round/>
+                      <a:headEnd type="none" w="med" len="med"/>
+                      <a:tailEnd type="none" w="med" len="med"/>
+                    </a:lnT>
+                    <a:lnB w="6350" cap="flat" cmpd="sng" algn="ctr">
+                      <a:solidFill>
+                        <a:srgbClr val="CBD5E1"/>
+                      </a:solidFill>
+                      <a:prstDash val="solid"/>
+                      <a:round/>
+                      <a:headEnd type="none" w="med" len="med"/>
+                      <a:tailEnd type="none" w="med" len="med"/>
+                    </a:lnB>
+                    <a:solidFill>
+                      <a:srgbClr val="FFFFFF"/>
+                    </a:solidFill>
+                  </a:tcPr>
+                </a:tc>
+                <a:tc>
+                  <a:txBody>
+                    <a:bodyPr/>
+                    <a:lstStyle/>
+                    <a:p>
+                      <a:pPr algn="ctr" indent="0" marL="0">
+                        <a:buNone/>
+                      </a:pPr>
+                      <a:r>
+                        <a:rPr lang="en-US" sz="900" dirty="0">
+                          <a:solidFill>
+                            <a:srgbClr val="000000"/>
+                          </a:solidFill>
+                          <a:latin typeface="Arial" pitchFamily="34" charset="0"/>
+                          <a:ea typeface="Arial" pitchFamily="34" charset="-122"/>
+                          <a:cs typeface="Arial" pitchFamily="34" charset="-120"/>
+                        </a:rPr>
+                        <a:t>4</a:t>
+                      </a:r>
+                      <a:endParaRPr lang="en-US" sz="900" dirty="0">
+                        <a:latin typeface="Arial" charset="0"/>
+                        <a:ea typeface="Arial" charset="0"/>
+                        <a:cs typeface="Arial" charset="0"/>
+                      </a:endParaRPr>
+                    </a:p>
+                  </a:txBody>
+                  <a:tcPr marL="91440" marR="91440" marT="45720" marB="45720">
+                    <a:lnL w="6350" cap="flat" cmpd="sng" algn="ctr">
+                      <a:solidFill>
+                        <a:srgbClr val="CBD5E1"/>
+                      </a:solidFill>
+                      <a:prstDash val="solid"/>
+                      <a:round/>
+                      <a:headEnd type="none" w="med" len="med"/>
+                      <a:tailEnd type="none" w="med" len="med"/>
+                    </a:lnL>
+                    <a:lnR w="6350" cap="flat" cmpd="sng" algn="ctr">
+                      <a:solidFill>
+                        <a:srgbClr val="CBD5E1"/>
+                      </a:solidFill>
+                      <a:prstDash val="solid"/>
+                      <a:round/>
+                      <a:headEnd type="none" w="med" len="med"/>
+                      <a:tailEnd type="none" w="med" len="med"/>
+                    </a:lnR>
+                    <a:lnT w="6350" cap="flat" cmpd="sng" algn="ctr">
+                      <a:solidFill>
+                        <a:srgbClr val="CBD5E1"/>
+                      </a:solidFill>
+                      <a:prstDash val="solid"/>
+                      <a:round/>
+                      <a:headEnd type="none" w="med" len="med"/>
+                      <a:tailEnd type="none" w="med" len="med"/>
+                    </a:lnT>
+                    <a:lnB w="6350" cap="flat" cmpd="sng" algn="ctr">
+                      <a:solidFill>
+                        <a:srgbClr val="CBD5E1"/>
+                      </a:solidFill>
+                      <a:prstDash val="solid"/>
+                      <a:round/>
+                      <a:headEnd type="none" w="med" len="med"/>
+                      <a:tailEnd type="none" w="med" len="med"/>
+                    </a:lnB>
+                    <a:solidFill>
+                      <a:srgbClr val="FFFFFF"/>
+                    </a:solidFill>
+                  </a:tcPr>
+                </a:tc>
+                <a:tc>
+                  <a:txBody>
+                    <a:bodyPr/>
+                    <a:lstStyle/>
+                    <a:p>
+                      <a:pPr algn="ctr" indent="0" marL="0">
+                        <a:buNone/>
+                      </a:pPr>
+                      <a:r>
+                        <a:rPr lang="en-US" sz="900" dirty="0">
+                          <a:solidFill>
+                            <a:srgbClr val="000000"/>
+                          </a:solidFill>
+                          <a:latin typeface="Arial" pitchFamily="34" charset="0"/>
+                          <a:ea typeface="Arial" pitchFamily="34" charset="-122"/>
+                          <a:cs typeface="Arial" pitchFamily="34" charset="-120"/>
+                        </a:rPr>
+                        <a:t>/5 (×2)</a:t>
+                      </a:r>
+                      <a:endParaRPr lang="en-US" sz="900" dirty="0">
+                        <a:latin typeface="Arial" charset="0"/>
+                        <a:ea typeface="Arial" charset="0"/>
+                        <a:cs typeface="Arial" charset="0"/>
+                      </a:endParaRPr>
+                    </a:p>
+                  </a:txBody>
+                  <a:tcPr marL="91440" marR="91440" marT="45720" marB="45720">
+                    <a:lnL w="6350" cap="flat" cmpd="sng" algn="ctr">
+                      <a:solidFill>
+                        <a:srgbClr val="CBD5E1"/>
+                      </a:solidFill>
+                      <a:prstDash val="solid"/>
+                      <a:round/>
+                      <a:headEnd type="none" w="med" len="med"/>
+                      <a:tailEnd type="none" w="med" len="med"/>
+                    </a:lnL>
+                    <a:lnR w="6350" cap="flat" cmpd="sng" algn="ctr">
+                      <a:solidFill>
+                        <a:srgbClr val="CBD5E1"/>
+                      </a:solidFill>
+                      <a:prstDash val="solid"/>
+                      <a:round/>
+                      <a:headEnd type="none" w="med" len="med"/>
+                      <a:tailEnd type="none" w="med" len="med"/>
+                    </a:lnR>
+                    <a:lnT w="6350" cap="flat" cmpd="sng" algn="ctr">
+                      <a:solidFill>
+                        <a:srgbClr val="CBD5E1"/>
+                      </a:solidFill>
+                      <a:prstDash val="solid"/>
+                      <a:round/>
+                      <a:headEnd type="none" w="med" len="med"/>
+                      <a:tailEnd type="none" w="med" len="med"/>
+                    </a:lnT>
+                    <a:lnB w="6350" cap="flat" cmpd="sng" algn="ctr">
+                      <a:solidFill>
+                        <a:srgbClr val="CBD5E1"/>
+                      </a:solidFill>
+                      <a:prstDash val="solid"/>
+                      <a:round/>
+                      <a:headEnd type="none" w="med" len="med"/>
+                      <a:tailEnd type="none" w="med" len="med"/>
+                    </a:lnB>
+                    <a:solidFill>
+                      <a:srgbClr val="FFFFFF"/>
+                    </a:solidFill>
+                  </a:tcPr>
+                </a:tc>
+                <a:tc>
+                  <a:txBody>
+                    <a:bodyPr/>
+                    <a:lstStyle/>
+                    <a:p>
+                      <a:pPr algn="ctr" indent="0" marL="0">
+                        <a:buNone/>
+                      </a:pPr>
+                      <a:r>
+                        <a:rPr lang="en-US" sz="900" dirty="0">
+                          <a:solidFill>
+                            <a:srgbClr val="000000"/>
+                          </a:solidFill>
+                          <a:latin typeface="Arial" pitchFamily="34" charset="0"/>
+                          <a:ea typeface="Arial" pitchFamily="34" charset="-122"/>
+                          <a:cs typeface="Arial" pitchFamily="34" charset="-120"/>
+                        </a:rPr>
+                        <a:t>8</a:t>
+                      </a:r>
+                      <a:endParaRPr lang="en-US" sz="900" dirty="0">
+                        <a:latin typeface="Arial" charset="0"/>
+                        <a:ea typeface="Arial" charset="0"/>
+                        <a:cs typeface="Arial" charset="0"/>
+                      </a:endParaRPr>
+                    </a:p>
+                  </a:txBody>
+                  <a:tcPr marL="91440" marR="91440" marT="45720" marB="45720">
+                    <a:lnL w="6350" cap="flat" cmpd="sng" algn="ctr">
+                      <a:solidFill>
+                        <a:srgbClr val="CBD5E1"/>
+                      </a:solidFill>
+                      <a:prstDash val="solid"/>
+                      <a:round/>
+                      <a:headEnd type="none" w="med" len="med"/>
+                      <a:tailEnd type="none" w="med" len="med"/>
+                    </a:lnL>
+                    <a:lnR w="6350" cap="flat" cmpd="sng" algn="ctr">
+                      <a:solidFill>
+                        <a:srgbClr val="CBD5E1"/>
+                      </a:solidFill>
+                      <a:prstDash val="solid"/>
+                      <a:round/>
+                      <a:headEnd type="none" w="med" len="med"/>
+                      <a:tailEnd type="none" w="med" len="med"/>
+                    </a:lnR>
+                    <a:lnT w="6350" cap="flat" cmpd="sng" algn="ctr">
+                      <a:solidFill>
+                        <a:srgbClr val="CBD5E1"/>
+                      </a:solidFill>
+                      <a:prstDash val="solid"/>
+                      <a:round/>
+                      <a:headEnd type="none" w="med" len="med"/>
+                      <a:tailEnd type="none" w="med" len="med"/>
+                    </a:lnT>
+                    <a:lnB w="6350" cap="flat" cmpd="sng" algn="ctr">
+                      <a:solidFill>
+                        <a:srgbClr val="CBD5E1"/>
+                      </a:solidFill>
+                      <a:prstDash val="solid"/>
+                      <a:round/>
+                      <a:headEnd type="none" w="med" len="med"/>
+                      <a:tailEnd type="none" w="med" len="med"/>
+                    </a:lnB>
+                    <a:solidFill>
+                      <a:srgbClr val="FFFFFF"/>
+                    </a:solidFill>
+                  </a:tcPr>
+                </a:tc>
+              </a:tr>
+              <a:tr h="201168">
+                <a:tc>
+                  <a:txBody>
+                    <a:bodyPr/>
+                    <a:lstStyle/>
+                    <a:p>
+                      <a:pPr algn="ctr" indent="0" marL="0">
+                        <a:buNone/>
+                      </a:pPr>
+                      <a:r>
+                        <a:rPr lang="en-US" sz="900" dirty="0">
+                          <a:solidFill>
+                            <a:srgbClr val="000000"/>
+                          </a:solidFill>
+                          <a:latin typeface="Arial" pitchFamily="34" charset="0"/>
+                          <a:ea typeface="Arial" pitchFamily="34" charset="-122"/>
+                          <a:cs typeface="Arial" pitchFamily="34" charset="-120"/>
+                        </a:rPr>
                         <a:t>Booking.com</a:t>
                       </a:r>
                       <a:endParaRPr lang="en-US" sz="900" dirty="0">
@@ -8848,7 +9190,7 @@
                       <a:tailEnd type="none" w="med" len="med"/>
                     </a:lnB>
                     <a:solidFill>
-                      <a:srgbClr val="FFFFFF"/>
+                      <a:srgbClr val="E8EFF8"/>
                     </a:solidFill>
                   </a:tcPr>
                 </a:tc>
@@ -8916,7 +9258,7 @@
                       <a:tailEnd type="none" w="med" len="med"/>
                     </a:lnB>
                     <a:solidFill>
-                      <a:srgbClr val="FFFFFF"/>
+                      <a:srgbClr val="E8EFF8"/>
                     </a:solidFill>
                   </a:tcPr>
                 </a:tc>
@@ -8984,7 +9326,7 @@
                       <a:tailEnd type="none" w="med" len="med"/>
                     </a:lnB>
                     <a:solidFill>
-                      <a:srgbClr val="FFFFFF"/>
+                      <a:srgbClr val="E8EFF8"/>
                     </a:solidFill>
                   </a:tcPr>
                 </a:tc>
@@ -9052,7 +9394,7 @@
                       <a:tailEnd type="none" w="med" len="med"/>
                     </a:lnB>
                     <a:solidFill>
-                      <a:srgbClr val="FFFFFF"/>
+                      <a:srgbClr val="E8EFF8"/>
                     </a:solidFill>
                   </a:tcPr>
                 </a:tc>
@@ -9074,348 +9416,6 @@
                           <a:cs typeface="Arial" pitchFamily="34" charset="-120"/>
                         </a:rPr>
                         <a:t>7.89</a:t>
-                      </a:r>
-                      <a:endParaRPr lang="en-US" sz="900" dirty="0">
-                        <a:latin typeface="Arial" charset="0"/>
-                        <a:ea typeface="Arial" charset="0"/>
-                        <a:cs typeface="Arial" charset="0"/>
-                      </a:endParaRPr>
-                    </a:p>
-                  </a:txBody>
-                  <a:tcPr marL="91440" marR="91440" marT="45720" marB="45720">
-                    <a:lnL w="6350" cap="flat" cmpd="sng" algn="ctr">
-                      <a:solidFill>
-                        <a:srgbClr val="CBD5E1"/>
-                      </a:solidFill>
-                      <a:prstDash val="solid"/>
-                      <a:round/>
-                      <a:headEnd type="none" w="med" len="med"/>
-                      <a:tailEnd type="none" w="med" len="med"/>
-                    </a:lnL>
-                    <a:lnR w="6350" cap="flat" cmpd="sng" algn="ctr">
-                      <a:solidFill>
-                        <a:srgbClr val="CBD5E1"/>
-                      </a:solidFill>
-                      <a:prstDash val="solid"/>
-                      <a:round/>
-                      <a:headEnd type="none" w="med" len="med"/>
-                      <a:tailEnd type="none" w="med" len="med"/>
-                    </a:lnR>
-                    <a:lnT w="6350" cap="flat" cmpd="sng" algn="ctr">
-                      <a:solidFill>
-                        <a:srgbClr val="CBD5E1"/>
-                      </a:solidFill>
-                      <a:prstDash val="solid"/>
-                      <a:round/>
-                      <a:headEnd type="none" w="med" len="med"/>
-                      <a:tailEnd type="none" w="med" len="med"/>
-                    </a:lnT>
-                    <a:lnB w="6350" cap="flat" cmpd="sng" algn="ctr">
-                      <a:solidFill>
-                        <a:srgbClr val="CBD5E1"/>
-                      </a:solidFill>
-                      <a:prstDash val="solid"/>
-                      <a:round/>
-                      <a:headEnd type="none" w="med" len="med"/>
-                      <a:tailEnd type="none" w="med" len="med"/>
-                    </a:lnB>
-                    <a:solidFill>
-                      <a:srgbClr val="FFFFFF"/>
-                    </a:solidFill>
-                  </a:tcPr>
-                </a:tc>
-              </a:tr>
-              <a:tr h="201168">
-                <a:tc>
-                  <a:txBody>
-                    <a:bodyPr/>
-                    <a:lstStyle/>
-                    <a:p>
-                      <a:pPr algn="ctr" indent="0" marL="0">
-                        <a:buNone/>
-                      </a:pPr>
-                      <a:r>
-                        <a:rPr lang="en-US" sz="900" dirty="0">
-                          <a:solidFill>
-                            <a:srgbClr val="000000"/>
-                          </a:solidFill>
-                          <a:latin typeface="Arial" pitchFamily="34" charset="0"/>
-                          <a:ea typeface="Arial" pitchFamily="34" charset="-122"/>
-                          <a:cs typeface="Arial" pitchFamily="34" charset="-120"/>
-                        </a:rPr>
-                        <a:t>楽天トラベル</a:t>
-                      </a:r>
-                      <a:endParaRPr lang="en-US" sz="900" dirty="0">
-                        <a:latin typeface="Arial" charset="0"/>
-                        <a:ea typeface="Arial" charset="0"/>
-                        <a:cs typeface="Arial" charset="0"/>
-                      </a:endParaRPr>
-                    </a:p>
-                  </a:txBody>
-                  <a:tcPr marL="91440" marR="91440" marT="45720" marB="45720">
-                    <a:lnL w="6350" cap="flat" cmpd="sng" algn="ctr">
-                      <a:solidFill>
-                        <a:srgbClr val="CBD5E1"/>
-                      </a:solidFill>
-                      <a:prstDash val="solid"/>
-                      <a:round/>
-                      <a:headEnd type="none" w="med" len="med"/>
-                      <a:tailEnd type="none" w="med" len="med"/>
-                    </a:lnL>
-                    <a:lnR w="6350" cap="flat" cmpd="sng" algn="ctr">
-                      <a:solidFill>
-                        <a:srgbClr val="CBD5E1"/>
-                      </a:solidFill>
-                      <a:prstDash val="solid"/>
-                      <a:round/>
-                      <a:headEnd type="none" w="med" len="med"/>
-                      <a:tailEnd type="none" w="med" len="med"/>
-                    </a:lnR>
-                    <a:lnT w="6350" cap="flat" cmpd="sng" algn="ctr">
-                      <a:solidFill>
-                        <a:srgbClr val="CBD5E1"/>
-                      </a:solidFill>
-                      <a:prstDash val="solid"/>
-                      <a:round/>
-                      <a:headEnd type="none" w="med" len="med"/>
-                      <a:tailEnd type="none" w="med" len="med"/>
-                    </a:lnT>
-                    <a:lnB w="6350" cap="flat" cmpd="sng" algn="ctr">
-                      <a:solidFill>
-                        <a:srgbClr val="CBD5E1"/>
-                      </a:solidFill>
-                      <a:prstDash val="solid"/>
-                      <a:round/>
-                      <a:headEnd type="none" w="med" len="med"/>
-                      <a:tailEnd type="none" w="med" len="med"/>
-                    </a:lnB>
-                    <a:solidFill>
-                      <a:srgbClr val="E8EFF8"/>
-                    </a:solidFill>
-                  </a:tcPr>
-                </a:tc>
-                <a:tc>
-                  <a:txBody>
-                    <a:bodyPr/>
-                    <a:lstStyle/>
-                    <a:p>
-                      <a:pPr algn="ctr" indent="0" marL="0">
-                        <a:buNone/>
-                      </a:pPr>
-                      <a:r>
-                        <a:rPr lang="en-US" sz="900" dirty="0">
-                          <a:solidFill>
-                            <a:srgbClr val="000000"/>
-                          </a:solidFill>
-                          <a:latin typeface="Arial" pitchFamily="34" charset="0"/>
-                          <a:ea typeface="Arial" pitchFamily="34" charset="-122"/>
-                          <a:cs typeface="Arial" pitchFamily="34" charset="-120"/>
-                        </a:rPr>
-                        <a:t>6</a:t>
-                      </a:r>
-                      <a:endParaRPr lang="en-US" sz="900" dirty="0">
-                        <a:latin typeface="Arial" charset="0"/>
-                        <a:ea typeface="Arial" charset="0"/>
-                        <a:cs typeface="Arial" charset="0"/>
-                      </a:endParaRPr>
-                    </a:p>
-                  </a:txBody>
-                  <a:tcPr marL="91440" marR="91440" marT="45720" marB="45720">
-                    <a:lnL w="6350" cap="flat" cmpd="sng" algn="ctr">
-                      <a:solidFill>
-                        <a:srgbClr val="CBD5E1"/>
-                      </a:solidFill>
-                      <a:prstDash val="solid"/>
-                      <a:round/>
-                      <a:headEnd type="none" w="med" len="med"/>
-                      <a:tailEnd type="none" w="med" len="med"/>
-                    </a:lnL>
-                    <a:lnR w="6350" cap="flat" cmpd="sng" algn="ctr">
-                      <a:solidFill>
-                        <a:srgbClr val="CBD5E1"/>
-                      </a:solidFill>
-                      <a:prstDash val="solid"/>
-                      <a:round/>
-                      <a:headEnd type="none" w="med" len="med"/>
-                      <a:tailEnd type="none" w="med" len="med"/>
-                    </a:lnR>
-                    <a:lnT w="6350" cap="flat" cmpd="sng" algn="ctr">
-                      <a:solidFill>
-                        <a:srgbClr val="CBD5E1"/>
-                      </a:solidFill>
-                      <a:prstDash val="solid"/>
-                      <a:round/>
-                      <a:headEnd type="none" w="med" len="med"/>
-                      <a:tailEnd type="none" w="med" len="med"/>
-                    </a:lnT>
-                    <a:lnB w="6350" cap="flat" cmpd="sng" algn="ctr">
-                      <a:solidFill>
-                        <a:srgbClr val="CBD5E1"/>
-                      </a:solidFill>
-                      <a:prstDash val="solid"/>
-                      <a:round/>
-                      <a:headEnd type="none" w="med" len="med"/>
-                      <a:tailEnd type="none" w="med" len="med"/>
-                    </a:lnB>
-                    <a:solidFill>
-                      <a:srgbClr val="E8EFF8"/>
-                    </a:solidFill>
-                  </a:tcPr>
-                </a:tc>
-                <a:tc>
-                  <a:txBody>
-                    <a:bodyPr/>
-                    <a:lstStyle/>
-                    <a:p>
-                      <a:pPr algn="ctr" indent="0" marL="0">
-                        <a:buNone/>
-                      </a:pPr>
-                      <a:r>
-                        <a:rPr lang="en-US" sz="900" dirty="0">
-                          <a:solidFill>
-                            <a:srgbClr val="000000"/>
-                          </a:solidFill>
-                          <a:latin typeface="Arial" pitchFamily="34" charset="0"/>
-                          <a:ea typeface="Arial" pitchFamily="34" charset="-122"/>
-                          <a:cs typeface="Arial" pitchFamily="34" charset="-120"/>
-                        </a:rPr>
-                        <a:t>3.83</a:t>
-                      </a:r>
-                      <a:endParaRPr lang="en-US" sz="900" dirty="0">
-                        <a:latin typeface="Arial" charset="0"/>
-                        <a:ea typeface="Arial" charset="0"/>
-                        <a:cs typeface="Arial" charset="0"/>
-                      </a:endParaRPr>
-                    </a:p>
-                  </a:txBody>
-                  <a:tcPr marL="91440" marR="91440" marT="45720" marB="45720">
-                    <a:lnL w="6350" cap="flat" cmpd="sng" algn="ctr">
-                      <a:solidFill>
-                        <a:srgbClr val="CBD5E1"/>
-                      </a:solidFill>
-                      <a:prstDash val="solid"/>
-                      <a:round/>
-                      <a:headEnd type="none" w="med" len="med"/>
-                      <a:tailEnd type="none" w="med" len="med"/>
-                    </a:lnL>
-                    <a:lnR w="6350" cap="flat" cmpd="sng" algn="ctr">
-                      <a:solidFill>
-                        <a:srgbClr val="CBD5E1"/>
-                      </a:solidFill>
-                      <a:prstDash val="solid"/>
-                      <a:round/>
-                      <a:headEnd type="none" w="med" len="med"/>
-                      <a:tailEnd type="none" w="med" len="med"/>
-                    </a:lnR>
-                    <a:lnT w="6350" cap="flat" cmpd="sng" algn="ctr">
-                      <a:solidFill>
-                        <a:srgbClr val="CBD5E1"/>
-                      </a:solidFill>
-                      <a:prstDash val="solid"/>
-                      <a:round/>
-                      <a:headEnd type="none" w="med" len="med"/>
-                      <a:tailEnd type="none" w="med" len="med"/>
-                    </a:lnT>
-                    <a:lnB w="6350" cap="flat" cmpd="sng" algn="ctr">
-                      <a:solidFill>
-                        <a:srgbClr val="CBD5E1"/>
-                      </a:solidFill>
-                      <a:prstDash val="solid"/>
-                      <a:round/>
-                      <a:headEnd type="none" w="med" len="med"/>
-                      <a:tailEnd type="none" w="med" len="med"/>
-                    </a:lnB>
-                    <a:solidFill>
-                      <a:srgbClr val="E8EFF8"/>
-                    </a:solidFill>
-                  </a:tcPr>
-                </a:tc>
-                <a:tc>
-                  <a:txBody>
-                    <a:bodyPr/>
-                    <a:lstStyle/>
-                    <a:p>
-                      <a:pPr algn="ctr" indent="0" marL="0">
-                        <a:buNone/>
-                      </a:pPr>
-                      <a:r>
-                        <a:rPr lang="en-US" sz="900" dirty="0">
-                          <a:solidFill>
-                            <a:srgbClr val="000000"/>
-                          </a:solidFill>
-                          <a:latin typeface="Arial" pitchFamily="34" charset="0"/>
-                          <a:ea typeface="Arial" pitchFamily="34" charset="-122"/>
-                          <a:cs typeface="Arial" pitchFamily="34" charset="-120"/>
-                        </a:rPr>
-                        <a:t>/5 (×2)</a:t>
-                      </a:r>
-                      <a:endParaRPr lang="en-US" sz="900" dirty="0">
-                        <a:latin typeface="Arial" charset="0"/>
-                        <a:ea typeface="Arial" charset="0"/>
-                        <a:cs typeface="Arial" charset="0"/>
-                      </a:endParaRPr>
-                    </a:p>
-                  </a:txBody>
-                  <a:tcPr marL="91440" marR="91440" marT="45720" marB="45720">
-                    <a:lnL w="6350" cap="flat" cmpd="sng" algn="ctr">
-                      <a:solidFill>
-                        <a:srgbClr val="CBD5E1"/>
-                      </a:solidFill>
-                      <a:prstDash val="solid"/>
-                      <a:round/>
-                      <a:headEnd type="none" w="med" len="med"/>
-                      <a:tailEnd type="none" w="med" len="med"/>
-                    </a:lnL>
-                    <a:lnR w="6350" cap="flat" cmpd="sng" algn="ctr">
-                      <a:solidFill>
-                        <a:srgbClr val="CBD5E1"/>
-                      </a:solidFill>
-                      <a:prstDash val="solid"/>
-                      <a:round/>
-                      <a:headEnd type="none" w="med" len="med"/>
-                      <a:tailEnd type="none" w="med" len="med"/>
-                    </a:lnR>
-                    <a:lnT w="6350" cap="flat" cmpd="sng" algn="ctr">
-                      <a:solidFill>
-                        <a:srgbClr val="CBD5E1"/>
-                      </a:solidFill>
-                      <a:prstDash val="solid"/>
-                      <a:round/>
-                      <a:headEnd type="none" w="med" len="med"/>
-                      <a:tailEnd type="none" w="med" len="med"/>
-                    </a:lnT>
-                    <a:lnB w="6350" cap="flat" cmpd="sng" algn="ctr">
-                      <a:solidFill>
-                        <a:srgbClr val="CBD5E1"/>
-                      </a:solidFill>
-                      <a:prstDash val="solid"/>
-                      <a:round/>
-                      <a:headEnd type="none" w="med" len="med"/>
-                      <a:tailEnd type="none" w="med" len="med"/>
-                    </a:lnB>
-                    <a:solidFill>
-                      <a:srgbClr val="E8EFF8"/>
-                    </a:solidFill>
-                  </a:tcPr>
-                </a:tc>
-                <a:tc>
-                  <a:txBody>
-                    <a:bodyPr/>
-                    <a:lstStyle/>
-                    <a:p>
-                      <a:pPr algn="ctr" indent="0" marL="0">
-                        <a:buNone/>
-                      </a:pPr>
-                      <a:r>
-                        <a:rPr lang="en-US" sz="900" dirty="0">
-                          <a:solidFill>
-                            <a:srgbClr val="000000"/>
-                          </a:solidFill>
-                          <a:latin typeface="Arial" pitchFamily="34" charset="0"/>
-                          <a:ea typeface="Arial" pitchFamily="34" charset="-122"/>
-                          <a:cs typeface="Arial" pitchFamily="34" charset="-120"/>
-                        </a:rPr>
-                        <a:t>7.67</a:t>
                       </a:r>
                       <a:endParaRPr lang="en-US" sz="900" dirty="0">
                         <a:latin typeface="Arial" charset="0"/>
@@ -10165,7 +10165,7 @@
                 <a:ea typeface="Arial" pitchFamily="34" charset="-122"/>
                 <a:cs typeface="Arial" pitchFamily="34" charset="-120"/>
               </a:rPr>
-              <a:t>20件（66.7%）</a:t>
+              <a:t>21件（67.7%）</a:t>
             </a:r>
             <a:endParaRPr lang="en-US" sz="1100" dirty="0"/>
           </a:p>
@@ -10263,7 +10263,7 @@
                 <a:ea typeface="Arial" pitchFamily="34" charset="-122"/>
                 <a:cs typeface="Arial" pitchFamily="34" charset="-120"/>
               </a:rPr>
-              <a:t>10件（33.3%）</a:t>
+              <a:t>10件（32.3%）</a:t>
             </a:r>
             <a:endParaRPr lang="en-US" sz="1100" dirty="0"/>
           </a:p>
@@ -11141,7 +11141,7 @@
                 <a:ea typeface="Arial" pitchFamily="34" charset="-122"/>
                 <a:cs typeface="Arial" pitchFamily="34" charset="-120"/>
               </a:rPr>
-              <a:t>8件</a:t>
+              <a:t>9件</a:t>
             </a:r>
             <a:endParaRPr lang="en-US" sz="900" dirty="0"/>
           </a:p>
@@ -11219,7 +11219,7 @@
                 <a:ea typeface="Arial" pitchFamily="34" charset="-122"/>
                 <a:cs typeface="Arial" pitchFamily="34" charset="-120"/>
               </a:rPr>
-              <a:t>部屋は清潔感あるし、浴衣あったりアメニティなども充実してる</a:t>
+              <a:t>館内は部屋も大浴場も清潔に掃除されていた</a:t>
             </a:r>
             <a:endParaRPr lang="en-US" sz="900" dirty="0"/>
           </a:p>
@@ -11234,6 +11234,229 @@
         <p:spPr>
           <a:xfrm>
             <a:off x="6263640" y="1828800"/>
+            <a:ext cx="2377440" cy="640080"/>
+          </a:xfrm>
+          <a:prstGeom prst="rect">
+            <a:avLst/>
+          </a:prstGeom>
+          <a:noFill/>
+          <a:ln/>
+        </p:spPr>
+        <p:txBody>
+          <a:bodyPr wrap="square" lIns="0" tIns="0" rIns="0" bIns="0" rtlCol="0" anchor="ctr"/>
+          <a:lstStyle/>
+          <a:p>
+            <a:pPr indent="0" marL="0">
+              <a:buNone/>
+            </a:pPr>
+            <a:r>
+              <a:rPr lang="en-US" sz="900" i="1" dirty="0">
+                <a:solidFill>
+                  <a:srgbClr val="3B7DD8"/>
+                </a:solidFill>
+                <a:latin typeface="Arial" pitchFamily="34" charset="0"/>
+                <a:ea typeface="Arial" pitchFamily="34" charset="-122"/>
+                <a:cs typeface="Arial" pitchFamily="34" charset="-120"/>
+              </a:rPr>
+              <a:t>「部屋は清潔感あるし、浴衣あったりアメニティなども充実してる」</a:t>
+            </a:r>
+            <a:endParaRPr lang="en-US" sz="900" dirty="0"/>
+          </a:p>
+        </p:txBody>
+      </p:sp>
+      <p:sp>
+        <p:nvSpPr>
+          <p:cNvPr id="26" name="Shape 24"/>
+          <p:cNvSpPr/>
+          <p:nvPr/>
+        </p:nvSpPr>
+        <p:spPr>
+          <a:xfrm>
+            <a:off x="457200" y="2880360"/>
+            <a:ext cx="2651760" cy="1600200"/>
+          </a:xfrm>
+          <a:prstGeom prst="rect">
+            <a:avLst/>
+          </a:prstGeom>
+          <a:solidFill>
+            <a:srgbClr val="FFFFFF"/>
+          </a:solidFill>
+          <a:ln/>
+          <a:effectLst>
+            <a:outerShdw sx="100000" sy="100000" kx="0" ky="0" algn="bl" rotWithShape="0" blurRad="50800" dist="25400" dir="8100000">
+              <a:srgbClr val="000000">
+                <a:alpha val="10000"/>
+              </a:srgbClr>
+            </a:outerShdw>
+          </a:effectLst>
+        </p:spPr>
+      </p:sp>
+      <p:sp>
+        <p:nvSpPr>
+          <p:cNvPr id="27" name="Shape 25"/>
+          <p:cNvSpPr/>
+          <p:nvPr/>
+        </p:nvSpPr>
+        <p:spPr>
+          <a:xfrm>
+            <a:off x="457200" y="2880360"/>
+            <a:ext cx="54864" cy="1600200"/>
+          </a:xfrm>
+          <a:prstGeom prst="rect">
+            <a:avLst/>
+          </a:prstGeom>
+          <a:solidFill>
+            <a:srgbClr val="16A34A"/>
+          </a:solidFill>
+          <a:ln/>
+        </p:spPr>
+      </p:sp>
+      <p:sp>
+        <p:nvSpPr>
+          <p:cNvPr id="28" name="Shape 26"/>
+          <p:cNvSpPr/>
+          <p:nvPr/>
+        </p:nvSpPr>
+        <p:spPr>
+          <a:xfrm>
+            <a:off x="2286000" y="2953512"/>
+            <a:ext cx="658368" cy="228600"/>
+          </a:xfrm>
+          <a:prstGeom prst="rect">
+            <a:avLst/>
+          </a:prstGeom>
+          <a:solidFill>
+            <a:srgbClr val="DCFCE7"/>
+          </a:solidFill>
+          <a:ln/>
+        </p:spPr>
+      </p:sp>
+      <p:sp>
+        <p:nvSpPr>
+          <p:cNvPr id="29" name="Text 27"/>
+          <p:cNvSpPr/>
+          <p:nvPr/>
+        </p:nvSpPr>
+        <p:spPr>
+          <a:xfrm>
+            <a:off x="2286000" y="2953512"/>
+            <a:ext cx="658368" cy="228600"/>
+          </a:xfrm>
+          <a:prstGeom prst="rect">
+            <a:avLst/>
+          </a:prstGeom>
+          <a:noFill/>
+          <a:ln/>
+        </p:spPr>
+        <p:txBody>
+          <a:bodyPr wrap="square" lIns="0" tIns="0" rIns="0" bIns="0" rtlCol="0" anchor="ctr"/>
+          <a:lstStyle/>
+          <a:p>
+            <a:pPr algn="ctr" indent="0" marL="0">
+              <a:buNone/>
+            </a:pPr>
+            <a:r>
+              <a:rPr lang="en-US" sz="900" b="1" dirty="0">
+                <a:solidFill>
+                  <a:srgbClr val="16A34A"/>
+                </a:solidFill>
+                <a:latin typeface="Arial" pitchFamily="34" charset="0"/>
+                <a:ea typeface="Arial" pitchFamily="34" charset="-122"/>
+                <a:cs typeface="Arial" pitchFamily="34" charset="-120"/>
+              </a:rPr>
+              <a:t>6件</a:t>
+            </a:r>
+            <a:endParaRPr lang="en-US" sz="900" dirty="0"/>
+          </a:p>
+        </p:txBody>
+      </p:sp>
+      <p:sp>
+        <p:nvSpPr>
+          <p:cNvPr id="30" name="Text 28"/>
+          <p:cNvSpPr/>
+          <p:nvPr/>
+        </p:nvSpPr>
+        <p:spPr>
+          <a:xfrm>
+            <a:off x="594360" y="2953512"/>
+            <a:ext cx="1645920" cy="274320"/>
+          </a:xfrm>
+          <a:prstGeom prst="rect">
+            <a:avLst/>
+          </a:prstGeom>
+          <a:noFill/>
+          <a:ln/>
+        </p:spPr>
+        <p:txBody>
+          <a:bodyPr wrap="square" lIns="0" tIns="0" rIns="0" bIns="0" rtlCol="0" anchor="ctr"/>
+          <a:lstStyle/>
+          <a:p>
+            <a:pPr indent="0" marL="0">
+              <a:buNone/>
+            </a:pPr>
+            <a:r>
+              <a:rPr lang="en-US" sz="1300" b="1" dirty="0">
+                <a:solidFill>
+                  <a:srgbClr val="1A2744"/>
+                </a:solidFill>
+                <a:latin typeface="Arial" pitchFamily="34" charset="0"/>
+                <a:ea typeface="Arial" pitchFamily="34" charset="-122"/>
+                <a:cs typeface="Arial" pitchFamily="34" charset="-120"/>
+              </a:rPr>
+              <a:t>スタッフの対応</a:t>
+            </a:r>
+            <a:endParaRPr lang="en-US" sz="1300" dirty="0"/>
+          </a:p>
+        </p:txBody>
+      </p:sp>
+      <p:sp>
+        <p:nvSpPr>
+          <p:cNvPr id="31" name="Text 29"/>
+          <p:cNvSpPr/>
+          <p:nvPr/>
+        </p:nvSpPr>
+        <p:spPr>
+          <a:xfrm>
+            <a:off x="594360" y="3246120"/>
+            <a:ext cx="2377440" cy="365760"/>
+          </a:xfrm>
+          <a:prstGeom prst="rect">
+            <a:avLst/>
+          </a:prstGeom>
+          <a:noFill/>
+          <a:ln/>
+        </p:spPr>
+        <p:txBody>
+          <a:bodyPr wrap="square" lIns="0" tIns="0" rIns="0" bIns="0" rtlCol="0" anchor="ctr"/>
+          <a:lstStyle/>
+          <a:p>
+            <a:pPr indent="0" marL="0">
+              <a:buNone/>
+            </a:pPr>
+            <a:r>
+              <a:rPr lang="en-US" sz="900" dirty="0">
+                <a:solidFill>
+                  <a:srgbClr val="64748B"/>
+                </a:solidFill>
+                <a:latin typeface="Arial" pitchFamily="34" charset="0"/>
+                <a:ea typeface="Arial" pitchFamily="34" charset="-122"/>
+                <a:cs typeface="Arial" pitchFamily="34" charset="-120"/>
+              </a:rPr>
+              <a:t>フロントのみなさんの応対がよかった</a:t>
+            </a:r>
+            <a:endParaRPr lang="en-US" sz="900" dirty="0"/>
+          </a:p>
+        </p:txBody>
+      </p:sp>
+      <p:sp>
+        <p:nvSpPr>
+          <p:cNvPr id="32" name="Text 30"/>
+          <p:cNvSpPr/>
+          <p:nvPr/>
+        </p:nvSpPr>
+        <p:spPr>
+          <a:xfrm>
+            <a:off x="594360" y="3657600"/>
             <a:ext cx="2377440" cy="640080"/>
           </a:xfrm>
           <a:prstGeom prst="rect">
@@ -11266,13 +11489,13 @@
       </p:sp>
       <p:sp>
         <p:nvSpPr>
-          <p:cNvPr id="26" name="Shape 24"/>
-          <p:cNvSpPr/>
-          <p:nvPr/>
-        </p:nvSpPr>
-        <p:spPr>
-          <a:xfrm>
-            <a:off x="457200" y="2880360"/>
+          <p:cNvPr id="33" name="Shape 31"/>
+          <p:cNvSpPr/>
+          <p:nvPr/>
+        </p:nvSpPr>
+        <p:spPr>
+          <a:xfrm>
+            <a:off x="3291840" y="2880360"/>
             <a:ext cx="2651760" cy="1600200"/>
           </a:xfrm>
           <a:prstGeom prst="rect">
@@ -11293,13 +11516,13 @@
       </p:sp>
       <p:sp>
         <p:nvSpPr>
-          <p:cNvPr id="27" name="Shape 25"/>
-          <p:cNvSpPr/>
-          <p:nvPr/>
-        </p:nvSpPr>
-        <p:spPr>
-          <a:xfrm>
-            <a:off x="457200" y="2880360"/>
+          <p:cNvPr id="34" name="Shape 32"/>
+          <p:cNvSpPr/>
+          <p:nvPr/>
+        </p:nvSpPr>
+        <p:spPr>
+          <a:xfrm>
+            <a:off x="3291840" y="2880360"/>
             <a:ext cx="54864" cy="1600200"/>
           </a:xfrm>
           <a:prstGeom prst="rect">
@@ -11313,13 +11536,13 @@
       </p:sp>
       <p:sp>
         <p:nvSpPr>
-          <p:cNvPr id="28" name="Shape 26"/>
-          <p:cNvSpPr/>
-          <p:nvPr/>
-        </p:nvSpPr>
-        <p:spPr>
-          <a:xfrm>
-            <a:off x="2286000" y="2953512"/>
+          <p:cNvPr id="35" name="Shape 33"/>
+          <p:cNvSpPr/>
+          <p:nvPr/>
+        </p:nvSpPr>
+        <p:spPr>
+          <a:xfrm>
+            <a:off x="5120640" y="2953512"/>
             <a:ext cx="658368" cy="228600"/>
           </a:xfrm>
           <a:prstGeom prst="rect">
@@ -11333,13 +11556,13 @@
       </p:sp>
       <p:sp>
         <p:nvSpPr>
-          <p:cNvPr id="29" name="Text 27"/>
-          <p:cNvSpPr/>
-          <p:nvPr/>
-        </p:nvSpPr>
-        <p:spPr>
-          <a:xfrm>
-            <a:off x="2286000" y="2953512"/>
+          <p:cNvPr id="36" name="Text 34"/>
+          <p:cNvSpPr/>
+          <p:nvPr/>
+        </p:nvSpPr>
+        <p:spPr>
+          <a:xfrm>
+            <a:off x="5120640" y="2953512"/>
             <a:ext cx="658368" cy="228600"/>
           </a:xfrm>
           <a:prstGeom prst="rect">
@@ -11364,230 +11587,7 @@
                 <a:ea typeface="Arial" pitchFamily="34" charset="-122"/>
                 <a:cs typeface="Arial" pitchFamily="34" charset="-120"/>
               </a:rPr>
-              <a:t>5件</a:t>
-            </a:r>
-            <a:endParaRPr lang="en-US" sz="900" dirty="0"/>
-          </a:p>
-        </p:txBody>
-      </p:sp>
-      <p:sp>
-        <p:nvSpPr>
-          <p:cNvPr id="30" name="Text 28"/>
-          <p:cNvSpPr/>
-          <p:nvPr/>
-        </p:nvSpPr>
-        <p:spPr>
-          <a:xfrm>
-            <a:off x="594360" y="2953512"/>
-            <a:ext cx="1645920" cy="274320"/>
-          </a:xfrm>
-          <a:prstGeom prst="rect">
-            <a:avLst/>
-          </a:prstGeom>
-          <a:noFill/>
-          <a:ln/>
-        </p:spPr>
-        <p:txBody>
-          <a:bodyPr wrap="square" lIns="0" tIns="0" rIns="0" bIns="0" rtlCol="0" anchor="ctr"/>
-          <a:lstStyle/>
-          <a:p>
-            <a:pPr indent="0" marL="0">
-              <a:buNone/>
-            </a:pPr>
-            <a:r>
-              <a:rPr lang="en-US" sz="1300" b="1" dirty="0">
-                <a:solidFill>
-                  <a:srgbClr val="1A2744"/>
-                </a:solidFill>
-                <a:latin typeface="Arial" pitchFamily="34" charset="0"/>
-                <a:ea typeface="Arial" pitchFamily="34" charset="-122"/>
-                <a:cs typeface="Arial" pitchFamily="34" charset="-120"/>
-              </a:rPr>
-              <a:t>スタッフの対応</a:t>
-            </a:r>
-            <a:endParaRPr lang="en-US" sz="1300" dirty="0"/>
-          </a:p>
-        </p:txBody>
-      </p:sp>
-      <p:sp>
-        <p:nvSpPr>
-          <p:cNvPr id="31" name="Text 29"/>
-          <p:cNvSpPr/>
-          <p:nvPr/>
-        </p:nvSpPr>
-        <p:spPr>
-          <a:xfrm>
-            <a:off x="594360" y="3246120"/>
-            <a:ext cx="2377440" cy="365760"/>
-          </a:xfrm>
-          <a:prstGeom prst="rect">
-            <a:avLst/>
-          </a:prstGeom>
-          <a:noFill/>
-          <a:ln/>
-        </p:spPr>
-        <p:txBody>
-          <a:bodyPr wrap="square" lIns="0" tIns="0" rIns="0" bIns="0" rtlCol="0" anchor="ctr"/>
-          <a:lstStyle/>
-          <a:p>
-            <a:pPr indent="0" marL="0">
-              <a:buNone/>
-            </a:pPr>
-            <a:r>
-              <a:rPr lang="en-US" sz="900" dirty="0">
-                <a:solidFill>
-                  <a:srgbClr val="64748B"/>
-                </a:solidFill>
-                <a:latin typeface="Arial" pitchFamily="34" charset="0"/>
-                <a:ea typeface="Arial" pitchFamily="34" charset="-122"/>
-                <a:cs typeface="Arial" pitchFamily="34" charset="-120"/>
-              </a:rPr>
-              <a:t>清潔感があり、スタッフの対応が良く立地も便利です</a:t>
-            </a:r>
-            <a:endParaRPr lang="en-US" sz="900" dirty="0"/>
-          </a:p>
-        </p:txBody>
-      </p:sp>
-      <p:sp>
-        <p:nvSpPr>
-          <p:cNvPr id="32" name="Text 30"/>
-          <p:cNvSpPr/>
-          <p:nvPr/>
-        </p:nvSpPr>
-        <p:spPr>
-          <a:xfrm>
-            <a:off x="594360" y="3657600"/>
-            <a:ext cx="2377440" cy="640080"/>
-          </a:xfrm>
-          <a:prstGeom prst="rect">
-            <a:avLst/>
-          </a:prstGeom>
-          <a:noFill/>
-          <a:ln/>
-        </p:spPr>
-        <p:txBody>
-          <a:bodyPr wrap="square" lIns="0" tIns="0" rIns="0" bIns="0" rtlCol="0" anchor="ctr"/>
-          <a:lstStyle/>
-          <a:p>
-            <a:pPr indent="0" marL="0">
-              <a:buNone/>
-            </a:pPr>
-            <a:r>
-              <a:rPr lang="en-US" sz="900" i="1" dirty="0">
-                <a:solidFill>
-                  <a:srgbClr val="3B7DD8"/>
-                </a:solidFill>
-                <a:latin typeface="Arial" pitchFamily="34" charset="0"/>
-                <a:ea typeface="Arial" pitchFamily="34" charset="-122"/>
-                <a:cs typeface="Arial" pitchFamily="34" charset="-120"/>
-              </a:rPr>
-              <a:t>「フロントの方々の対応がとても丁寧でした」</a:t>
-            </a:r>
-            <a:endParaRPr lang="en-US" sz="900" dirty="0"/>
-          </a:p>
-        </p:txBody>
-      </p:sp>
-      <p:sp>
-        <p:nvSpPr>
-          <p:cNvPr id="33" name="Shape 31"/>
-          <p:cNvSpPr/>
-          <p:nvPr/>
-        </p:nvSpPr>
-        <p:spPr>
-          <a:xfrm>
-            <a:off x="3291840" y="2880360"/>
-            <a:ext cx="2651760" cy="1600200"/>
-          </a:xfrm>
-          <a:prstGeom prst="rect">
-            <a:avLst/>
-          </a:prstGeom>
-          <a:solidFill>
-            <a:srgbClr val="FFFFFF"/>
-          </a:solidFill>
-          <a:ln/>
-          <a:effectLst>
-            <a:outerShdw sx="100000" sy="100000" kx="0" ky="0" algn="bl" rotWithShape="0" blurRad="50800" dist="25400" dir="8100000">
-              <a:srgbClr val="000000">
-                <a:alpha val="10000"/>
-              </a:srgbClr>
-            </a:outerShdw>
-          </a:effectLst>
-        </p:spPr>
-      </p:sp>
-      <p:sp>
-        <p:nvSpPr>
-          <p:cNvPr id="34" name="Shape 32"/>
-          <p:cNvSpPr/>
-          <p:nvPr/>
-        </p:nvSpPr>
-        <p:spPr>
-          <a:xfrm>
-            <a:off x="3291840" y="2880360"/>
-            <a:ext cx="54864" cy="1600200"/>
-          </a:xfrm>
-          <a:prstGeom prst="rect">
-            <a:avLst/>
-          </a:prstGeom>
-          <a:solidFill>
-            <a:srgbClr val="16A34A"/>
-          </a:solidFill>
-          <a:ln/>
-        </p:spPr>
-      </p:sp>
-      <p:sp>
-        <p:nvSpPr>
-          <p:cNvPr id="35" name="Shape 33"/>
-          <p:cNvSpPr/>
-          <p:nvPr/>
-        </p:nvSpPr>
-        <p:spPr>
-          <a:xfrm>
-            <a:off x="5120640" y="2953512"/>
-            <a:ext cx="658368" cy="228600"/>
-          </a:xfrm>
-          <a:prstGeom prst="rect">
-            <a:avLst/>
-          </a:prstGeom>
-          <a:solidFill>
-            <a:srgbClr val="DCFCE7"/>
-          </a:solidFill>
-          <a:ln/>
-        </p:spPr>
-      </p:sp>
-      <p:sp>
-        <p:nvSpPr>
-          <p:cNvPr id="36" name="Text 34"/>
-          <p:cNvSpPr/>
-          <p:nvPr/>
-        </p:nvSpPr>
-        <p:spPr>
-          <a:xfrm>
-            <a:off x="5120640" y="2953512"/>
-            <a:ext cx="658368" cy="228600"/>
-          </a:xfrm>
-          <a:prstGeom prst="rect">
-            <a:avLst/>
-          </a:prstGeom>
-          <a:noFill/>
-          <a:ln/>
-        </p:spPr>
-        <p:txBody>
-          <a:bodyPr wrap="square" lIns="0" tIns="0" rIns="0" bIns="0" rtlCol="0" anchor="ctr"/>
-          <a:lstStyle/>
-          <a:p>
-            <a:pPr algn="ctr" indent="0" marL="0">
-              <a:buNone/>
-            </a:pPr>
-            <a:r>
-              <a:rPr lang="en-US" sz="900" b="1" dirty="0">
-                <a:solidFill>
-                  <a:srgbClr val="16A34A"/>
-                </a:solidFill>
-                <a:latin typeface="Arial" pitchFamily="34" charset="0"/>
-                <a:ea typeface="Arial" pitchFamily="34" charset="-122"/>
-                <a:cs typeface="Arial" pitchFamily="34" charset="-120"/>
-              </a:rPr>
-              <a:t>3件</a:t>
+              <a:t>4件</a:t>
             </a:r>
             <a:endParaRPr lang="en-US" sz="900" dirty="0"/>
           </a:p>
@@ -11665,7 +11665,7 @@
                 <a:ea typeface="Arial" pitchFamily="34" charset="-122"/>
                 <a:cs typeface="Arial" pitchFamily="34" charset="-120"/>
               </a:rPr>
-              <a:t>大浴場もゆったりできてよかったですが、朝食にも大変満足しました</a:t>
+              <a:t>朝食の種類が少なく、和食のみでデザートや飲み物があまりないところが残念</a:t>
             </a:r>
             <a:endParaRPr lang="en-US" sz="900" dirty="0"/>
           </a:p>
@@ -11704,7 +11704,7 @@
                 <a:ea typeface="Arial" pitchFamily="34" charset="-122"/>
                 <a:cs typeface="Arial" pitchFamily="34" charset="-120"/>
               </a:rPr>
-              <a:t>「難点といえば ・EVが１基（混雑時には待ち時間あり） ・大浴場が男女入替え制で時間に制約あり ・朝食がしょぼい ト...」</a:t>
+              <a:t>「大浴場もゆったりできてよかったですが、朝食にも大変満足しました」</a:t>
             </a:r>
             <a:endParaRPr lang="en-US" sz="900" dirty="0"/>
           </a:p>
@@ -12617,7 +12617,7 @@
                           <a:ea typeface="Arial" pitchFamily="34" charset="-122"/>
                           <a:cs typeface="Arial" pitchFamily="34" charset="-120"/>
                         </a:rPr>
-                        <a:t>大浴場はあるけど、男女時間交代制なのでタイミング悪く、使用できなかったのは残念だった</a:t>
+                        <a:t>朝食の種類が少なく、和食のみでデザートや飲み物があまりないところが残念</a:t>
                       </a:r>
                       <a:endParaRPr lang="en-US" sz="900" dirty="0">
                         <a:latin typeface="Arial" charset="0"/>
@@ -12685,7 +12685,7 @@
                           <a:ea typeface="Arial" pitchFamily="34" charset="-122"/>
                           <a:cs typeface="Arial" pitchFamily="34" charset="-120"/>
                         </a:rPr>
-                        <a:t>3件</a:t>
+                        <a:t>4件</a:t>
                       </a:r>
                       <a:endParaRPr lang="en-US" sz="900" dirty="0">
                         <a:latin typeface="Arial" charset="0"/>

--- a/納品レポート/ホテル別レポート/apa_sagamihara_口コミ分析レポート.pptx
+++ b/納品レポート/ホテル別レポート/apa_sagamihara_口コミ分析レポート.pptx
@@ -2750,7 +2750,7 @@
                 <a:ea typeface="Arial" pitchFamily="34" charset="-122"/>
                 <a:cs typeface="Arial" pitchFamily="34" charset="-120"/>
               </a:rPr>
-              <a:t>作成日：2026年4月6日</a:t>
+              <a:t>作成日：2026年4月7日</a:t>
             </a:r>
             <a:endParaRPr lang="en-US" sz="1000" dirty="0"/>
           </a:p>

--- a/納品レポート/ホテル別レポート/apa_sagamihara_口コミ分析レポート.pptx
+++ b/納品レポート/ホテル別レポート/apa_sagamihara_口コミ分析レポート.pptx
@@ -2750,7 +2750,7 @@
                 <a:ea typeface="Arial" pitchFamily="34" charset="-122"/>
                 <a:cs typeface="Arial" pitchFamily="34" charset="-120"/>
               </a:rPr>
-              <a:t>作成日：2026年4月7日</a:t>
+              <a:t>作成日：2026年4月8日</a:t>
             </a:r>
             <a:endParaRPr lang="en-US" sz="1000" dirty="0"/>
           </a:p>

--- a/納品レポート/ホテル別レポート/apa_sagamihara_口コミ分析レポート.pptx
+++ b/納品レポート/ホテル別レポート/apa_sagamihara_口コミ分析レポート.pptx
@@ -2750,7 +2750,7 @@
                 <a:ea typeface="Arial" pitchFamily="34" charset="-122"/>
                 <a:cs typeface="Arial" pitchFamily="34" charset="-120"/>
               </a:rPr>
-              <a:t>作成日：2026年4月10日</a:t>
+              <a:t>作成日：2026年4月11日</a:t>
             </a:r>
             <a:endParaRPr lang="en-US" sz="1000" dirty="0"/>
           </a:p>

--- a/納品レポート/ホテル別レポート/apa_sagamihara_口コミ分析レポート.pptx
+++ b/納品レポート/ホテル別レポート/apa_sagamihara_口コミ分析レポート.pptx
@@ -2750,7 +2750,7 @@
                 <a:ea typeface="Arial" pitchFamily="34" charset="-122"/>
                 <a:cs typeface="Arial" pitchFamily="34" charset="-120"/>
               </a:rPr>
-              <a:t>作成日：2026年4月11日</a:t>
+              <a:t>作成日：2026年4月13日</a:t>
             </a:r>
             <a:endParaRPr lang="en-US" sz="1000" dirty="0"/>
           </a:p>

--- a/納品レポート/ホテル別レポート/apa_sagamihara_口コミ分析レポート.pptx
+++ b/納品レポート/ホテル別レポート/apa_sagamihara_口コミ分析レポート.pptx
@@ -2750,7 +2750,7 @@
                 <a:ea typeface="Arial" pitchFamily="34" charset="-122"/>
                 <a:cs typeface="Arial" pitchFamily="34" charset="-120"/>
               </a:rPr>
-              <a:t>作成日：2026年4月13日</a:t>
+              <a:t>作成日：2026年4月15日</a:t>
             </a:r>
             <a:endParaRPr lang="en-US" sz="1000" dirty="0"/>
           </a:p>

--- a/納品レポート/ホテル別レポート/apa_sagamihara_口コミ分析レポート.pptx
+++ b/納品レポート/ホテル別レポート/apa_sagamihara_口コミ分析レポート.pptx
@@ -2750,7 +2750,7 @@
                 <a:ea typeface="Arial" pitchFamily="34" charset="-122"/>
                 <a:cs typeface="Arial" pitchFamily="34" charset="-120"/>
               </a:rPr>
-              <a:t>作成日：2026年4月16日</a:t>
+              <a:t>作成日：2026年4月20日</a:t>
             </a:r>
             <a:endParaRPr lang="en-US" sz="1000" dirty="0"/>
           </a:p>

--- a/納品レポート/ホテル別レポート/apa_sagamihara_口コミ分析レポート.pptx
+++ b/納品レポート/ホテル別レポート/apa_sagamihara_口コミ分析レポート.pptx
@@ -2668,7 +2668,7 @@
                 <a:ea typeface="Arial" pitchFamily="34" charset="-122"/>
                 <a:cs typeface="Arial" pitchFamily="34" charset="-120"/>
               </a:rPr>
-              <a:t>アパホテル相模原橋本駅東</a:t>
+              <a:t>アパホテル相模原</a:t>
             </a:r>
             <a:endParaRPr lang="en-US" sz="1600" dirty="0"/>
           </a:p>
@@ -2750,7 +2750,7 @@
                 <a:ea typeface="Arial" pitchFamily="34" charset="-122"/>
                 <a:cs typeface="Arial" pitchFamily="34" charset="-120"/>
               </a:rPr>
-              <a:t>作成日：2026年4月20日</a:t>
+              <a:t>作成日：2026年4月21日</a:t>
             </a:r>
             <a:endParaRPr lang="en-US" sz="1000" dirty="0"/>
           </a:p>

--- a/納品レポート/ホテル別レポート/apa_sagamihara_口コミ分析レポート.pptx
+++ b/納品レポート/ホテル別レポート/apa_sagamihara_口コミ分析レポート.pptx
@@ -2668,7 +2668,7 @@
                 <a:ea typeface="Arial" pitchFamily="34" charset="-122"/>
                 <a:cs typeface="Arial" pitchFamily="34" charset="-120"/>
               </a:rPr>
-              <a:t>アパホテル相模原</a:t>
+              <a:t>アパホテル相模原橋本駅東</a:t>
             </a:r>
             <a:endParaRPr lang="en-US" sz="1600" dirty="0"/>
           </a:p>
@@ -2750,7 +2750,7 @@
                 <a:ea typeface="Arial" pitchFamily="34" charset="-122"/>
                 <a:cs typeface="Arial" pitchFamily="34" charset="-120"/>
               </a:rPr>
-              <a:t>作成日：2026年4月21日</a:t>
+              <a:t>作成日：2026年4月22日</a:t>
             </a:r>
             <a:endParaRPr lang="en-US" sz="1000" dirty="0"/>
           </a:p>
